--- a/decks/Pitch_Deck_AthenaRun_v4.pptx
+++ b/decks/Pitch_Deck_AthenaRun_v4.pptx
@@ -2778,8 +2778,8 @@
         </p:nvSpPr>
         <p:spPr>
           <a:xfrm>
-            <a:off x="694944" y="4590288"/>
-            <a:ext cx="8229600" cy="256032"/>
+            <a:off x="704088" y="4178808"/>
+            <a:ext cx="8686800" cy="219456"/>
           </a:xfrm>
           <a:prstGeom prst="rect">
             <a:avLst/>
@@ -2794,57 +2794,27 @@
           <a:p>
             <a:pPr algn="l"/>
             <a:r>
-              <a:rPr sz="1700" b="1">
-                <a:solidFill>
-                  <a:srgbClr val="FF6B3D"/>
+              <a:rPr sz="1700" b="0">
+                <a:solidFill>
+                  <a:srgbClr val="C9C9CE"/>
                 </a:solidFill>
                 <a:latin typeface="Poppins"/>
               </a:rPr>
-              <a:t>We build the chain, not the generator.</a:t>
-            </a:r>
-          </a:p>
-        </p:txBody>
-      </p:sp>
-      <p:sp>
-        <p:nvSpPr>
-          <p:cNvPr id="103" name="rect 103"/>
-          <p:cNvSpPr/>
-          <p:nvPr/>
-        </p:nvSpPr>
-        <p:spPr>
-          <a:xfrm>
-            <a:off x="694944" y="5138928"/>
-            <a:ext cx="10789920" cy="10973"/>
-          </a:xfrm>
-          <a:prstGeom prst="rect">
-            <a:avLst/>
-          </a:prstGeom>
-          <a:solidFill>
-            <a:srgbClr val="2B2B2D"/>
-          </a:solidFill>
-          <a:ln>
-            <a:noFill/>
-          </a:ln>
-          <a:effectLst/>
-        </p:spPr>
-        <p:txBody>
-          <a:bodyPr rtlCol="0" anchor="ctr"/>
-          <a:lstStyle/>
-          <a:p>
-            <a:pPr algn="ctr"/>
-          </a:p>
-        </p:txBody>
-      </p:sp>
-      <p:sp>
-        <p:nvSpPr>
-          <p:cNvPr id="104" name="TextBox 104"/>
-          <p:cNvSpPr txBox="1"/>
-          <p:nvPr/>
-        </p:nvSpPr>
-        <p:spPr>
-          <a:xfrm>
-            <a:off x="694944" y="5358384"/>
-            <a:ext cx="10789920" cy="155448"/>
+              <a:t>The bottleneck has moved from writing code to everything around it.</a:t>
+            </a:r>
+          </a:p>
+        </p:txBody>
+      </p:sp>
+      <p:sp>
+        <p:nvSpPr>
+          <p:cNvPr id="103" name="TextBox 103"/>
+          <p:cNvSpPr txBox="1"/>
+          <p:nvPr/>
+        </p:nvSpPr>
+        <p:spPr>
+          <a:xfrm>
+            <a:off x="694944" y="4590288"/>
+            <a:ext cx="8229600" cy="256032"/>
           </a:xfrm>
           <a:prstGeom prst="rect">
             <a:avLst/>
@@ -2859,22 +2829,13 @@
           <a:p>
             <a:pPr algn="l"/>
             <a:r>
-              <a:rPr sz="1000" b="0" spc="200">
-                <a:solidFill>
-                  <a:srgbClr val="5A5A60"/>
-                </a:solidFill>
-                <a:latin typeface="Courier New"/>
-              </a:rPr>
-              <a:t>SELECTED PROGRAMS</a:t>
-            </a:r>
-            <a:r>
-              <a:rPr sz="1000" b="0" spc="200">
-                <a:solidFill>
-                  <a:srgbClr val="9A9AA2"/>
-                </a:solidFill>
-                <a:latin typeface="Courier New"/>
-              </a:rPr>
-              <a:t>   HESSEN AI COHORT 2026  ·  CYBERLAB KARLSRUHE 2026  ·  NVIDIA INCEPTION</a:t>
+              <a:rPr sz="1700" b="1">
+                <a:solidFill>
+                  <a:srgbClr val="FF6B3D"/>
+                </a:solidFill>
+                <a:latin typeface="Poppins"/>
+              </a:rPr>
+              <a:t>We build the chain, not the generator.</a:t>
             </a:r>
           </a:p>
         </p:txBody>
@@ -4947,7 +4908,7 @@
                 </a:solidFill>
                 <a:latin typeface="Poppins"/>
               </a:rPr>
-              <a:t>Our moat is the whole row — and the loop nobody else has.</a:t>
+              <a:t>Our moat is the whole row, and the loop nobody else has.</a:t>
             </a:r>
           </a:p>
         </p:txBody>
@@ -6505,7 +6466,7 @@
                 </a:solidFill>
                 <a:latin typeface="Poppins"/>
               </a:rPr>
-              <a:t> — highly experienced in AI development and security.</a:t>
+              <a:t>, highly experienced in AI development and security.</a:t>
             </a:r>
           </a:p>
         </p:txBody>
@@ -7750,7 +7711,7 @@
                 </a:solidFill>
                 <a:latin typeface="Poppins"/>
               </a:rPr>
-              <a:t> Signed intent, secured distribution, and three programs vetting the company — all before the platform is public.</a:t>
+              <a:t> Signed intent, secured distribution, and three programs vetting the company, all before the platform is public.</a:t>
             </a:r>
           </a:p>
         </p:txBody>
@@ -7966,7 +7927,7 @@
                 </a:solidFill>
                 <a:latin typeface="Courier New"/>
               </a:rPr>
-              <a:t>FIVE STEPS AROUND THE CODE — NOT ONE OF THEM IS CODE</a:t>
+              <a:t>FIVE STEPS AROUND THE CODE. NOT ONE OF THEM IS CODE</a:t>
             </a:r>
           </a:p>
         </p:txBody>
@@ -8759,8 +8720,8 @@
         </p:nvSpPr>
         <p:spPr>
           <a:xfrm>
-            <a:off x="694944" y="3310128"/>
-            <a:ext cx="10789920" cy="164592"/>
+            <a:off x="694944" y="3675888"/>
+            <a:ext cx="2743200" cy="822960"/>
           </a:xfrm>
           <a:prstGeom prst="rect">
             <a:avLst/>
@@ -8775,13 +8736,22 @@
           <a:p>
             <a:pPr algn="l"/>
             <a:r>
-              <a:rPr sz="1100" b="0" spc="200">
+              <a:rPr sz="5400" b="0">
+                <a:solidFill>
+                  <a:srgbClr val="FF6B3D"/>
+                </a:solidFill>
+                <a:latin typeface="Poppins"/>
+              </a:rPr>
+              <a:t>61</a:t>
+            </a:r>
+            <a:r>
+              <a:rPr sz="2400" b="0">
                 <a:solidFill>
                   <a:srgbClr val="9A9AA2"/>
                 </a:solidFill>
-                <a:latin typeface="Courier New"/>
-              </a:rPr>
-              <a:t>THEY BOUGHT THE GENERATOR — THE CHAIN AROUND IT IS STILL MANUAL</a:t>
+                <a:latin typeface="Poppins"/>
+              </a:rPr>
+              <a:t>%</a:t>
             </a:r>
           </a:p>
         </p:txBody>
@@ -8794,8 +8764,8 @@
         </p:nvSpPr>
         <p:spPr>
           <a:xfrm>
-            <a:off x="694944" y="3675888"/>
-            <a:ext cx="2743200" cy="822960"/>
+            <a:off x="2212848" y="3840480"/>
+            <a:ext cx="4114800" cy="502920"/>
           </a:xfrm>
           <a:prstGeom prst="rect">
             <a:avLst/>
@@ -8810,36 +8780,3027 @@
           <a:p>
             <a:pPr algn="l"/>
             <a:r>
-              <a:rPr sz="5400" b="0">
-                <a:solidFill>
-                  <a:srgbClr val="FF6B3D"/>
+              <a:rPr sz="1400" b="0">
+                <a:solidFill>
+                  <a:srgbClr val="9A9AA2"/>
                 </a:solidFill>
                 <a:latin typeface="Poppins"/>
               </a:rPr>
-              <a:t>61</a:t>
-            </a:r>
-            <a:r>
-              <a:rPr sz="2400" b="0">
-                <a:solidFill>
-                  <a:srgbClr val="9A9AA2"/>
-                </a:solidFill>
-                <a:latin typeface="Poppins"/>
-              </a:rPr>
-              <a:t>%</a:t>
-            </a:r>
-          </a:p>
-        </p:txBody>
-      </p:sp>
-      <p:sp>
-        <p:nvSpPr>
-          <p:cNvPr id="131" name="TextBox 131"/>
-          <p:cNvSpPr txBox="1"/>
-          <p:nvPr/>
-        </p:nvSpPr>
-        <p:spPr>
-          <a:xfrm>
-            <a:off x="2212848" y="3840480"/>
-            <a:ext cx="4114800" cy="502920"/>
+              <a:t>of organizations see no EBIT impact from AI</a:t>
+            </a:r>
+          </a:p>
+        </p:txBody>
+      </p:sp>
+      <p:sp>
+        <p:nvSpPr>
+          <p:cNvPr id="131" name="ellipse 131"/>
+          <p:cNvSpPr/>
+          <p:nvPr/>
+        </p:nvSpPr>
+        <p:spPr>
+          <a:xfrm>
+            <a:off x="692658" y="4670298"/>
+            <a:ext cx="96012" cy="96012"/>
+          </a:xfrm>
+          <a:prstGeom prst="ellipse">
+            <a:avLst/>
+          </a:prstGeom>
+          <a:solidFill>
+            <a:srgbClr val="FF6B3D"/>
+          </a:solidFill>
+          <a:ln>
+            <a:noFill/>
+          </a:ln>
+          <a:effectLst/>
+        </p:spPr>
+        <p:txBody>
+          <a:bodyPr rtlCol="0" anchor="ctr"/>
+          <a:lstStyle/>
+          <a:p>
+            <a:pPr algn="ctr"/>
+          </a:p>
+        </p:txBody>
+      </p:sp>
+      <p:sp>
+        <p:nvSpPr>
+          <p:cNvPr id="132" name="ellipse 132"/>
+          <p:cNvSpPr/>
+          <p:nvPr/>
+        </p:nvSpPr>
+        <p:spPr>
+          <a:xfrm>
+            <a:off x="834390" y="4670298"/>
+            <a:ext cx="96012" cy="96012"/>
+          </a:xfrm>
+          <a:prstGeom prst="ellipse">
+            <a:avLst/>
+          </a:prstGeom>
+          <a:solidFill>
+            <a:srgbClr val="FF6B3D"/>
+          </a:solidFill>
+          <a:ln>
+            <a:noFill/>
+          </a:ln>
+          <a:effectLst/>
+        </p:spPr>
+        <p:txBody>
+          <a:bodyPr rtlCol="0" anchor="ctr"/>
+          <a:lstStyle/>
+          <a:p>
+            <a:pPr algn="ctr"/>
+          </a:p>
+        </p:txBody>
+      </p:sp>
+      <p:sp>
+        <p:nvSpPr>
+          <p:cNvPr id="133" name="ellipse 133"/>
+          <p:cNvSpPr/>
+          <p:nvPr/>
+        </p:nvSpPr>
+        <p:spPr>
+          <a:xfrm>
+            <a:off x="976122" y="4670298"/>
+            <a:ext cx="96012" cy="96012"/>
+          </a:xfrm>
+          <a:prstGeom prst="ellipse">
+            <a:avLst/>
+          </a:prstGeom>
+          <a:solidFill>
+            <a:srgbClr val="FF6B3D"/>
+          </a:solidFill>
+          <a:ln>
+            <a:noFill/>
+          </a:ln>
+          <a:effectLst/>
+        </p:spPr>
+        <p:txBody>
+          <a:bodyPr rtlCol="0" anchor="ctr"/>
+          <a:lstStyle/>
+          <a:p>
+            <a:pPr algn="ctr"/>
+          </a:p>
+        </p:txBody>
+      </p:sp>
+      <p:sp>
+        <p:nvSpPr>
+          <p:cNvPr id="134" name="ellipse 134"/>
+          <p:cNvSpPr/>
+          <p:nvPr/>
+        </p:nvSpPr>
+        <p:spPr>
+          <a:xfrm>
+            <a:off x="1117854" y="4670298"/>
+            <a:ext cx="96012" cy="96012"/>
+          </a:xfrm>
+          <a:prstGeom prst="ellipse">
+            <a:avLst/>
+          </a:prstGeom>
+          <a:solidFill>
+            <a:srgbClr val="FF6B3D"/>
+          </a:solidFill>
+          <a:ln>
+            <a:noFill/>
+          </a:ln>
+          <a:effectLst/>
+        </p:spPr>
+        <p:txBody>
+          <a:bodyPr rtlCol="0" anchor="ctr"/>
+          <a:lstStyle/>
+          <a:p>
+            <a:pPr algn="ctr"/>
+          </a:p>
+        </p:txBody>
+      </p:sp>
+      <p:sp>
+        <p:nvSpPr>
+          <p:cNvPr id="135" name="ellipse 135"/>
+          <p:cNvSpPr/>
+          <p:nvPr/>
+        </p:nvSpPr>
+        <p:spPr>
+          <a:xfrm>
+            <a:off x="1259586" y="4670298"/>
+            <a:ext cx="96012" cy="96012"/>
+          </a:xfrm>
+          <a:prstGeom prst="ellipse">
+            <a:avLst/>
+          </a:prstGeom>
+          <a:solidFill>
+            <a:srgbClr val="FF6B3D"/>
+          </a:solidFill>
+          <a:ln>
+            <a:noFill/>
+          </a:ln>
+          <a:effectLst/>
+        </p:spPr>
+        <p:txBody>
+          <a:bodyPr rtlCol="0" anchor="ctr"/>
+          <a:lstStyle/>
+          <a:p>
+            <a:pPr algn="ctr"/>
+          </a:p>
+        </p:txBody>
+      </p:sp>
+      <p:sp>
+        <p:nvSpPr>
+          <p:cNvPr id="136" name="ellipse 136"/>
+          <p:cNvSpPr/>
+          <p:nvPr/>
+        </p:nvSpPr>
+        <p:spPr>
+          <a:xfrm>
+            <a:off x="1401318" y="4670298"/>
+            <a:ext cx="96012" cy="96012"/>
+          </a:xfrm>
+          <a:prstGeom prst="ellipse">
+            <a:avLst/>
+          </a:prstGeom>
+          <a:solidFill>
+            <a:srgbClr val="FF6B3D"/>
+          </a:solidFill>
+          <a:ln>
+            <a:noFill/>
+          </a:ln>
+          <a:effectLst/>
+        </p:spPr>
+        <p:txBody>
+          <a:bodyPr rtlCol="0" anchor="ctr"/>
+          <a:lstStyle/>
+          <a:p>
+            <a:pPr algn="ctr"/>
+          </a:p>
+        </p:txBody>
+      </p:sp>
+      <p:sp>
+        <p:nvSpPr>
+          <p:cNvPr id="137" name="ellipse 137"/>
+          <p:cNvSpPr/>
+          <p:nvPr/>
+        </p:nvSpPr>
+        <p:spPr>
+          <a:xfrm>
+            <a:off x="1543050" y="4670298"/>
+            <a:ext cx="96012" cy="96012"/>
+          </a:xfrm>
+          <a:prstGeom prst="ellipse">
+            <a:avLst/>
+          </a:prstGeom>
+          <a:solidFill>
+            <a:srgbClr val="FF6B3D"/>
+          </a:solidFill>
+          <a:ln>
+            <a:noFill/>
+          </a:ln>
+          <a:effectLst/>
+        </p:spPr>
+        <p:txBody>
+          <a:bodyPr rtlCol="0" anchor="ctr"/>
+          <a:lstStyle/>
+          <a:p>
+            <a:pPr algn="ctr"/>
+          </a:p>
+        </p:txBody>
+      </p:sp>
+      <p:sp>
+        <p:nvSpPr>
+          <p:cNvPr id="138" name="ellipse 138"/>
+          <p:cNvSpPr/>
+          <p:nvPr/>
+        </p:nvSpPr>
+        <p:spPr>
+          <a:xfrm>
+            <a:off x="1684782" y="4670298"/>
+            <a:ext cx="96012" cy="96012"/>
+          </a:xfrm>
+          <a:prstGeom prst="ellipse">
+            <a:avLst/>
+          </a:prstGeom>
+          <a:solidFill>
+            <a:srgbClr val="FF6B3D"/>
+          </a:solidFill>
+          <a:ln>
+            <a:noFill/>
+          </a:ln>
+          <a:effectLst/>
+        </p:spPr>
+        <p:txBody>
+          <a:bodyPr rtlCol="0" anchor="ctr"/>
+          <a:lstStyle/>
+          <a:p>
+            <a:pPr algn="ctr"/>
+          </a:p>
+        </p:txBody>
+      </p:sp>
+      <p:sp>
+        <p:nvSpPr>
+          <p:cNvPr id="139" name="ellipse 139"/>
+          <p:cNvSpPr/>
+          <p:nvPr/>
+        </p:nvSpPr>
+        <p:spPr>
+          <a:xfrm>
+            <a:off x="1826514" y="4670298"/>
+            <a:ext cx="96012" cy="96012"/>
+          </a:xfrm>
+          <a:prstGeom prst="ellipse">
+            <a:avLst/>
+          </a:prstGeom>
+          <a:solidFill>
+            <a:srgbClr val="FF6B3D"/>
+          </a:solidFill>
+          <a:ln>
+            <a:noFill/>
+          </a:ln>
+          <a:effectLst/>
+        </p:spPr>
+        <p:txBody>
+          <a:bodyPr rtlCol="0" anchor="ctr"/>
+          <a:lstStyle/>
+          <a:p>
+            <a:pPr algn="ctr"/>
+          </a:p>
+        </p:txBody>
+      </p:sp>
+      <p:sp>
+        <p:nvSpPr>
+          <p:cNvPr id="140" name="ellipse 140"/>
+          <p:cNvSpPr/>
+          <p:nvPr/>
+        </p:nvSpPr>
+        <p:spPr>
+          <a:xfrm>
+            <a:off x="1968246" y="4670298"/>
+            <a:ext cx="96012" cy="96012"/>
+          </a:xfrm>
+          <a:prstGeom prst="ellipse">
+            <a:avLst/>
+          </a:prstGeom>
+          <a:solidFill>
+            <a:srgbClr val="FF6B3D"/>
+          </a:solidFill>
+          <a:ln>
+            <a:noFill/>
+          </a:ln>
+          <a:effectLst/>
+        </p:spPr>
+        <p:txBody>
+          <a:bodyPr rtlCol="0" anchor="ctr"/>
+          <a:lstStyle/>
+          <a:p>
+            <a:pPr algn="ctr"/>
+          </a:p>
+        </p:txBody>
+      </p:sp>
+      <p:sp>
+        <p:nvSpPr>
+          <p:cNvPr id="141" name="ellipse 141"/>
+          <p:cNvSpPr/>
+          <p:nvPr/>
+        </p:nvSpPr>
+        <p:spPr>
+          <a:xfrm>
+            <a:off x="2109978" y="4670298"/>
+            <a:ext cx="96012" cy="96012"/>
+          </a:xfrm>
+          <a:prstGeom prst="ellipse">
+            <a:avLst/>
+          </a:prstGeom>
+          <a:solidFill>
+            <a:srgbClr val="FF6B3D"/>
+          </a:solidFill>
+          <a:ln>
+            <a:noFill/>
+          </a:ln>
+          <a:effectLst/>
+        </p:spPr>
+        <p:txBody>
+          <a:bodyPr rtlCol="0" anchor="ctr"/>
+          <a:lstStyle/>
+          <a:p>
+            <a:pPr algn="ctr"/>
+          </a:p>
+        </p:txBody>
+      </p:sp>
+      <p:sp>
+        <p:nvSpPr>
+          <p:cNvPr id="142" name="ellipse 142"/>
+          <p:cNvSpPr/>
+          <p:nvPr/>
+        </p:nvSpPr>
+        <p:spPr>
+          <a:xfrm>
+            <a:off x="2251710" y="4670298"/>
+            <a:ext cx="96012" cy="96012"/>
+          </a:xfrm>
+          <a:prstGeom prst="ellipse">
+            <a:avLst/>
+          </a:prstGeom>
+          <a:solidFill>
+            <a:srgbClr val="FF6B3D"/>
+          </a:solidFill>
+          <a:ln>
+            <a:noFill/>
+          </a:ln>
+          <a:effectLst/>
+        </p:spPr>
+        <p:txBody>
+          <a:bodyPr rtlCol="0" anchor="ctr"/>
+          <a:lstStyle/>
+          <a:p>
+            <a:pPr algn="ctr"/>
+          </a:p>
+        </p:txBody>
+      </p:sp>
+      <p:sp>
+        <p:nvSpPr>
+          <p:cNvPr id="143" name="ellipse 143"/>
+          <p:cNvSpPr/>
+          <p:nvPr/>
+        </p:nvSpPr>
+        <p:spPr>
+          <a:xfrm>
+            <a:off x="2393442" y="4670298"/>
+            <a:ext cx="96012" cy="96012"/>
+          </a:xfrm>
+          <a:prstGeom prst="ellipse">
+            <a:avLst/>
+          </a:prstGeom>
+          <a:solidFill>
+            <a:srgbClr val="FF6B3D"/>
+          </a:solidFill>
+          <a:ln>
+            <a:noFill/>
+          </a:ln>
+          <a:effectLst/>
+        </p:spPr>
+        <p:txBody>
+          <a:bodyPr rtlCol="0" anchor="ctr"/>
+          <a:lstStyle/>
+          <a:p>
+            <a:pPr algn="ctr"/>
+          </a:p>
+        </p:txBody>
+      </p:sp>
+      <p:sp>
+        <p:nvSpPr>
+          <p:cNvPr id="144" name="ellipse 144"/>
+          <p:cNvSpPr/>
+          <p:nvPr/>
+        </p:nvSpPr>
+        <p:spPr>
+          <a:xfrm>
+            <a:off x="2535174" y="4670298"/>
+            <a:ext cx="96012" cy="96012"/>
+          </a:xfrm>
+          <a:prstGeom prst="ellipse">
+            <a:avLst/>
+          </a:prstGeom>
+          <a:solidFill>
+            <a:srgbClr val="FF6B3D"/>
+          </a:solidFill>
+          <a:ln>
+            <a:noFill/>
+          </a:ln>
+          <a:effectLst/>
+        </p:spPr>
+        <p:txBody>
+          <a:bodyPr rtlCol="0" anchor="ctr"/>
+          <a:lstStyle/>
+          <a:p>
+            <a:pPr algn="ctr"/>
+          </a:p>
+        </p:txBody>
+      </p:sp>
+      <p:sp>
+        <p:nvSpPr>
+          <p:cNvPr id="145" name="ellipse 145"/>
+          <p:cNvSpPr/>
+          <p:nvPr/>
+        </p:nvSpPr>
+        <p:spPr>
+          <a:xfrm>
+            <a:off x="2676906" y="4670298"/>
+            <a:ext cx="96012" cy="96012"/>
+          </a:xfrm>
+          <a:prstGeom prst="ellipse">
+            <a:avLst/>
+          </a:prstGeom>
+          <a:solidFill>
+            <a:srgbClr val="FF6B3D"/>
+          </a:solidFill>
+          <a:ln>
+            <a:noFill/>
+          </a:ln>
+          <a:effectLst/>
+        </p:spPr>
+        <p:txBody>
+          <a:bodyPr rtlCol="0" anchor="ctr"/>
+          <a:lstStyle/>
+          <a:p>
+            <a:pPr algn="ctr"/>
+          </a:p>
+        </p:txBody>
+      </p:sp>
+      <p:sp>
+        <p:nvSpPr>
+          <p:cNvPr id="146" name="ellipse 146"/>
+          <p:cNvSpPr/>
+          <p:nvPr/>
+        </p:nvSpPr>
+        <p:spPr>
+          <a:xfrm>
+            <a:off x="2818638" y="4670298"/>
+            <a:ext cx="96012" cy="96012"/>
+          </a:xfrm>
+          <a:prstGeom prst="ellipse">
+            <a:avLst/>
+          </a:prstGeom>
+          <a:solidFill>
+            <a:srgbClr val="FF6B3D"/>
+          </a:solidFill>
+          <a:ln>
+            <a:noFill/>
+          </a:ln>
+          <a:effectLst/>
+        </p:spPr>
+        <p:txBody>
+          <a:bodyPr rtlCol="0" anchor="ctr"/>
+          <a:lstStyle/>
+          <a:p>
+            <a:pPr algn="ctr"/>
+          </a:p>
+        </p:txBody>
+      </p:sp>
+      <p:sp>
+        <p:nvSpPr>
+          <p:cNvPr id="147" name="ellipse 147"/>
+          <p:cNvSpPr/>
+          <p:nvPr/>
+        </p:nvSpPr>
+        <p:spPr>
+          <a:xfrm>
+            <a:off x="2960370" y="4670298"/>
+            <a:ext cx="96012" cy="96012"/>
+          </a:xfrm>
+          <a:prstGeom prst="ellipse">
+            <a:avLst/>
+          </a:prstGeom>
+          <a:solidFill>
+            <a:srgbClr val="FF6B3D"/>
+          </a:solidFill>
+          <a:ln>
+            <a:noFill/>
+          </a:ln>
+          <a:effectLst/>
+        </p:spPr>
+        <p:txBody>
+          <a:bodyPr rtlCol="0" anchor="ctr"/>
+          <a:lstStyle/>
+          <a:p>
+            <a:pPr algn="ctr"/>
+          </a:p>
+        </p:txBody>
+      </p:sp>
+      <p:sp>
+        <p:nvSpPr>
+          <p:cNvPr id="148" name="ellipse 148"/>
+          <p:cNvSpPr/>
+          <p:nvPr/>
+        </p:nvSpPr>
+        <p:spPr>
+          <a:xfrm>
+            <a:off x="3102102" y="4670298"/>
+            <a:ext cx="96012" cy="96012"/>
+          </a:xfrm>
+          <a:prstGeom prst="ellipse">
+            <a:avLst/>
+          </a:prstGeom>
+          <a:solidFill>
+            <a:srgbClr val="FF6B3D"/>
+          </a:solidFill>
+          <a:ln>
+            <a:noFill/>
+          </a:ln>
+          <a:effectLst/>
+        </p:spPr>
+        <p:txBody>
+          <a:bodyPr rtlCol="0" anchor="ctr"/>
+          <a:lstStyle/>
+          <a:p>
+            <a:pPr algn="ctr"/>
+          </a:p>
+        </p:txBody>
+      </p:sp>
+      <p:sp>
+        <p:nvSpPr>
+          <p:cNvPr id="149" name="ellipse 149"/>
+          <p:cNvSpPr/>
+          <p:nvPr/>
+        </p:nvSpPr>
+        <p:spPr>
+          <a:xfrm>
+            <a:off x="3243834" y="4670298"/>
+            <a:ext cx="96012" cy="96012"/>
+          </a:xfrm>
+          <a:prstGeom prst="ellipse">
+            <a:avLst/>
+          </a:prstGeom>
+          <a:solidFill>
+            <a:srgbClr val="FF6B3D"/>
+          </a:solidFill>
+          <a:ln>
+            <a:noFill/>
+          </a:ln>
+          <a:effectLst/>
+        </p:spPr>
+        <p:txBody>
+          <a:bodyPr rtlCol="0" anchor="ctr"/>
+          <a:lstStyle/>
+          <a:p>
+            <a:pPr algn="ctr"/>
+          </a:p>
+        </p:txBody>
+      </p:sp>
+      <p:sp>
+        <p:nvSpPr>
+          <p:cNvPr id="150" name="ellipse 150"/>
+          <p:cNvSpPr/>
+          <p:nvPr/>
+        </p:nvSpPr>
+        <p:spPr>
+          <a:xfrm>
+            <a:off x="3385566" y="4670298"/>
+            <a:ext cx="96012" cy="96012"/>
+          </a:xfrm>
+          <a:prstGeom prst="ellipse">
+            <a:avLst/>
+          </a:prstGeom>
+          <a:solidFill>
+            <a:srgbClr val="FF6B3D"/>
+          </a:solidFill>
+          <a:ln>
+            <a:noFill/>
+          </a:ln>
+          <a:effectLst/>
+        </p:spPr>
+        <p:txBody>
+          <a:bodyPr rtlCol="0" anchor="ctr"/>
+          <a:lstStyle/>
+          <a:p>
+            <a:pPr algn="ctr"/>
+          </a:p>
+        </p:txBody>
+      </p:sp>
+      <p:sp>
+        <p:nvSpPr>
+          <p:cNvPr id="151" name="ellipse 151"/>
+          <p:cNvSpPr/>
+          <p:nvPr/>
+        </p:nvSpPr>
+        <p:spPr>
+          <a:xfrm>
+            <a:off x="692658" y="4812030"/>
+            <a:ext cx="96012" cy="96012"/>
+          </a:xfrm>
+          <a:prstGeom prst="ellipse">
+            <a:avLst/>
+          </a:prstGeom>
+          <a:solidFill>
+            <a:srgbClr val="FF6B3D"/>
+          </a:solidFill>
+          <a:ln>
+            <a:noFill/>
+          </a:ln>
+          <a:effectLst/>
+        </p:spPr>
+        <p:txBody>
+          <a:bodyPr rtlCol="0" anchor="ctr"/>
+          <a:lstStyle/>
+          <a:p>
+            <a:pPr algn="ctr"/>
+          </a:p>
+        </p:txBody>
+      </p:sp>
+      <p:sp>
+        <p:nvSpPr>
+          <p:cNvPr id="152" name="ellipse 152"/>
+          <p:cNvSpPr/>
+          <p:nvPr/>
+        </p:nvSpPr>
+        <p:spPr>
+          <a:xfrm>
+            <a:off x="834390" y="4812030"/>
+            <a:ext cx="96012" cy="96012"/>
+          </a:xfrm>
+          <a:prstGeom prst="ellipse">
+            <a:avLst/>
+          </a:prstGeom>
+          <a:solidFill>
+            <a:srgbClr val="FF6B3D"/>
+          </a:solidFill>
+          <a:ln>
+            <a:noFill/>
+          </a:ln>
+          <a:effectLst/>
+        </p:spPr>
+        <p:txBody>
+          <a:bodyPr rtlCol="0" anchor="ctr"/>
+          <a:lstStyle/>
+          <a:p>
+            <a:pPr algn="ctr"/>
+          </a:p>
+        </p:txBody>
+      </p:sp>
+      <p:sp>
+        <p:nvSpPr>
+          <p:cNvPr id="153" name="ellipse 153"/>
+          <p:cNvSpPr/>
+          <p:nvPr/>
+        </p:nvSpPr>
+        <p:spPr>
+          <a:xfrm>
+            <a:off x="976122" y="4812030"/>
+            <a:ext cx="96012" cy="96012"/>
+          </a:xfrm>
+          <a:prstGeom prst="ellipse">
+            <a:avLst/>
+          </a:prstGeom>
+          <a:solidFill>
+            <a:srgbClr val="FF6B3D"/>
+          </a:solidFill>
+          <a:ln>
+            <a:noFill/>
+          </a:ln>
+          <a:effectLst/>
+        </p:spPr>
+        <p:txBody>
+          <a:bodyPr rtlCol="0" anchor="ctr"/>
+          <a:lstStyle/>
+          <a:p>
+            <a:pPr algn="ctr"/>
+          </a:p>
+        </p:txBody>
+      </p:sp>
+      <p:sp>
+        <p:nvSpPr>
+          <p:cNvPr id="154" name="ellipse 154"/>
+          <p:cNvSpPr/>
+          <p:nvPr/>
+        </p:nvSpPr>
+        <p:spPr>
+          <a:xfrm>
+            <a:off x="1117854" y="4812030"/>
+            <a:ext cx="96012" cy="96012"/>
+          </a:xfrm>
+          <a:prstGeom prst="ellipse">
+            <a:avLst/>
+          </a:prstGeom>
+          <a:solidFill>
+            <a:srgbClr val="FF6B3D"/>
+          </a:solidFill>
+          <a:ln>
+            <a:noFill/>
+          </a:ln>
+          <a:effectLst/>
+        </p:spPr>
+        <p:txBody>
+          <a:bodyPr rtlCol="0" anchor="ctr"/>
+          <a:lstStyle/>
+          <a:p>
+            <a:pPr algn="ctr"/>
+          </a:p>
+        </p:txBody>
+      </p:sp>
+      <p:sp>
+        <p:nvSpPr>
+          <p:cNvPr id="155" name="ellipse 155"/>
+          <p:cNvSpPr/>
+          <p:nvPr/>
+        </p:nvSpPr>
+        <p:spPr>
+          <a:xfrm>
+            <a:off x="1259586" y="4812030"/>
+            <a:ext cx="96012" cy="96012"/>
+          </a:xfrm>
+          <a:prstGeom prst="ellipse">
+            <a:avLst/>
+          </a:prstGeom>
+          <a:solidFill>
+            <a:srgbClr val="FF6B3D"/>
+          </a:solidFill>
+          <a:ln>
+            <a:noFill/>
+          </a:ln>
+          <a:effectLst/>
+        </p:spPr>
+        <p:txBody>
+          <a:bodyPr rtlCol="0" anchor="ctr"/>
+          <a:lstStyle/>
+          <a:p>
+            <a:pPr algn="ctr"/>
+          </a:p>
+        </p:txBody>
+      </p:sp>
+      <p:sp>
+        <p:nvSpPr>
+          <p:cNvPr id="156" name="ellipse 156"/>
+          <p:cNvSpPr/>
+          <p:nvPr/>
+        </p:nvSpPr>
+        <p:spPr>
+          <a:xfrm>
+            <a:off x="1401318" y="4812030"/>
+            <a:ext cx="96012" cy="96012"/>
+          </a:xfrm>
+          <a:prstGeom prst="ellipse">
+            <a:avLst/>
+          </a:prstGeom>
+          <a:solidFill>
+            <a:srgbClr val="FF6B3D"/>
+          </a:solidFill>
+          <a:ln>
+            <a:noFill/>
+          </a:ln>
+          <a:effectLst/>
+        </p:spPr>
+        <p:txBody>
+          <a:bodyPr rtlCol="0" anchor="ctr"/>
+          <a:lstStyle/>
+          <a:p>
+            <a:pPr algn="ctr"/>
+          </a:p>
+        </p:txBody>
+      </p:sp>
+      <p:sp>
+        <p:nvSpPr>
+          <p:cNvPr id="157" name="ellipse 157"/>
+          <p:cNvSpPr/>
+          <p:nvPr/>
+        </p:nvSpPr>
+        <p:spPr>
+          <a:xfrm>
+            <a:off x="1543050" y="4812030"/>
+            <a:ext cx="96012" cy="96012"/>
+          </a:xfrm>
+          <a:prstGeom prst="ellipse">
+            <a:avLst/>
+          </a:prstGeom>
+          <a:solidFill>
+            <a:srgbClr val="FF6B3D"/>
+          </a:solidFill>
+          <a:ln>
+            <a:noFill/>
+          </a:ln>
+          <a:effectLst/>
+        </p:spPr>
+        <p:txBody>
+          <a:bodyPr rtlCol="0" anchor="ctr"/>
+          <a:lstStyle/>
+          <a:p>
+            <a:pPr algn="ctr"/>
+          </a:p>
+        </p:txBody>
+      </p:sp>
+      <p:sp>
+        <p:nvSpPr>
+          <p:cNvPr id="158" name="ellipse 158"/>
+          <p:cNvSpPr/>
+          <p:nvPr/>
+        </p:nvSpPr>
+        <p:spPr>
+          <a:xfrm>
+            <a:off x="1684782" y="4812030"/>
+            <a:ext cx="96012" cy="96012"/>
+          </a:xfrm>
+          <a:prstGeom prst="ellipse">
+            <a:avLst/>
+          </a:prstGeom>
+          <a:solidFill>
+            <a:srgbClr val="FF6B3D"/>
+          </a:solidFill>
+          <a:ln>
+            <a:noFill/>
+          </a:ln>
+          <a:effectLst/>
+        </p:spPr>
+        <p:txBody>
+          <a:bodyPr rtlCol="0" anchor="ctr"/>
+          <a:lstStyle/>
+          <a:p>
+            <a:pPr algn="ctr"/>
+          </a:p>
+        </p:txBody>
+      </p:sp>
+      <p:sp>
+        <p:nvSpPr>
+          <p:cNvPr id="159" name="ellipse 159"/>
+          <p:cNvSpPr/>
+          <p:nvPr/>
+        </p:nvSpPr>
+        <p:spPr>
+          <a:xfrm>
+            <a:off x="1826514" y="4812030"/>
+            <a:ext cx="96012" cy="96012"/>
+          </a:xfrm>
+          <a:prstGeom prst="ellipse">
+            <a:avLst/>
+          </a:prstGeom>
+          <a:solidFill>
+            <a:srgbClr val="FF6B3D"/>
+          </a:solidFill>
+          <a:ln>
+            <a:noFill/>
+          </a:ln>
+          <a:effectLst/>
+        </p:spPr>
+        <p:txBody>
+          <a:bodyPr rtlCol="0" anchor="ctr"/>
+          <a:lstStyle/>
+          <a:p>
+            <a:pPr algn="ctr"/>
+          </a:p>
+        </p:txBody>
+      </p:sp>
+      <p:sp>
+        <p:nvSpPr>
+          <p:cNvPr id="160" name="ellipse 160"/>
+          <p:cNvSpPr/>
+          <p:nvPr/>
+        </p:nvSpPr>
+        <p:spPr>
+          <a:xfrm>
+            <a:off x="1968246" y="4812030"/>
+            <a:ext cx="96012" cy="96012"/>
+          </a:xfrm>
+          <a:prstGeom prst="ellipse">
+            <a:avLst/>
+          </a:prstGeom>
+          <a:solidFill>
+            <a:srgbClr val="FF6B3D"/>
+          </a:solidFill>
+          <a:ln>
+            <a:noFill/>
+          </a:ln>
+          <a:effectLst/>
+        </p:spPr>
+        <p:txBody>
+          <a:bodyPr rtlCol="0" anchor="ctr"/>
+          <a:lstStyle/>
+          <a:p>
+            <a:pPr algn="ctr"/>
+          </a:p>
+        </p:txBody>
+      </p:sp>
+      <p:sp>
+        <p:nvSpPr>
+          <p:cNvPr id="161" name="ellipse 161"/>
+          <p:cNvSpPr/>
+          <p:nvPr/>
+        </p:nvSpPr>
+        <p:spPr>
+          <a:xfrm>
+            <a:off x="2109978" y="4812030"/>
+            <a:ext cx="96012" cy="96012"/>
+          </a:xfrm>
+          <a:prstGeom prst="ellipse">
+            <a:avLst/>
+          </a:prstGeom>
+          <a:solidFill>
+            <a:srgbClr val="FF6B3D"/>
+          </a:solidFill>
+          <a:ln>
+            <a:noFill/>
+          </a:ln>
+          <a:effectLst/>
+        </p:spPr>
+        <p:txBody>
+          <a:bodyPr rtlCol="0" anchor="ctr"/>
+          <a:lstStyle/>
+          <a:p>
+            <a:pPr algn="ctr"/>
+          </a:p>
+        </p:txBody>
+      </p:sp>
+      <p:sp>
+        <p:nvSpPr>
+          <p:cNvPr id="162" name="ellipse 162"/>
+          <p:cNvSpPr/>
+          <p:nvPr/>
+        </p:nvSpPr>
+        <p:spPr>
+          <a:xfrm>
+            <a:off x="2251710" y="4812030"/>
+            <a:ext cx="96012" cy="96012"/>
+          </a:xfrm>
+          <a:prstGeom prst="ellipse">
+            <a:avLst/>
+          </a:prstGeom>
+          <a:solidFill>
+            <a:srgbClr val="FF6B3D"/>
+          </a:solidFill>
+          <a:ln>
+            <a:noFill/>
+          </a:ln>
+          <a:effectLst/>
+        </p:spPr>
+        <p:txBody>
+          <a:bodyPr rtlCol="0" anchor="ctr"/>
+          <a:lstStyle/>
+          <a:p>
+            <a:pPr algn="ctr"/>
+          </a:p>
+        </p:txBody>
+      </p:sp>
+      <p:sp>
+        <p:nvSpPr>
+          <p:cNvPr id="163" name="ellipse 163"/>
+          <p:cNvSpPr/>
+          <p:nvPr/>
+        </p:nvSpPr>
+        <p:spPr>
+          <a:xfrm>
+            <a:off x="2393442" y="4812030"/>
+            <a:ext cx="96012" cy="96012"/>
+          </a:xfrm>
+          <a:prstGeom prst="ellipse">
+            <a:avLst/>
+          </a:prstGeom>
+          <a:solidFill>
+            <a:srgbClr val="FF6B3D"/>
+          </a:solidFill>
+          <a:ln>
+            <a:noFill/>
+          </a:ln>
+          <a:effectLst/>
+        </p:spPr>
+        <p:txBody>
+          <a:bodyPr rtlCol="0" anchor="ctr"/>
+          <a:lstStyle/>
+          <a:p>
+            <a:pPr algn="ctr"/>
+          </a:p>
+        </p:txBody>
+      </p:sp>
+      <p:sp>
+        <p:nvSpPr>
+          <p:cNvPr id="164" name="ellipse 164"/>
+          <p:cNvSpPr/>
+          <p:nvPr/>
+        </p:nvSpPr>
+        <p:spPr>
+          <a:xfrm>
+            <a:off x="2535174" y="4812030"/>
+            <a:ext cx="96012" cy="96012"/>
+          </a:xfrm>
+          <a:prstGeom prst="ellipse">
+            <a:avLst/>
+          </a:prstGeom>
+          <a:solidFill>
+            <a:srgbClr val="FF6B3D"/>
+          </a:solidFill>
+          <a:ln>
+            <a:noFill/>
+          </a:ln>
+          <a:effectLst/>
+        </p:spPr>
+        <p:txBody>
+          <a:bodyPr rtlCol="0" anchor="ctr"/>
+          <a:lstStyle/>
+          <a:p>
+            <a:pPr algn="ctr"/>
+          </a:p>
+        </p:txBody>
+      </p:sp>
+      <p:sp>
+        <p:nvSpPr>
+          <p:cNvPr id="165" name="ellipse 165"/>
+          <p:cNvSpPr/>
+          <p:nvPr/>
+        </p:nvSpPr>
+        <p:spPr>
+          <a:xfrm>
+            <a:off x="2676906" y="4812030"/>
+            <a:ext cx="96012" cy="96012"/>
+          </a:xfrm>
+          <a:prstGeom prst="ellipse">
+            <a:avLst/>
+          </a:prstGeom>
+          <a:solidFill>
+            <a:srgbClr val="FF6B3D"/>
+          </a:solidFill>
+          <a:ln>
+            <a:noFill/>
+          </a:ln>
+          <a:effectLst/>
+        </p:spPr>
+        <p:txBody>
+          <a:bodyPr rtlCol="0" anchor="ctr"/>
+          <a:lstStyle/>
+          <a:p>
+            <a:pPr algn="ctr"/>
+          </a:p>
+        </p:txBody>
+      </p:sp>
+      <p:sp>
+        <p:nvSpPr>
+          <p:cNvPr id="166" name="ellipse 166"/>
+          <p:cNvSpPr/>
+          <p:nvPr/>
+        </p:nvSpPr>
+        <p:spPr>
+          <a:xfrm>
+            <a:off x="2818638" y="4812030"/>
+            <a:ext cx="96012" cy="96012"/>
+          </a:xfrm>
+          <a:prstGeom prst="ellipse">
+            <a:avLst/>
+          </a:prstGeom>
+          <a:solidFill>
+            <a:srgbClr val="FF6B3D"/>
+          </a:solidFill>
+          <a:ln>
+            <a:noFill/>
+          </a:ln>
+          <a:effectLst/>
+        </p:spPr>
+        <p:txBody>
+          <a:bodyPr rtlCol="0" anchor="ctr"/>
+          <a:lstStyle/>
+          <a:p>
+            <a:pPr algn="ctr"/>
+          </a:p>
+        </p:txBody>
+      </p:sp>
+      <p:sp>
+        <p:nvSpPr>
+          <p:cNvPr id="167" name="ellipse 167"/>
+          <p:cNvSpPr/>
+          <p:nvPr/>
+        </p:nvSpPr>
+        <p:spPr>
+          <a:xfrm>
+            <a:off x="2960370" y="4812030"/>
+            <a:ext cx="96012" cy="96012"/>
+          </a:xfrm>
+          <a:prstGeom prst="ellipse">
+            <a:avLst/>
+          </a:prstGeom>
+          <a:solidFill>
+            <a:srgbClr val="FF6B3D"/>
+          </a:solidFill>
+          <a:ln>
+            <a:noFill/>
+          </a:ln>
+          <a:effectLst/>
+        </p:spPr>
+        <p:txBody>
+          <a:bodyPr rtlCol="0" anchor="ctr"/>
+          <a:lstStyle/>
+          <a:p>
+            <a:pPr algn="ctr"/>
+          </a:p>
+        </p:txBody>
+      </p:sp>
+      <p:sp>
+        <p:nvSpPr>
+          <p:cNvPr id="168" name="ellipse 168"/>
+          <p:cNvSpPr/>
+          <p:nvPr/>
+        </p:nvSpPr>
+        <p:spPr>
+          <a:xfrm>
+            <a:off x="3102102" y="4812030"/>
+            <a:ext cx="96012" cy="96012"/>
+          </a:xfrm>
+          <a:prstGeom prst="ellipse">
+            <a:avLst/>
+          </a:prstGeom>
+          <a:solidFill>
+            <a:srgbClr val="FF6B3D"/>
+          </a:solidFill>
+          <a:ln>
+            <a:noFill/>
+          </a:ln>
+          <a:effectLst/>
+        </p:spPr>
+        <p:txBody>
+          <a:bodyPr rtlCol="0" anchor="ctr"/>
+          <a:lstStyle/>
+          <a:p>
+            <a:pPr algn="ctr"/>
+          </a:p>
+        </p:txBody>
+      </p:sp>
+      <p:sp>
+        <p:nvSpPr>
+          <p:cNvPr id="169" name="ellipse 169"/>
+          <p:cNvSpPr/>
+          <p:nvPr/>
+        </p:nvSpPr>
+        <p:spPr>
+          <a:xfrm>
+            <a:off x="3243834" y="4812030"/>
+            <a:ext cx="96012" cy="96012"/>
+          </a:xfrm>
+          <a:prstGeom prst="ellipse">
+            <a:avLst/>
+          </a:prstGeom>
+          <a:solidFill>
+            <a:srgbClr val="FF6B3D"/>
+          </a:solidFill>
+          <a:ln>
+            <a:noFill/>
+          </a:ln>
+          <a:effectLst/>
+        </p:spPr>
+        <p:txBody>
+          <a:bodyPr rtlCol="0" anchor="ctr"/>
+          <a:lstStyle/>
+          <a:p>
+            <a:pPr algn="ctr"/>
+          </a:p>
+        </p:txBody>
+      </p:sp>
+      <p:sp>
+        <p:nvSpPr>
+          <p:cNvPr id="170" name="ellipse 170"/>
+          <p:cNvSpPr/>
+          <p:nvPr/>
+        </p:nvSpPr>
+        <p:spPr>
+          <a:xfrm>
+            <a:off x="3385566" y="4812030"/>
+            <a:ext cx="96012" cy="96012"/>
+          </a:xfrm>
+          <a:prstGeom prst="ellipse">
+            <a:avLst/>
+          </a:prstGeom>
+          <a:solidFill>
+            <a:srgbClr val="FF6B3D"/>
+          </a:solidFill>
+          <a:ln>
+            <a:noFill/>
+          </a:ln>
+          <a:effectLst/>
+        </p:spPr>
+        <p:txBody>
+          <a:bodyPr rtlCol="0" anchor="ctr"/>
+          <a:lstStyle/>
+          <a:p>
+            <a:pPr algn="ctr"/>
+          </a:p>
+        </p:txBody>
+      </p:sp>
+      <p:sp>
+        <p:nvSpPr>
+          <p:cNvPr id="171" name="ellipse 171"/>
+          <p:cNvSpPr/>
+          <p:nvPr/>
+        </p:nvSpPr>
+        <p:spPr>
+          <a:xfrm>
+            <a:off x="692658" y="4953762"/>
+            <a:ext cx="96012" cy="96012"/>
+          </a:xfrm>
+          <a:prstGeom prst="ellipse">
+            <a:avLst/>
+          </a:prstGeom>
+          <a:solidFill>
+            <a:srgbClr val="FF6B3D"/>
+          </a:solidFill>
+          <a:ln>
+            <a:noFill/>
+          </a:ln>
+          <a:effectLst/>
+        </p:spPr>
+        <p:txBody>
+          <a:bodyPr rtlCol="0" anchor="ctr"/>
+          <a:lstStyle/>
+          <a:p>
+            <a:pPr algn="ctr"/>
+          </a:p>
+        </p:txBody>
+      </p:sp>
+      <p:sp>
+        <p:nvSpPr>
+          <p:cNvPr id="172" name="ellipse 172"/>
+          <p:cNvSpPr/>
+          <p:nvPr/>
+        </p:nvSpPr>
+        <p:spPr>
+          <a:xfrm>
+            <a:off x="834390" y="4953762"/>
+            <a:ext cx="96012" cy="96012"/>
+          </a:xfrm>
+          <a:prstGeom prst="ellipse">
+            <a:avLst/>
+          </a:prstGeom>
+          <a:solidFill>
+            <a:srgbClr val="FF6B3D"/>
+          </a:solidFill>
+          <a:ln>
+            <a:noFill/>
+          </a:ln>
+          <a:effectLst/>
+        </p:spPr>
+        <p:txBody>
+          <a:bodyPr rtlCol="0" anchor="ctr"/>
+          <a:lstStyle/>
+          <a:p>
+            <a:pPr algn="ctr"/>
+          </a:p>
+        </p:txBody>
+      </p:sp>
+      <p:sp>
+        <p:nvSpPr>
+          <p:cNvPr id="173" name="ellipse 173"/>
+          <p:cNvSpPr/>
+          <p:nvPr/>
+        </p:nvSpPr>
+        <p:spPr>
+          <a:xfrm>
+            <a:off x="976122" y="4953762"/>
+            <a:ext cx="96012" cy="96012"/>
+          </a:xfrm>
+          <a:prstGeom prst="ellipse">
+            <a:avLst/>
+          </a:prstGeom>
+          <a:solidFill>
+            <a:srgbClr val="FF6B3D"/>
+          </a:solidFill>
+          <a:ln>
+            <a:noFill/>
+          </a:ln>
+          <a:effectLst/>
+        </p:spPr>
+        <p:txBody>
+          <a:bodyPr rtlCol="0" anchor="ctr"/>
+          <a:lstStyle/>
+          <a:p>
+            <a:pPr algn="ctr"/>
+          </a:p>
+        </p:txBody>
+      </p:sp>
+      <p:sp>
+        <p:nvSpPr>
+          <p:cNvPr id="174" name="ellipse 174"/>
+          <p:cNvSpPr/>
+          <p:nvPr/>
+        </p:nvSpPr>
+        <p:spPr>
+          <a:xfrm>
+            <a:off x="1117854" y="4953762"/>
+            <a:ext cx="96012" cy="96012"/>
+          </a:xfrm>
+          <a:prstGeom prst="ellipse">
+            <a:avLst/>
+          </a:prstGeom>
+          <a:solidFill>
+            <a:srgbClr val="FF6B3D"/>
+          </a:solidFill>
+          <a:ln>
+            <a:noFill/>
+          </a:ln>
+          <a:effectLst/>
+        </p:spPr>
+        <p:txBody>
+          <a:bodyPr rtlCol="0" anchor="ctr"/>
+          <a:lstStyle/>
+          <a:p>
+            <a:pPr algn="ctr"/>
+          </a:p>
+        </p:txBody>
+      </p:sp>
+      <p:sp>
+        <p:nvSpPr>
+          <p:cNvPr id="175" name="ellipse 175"/>
+          <p:cNvSpPr/>
+          <p:nvPr/>
+        </p:nvSpPr>
+        <p:spPr>
+          <a:xfrm>
+            <a:off x="1259586" y="4953762"/>
+            <a:ext cx="96012" cy="96012"/>
+          </a:xfrm>
+          <a:prstGeom prst="ellipse">
+            <a:avLst/>
+          </a:prstGeom>
+          <a:solidFill>
+            <a:srgbClr val="FF6B3D"/>
+          </a:solidFill>
+          <a:ln>
+            <a:noFill/>
+          </a:ln>
+          <a:effectLst/>
+        </p:spPr>
+        <p:txBody>
+          <a:bodyPr rtlCol="0" anchor="ctr"/>
+          <a:lstStyle/>
+          <a:p>
+            <a:pPr algn="ctr"/>
+          </a:p>
+        </p:txBody>
+      </p:sp>
+      <p:sp>
+        <p:nvSpPr>
+          <p:cNvPr id="176" name="ellipse 176"/>
+          <p:cNvSpPr/>
+          <p:nvPr/>
+        </p:nvSpPr>
+        <p:spPr>
+          <a:xfrm>
+            <a:off x="1401318" y="4953762"/>
+            <a:ext cx="96012" cy="96012"/>
+          </a:xfrm>
+          <a:prstGeom prst="ellipse">
+            <a:avLst/>
+          </a:prstGeom>
+          <a:solidFill>
+            <a:srgbClr val="FF6B3D"/>
+          </a:solidFill>
+          <a:ln>
+            <a:noFill/>
+          </a:ln>
+          <a:effectLst/>
+        </p:spPr>
+        <p:txBody>
+          <a:bodyPr rtlCol="0" anchor="ctr"/>
+          <a:lstStyle/>
+          <a:p>
+            <a:pPr algn="ctr"/>
+          </a:p>
+        </p:txBody>
+      </p:sp>
+      <p:sp>
+        <p:nvSpPr>
+          <p:cNvPr id="177" name="ellipse 177"/>
+          <p:cNvSpPr/>
+          <p:nvPr/>
+        </p:nvSpPr>
+        <p:spPr>
+          <a:xfrm>
+            <a:off x="1543050" y="4953762"/>
+            <a:ext cx="96012" cy="96012"/>
+          </a:xfrm>
+          <a:prstGeom prst="ellipse">
+            <a:avLst/>
+          </a:prstGeom>
+          <a:solidFill>
+            <a:srgbClr val="FF6B3D"/>
+          </a:solidFill>
+          <a:ln>
+            <a:noFill/>
+          </a:ln>
+          <a:effectLst/>
+        </p:spPr>
+        <p:txBody>
+          <a:bodyPr rtlCol="0" anchor="ctr"/>
+          <a:lstStyle/>
+          <a:p>
+            <a:pPr algn="ctr"/>
+          </a:p>
+        </p:txBody>
+      </p:sp>
+      <p:sp>
+        <p:nvSpPr>
+          <p:cNvPr id="178" name="ellipse 178"/>
+          <p:cNvSpPr/>
+          <p:nvPr/>
+        </p:nvSpPr>
+        <p:spPr>
+          <a:xfrm>
+            <a:off x="1684782" y="4953762"/>
+            <a:ext cx="96012" cy="96012"/>
+          </a:xfrm>
+          <a:prstGeom prst="ellipse">
+            <a:avLst/>
+          </a:prstGeom>
+          <a:solidFill>
+            <a:srgbClr val="FF6B3D"/>
+          </a:solidFill>
+          <a:ln>
+            <a:noFill/>
+          </a:ln>
+          <a:effectLst/>
+        </p:spPr>
+        <p:txBody>
+          <a:bodyPr rtlCol="0" anchor="ctr"/>
+          <a:lstStyle/>
+          <a:p>
+            <a:pPr algn="ctr"/>
+          </a:p>
+        </p:txBody>
+      </p:sp>
+      <p:sp>
+        <p:nvSpPr>
+          <p:cNvPr id="179" name="ellipse 179"/>
+          <p:cNvSpPr/>
+          <p:nvPr/>
+        </p:nvSpPr>
+        <p:spPr>
+          <a:xfrm>
+            <a:off x="1826514" y="4953762"/>
+            <a:ext cx="96012" cy="96012"/>
+          </a:xfrm>
+          <a:prstGeom prst="ellipse">
+            <a:avLst/>
+          </a:prstGeom>
+          <a:solidFill>
+            <a:srgbClr val="FF6B3D"/>
+          </a:solidFill>
+          <a:ln>
+            <a:noFill/>
+          </a:ln>
+          <a:effectLst/>
+        </p:spPr>
+        <p:txBody>
+          <a:bodyPr rtlCol="0" anchor="ctr"/>
+          <a:lstStyle/>
+          <a:p>
+            <a:pPr algn="ctr"/>
+          </a:p>
+        </p:txBody>
+      </p:sp>
+      <p:sp>
+        <p:nvSpPr>
+          <p:cNvPr id="180" name="ellipse 180"/>
+          <p:cNvSpPr/>
+          <p:nvPr/>
+        </p:nvSpPr>
+        <p:spPr>
+          <a:xfrm>
+            <a:off x="1968246" y="4953762"/>
+            <a:ext cx="96012" cy="96012"/>
+          </a:xfrm>
+          <a:prstGeom prst="ellipse">
+            <a:avLst/>
+          </a:prstGeom>
+          <a:solidFill>
+            <a:srgbClr val="FF6B3D"/>
+          </a:solidFill>
+          <a:ln>
+            <a:noFill/>
+          </a:ln>
+          <a:effectLst/>
+        </p:spPr>
+        <p:txBody>
+          <a:bodyPr rtlCol="0" anchor="ctr"/>
+          <a:lstStyle/>
+          <a:p>
+            <a:pPr algn="ctr"/>
+          </a:p>
+        </p:txBody>
+      </p:sp>
+      <p:sp>
+        <p:nvSpPr>
+          <p:cNvPr id="181" name="ellipse 181"/>
+          <p:cNvSpPr/>
+          <p:nvPr/>
+        </p:nvSpPr>
+        <p:spPr>
+          <a:xfrm>
+            <a:off x="2109978" y="4953762"/>
+            <a:ext cx="96012" cy="96012"/>
+          </a:xfrm>
+          <a:prstGeom prst="ellipse">
+            <a:avLst/>
+          </a:prstGeom>
+          <a:solidFill>
+            <a:srgbClr val="FF6B3D"/>
+          </a:solidFill>
+          <a:ln>
+            <a:noFill/>
+          </a:ln>
+          <a:effectLst/>
+        </p:spPr>
+        <p:txBody>
+          <a:bodyPr rtlCol="0" anchor="ctr"/>
+          <a:lstStyle/>
+          <a:p>
+            <a:pPr algn="ctr"/>
+          </a:p>
+        </p:txBody>
+      </p:sp>
+      <p:sp>
+        <p:nvSpPr>
+          <p:cNvPr id="182" name="ellipse 182"/>
+          <p:cNvSpPr/>
+          <p:nvPr/>
+        </p:nvSpPr>
+        <p:spPr>
+          <a:xfrm>
+            <a:off x="2251710" y="4953762"/>
+            <a:ext cx="96012" cy="96012"/>
+          </a:xfrm>
+          <a:prstGeom prst="ellipse">
+            <a:avLst/>
+          </a:prstGeom>
+          <a:solidFill>
+            <a:srgbClr val="FF6B3D"/>
+          </a:solidFill>
+          <a:ln>
+            <a:noFill/>
+          </a:ln>
+          <a:effectLst/>
+        </p:spPr>
+        <p:txBody>
+          <a:bodyPr rtlCol="0" anchor="ctr"/>
+          <a:lstStyle/>
+          <a:p>
+            <a:pPr algn="ctr"/>
+          </a:p>
+        </p:txBody>
+      </p:sp>
+      <p:sp>
+        <p:nvSpPr>
+          <p:cNvPr id="183" name="ellipse 183"/>
+          <p:cNvSpPr/>
+          <p:nvPr/>
+        </p:nvSpPr>
+        <p:spPr>
+          <a:xfrm>
+            <a:off x="2393442" y="4953762"/>
+            <a:ext cx="96012" cy="96012"/>
+          </a:xfrm>
+          <a:prstGeom prst="ellipse">
+            <a:avLst/>
+          </a:prstGeom>
+          <a:solidFill>
+            <a:srgbClr val="FF6B3D"/>
+          </a:solidFill>
+          <a:ln>
+            <a:noFill/>
+          </a:ln>
+          <a:effectLst/>
+        </p:spPr>
+        <p:txBody>
+          <a:bodyPr rtlCol="0" anchor="ctr"/>
+          <a:lstStyle/>
+          <a:p>
+            <a:pPr algn="ctr"/>
+          </a:p>
+        </p:txBody>
+      </p:sp>
+      <p:sp>
+        <p:nvSpPr>
+          <p:cNvPr id="184" name="ellipse 184"/>
+          <p:cNvSpPr/>
+          <p:nvPr/>
+        </p:nvSpPr>
+        <p:spPr>
+          <a:xfrm>
+            <a:off x="2535174" y="4953762"/>
+            <a:ext cx="96012" cy="96012"/>
+          </a:xfrm>
+          <a:prstGeom prst="ellipse">
+            <a:avLst/>
+          </a:prstGeom>
+          <a:solidFill>
+            <a:srgbClr val="FF6B3D"/>
+          </a:solidFill>
+          <a:ln>
+            <a:noFill/>
+          </a:ln>
+          <a:effectLst/>
+        </p:spPr>
+        <p:txBody>
+          <a:bodyPr rtlCol="0" anchor="ctr"/>
+          <a:lstStyle/>
+          <a:p>
+            <a:pPr algn="ctr"/>
+          </a:p>
+        </p:txBody>
+      </p:sp>
+      <p:sp>
+        <p:nvSpPr>
+          <p:cNvPr id="185" name="ellipse 185"/>
+          <p:cNvSpPr/>
+          <p:nvPr/>
+        </p:nvSpPr>
+        <p:spPr>
+          <a:xfrm>
+            <a:off x="2676906" y="4953762"/>
+            <a:ext cx="96012" cy="96012"/>
+          </a:xfrm>
+          <a:prstGeom prst="ellipse">
+            <a:avLst/>
+          </a:prstGeom>
+          <a:solidFill>
+            <a:srgbClr val="FF6B3D"/>
+          </a:solidFill>
+          <a:ln>
+            <a:noFill/>
+          </a:ln>
+          <a:effectLst/>
+        </p:spPr>
+        <p:txBody>
+          <a:bodyPr rtlCol="0" anchor="ctr"/>
+          <a:lstStyle/>
+          <a:p>
+            <a:pPr algn="ctr"/>
+          </a:p>
+        </p:txBody>
+      </p:sp>
+      <p:sp>
+        <p:nvSpPr>
+          <p:cNvPr id="186" name="ellipse 186"/>
+          <p:cNvSpPr/>
+          <p:nvPr/>
+        </p:nvSpPr>
+        <p:spPr>
+          <a:xfrm>
+            <a:off x="2818638" y="4953762"/>
+            <a:ext cx="96012" cy="96012"/>
+          </a:xfrm>
+          <a:prstGeom prst="ellipse">
+            <a:avLst/>
+          </a:prstGeom>
+          <a:solidFill>
+            <a:srgbClr val="FF6B3D"/>
+          </a:solidFill>
+          <a:ln>
+            <a:noFill/>
+          </a:ln>
+          <a:effectLst/>
+        </p:spPr>
+        <p:txBody>
+          <a:bodyPr rtlCol="0" anchor="ctr"/>
+          <a:lstStyle/>
+          <a:p>
+            <a:pPr algn="ctr"/>
+          </a:p>
+        </p:txBody>
+      </p:sp>
+      <p:sp>
+        <p:nvSpPr>
+          <p:cNvPr id="187" name="ellipse 187"/>
+          <p:cNvSpPr/>
+          <p:nvPr/>
+        </p:nvSpPr>
+        <p:spPr>
+          <a:xfrm>
+            <a:off x="2960370" y="4953762"/>
+            <a:ext cx="96012" cy="96012"/>
+          </a:xfrm>
+          <a:prstGeom prst="ellipse">
+            <a:avLst/>
+          </a:prstGeom>
+          <a:solidFill>
+            <a:srgbClr val="FF6B3D"/>
+          </a:solidFill>
+          <a:ln>
+            <a:noFill/>
+          </a:ln>
+          <a:effectLst/>
+        </p:spPr>
+        <p:txBody>
+          <a:bodyPr rtlCol="0" anchor="ctr"/>
+          <a:lstStyle/>
+          <a:p>
+            <a:pPr algn="ctr"/>
+          </a:p>
+        </p:txBody>
+      </p:sp>
+      <p:sp>
+        <p:nvSpPr>
+          <p:cNvPr id="188" name="ellipse 188"/>
+          <p:cNvSpPr/>
+          <p:nvPr/>
+        </p:nvSpPr>
+        <p:spPr>
+          <a:xfrm>
+            <a:off x="3102102" y="4953762"/>
+            <a:ext cx="96012" cy="96012"/>
+          </a:xfrm>
+          <a:prstGeom prst="ellipse">
+            <a:avLst/>
+          </a:prstGeom>
+          <a:solidFill>
+            <a:srgbClr val="FF6B3D"/>
+          </a:solidFill>
+          <a:ln>
+            <a:noFill/>
+          </a:ln>
+          <a:effectLst/>
+        </p:spPr>
+        <p:txBody>
+          <a:bodyPr rtlCol="0" anchor="ctr"/>
+          <a:lstStyle/>
+          <a:p>
+            <a:pPr algn="ctr"/>
+          </a:p>
+        </p:txBody>
+      </p:sp>
+      <p:sp>
+        <p:nvSpPr>
+          <p:cNvPr id="189" name="ellipse 189"/>
+          <p:cNvSpPr/>
+          <p:nvPr/>
+        </p:nvSpPr>
+        <p:spPr>
+          <a:xfrm>
+            <a:off x="3243834" y="4953762"/>
+            <a:ext cx="96012" cy="96012"/>
+          </a:xfrm>
+          <a:prstGeom prst="ellipse">
+            <a:avLst/>
+          </a:prstGeom>
+          <a:solidFill>
+            <a:srgbClr val="FF6B3D"/>
+          </a:solidFill>
+          <a:ln>
+            <a:noFill/>
+          </a:ln>
+          <a:effectLst/>
+        </p:spPr>
+        <p:txBody>
+          <a:bodyPr rtlCol="0" anchor="ctr"/>
+          <a:lstStyle/>
+          <a:p>
+            <a:pPr algn="ctr"/>
+          </a:p>
+        </p:txBody>
+      </p:sp>
+      <p:sp>
+        <p:nvSpPr>
+          <p:cNvPr id="190" name="ellipse 190"/>
+          <p:cNvSpPr/>
+          <p:nvPr/>
+        </p:nvSpPr>
+        <p:spPr>
+          <a:xfrm>
+            <a:off x="3385566" y="4953762"/>
+            <a:ext cx="96012" cy="96012"/>
+          </a:xfrm>
+          <a:prstGeom prst="ellipse">
+            <a:avLst/>
+          </a:prstGeom>
+          <a:solidFill>
+            <a:srgbClr val="FF6B3D"/>
+          </a:solidFill>
+          <a:ln>
+            <a:noFill/>
+          </a:ln>
+          <a:effectLst/>
+        </p:spPr>
+        <p:txBody>
+          <a:bodyPr rtlCol="0" anchor="ctr"/>
+          <a:lstStyle/>
+          <a:p>
+            <a:pPr algn="ctr"/>
+          </a:p>
+        </p:txBody>
+      </p:sp>
+      <p:sp>
+        <p:nvSpPr>
+          <p:cNvPr id="191" name="ellipse 191"/>
+          <p:cNvSpPr/>
+          <p:nvPr/>
+        </p:nvSpPr>
+        <p:spPr>
+          <a:xfrm>
+            <a:off x="692658" y="5095494"/>
+            <a:ext cx="96012" cy="96012"/>
+          </a:xfrm>
+          <a:prstGeom prst="ellipse">
+            <a:avLst/>
+          </a:prstGeom>
+          <a:solidFill>
+            <a:srgbClr val="FF6B3D"/>
+          </a:solidFill>
+          <a:ln>
+            <a:noFill/>
+          </a:ln>
+          <a:effectLst/>
+        </p:spPr>
+        <p:txBody>
+          <a:bodyPr rtlCol="0" anchor="ctr"/>
+          <a:lstStyle/>
+          <a:p>
+            <a:pPr algn="ctr"/>
+          </a:p>
+        </p:txBody>
+      </p:sp>
+      <p:sp>
+        <p:nvSpPr>
+          <p:cNvPr id="192" name="ellipse 192"/>
+          <p:cNvSpPr/>
+          <p:nvPr/>
+        </p:nvSpPr>
+        <p:spPr>
+          <a:xfrm>
+            <a:off x="834390" y="5095494"/>
+            <a:ext cx="96012" cy="96012"/>
+          </a:xfrm>
+          <a:prstGeom prst="ellipse">
+            <a:avLst/>
+          </a:prstGeom>
+          <a:solidFill>
+            <a:srgbClr val="2B2B2D"/>
+          </a:solidFill>
+          <a:ln>
+            <a:noFill/>
+          </a:ln>
+          <a:effectLst/>
+        </p:spPr>
+        <p:txBody>
+          <a:bodyPr rtlCol="0" anchor="ctr"/>
+          <a:lstStyle/>
+          <a:p>
+            <a:pPr algn="ctr"/>
+          </a:p>
+        </p:txBody>
+      </p:sp>
+      <p:sp>
+        <p:nvSpPr>
+          <p:cNvPr id="193" name="ellipse 193"/>
+          <p:cNvSpPr/>
+          <p:nvPr/>
+        </p:nvSpPr>
+        <p:spPr>
+          <a:xfrm>
+            <a:off x="976122" y="5095494"/>
+            <a:ext cx="96012" cy="96012"/>
+          </a:xfrm>
+          <a:prstGeom prst="ellipse">
+            <a:avLst/>
+          </a:prstGeom>
+          <a:solidFill>
+            <a:srgbClr val="2B2B2D"/>
+          </a:solidFill>
+          <a:ln>
+            <a:noFill/>
+          </a:ln>
+          <a:effectLst/>
+        </p:spPr>
+        <p:txBody>
+          <a:bodyPr rtlCol="0" anchor="ctr"/>
+          <a:lstStyle/>
+          <a:p>
+            <a:pPr algn="ctr"/>
+          </a:p>
+        </p:txBody>
+      </p:sp>
+      <p:sp>
+        <p:nvSpPr>
+          <p:cNvPr id="194" name="ellipse 194"/>
+          <p:cNvSpPr/>
+          <p:nvPr/>
+        </p:nvSpPr>
+        <p:spPr>
+          <a:xfrm>
+            <a:off x="1117854" y="5095494"/>
+            <a:ext cx="96012" cy="96012"/>
+          </a:xfrm>
+          <a:prstGeom prst="ellipse">
+            <a:avLst/>
+          </a:prstGeom>
+          <a:solidFill>
+            <a:srgbClr val="2B2B2D"/>
+          </a:solidFill>
+          <a:ln>
+            <a:noFill/>
+          </a:ln>
+          <a:effectLst/>
+        </p:spPr>
+        <p:txBody>
+          <a:bodyPr rtlCol="0" anchor="ctr"/>
+          <a:lstStyle/>
+          <a:p>
+            <a:pPr algn="ctr"/>
+          </a:p>
+        </p:txBody>
+      </p:sp>
+      <p:sp>
+        <p:nvSpPr>
+          <p:cNvPr id="195" name="ellipse 195"/>
+          <p:cNvSpPr/>
+          <p:nvPr/>
+        </p:nvSpPr>
+        <p:spPr>
+          <a:xfrm>
+            <a:off x="1259586" y="5095494"/>
+            <a:ext cx="96012" cy="96012"/>
+          </a:xfrm>
+          <a:prstGeom prst="ellipse">
+            <a:avLst/>
+          </a:prstGeom>
+          <a:solidFill>
+            <a:srgbClr val="2B2B2D"/>
+          </a:solidFill>
+          <a:ln>
+            <a:noFill/>
+          </a:ln>
+          <a:effectLst/>
+        </p:spPr>
+        <p:txBody>
+          <a:bodyPr rtlCol="0" anchor="ctr"/>
+          <a:lstStyle/>
+          <a:p>
+            <a:pPr algn="ctr"/>
+          </a:p>
+        </p:txBody>
+      </p:sp>
+      <p:sp>
+        <p:nvSpPr>
+          <p:cNvPr id="196" name="ellipse 196"/>
+          <p:cNvSpPr/>
+          <p:nvPr/>
+        </p:nvSpPr>
+        <p:spPr>
+          <a:xfrm>
+            <a:off x="1401318" y="5095494"/>
+            <a:ext cx="96012" cy="96012"/>
+          </a:xfrm>
+          <a:prstGeom prst="ellipse">
+            <a:avLst/>
+          </a:prstGeom>
+          <a:solidFill>
+            <a:srgbClr val="2B2B2D"/>
+          </a:solidFill>
+          <a:ln>
+            <a:noFill/>
+          </a:ln>
+          <a:effectLst/>
+        </p:spPr>
+        <p:txBody>
+          <a:bodyPr rtlCol="0" anchor="ctr"/>
+          <a:lstStyle/>
+          <a:p>
+            <a:pPr algn="ctr"/>
+          </a:p>
+        </p:txBody>
+      </p:sp>
+      <p:sp>
+        <p:nvSpPr>
+          <p:cNvPr id="197" name="ellipse 197"/>
+          <p:cNvSpPr/>
+          <p:nvPr/>
+        </p:nvSpPr>
+        <p:spPr>
+          <a:xfrm>
+            <a:off x="1543050" y="5095494"/>
+            <a:ext cx="96012" cy="96012"/>
+          </a:xfrm>
+          <a:prstGeom prst="ellipse">
+            <a:avLst/>
+          </a:prstGeom>
+          <a:solidFill>
+            <a:srgbClr val="2B2B2D"/>
+          </a:solidFill>
+          <a:ln>
+            <a:noFill/>
+          </a:ln>
+          <a:effectLst/>
+        </p:spPr>
+        <p:txBody>
+          <a:bodyPr rtlCol="0" anchor="ctr"/>
+          <a:lstStyle/>
+          <a:p>
+            <a:pPr algn="ctr"/>
+          </a:p>
+        </p:txBody>
+      </p:sp>
+      <p:sp>
+        <p:nvSpPr>
+          <p:cNvPr id="198" name="ellipse 198"/>
+          <p:cNvSpPr/>
+          <p:nvPr/>
+        </p:nvSpPr>
+        <p:spPr>
+          <a:xfrm>
+            <a:off x="1684782" y="5095494"/>
+            <a:ext cx="96012" cy="96012"/>
+          </a:xfrm>
+          <a:prstGeom prst="ellipse">
+            <a:avLst/>
+          </a:prstGeom>
+          <a:solidFill>
+            <a:srgbClr val="2B2B2D"/>
+          </a:solidFill>
+          <a:ln>
+            <a:noFill/>
+          </a:ln>
+          <a:effectLst/>
+        </p:spPr>
+        <p:txBody>
+          <a:bodyPr rtlCol="0" anchor="ctr"/>
+          <a:lstStyle/>
+          <a:p>
+            <a:pPr algn="ctr"/>
+          </a:p>
+        </p:txBody>
+      </p:sp>
+      <p:sp>
+        <p:nvSpPr>
+          <p:cNvPr id="199" name="ellipse 199"/>
+          <p:cNvSpPr/>
+          <p:nvPr/>
+        </p:nvSpPr>
+        <p:spPr>
+          <a:xfrm>
+            <a:off x="1826514" y="5095494"/>
+            <a:ext cx="96012" cy="96012"/>
+          </a:xfrm>
+          <a:prstGeom prst="ellipse">
+            <a:avLst/>
+          </a:prstGeom>
+          <a:solidFill>
+            <a:srgbClr val="2B2B2D"/>
+          </a:solidFill>
+          <a:ln>
+            <a:noFill/>
+          </a:ln>
+          <a:effectLst/>
+        </p:spPr>
+        <p:txBody>
+          <a:bodyPr rtlCol="0" anchor="ctr"/>
+          <a:lstStyle/>
+          <a:p>
+            <a:pPr algn="ctr"/>
+          </a:p>
+        </p:txBody>
+      </p:sp>
+      <p:sp>
+        <p:nvSpPr>
+          <p:cNvPr id="200" name="ellipse 200"/>
+          <p:cNvSpPr/>
+          <p:nvPr/>
+        </p:nvSpPr>
+        <p:spPr>
+          <a:xfrm>
+            <a:off x="1968246" y="5095494"/>
+            <a:ext cx="96012" cy="96012"/>
+          </a:xfrm>
+          <a:prstGeom prst="ellipse">
+            <a:avLst/>
+          </a:prstGeom>
+          <a:solidFill>
+            <a:srgbClr val="2B2B2D"/>
+          </a:solidFill>
+          <a:ln>
+            <a:noFill/>
+          </a:ln>
+          <a:effectLst/>
+        </p:spPr>
+        <p:txBody>
+          <a:bodyPr rtlCol="0" anchor="ctr"/>
+          <a:lstStyle/>
+          <a:p>
+            <a:pPr algn="ctr"/>
+          </a:p>
+        </p:txBody>
+      </p:sp>
+      <p:sp>
+        <p:nvSpPr>
+          <p:cNvPr id="201" name="ellipse 201"/>
+          <p:cNvSpPr/>
+          <p:nvPr/>
+        </p:nvSpPr>
+        <p:spPr>
+          <a:xfrm>
+            <a:off x="2109978" y="5095494"/>
+            <a:ext cx="96012" cy="96012"/>
+          </a:xfrm>
+          <a:prstGeom prst="ellipse">
+            <a:avLst/>
+          </a:prstGeom>
+          <a:solidFill>
+            <a:srgbClr val="2B2B2D"/>
+          </a:solidFill>
+          <a:ln>
+            <a:noFill/>
+          </a:ln>
+          <a:effectLst/>
+        </p:spPr>
+        <p:txBody>
+          <a:bodyPr rtlCol="0" anchor="ctr"/>
+          <a:lstStyle/>
+          <a:p>
+            <a:pPr algn="ctr"/>
+          </a:p>
+        </p:txBody>
+      </p:sp>
+      <p:sp>
+        <p:nvSpPr>
+          <p:cNvPr id="202" name="ellipse 202"/>
+          <p:cNvSpPr/>
+          <p:nvPr/>
+        </p:nvSpPr>
+        <p:spPr>
+          <a:xfrm>
+            <a:off x="2251710" y="5095494"/>
+            <a:ext cx="96012" cy="96012"/>
+          </a:xfrm>
+          <a:prstGeom prst="ellipse">
+            <a:avLst/>
+          </a:prstGeom>
+          <a:solidFill>
+            <a:srgbClr val="2B2B2D"/>
+          </a:solidFill>
+          <a:ln>
+            <a:noFill/>
+          </a:ln>
+          <a:effectLst/>
+        </p:spPr>
+        <p:txBody>
+          <a:bodyPr rtlCol="0" anchor="ctr"/>
+          <a:lstStyle/>
+          <a:p>
+            <a:pPr algn="ctr"/>
+          </a:p>
+        </p:txBody>
+      </p:sp>
+      <p:sp>
+        <p:nvSpPr>
+          <p:cNvPr id="203" name="ellipse 203"/>
+          <p:cNvSpPr/>
+          <p:nvPr/>
+        </p:nvSpPr>
+        <p:spPr>
+          <a:xfrm>
+            <a:off x="2393442" y="5095494"/>
+            <a:ext cx="96012" cy="96012"/>
+          </a:xfrm>
+          <a:prstGeom prst="ellipse">
+            <a:avLst/>
+          </a:prstGeom>
+          <a:solidFill>
+            <a:srgbClr val="2B2B2D"/>
+          </a:solidFill>
+          <a:ln>
+            <a:noFill/>
+          </a:ln>
+          <a:effectLst/>
+        </p:spPr>
+        <p:txBody>
+          <a:bodyPr rtlCol="0" anchor="ctr"/>
+          <a:lstStyle/>
+          <a:p>
+            <a:pPr algn="ctr"/>
+          </a:p>
+        </p:txBody>
+      </p:sp>
+      <p:sp>
+        <p:nvSpPr>
+          <p:cNvPr id="204" name="ellipse 204"/>
+          <p:cNvSpPr/>
+          <p:nvPr/>
+        </p:nvSpPr>
+        <p:spPr>
+          <a:xfrm>
+            <a:off x="2535174" y="5095494"/>
+            <a:ext cx="96012" cy="96012"/>
+          </a:xfrm>
+          <a:prstGeom prst="ellipse">
+            <a:avLst/>
+          </a:prstGeom>
+          <a:solidFill>
+            <a:srgbClr val="2B2B2D"/>
+          </a:solidFill>
+          <a:ln>
+            <a:noFill/>
+          </a:ln>
+          <a:effectLst/>
+        </p:spPr>
+        <p:txBody>
+          <a:bodyPr rtlCol="0" anchor="ctr"/>
+          <a:lstStyle/>
+          <a:p>
+            <a:pPr algn="ctr"/>
+          </a:p>
+        </p:txBody>
+      </p:sp>
+      <p:sp>
+        <p:nvSpPr>
+          <p:cNvPr id="205" name="ellipse 205"/>
+          <p:cNvSpPr/>
+          <p:nvPr/>
+        </p:nvSpPr>
+        <p:spPr>
+          <a:xfrm>
+            <a:off x="2676906" y="5095494"/>
+            <a:ext cx="96012" cy="96012"/>
+          </a:xfrm>
+          <a:prstGeom prst="ellipse">
+            <a:avLst/>
+          </a:prstGeom>
+          <a:solidFill>
+            <a:srgbClr val="2B2B2D"/>
+          </a:solidFill>
+          <a:ln>
+            <a:noFill/>
+          </a:ln>
+          <a:effectLst/>
+        </p:spPr>
+        <p:txBody>
+          <a:bodyPr rtlCol="0" anchor="ctr"/>
+          <a:lstStyle/>
+          <a:p>
+            <a:pPr algn="ctr"/>
+          </a:p>
+        </p:txBody>
+      </p:sp>
+      <p:sp>
+        <p:nvSpPr>
+          <p:cNvPr id="206" name="ellipse 206"/>
+          <p:cNvSpPr/>
+          <p:nvPr/>
+        </p:nvSpPr>
+        <p:spPr>
+          <a:xfrm>
+            <a:off x="2818638" y="5095494"/>
+            <a:ext cx="96012" cy="96012"/>
+          </a:xfrm>
+          <a:prstGeom prst="ellipse">
+            <a:avLst/>
+          </a:prstGeom>
+          <a:solidFill>
+            <a:srgbClr val="2B2B2D"/>
+          </a:solidFill>
+          <a:ln>
+            <a:noFill/>
+          </a:ln>
+          <a:effectLst/>
+        </p:spPr>
+        <p:txBody>
+          <a:bodyPr rtlCol="0" anchor="ctr"/>
+          <a:lstStyle/>
+          <a:p>
+            <a:pPr algn="ctr"/>
+          </a:p>
+        </p:txBody>
+      </p:sp>
+      <p:sp>
+        <p:nvSpPr>
+          <p:cNvPr id="207" name="ellipse 207"/>
+          <p:cNvSpPr/>
+          <p:nvPr/>
+        </p:nvSpPr>
+        <p:spPr>
+          <a:xfrm>
+            <a:off x="2960370" y="5095494"/>
+            <a:ext cx="96012" cy="96012"/>
+          </a:xfrm>
+          <a:prstGeom prst="ellipse">
+            <a:avLst/>
+          </a:prstGeom>
+          <a:solidFill>
+            <a:srgbClr val="2B2B2D"/>
+          </a:solidFill>
+          <a:ln>
+            <a:noFill/>
+          </a:ln>
+          <a:effectLst/>
+        </p:spPr>
+        <p:txBody>
+          <a:bodyPr rtlCol="0" anchor="ctr"/>
+          <a:lstStyle/>
+          <a:p>
+            <a:pPr algn="ctr"/>
+          </a:p>
+        </p:txBody>
+      </p:sp>
+      <p:sp>
+        <p:nvSpPr>
+          <p:cNvPr id="208" name="ellipse 208"/>
+          <p:cNvSpPr/>
+          <p:nvPr/>
+        </p:nvSpPr>
+        <p:spPr>
+          <a:xfrm>
+            <a:off x="3102102" y="5095494"/>
+            <a:ext cx="96012" cy="96012"/>
+          </a:xfrm>
+          <a:prstGeom prst="ellipse">
+            <a:avLst/>
+          </a:prstGeom>
+          <a:solidFill>
+            <a:srgbClr val="2B2B2D"/>
+          </a:solidFill>
+          <a:ln>
+            <a:noFill/>
+          </a:ln>
+          <a:effectLst/>
+        </p:spPr>
+        <p:txBody>
+          <a:bodyPr rtlCol="0" anchor="ctr"/>
+          <a:lstStyle/>
+          <a:p>
+            <a:pPr algn="ctr"/>
+          </a:p>
+        </p:txBody>
+      </p:sp>
+      <p:sp>
+        <p:nvSpPr>
+          <p:cNvPr id="209" name="ellipse 209"/>
+          <p:cNvSpPr/>
+          <p:nvPr/>
+        </p:nvSpPr>
+        <p:spPr>
+          <a:xfrm>
+            <a:off x="3243834" y="5095494"/>
+            <a:ext cx="96012" cy="96012"/>
+          </a:xfrm>
+          <a:prstGeom prst="ellipse">
+            <a:avLst/>
+          </a:prstGeom>
+          <a:solidFill>
+            <a:srgbClr val="2B2B2D"/>
+          </a:solidFill>
+          <a:ln>
+            <a:noFill/>
+          </a:ln>
+          <a:effectLst/>
+        </p:spPr>
+        <p:txBody>
+          <a:bodyPr rtlCol="0" anchor="ctr"/>
+          <a:lstStyle/>
+          <a:p>
+            <a:pPr algn="ctr"/>
+          </a:p>
+        </p:txBody>
+      </p:sp>
+      <p:sp>
+        <p:nvSpPr>
+          <p:cNvPr id="210" name="ellipse 210"/>
+          <p:cNvSpPr/>
+          <p:nvPr/>
+        </p:nvSpPr>
+        <p:spPr>
+          <a:xfrm>
+            <a:off x="3385566" y="5095494"/>
+            <a:ext cx="96012" cy="96012"/>
+          </a:xfrm>
+          <a:prstGeom prst="ellipse">
+            <a:avLst/>
+          </a:prstGeom>
+          <a:solidFill>
+            <a:srgbClr val="2B2B2D"/>
+          </a:solidFill>
+          <a:ln>
+            <a:noFill/>
+          </a:ln>
+          <a:effectLst/>
+        </p:spPr>
+        <p:txBody>
+          <a:bodyPr rtlCol="0" anchor="ctr"/>
+          <a:lstStyle/>
+          <a:p>
+            <a:pPr algn="ctr"/>
+          </a:p>
+        </p:txBody>
+      </p:sp>
+      <p:sp>
+        <p:nvSpPr>
+          <p:cNvPr id="211" name="ellipse 211"/>
+          <p:cNvSpPr/>
+          <p:nvPr/>
+        </p:nvSpPr>
+        <p:spPr>
+          <a:xfrm>
+            <a:off x="692658" y="5237226"/>
+            <a:ext cx="96012" cy="96012"/>
+          </a:xfrm>
+          <a:prstGeom prst="ellipse">
+            <a:avLst/>
+          </a:prstGeom>
+          <a:solidFill>
+            <a:srgbClr val="2B2B2D"/>
+          </a:solidFill>
+          <a:ln>
+            <a:noFill/>
+          </a:ln>
+          <a:effectLst/>
+        </p:spPr>
+        <p:txBody>
+          <a:bodyPr rtlCol="0" anchor="ctr"/>
+          <a:lstStyle/>
+          <a:p>
+            <a:pPr algn="ctr"/>
+          </a:p>
+        </p:txBody>
+      </p:sp>
+      <p:sp>
+        <p:nvSpPr>
+          <p:cNvPr id="212" name="ellipse 212"/>
+          <p:cNvSpPr/>
+          <p:nvPr/>
+        </p:nvSpPr>
+        <p:spPr>
+          <a:xfrm>
+            <a:off x="834390" y="5237226"/>
+            <a:ext cx="96012" cy="96012"/>
+          </a:xfrm>
+          <a:prstGeom prst="ellipse">
+            <a:avLst/>
+          </a:prstGeom>
+          <a:solidFill>
+            <a:srgbClr val="2B2B2D"/>
+          </a:solidFill>
+          <a:ln>
+            <a:noFill/>
+          </a:ln>
+          <a:effectLst/>
+        </p:spPr>
+        <p:txBody>
+          <a:bodyPr rtlCol="0" anchor="ctr"/>
+          <a:lstStyle/>
+          <a:p>
+            <a:pPr algn="ctr"/>
+          </a:p>
+        </p:txBody>
+      </p:sp>
+      <p:sp>
+        <p:nvSpPr>
+          <p:cNvPr id="213" name="ellipse 213"/>
+          <p:cNvSpPr/>
+          <p:nvPr/>
+        </p:nvSpPr>
+        <p:spPr>
+          <a:xfrm>
+            <a:off x="976122" y="5237226"/>
+            <a:ext cx="96012" cy="96012"/>
+          </a:xfrm>
+          <a:prstGeom prst="ellipse">
+            <a:avLst/>
+          </a:prstGeom>
+          <a:solidFill>
+            <a:srgbClr val="2B2B2D"/>
+          </a:solidFill>
+          <a:ln>
+            <a:noFill/>
+          </a:ln>
+          <a:effectLst/>
+        </p:spPr>
+        <p:txBody>
+          <a:bodyPr rtlCol="0" anchor="ctr"/>
+          <a:lstStyle/>
+          <a:p>
+            <a:pPr algn="ctr"/>
+          </a:p>
+        </p:txBody>
+      </p:sp>
+      <p:sp>
+        <p:nvSpPr>
+          <p:cNvPr id="214" name="ellipse 214"/>
+          <p:cNvSpPr/>
+          <p:nvPr/>
+        </p:nvSpPr>
+        <p:spPr>
+          <a:xfrm>
+            <a:off x="1117854" y="5237226"/>
+            <a:ext cx="96012" cy="96012"/>
+          </a:xfrm>
+          <a:prstGeom prst="ellipse">
+            <a:avLst/>
+          </a:prstGeom>
+          <a:solidFill>
+            <a:srgbClr val="2B2B2D"/>
+          </a:solidFill>
+          <a:ln>
+            <a:noFill/>
+          </a:ln>
+          <a:effectLst/>
+        </p:spPr>
+        <p:txBody>
+          <a:bodyPr rtlCol="0" anchor="ctr"/>
+          <a:lstStyle/>
+          <a:p>
+            <a:pPr algn="ctr"/>
+          </a:p>
+        </p:txBody>
+      </p:sp>
+      <p:sp>
+        <p:nvSpPr>
+          <p:cNvPr id="215" name="ellipse 215"/>
+          <p:cNvSpPr/>
+          <p:nvPr/>
+        </p:nvSpPr>
+        <p:spPr>
+          <a:xfrm>
+            <a:off x="1259586" y="5237226"/>
+            <a:ext cx="96012" cy="96012"/>
+          </a:xfrm>
+          <a:prstGeom prst="ellipse">
+            <a:avLst/>
+          </a:prstGeom>
+          <a:solidFill>
+            <a:srgbClr val="2B2B2D"/>
+          </a:solidFill>
+          <a:ln>
+            <a:noFill/>
+          </a:ln>
+          <a:effectLst/>
+        </p:spPr>
+        <p:txBody>
+          <a:bodyPr rtlCol="0" anchor="ctr"/>
+          <a:lstStyle/>
+          <a:p>
+            <a:pPr algn="ctr"/>
+          </a:p>
+        </p:txBody>
+      </p:sp>
+      <p:sp>
+        <p:nvSpPr>
+          <p:cNvPr id="216" name="ellipse 216"/>
+          <p:cNvSpPr/>
+          <p:nvPr/>
+        </p:nvSpPr>
+        <p:spPr>
+          <a:xfrm>
+            <a:off x="1401318" y="5237226"/>
+            <a:ext cx="96012" cy="96012"/>
+          </a:xfrm>
+          <a:prstGeom prst="ellipse">
+            <a:avLst/>
+          </a:prstGeom>
+          <a:solidFill>
+            <a:srgbClr val="2B2B2D"/>
+          </a:solidFill>
+          <a:ln>
+            <a:noFill/>
+          </a:ln>
+          <a:effectLst/>
+        </p:spPr>
+        <p:txBody>
+          <a:bodyPr rtlCol="0" anchor="ctr"/>
+          <a:lstStyle/>
+          <a:p>
+            <a:pPr algn="ctr"/>
+          </a:p>
+        </p:txBody>
+      </p:sp>
+      <p:sp>
+        <p:nvSpPr>
+          <p:cNvPr id="217" name="ellipse 217"/>
+          <p:cNvSpPr/>
+          <p:nvPr/>
+        </p:nvSpPr>
+        <p:spPr>
+          <a:xfrm>
+            <a:off x="1543050" y="5237226"/>
+            <a:ext cx="96012" cy="96012"/>
+          </a:xfrm>
+          <a:prstGeom prst="ellipse">
+            <a:avLst/>
+          </a:prstGeom>
+          <a:solidFill>
+            <a:srgbClr val="2B2B2D"/>
+          </a:solidFill>
+          <a:ln>
+            <a:noFill/>
+          </a:ln>
+          <a:effectLst/>
+        </p:spPr>
+        <p:txBody>
+          <a:bodyPr rtlCol="0" anchor="ctr"/>
+          <a:lstStyle/>
+          <a:p>
+            <a:pPr algn="ctr"/>
+          </a:p>
+        </p:txBody>
+      </p:sp>
+      <p:sp>
+        <p:nvSpPr>
+          <p:cNvPr id="218" name="ellipse 218"/>
+          <p:cNvSpPr/>
+          <p:nvPr/>
+        </p:nvSpPr>
+        <p:spPr>
+          <a:xfrm>
+            <a:off x="1684782" y="5237226"/>
+            <a:ext cx="96012" cy="96012"/>
+          </a:xfrm>
+          <a:prstGeom prst="ellipse">
+            <a:avLst/>
+          </a:prstGeom>
+          <a:solidFill>
+            <a:srgbClr val="2B2B2D"/>
+          </a:solidFill>
+          <a:ln>
+            <a:noFill/>
+          </a:ln>
+          <a:effectLst/>
+        </p:spPr>
+        <p:txBody>
+          <a:bodyPr rtlCol="0" anchor="ctr"/>
+          <a:lstStyle/>
+          <a:p>
+            <a:pPr algn="ctr"/>
+          </a:p>
+        </p:txBody>
+      </p:sp>
+      <p:sp>
+        <p:nvSpPr>
+          <p:cNvPr id="219" name="ellipse 219"/>
+          <p:cNvSpPr/>
+          <p:nvPr/>
+        </p:nvSpPr>
+        <p:spPr>
+          <a:xfrm>
+            <a:off x="1826514" y="5237226"/>
+            <a:ext cx="96012" cy="96012"/>
+          </a:xfrm>
+          <a:prstGeom prst="ellipse">
+            <a:avLst/>
+          </a:prstGeom>
+          <a:solidFill>
+            <a:srgbClr val="2B2B2D"/>
+          </a:solidFill>
+          <a:ln>
+            <a:noFill/>
+          </a:ln>
+          <a:effectLst/>
+        </p:spPr>
+        <p:txBody>
+          <a:bodyPr rtlCol="0" anchor="ctr"/>
+          <a:lstStyle/>
+          <a:p>
+            <a:pPr algn="ctr"/>
+          </a:p>
+        </p:txBody>
+      </p:sp>
+      <p:sp>
+        <p:nvSpPr>
+          <p:cNvPr id="220" name="ellipse 220"/>
+          <p:cNvSpPr/>
+          <p:nvPr/>
+        </p:nvSpPr>
+        <p:spPr>
+          <a:xfrm>
+            <a:off x="1968246" y="5237226"/>
+            <a:ext cx="96012" cy="96012"/>
+          </a:xfrm>
+          <a:prstGeom prst="ellipse">
+            <a:avLst/>
+          </a:prstGeom>
+          <a:solidFill>
+            <a:srgbClr val="2B2B2D"/>
+          </a:solidFill>
+          <a:ln>
+            <a:noFill/>
+          </a:ln>
+          <a:effectLst/>
+        </p:spPr>
+        <p:txBody>
+          <a:bodyPr rtlCol="0" anchor="ctr"/>
+          <a:lstStyle/>
+          <a:p>
+            <a:pPr algn="ctr"/>
+          </a:p>
+        </p:txBody>
+      </p:sp>
+      <p:sp>
+        <p:nvSpPr>
+          <p:cNvPr id="221" name="ellipse 221"/>
+          <p:cNvSpPr/>
+          <p:nvPr/>
+        </p:nvSpPr>
+        <p:spPr>
+          <a:xfrm>
+            <a:off x="2109978" y="5237226"/>
+            <a:ext cx="96012" cy="96012"/>
+          </a:xfrm>
+          <a:prstGeom prst="ellipse">
+            <a:avLst/>
+          </a:prstGeom>
+          <a:solidFill>
+            <a:srgbClr val="2B2B2D"/>
+          </a:solidFill>
+          <a:ln>
+            <a:noFill/>
+          </a:ln>
+          <a:effectLst/>
+        </p:spPr>
+        <p:txBody>
+          <a:bodyPr rtlCol="0" anchor="ctr"/>
+          <a:lstStyle/>
+          <a:p>
+            <a:pPr algn="ctr"/>
+          </a:p>
+        </p:txBody>
+      </p:sp>
+      <p:sp>
+        <p:nvSpPr>
+          <p:cNvPr id="222" name="ellipse 222"/>
+          <p:cNvSpPr/>
+          <p:nvPr/>
+        </p:nvSpPr>
+        <p:spPr>
+          <a:xfrm>
+            <a:off x="2251710" y="5237226"/>
+            <a:ext cx="96012" cy="96012"/>
+          </a:xfrm>
+          <a:prstGeom prst="ellipse">
+            <a:avLst/>
+          </a:prstGeom>
+          <a:solidFill>
+            <a:srgbClr val="2B2B2D"/>
+          </a:solidFill>
+          <a:ln>
+            <a:noFill/>
+          </a:ln>
+          <a:effectLst/>
+        </p:spPr>
+        <p:txBody>
+          <a:bodyPr rtlCol="0" anchor="ctr"/>
+          <a:lstStyle/>
+          <a:p>
+            <a:pPr algn="ctr"/>
+          </a:p>
+        </p:txBody>
+      </p:sp>
+      <p:sp>
+        <p:nvSpPr>
+          <p:cNvPr id="223" name="ellipse 223"/>
+          <p:cNvSpPr/>
+          <p:nvPr/>
+        </p:nvSpPr>
+        <p:spPr>
+          <a:xfrm>
+            <a:off x="2393442" y="5237226"/>
+            <a:ext cx="96012" cy="96012"/>
+          </a:xfrm>
+          <a:prstGeom prst="ellipse">
+            <a:avLst/>
+          </a:prstGeom>
+          <a:solidFill>
+            <a:srgbClr val="2B2B2D"/>
+          </a:solidFill>
+          <a:ln>
+            <a:noFill/>
+          </a:ln>
+          <a:effectLst/>
+        </p:spPr>
+        <p:txBody>
+          <a:bodyPr rtlCol="0" anchor="ctr"/>
+          <a:lstStyle/>
+          <a:p>
+            <a:pPr algn="ctr"/>
+          </a:p>
+        </p:txBody>
+      </p:sp>
+      <p:sp>
+        <p:nvSpPr>
+          <p:cNvPr id="224" name="ellipse 224"/>
+          <p:cNvSpPr/>
+          <p:nvPr/>
+        </p:nvSpPr>
+        <p:spPr>
+          <a:xfrm>
+            <a:off x="2535174" y="5237226"/>
+            <a:ext cx="96012" cy="96012"/>
+          </a:xfrm>
+          <a:prstGeom prst="ellipse">
+            <a:avLst/>
+          </a:prstGeom>
+          <a:solidFill>
+            <a:srgbClr val="2B2B2D"/>
+          </a:solidFill>
+          <a:ln>
+            <a:noFill/>
+          </a:ln>
+          <a:effectLst/>
+        </p:spPr>
+        <p:txBody>
+          <a:bodyPr rtlCol="0" anchor="ctr"/>
+          <a:lstStyle/>
+          <a:p>
+            <a:pPr algn="ctr"/>
+          </a:p>
+        </p:txBody>
+      </p:sp>
+      <p:sp>
+        <p:nvSpPr>
+          <p:cNvPr id="225" name="ellipse 225"/>
+          <p:cNvSpPr/>
+          <p:nvPr/>
+        </p:nvSpPr>
+        <p:spPr>
+          <a:xfrm>
+            <a:off x="2676906" y="5237226"/>
+            <a:ext cx="96012" cy="96012"/>
+          </a:xfrm>
+          <a:prstGeom prst="ellipse">
+            <a:avLst/>
+          </a:prstGeom>
+          <a:solidFill>
+            <a:srgbClr val="2B2B2D"/>
+          </a:solidFill>
+          <a:ln>
+            <a:noFill/>
+          </a:ln>
+          <a:effectLst/>
+        </p:spPr>
+        <p:txBody>
+          <a:bodyPr rtlCol="0" anchor="ctr"/>
+          <a:lstStyle/>
+          <a:p>
+            <a:pPr algn="ctr"/>
+          </a:p>
+        </p:txBody>
+      </p:sp>
+      <p:sp>
+        <p:nvSpPr>
+          <p:cNvPr id="226" name="ellipse 226"/>
+          <p:cNvSpPr/>
+          <p:nvPr/>
+        </p:nvSpPr>
+        <p:spPr>
+          <a:xfrm>
+            <a:off x="2818638" y="5237226"/>
+            <a:ext cx="96012" cy="96012"/>
+          </a:xfrm>
+          <a:prstGeom prst="ellipse">
+            <a:avLst/>
+          </a:prstGeom>
+          <a:solidFill>
+            <a:srgbClr val="2B2B2D"/>
+          </a:solidFill>
+          <a:ln>
+            <a:noFill/>
+          </a:ln>
+          <a:effectLst/>
+        </p:spPr>
+        <p:txBody>
+          <a:bodyPr rtlCol="0" anchor="ctr"/>
+          <a:lstStyle/>
+          <a:p>
+            <a:pPr algn="ctr"/>
+          </a:p>
+        </p:txBody>
+      </p:sp>
+      <p:sp>
+        <p:nvSpPr>
+          <p:cNvPr id="227" name="ellipse 227"/>
+          <p:cNvSpPr/>
+          <p:nvPr/>
+        </p:nvSpPr>
+        <p:spPr>
+          <a:xfrm>
+            <a:off x="2960370" y="5237226"/>
+            <a:ext cx="96012" cy="96012"/>
+          </a:xfrm>
+          <a:prstGeom prst="ellipse">
+            <a:avLst/>
+          </a:prstGeom>
+          <a:solidFill>
+            <a:srgbClr val="2B2B2D"/>
+          </a:solidFill>
+          <a:ln>
+            <a:noFill/>
+          </a:ln>
+          <a:effectLst/>
+        </p:spPr>
+        <p:txBody>
+          <a:bodyPr rtlCol="0" anchor="ctr"/>
+          <a:lstStyle/>
+          <a:p>
+            <a:pPr algn="ctr"/>
+          </a:p>
+        </p:txBody>
+      </p:sp>
+      <p:sp>
+        <p:nvSpPr>
+          <p:cNvPr id="228" name="ellipse 228"/>
+          <p:cNvSpPr/>
+          <p:nvPr/>
+        </p:nvSpPr>
+        <p:spPr>
+          <a:xfrm>
+            <a:off x="3102102" y="5237226"/>
+            <a:ext cx="96012" cy="96012"/>
+          </a:xfrm>
+          <a:prstGeom prst="ellipse">
+            <a:avLst/>
+          </a:prstGeom>
+          <a:solidFill>
+            <a:srgbClr val="2B2B2D"/>
+          </a:solidFill>
+          <a:ln>
+            <a:noFill/>
+          </a:ln>
+          <a:effectLst/>
+        </p:spPr>
+        <p:txBody>
+          <a:bodyPr rtlCol="0" anchor="ctr"/>
+          <a:lstStyle/>
+          <a:p>
+            <a:pPr algn="ctr"/>
+          </a:p>
+        </p:txBody>
+      </p:sp>
+      <p:sp>
+        <p:nvSpPr>
+          <p:cNvPr id="229" name="ellipse 229"/>
+          <p:cNvSpPr/>
+          <p:nvPr/>
+        </p:nvSpPr>
+        <p:spPr>
+          <a:xfrm>
+            <a:off x="3243834" y="5237226"/>
+            <a:ext cx="96012" cy="96012"/>
+          </a:xfrm>
+          <a:prstGeom prst="ellipse">
+            <a:avLst/>
+          </a:prstGeom>
+          <a:solidFill>
+            <a:srgbClr val="2B2B2D"/>
+          </a:solidFill>
+          <a:ln>
+            <a:noFill/>
+          </a:ln>
+          <a:effectLst/>
+        </p:spPr>
+        <p:txBody>
+          <a:bodyPr rtlCol="0" anchor="ctr"/>
+          <a:lstStyle/>
+          <a:p>
+            <a:pPr algn="ctr"/>
+          </a:p>
+        </p:txBody>
+      </p:sp>
+      <p:sp>
+        <p:nvSpPr>
+          <p:cNvPr id="230" name="ellipse 230"/>
+          <p:cNvSpPr/>
+          <p:nvPr/>
+        </p:nvSpPr>
+        <p:spPr>
+          <a:xfrm>
+            <a:off x="3385566" y="5237226"/>
+            <a:ext cx="96012" cy="96012"/>
+          </a:xfrm>
+          <a:prstGeom prst="ellipse">
+            <a:avLst/>
+          </a:prstGeom>
+          <a:solidFill>
+            <a:srgbClr val="2B2B2D"/>
+          </a:solidFill>
+          <a:ln>
+            <a:noFill/>
+          </a:ln>
+          <a:effectLst/>
+        </p:spPr>
+        <p:txBody>
+          <a:bodyPr rtlCol="0" anchor="ctr"/>
+          <a:lstStyle/>
+          <a:p>
+            <a:pPr algn="ctr"/>
+          </a:p>
+        </p:txBody>
+      </p:sp>
+      <p:sp>
+        <p:nvSpPr>
+          <p:cNvPr id="231" name="TextBox 231"/>
+          <p:cNvSpPr txBox="1"/>
+          <p:nvPr/>
+        </p:nvSpPr>
+        <p:spPr>
+          <a:xfrm>
+            <a:off x="694944" y="5413248"/>
+            <a:ext cx="5486400" cy="137160"/>
           </a:xfrm>
           <a:prstGeom prst="rect">
             <a:avLst/>
@@ -8854,3041 +11815,6 @@
           <a:p>
             <a:pPr algn="l"/>
             <a:r>
-              <a:rPr sz="1400" b="0">
-                <a:solidFill>
-                  <a:srgbClr val="9A9AA2"/>
-                </a:solidFill>
-                <a:latin typeface="Poppins"/>
-              </a:rPr>
-              <a:t>of organizations see no EBIT impact from AI</a:t>
-            </a:r>
-          </a:p>
-        </p:txBody>
-      </p:sp>
-      <p:sp>
-        <p:nvSpPr>
-          <p:cNvPr id="132" name="ellipse 132"/>
-          <p:cNvSpPr/>
-          <p:nvPr/>
-        </p:nvSpPr>
-        <p:spPr>
-          <a:xfrm>
-            <a:off x="692658" y="4670298"/>
-            <a:ext cx="96012" cy="96012"/>
-          </a:xfrm>
-          <a:prstGeom prst="ellipse">
-            <a:avLst/>
-          </a:prstGeom>
-          <a:solidFill>
-            <a:srgbClr val="FF6B3D"/>
-          </a:solidFill>
-          <a:ln>
-            <a:noFill/>
-          </a:ln>
-          <a:effectLst/>
-        </p:spPr>
-        <p:txBody>
-          <a:bodyPr rtlCol="0" anchor="ctr"/>
-          <a:lstStyle/>
-          <a:p>
-            <a:pPr algn="ctr"/>
-          </a:p>
-        </p:txBody>
-      </p:sp>
-      <p:sp>
-        <p:nvSpPr>
-          <p:cNvPr id="133" name="ellipse 133"/>
-          <p:cNvSpPr/>
-          <p:nvPr/>
-        </p:nvSpPr>
-        <p:spPr>
-          <a:xfrm>
-            <a:off x="834390" y="4670298"/>
-            <a:ext cx="96012" cy="96012"/>
-          </a:xfrm>
-          <a:prstGeom prst="ellipse">
-            <a:avLst/>
-          </a:prstGeom>
-          <a:solidFill>
-            <a:srgbClr val="FF6B3D"/>
-          </a:solidFill>
-          <a:ln>
-            <a:noFill/>
-          </a:ln>
-          <a:effectLst/>
-        </p:spPr>
-        <p:txBody>
-          <a:bodyPr rtlCol="0" anchor="ctr"/>
-          <a:lstStyle/>
-          <a:p>
-            <a:pPr algn="ctr"/>
-          </a:p>
-        </p:txBody>
-      </p:sp>
-      <p:sp>
-        <p:nvSpPr>
-          <p:cNvPr id="134" name="ellipse 134"/>
-          <p:cNvSpPr/>
-          <p:nvPr/>
-        </p:nvSpPr>
-        <p:spPr>
-          <a:xfrm>
-            <a:off x="976122" y="4670298"/>
-            <a:ext cx="96012" cy="96012"/>
-          </a:xfrm>
-          <a:prstGeom prst="ellipse">
-            <a:avLst/>
-          </a:prstGeom>
-          <a:solidFill>
-            <a:srgbClr val="FF6B3D"/>
-          </a:solidFill>
-          <a:ln>
-            <a:noFill/>
-          </a:ln>
-          <a:effectLst/>
-        </p:spPr>
-        <p:txBody>
-          <a:bodyPr rtlCol="0" anchor="ctr"/>
-          <a:lstStyle/>
-          <a:p>
-            <a:pPr algn="ctr"/>
-          </a:p>
-        </p:txBody>
-      </p:sp>
-      <p:sp>
-        <p:nvSpPr>
-          <p:cNvPr id="135" name="ellipse 135"/>
-          <p:cNvSpPr/>
-          <p:nvPr/>
-        </p:nvSpPr>
-        <p:spPr>
-          <a:xfrm>
-            <a:off x="1117854" y="4670298"/>
-            <a:ext cx="96012" cy="96012"/>
-          </a:xfrm>
-          <a:prstGeom prst="ellipse">
-            <a:avLst/>
-          </a:prstGeom>
-          <a:solidFill>
-            <a:srgbClr val="FF6B3D"/>
-          </a:solidFill>
-          <a:ln>
-            <a:noFill/>
-          </a:ln>
-          <a:effectLst/>
-        </p:spPr>
-        <p:txBody>
-          <a:bodyPr rtlCol="0" anchor="ctr"/>
-          <a:lstStyle/>
-          <a:p>
-            <a:pPr algn="ctr"/>
-          </a:p>
-        </p:txBody>
-      </p:sp>
-      <p:sp>
-        <p:nvSpPr>
-          <p:cNvPr id="136" name="ellipse 136"/>
-          <p:cNvSpPr/>
-          <p:nvPr/>
-        </p:nvSpPr>
-        <p:spPr>
-          <a:xfrm>
-            <a:off x="1259586" y="4670298"/>
-            <a:ext cx="96012" cy="96012"/>
-          </a:xfrm>
-          <a:prstGeom prst="ellipse">
-            <a:avLst/>
-          </a:prstGeom>
-          <a:solidFill>
-            <a:srgbClr val="FF6B3D"/>
-          </a:solidFill>
-          <a:ln>
-            <a:noFill/>
-          </a:ln>
-          <a:effectLst/>
-        </p:spPr>
-        <p:txBody>
-          <a:bodyPr rtlCol="0" anchor="ctr"/>
-          <a:lstStyle/>
-          <a:p>
-            <a:pPr algn="ctr"/>
-          </a:p>
-        </p:txBody>
-      </p:sp>
-      <p:sp>
-        <p:nvSpPr>
-          <p:cNvPr id="137" name="ellipse 137"/>
-          <p:cNvSpPr/>
-          <p:nvPr/>
-        </p:nvSpPr>
-        <p:spPr>
-          <a:xfrm>
-            <a:off x="1401318" y="4670298"/>
-            <a:ext cx="96012" cy="96012"/>
-          </a:xfrm>
-          <a:prstGeom prst="ellipse">
-            <a:avLst/>
-          </a:prstGeom>
-          <a:solidFill>
-            <a:srgbClr val="FF6B3D"/>
-          </a:solidFill>
-          <a:ln>
-            <a:noFill/>
-          </a:ln>
-          <a:effectLst/>
-        </p:spPr>
-        <p:txBody>
-          <a:bodyPr rtlCol="0" anchor="ctr"/>
-          <a:lstStyle/>
-          <a:p>
-            <a:pPr algn="ctr"/>
-          </a:p>
-        </p:txBody>
-      </p:sp>
-      <p:sp>
-        <p:nvSpPr>
-          <p:cNvPr id="138" name="ellipse 138"/>
-          <p:cNvSpPr/>
-          <p:nvPr/>
-        </p:nvSpPr>
-        <p:spPr>
-          <a:xfrm>
-            <a:off x="1543050" y="4670298"/>
-            <a:ext cx="96012" cy="96012"/>
-          </a:xfrm>
-          <a:prstGeom prst="ellipse">
-            <a:avLst/>
-          </a:prstGeom>
-          <a:solidFill>
-            <a:srgbClr val="FF6B3D"/>
-          </a:solidFill>
-          <a:ln>
-            <a:noFill/>
-          </a:ln>
-          <a:effectLst/>
-        </p:spPr>
-        <p:txBody>
-          <a:bodyPr rtlCol="0" anchor="ctr"/>
-          <a:lstStyle/>
-          <a:p>
-            <a:pPr algn="ctr"/>
-          </a:p>
-        </p:txBody>
-      </p:sp>
-      <p:sp>
-        <p:nvSpPr>
-          <p:cNvPr id="139" name="ellipse 139"/>
-          <p:cNvSpPr/>
-          <p:nvPr/>
-        </p:nvSpPr>
-        <p:spPr>
-          <a:xfrm>
-            <a:off x="1684782" y="4670298"/>
-            <a:ext cx="96012" cy="96012"/>
-          </a:xfrm>
-          <a:prstGeom prst="ellipse">
-            <a:avLst/>
-          </a:prstGeom>
-          <a:solidFill>
-            <a:srgbClr val="FF6B3D"/>
-          </a:solidFill>
-          <a:ln>
-            <a:noFill/>
-          </a:ln>
-          <a:effectLst/>
-        </p:spPr>
-        <p:txBody>
-          <a:bodyPr rtlCol="0" anchor="ctr"/>
-          <a:lstStyle/>
-          <a:p>
-            <a:pPr algn="ctr"/>
-          </a:p>
-        </p:txBody>
-      </p:sp>
-      <p:sp>
-        <p:nvSpPr>
-          <p:cNvPr id="140" name="ellipse 140"/>
-          <p:cNvSpPr/>
-          <p:nvPr/>
-        </p:nvSpPr>
-        <p:spPr>
-          <a:xfrm>
-            <a:off x="1826514" y="4670298"/>
-            <a:ext cx="96012" cy="96012"/>
-          </a:xfrm>
-          <a:prstGeom prst="ellipse">
-            <a:avLst/>
-          </a:prstGeom>
-          <a:solidFill>
-            <a:srgbClr val="FF6B3D"/>
-          </a:solidFill>
-          <a:ln>
-            <a:noFill/>
-          </a:ln>
-          <a:effectLst/>
-        </p:spPr>
-        <p:txBody>
-          <a:bodyPr rtlCol="0" anchor="ctr"/>
-          <a:lstStyle/>
-          <a:p>
-            <a:pPr algn="ctr"/>
-          </a:p>
-        </p:txBody>
-      </p:sp>
-      <p:sp>
-        <p:nvSpPr>
-          <p:cNvPr id="141" name="ellipse 141"/>
-          <p:cNvSpPr/>
-          <p:nvPr/>
-        </p:nvSpPr>
-        <p:spPr>
-          <a:xfrm>
-            <a:off x="1968246" y="4670298"/>
-            <a:ext cx="96012" cy="96012"/>
-          </a:xfrm>
-          <a:prstGeom prst="ellipse">
-            <a:avLst/>
-          </a:prstGeom>
-          <a:solidFill>
-            <a:srgbClr val="FF6B3D"/>
-          </a:solidFill>
-          <a:ln>
-            <a:noFill/>
-          </a:ln>
-          <a:effectLst/>
-        </p:spPr>
-        <p:txBody>
-          <a:bodyPr rtlCol="0" anchor="ctr"/>
-          <a:lstStyle/>
-          <a:p>
-            <a:pPr algn="ctr"/>
-          </a:p>
-        </p:txBody>
-      </p:sp>
-      <p:sp>
-        <p:nvSpPr>
-          <p:cNvPr id="142" name="ellipse 142"/>
-          <p:cNvSpPr/>
-          <p:nvPr/>
-        </p:nvSpPr>
-        <p:spPr>
-          <a:xfrm>
-            <a:off x="2109978" y="4670298"/>
-            <a:ext cx="96012" cy="96012"/>
-          </a:xfrm>
-          <a:prstGeom prst="ellipse">
-            <a:avLst/>
-          </a:prstGeom>
-          <a:solidFill>
-            <a:srgbClr val="FF6B3D"/>
-          </a:solidFill>
-          <a:ln>
-            <a:noFill/>
-          </a:ln>
-          <a:effectLst/>
-        </p:spPr>
-        <p:txBody>
-          <a:bodyPr rtlCol="0" anchor="ctr"/>
-          <a:lstStyle/>
-          <a:p>
-            <a:pPr algn="ctr"/>
-          </a:p>
-        </p:txBody>
-      </p:sp>
-      <p:sp>
-        <p:nvSpPr>
-          <p:cNvPr id="143" name="ellipse 143"/>
-          <p:cNvSpPr/>
-          <p:nvPr/>
-        </p:nvSpPr>
-        <p:spPr>
-          <a:xfrm>
-            <a:off x="2251710" y="4670298"/>
-            <a:ext cx="96012" cy="96012"/>
-          </a:xfrm>
-          <a:prstGeom prst="ellipse">
-            <a:avLst/>
-          </a:prstGeom>
-          <a:solidFill>
-            <a:srgbClr val="FF6B3D"/>
-          </a:solidFill>
-          <a:ln>
-            <a:noFill/>
-          </a:ln>
-          <a:effectLst/>
-        </p:spPr>
-        <p:txBody>
-          <a:bodyPr rtlCol="0" anchor="ctr"/>
-          <a:lstStyle/>
-          <a:p>
-            <a:pPr algn="ctr"/>
-          </a:p>
-        </p:txBody>
-      </p:sp>
-      <p:sp>
-        <p:nvSpPr>
-          <p:cNvPr id="144" name="ellipse 144"/>
-          <p:cNvSpPr/>
-          <p:nvPr/>
-        </p:nvSpPr>
-        <p:spPr>
-          <a:xfrm>
-            <a:off x="2393442" y="4670298"/>
-            <a:ext cx="96012" cy="96012"/>
-          </a:xfrm>
-          <a:prstGeom prst="ellipse">
-            <a:avLst/>
-          </a:prstGeom>
-          <a:solidFill>
-            <a:srgbClr val="FF6B3D"/>
-          </a:solidFill>
-          <a:ln>
-            <a:noFill/>
-          </a:ln>
-          <a:effectLst/>
-        </p:spPr>
-        <p:txBody>
-          <a:bodyPr rtlCol="0" anchor="ctr"/>
-          <a:lstStyle/>
-          <a:p>
-            <a:pPr algn="ctr"/>
-          </a:p>
-        </p:txBody>
-      </p:sp>
-      <p:sp>
-        <p:nvSpPr>
-          <p:cNvPr id="145" name="ellipse 145"/>
-          <p:cNvSpPr/>
-          <p:nvPr/>
-        </p:nvSpPr>
-        <p:spPr>
-          <a:xfrm>
-            <a:off x="2535174" y="4670298"/>
-            <a:ext cx="96012" cy="96012"/>
-          </a:xfrm>
-          <a:prstGeom prst="ellipse">
-            <a:avLst/>
-          </a:prstGeom>
-          <a:solidFill>
-            <a:srgbClr val="FF6B3D"/>
-          </a:solidFill>
-          <a:ln>
-            <a:noFill/>
-          </a:ln>
-          <a:effectLst/>
-        </p:spPr>
-        <p:txBody>
-          <a:bodyPr rtlCol="0" anchor="ctr"/>
-          <a:lstStyle/>
-          <a:p>
-            <a:pPr algn="ctr"/>
-          </a:p>
-        </p:txBody>
-      </p:sp>
-      <p:sp>
-        <p:nvSpPr>
-          <p:cNvPr id="146" name="ellipse 146"/>
-          <p:cNvSpPr/>
-          <p:nvPr/>
-        </p:nvSpPr>
-        <p:spPr>
-          <a:xfrm>
-            <a:off x="2676906" y="4670298"/>
-            <a:ext cx="96012" cy="96012"/>
-          </a:xfrm>
-          <a:prstGeom prst="ellipse">
-            <a:avLst/>
-          </a:prstGeom>
-          <a:solidFill>
-            <a:srgbClr val="FF6B3D"/>
-          </a:solidFill>
-          <a:ln>
-            <a:noFill/>
-          </a:ln>
-          <a:effectLst/>
-        </p:spPr>
-        <p:txBody>
-          <a:bodyPr rtlCol="0" anchor="ctr"/>
-          <a:lstStyle/>
-          <a:p>
-            <a:pPr algn="ctr"/>
-          </a:p>
-        </p:txBody>
-      </p:sp>
-      <p:sp>
-        <p:nvSpPr>
-          <p:cNvPr id="147" name="ellipse 147"/>
-          <p:cNvSpPr/>
-          <p:nvPr/>
-        </p:nvSpPr>
-        <p:spPr>
-          <a:xfrm>
-            <a:off x="2818638" y="4670298"/>
-            <a:ext cx="96012" cy="96012"/>
-          </a:xfrm>
-          <a:prstGeom prst="ellipse">
-            <a:avLst/>
-          </a:prstGeom>
-          <a:solidFill>
-            <a:srgbClr val="FF6B3D"/>
-          </a:solidFill>
-          <a:ln>
-            <a:noFill/>
-          </a:ln>
-          <a:effectLst/>
-        </p:spPr>
-        <p:txBody>
-          <a:bodyPr rtlCol="0" anchor="ctr"/>
-          <a:lstStyle/>
-          <a:p>
-            <a:pPr algn="ctr"/>
-          </a:p>
-        </p:txBody>
-      </p:sp>
-      <p:sp>
-        <p:nvSpPr>
-          <p:cNvPr id="148" name="ellipse 148"/>
-          <p:cNvSpPr/>
-          <p:nvPr/>
-        </p:nvSpPr>
-        <p:spPr>
-          <a:xfrm>
-            <a:off x="2960370" y="4670298"/>
-            <a:ext cx="96012" cy="96012"/>
-          </a:xfrm>
-          <a:prstGeom prst="ellipse">
-            <a:avLst/>
-          </a:prstGeom>
-          <a:solidFill>
-            <a:srgbClr val="FF6B3D"/>
-          </a:solidFill>
-          <a:ln>
-            <a:noFill/>
-          </a:ln>
-          <a:effectLst/>
-        </p:spPr>
-        <p:txBody>
-          <a:bodyPr rtlCol="0" anchor="ctr"/>
-          <a:lstStyle/>
-          <a:p>
-            <a:pPr algn="ctr"/>
-          </a:p>
-        </p:txBody>
-      </p:sp>
-      <p:sp>
-        <p:nvSpPr>
-          <p:cNvPr id="149" name="ellipse 149"/>
-          <p:cNvSpPr/>
-          <p:nvPr/>
-        </p:nvSpPr>
-        <p:spPr>
-          <a:xfrm>
-            <a:off x="3102102" y="4670298"/>
-            <a:ext cx="96012" cy="96012"/>
-          </a:xfrm>
-          <a:prstGeom prst="ellipse">
-            <a:avLst/>
-          </a:prstGeom>
-          <a:solidFill>
-            <a:srgbClr val="FF6B3D"/>
-          </a:solidFill>
-          <a:ln>
-            <a:noFill/>
-          </a:ln>
-          <a:effectLst/>
-        </p:spPr>
-        <p:txBody>
-          <a:bodyPr rtlCol="0" anchor="ctr"/>
-          <a:lstStyle/>
-          <a:p>
-            <a:pPr algn="ctr"/>
-          </a:p>
-        </p:txBody>
-      </p:sp>
-      <p:sp>
-        <p:nvSpPr>
-          <p:cNvPr id="150" name="ellipse 150"/>
-          <p:cNvSpPr/>
-          <p:nvPr/>
-        </p:nvSpPr>
-        <p:spPr>
-          <a:xfrm>
-            <a:off x="3243834" y="4670298"/>
-            <a:ext cx="96012" cy="96012"/>
-          </a:xfrm>
-          <a:prstGeom prst="ellipse">
-            <a:avLst/>
-          </a:prstGeom>
-          <a:solidFill>
-            <a:srgbClr val="FF6B3D"/>
-          </a:solidFill>
-          <a:ln>
-            <a:noFill/>
-          </a:ln>
-          <a:effectLst/>
-        </p:spPr>
-        <p:txBody>
-          <a:bodyPr rtlCol="0" anchor="ctr"/>
-          <a:lstStyle/>
-          <a:p>
-            <a:pPr algn="ctr"/>
-          </a:p>
-        </p:txBody>
-      </p:sp>
-      <p:sp>
-        <p:nvSpPr>
-          <p:cNvPr id="151" name="ellipse 151"/>
-          <p:cNvSpPr/>
-          <p:nvPr/>
-        </p:nvSpPr>
-        <p:spPr>
-          <a:xfrm>
-            <a:off x="3385566" y="4670298"/>
-            <a:ext cx="96012" cy="96012"/>
-          </a:xfrm>
-          <a:prstGeom prst="ellipse">
-            <a:avLst/>
-          </a:prstGeom>
-          <a:solidFill>
-            <a:srgbClr val="FF6B3D"/>
-          </a:solidFill>
-          <a:ln>
-            <a:noFill/>
-          </a:ln>
-          <a:effectLst/>
-        </p:spPr>
-        <p:txBody>
-          <a:bodyPr rtlCol="0" anchor="ctr"/>
-          <a:lstStyle/>
-          <a:p>
-            <a:pPr algn="ctr"/>
-          </a:p>
-        </p:txBody>
-      </p:sp>
-      <p:sp>
-        <p:nvSpPr>
-          <p:cNvPr id="152" name="ellipse 152"/>
-          <p:cNvSpPr/>
-          <p:nvPr/>
-        </p:nvSpPr>
-        <p:spPr>
-          <a:xfrm>
-            <a:off x="692658" y="4812030"/>
-            <a:ext cx="96012" cy="96012"/>
-          </a:xfrm>
-          <a:prstGeom prst="ellipse">
-            <a:avLst/>
-          </a:prstGeom>
-          <a:solidFill>
-            <a:srgbClr val="FF6B3D"/>
-          </a:solidFill>
-          <a:ln>
-            <a:noFill/>
-          </a:ln>
-          <a:effectLst/>
-        </p:spPr>
-        <p:txBody>
-          <a:bodyPr rtlCol="0" anchor="ctr"/>
-          <a:lstStyle/>
-          <a:p>
-            <a:pPr algn="ctr"/>
-          </a:p>
-        </p:txBody>
-      </p:sp>
-      <p:sp>
-        <p:nvSpPr>
-          <p:cNvPr id="153" name="ellipse 153"/>
-          <p:cNvSpPr/>
-          <p:nvPr/>
-        </p:nvSpPr>
-        <p:spPr>
-          <a:xfrm>
-            <a:off x="834390" y="4812030"/>
-            <a:ext cx="96012" cy="96012"/>
-          </a:xfrm>
-          <a:prstGeom prst="ellipse">
-            <a:avLst/>
-          </a:prstGeom>
-          <a:solidFill>
-            <a:srgbClr val="FF6B3D"/>
-          </a:solidFill>
-          <a:ln>
-            <a:noFill/>
-          </a:ln>
-          <a:effectLst/>
-        </p:spPr>
-        <p:txBody>
-          <a:bodyPr rtlCol="0" anchor="ctr"/>
-          <a:lstStyle/>
-          <a:p>
-            <a:pPr algn="ctr"/>
-          </a:p>
-        </p:txBody>
-      </p:sp>
-      <p:sp>
-        <p:nvSpPr>
-          <p:cNvPr id="154" name="ellipse 154"/>
-          <p:cNvSpPr/>
-          <p:nvPr/>
-        </p:nvSpPr>
-        <p:spPr>
-          <a:xfrm>
-            <a:off x="976122" y="4812030"/>
-            <a:ext cx="96012" cy="96012"/>
-          </a:xfrm>
-          <a:prstGeom prst="ellipse">
-            <a:avLst/>
-          </a:prstGeom>
-          <a:solidFill>
-            <a:srgbClr val="FF6B3D"/>
-          </a:solidFill>
-          <a:ln>
-            <a:noFill/>
-          </a:ln>
-          <a:effectLst/>
-        </p:spPr>
-        <p:txBody>
-          <a:bodyPr rtlCol="0" anchor="ctr"/>
-          <a:lstStyle/>
-          <a:p>
-            <a:pPr algn="ctr"/>
-          </a:p>
-        </p:txBody>
-      </p:sp>
-      <p:sp>
-        <p:nvSpPr>
-          <p:cNvPr id="155" name="ellipse 155"/>
-          <p:cNvSpPr/>
-          <p:nvPr/>
-        </p:nvSpPr>
-        <p:spPr>
-          <a:xfrm>
-            <a:off x="1117854" y="4812030"/>
-            <a:ext cx="96012" cy="96012"/>
-          </a:xfrm>
-          <a:prstGeom prst="ellipse">
-            <a:avLst/>
-          </a:prstGeom>
-          <a:solidFill>
-            <a:srgbClr val="FF6B3D"/>
-          </a:solidFill>
-          <a:ln>
-            <a:noFill/>
-          </a:ln>
-          <a:effectLst/>
-        </p:spPr>
-        <p:txBody>
-          <a:bodyPr rtlCol="0" anchor="ctr"/>
-          <a:lstStyle/>
-          <a:p>
-            <a:pPr algn="ctr"/>
-          </a:p>
-        </p:txBody>
-      </p:sp>
-      <p:sp>
-        <p:nvSpPr>
-          <p:cNvPr id="156" name="ellipse 156"/>
-          <p:cNvSpPr/>
-          <p:nvPr/>
-        </p:nvSpPr>
-        <p:spPr>
-          <a:xfrm>
-            <a:off x="1259586" y="4812030"/>
-            <a:ext cx="96012" cy="96012"/>
-          </a:xfrm>
-          <a:prstGeom prst="ellipse">
-            <a:avLst/>
-          </a:prstGeom>
-          <a:solidFill>
-            <a:srgbClr val="FF6B3D"/>
-          </a:solidFill>
-          <a:ln>
-            <a:noFill/>
-          </a:ln>
-          <a:effectLst/>
-        </p:spPr>
-        <p:txBody>
-          <a:bodyPr rtlCol="0" anchor="ctr"/>
-          <a:lstStyle/>
-          <a:p>
-            <a:pPr algn="ctr"/>
-          </a:p>
-        </p:txBody>
-      </p:sp>
-      <p:sp>
-        <p:nvSpPr>
-          <p:cNvPr id="157" name="ellipse 157"/>
-          <p:cNvSpPr/>
-          <p:nvPr/>
-        </p:nvSpPr>
-        <p:spPr>
-          <a:xfrm>
-            <a:off x="1401318" y="4812030"/>
-            <a:ext cx="96012" cy="96012"/>
-          </a:xfrm>
-          <a:prstGeom prst="ellipse">
-            <a:avLst/>
-          </a:prstGeom>
-          <a:solidFill>
-            <a:srgbClr val="FF6B3D"/>
-          </a:solidFill>
-          <a:ln>
-            <a:noFill/>
-          </a:ln>
-          <a:effectLst/>
-        </p:spPr>
-        <p:txBody>
-          <a:bodyPr rtlCol="0" anchor="ctr"/>
-          <a:lstStyle/>
-          <a:p>
-            <a:pPr algn="ctr"/>
-          </a:p>
-        </p:txBody>
-      </p:sp>
-      <p:sp>
-        <p:nvSpPr>
-          <p:cNvPr id="158" name="ellipse 158"/>
-          <p:cNvSpPr/>
-          <p:nvPr/>
-        </p:nvSpPr>
-        <p:spPr>
-          <a:xfrm>
-            <a:off x="1543050" y="4812030"/>
-            <a:ext cx="96012" cy="96012"/>
-          </a:xfrm>
-          <a:prstGeom prst="ellipse">
-            <a:avLst/>
-          </a:prstGeom>
-          <a:solidFill>
-            <a:srgbClr val="FF6B3D"/>
-          </a:solidFill>
-          <a:ln>
-            <a:noFill/>
-          </a:ln>
-          <a:effectLst/>
-        </p:spPr>
-        <p:txBody>
-          <a:bodyPr rtlCol="0" anchor="ctr"/>
-          <a:lstStyle/>
-          <a:p>
-            <a:pPr algn="ctr"/>
-          </a:p>
-        </p:txBody>
-      </p:sp>
-      <p:sp>
-        <p:nvSpPr>
-          <p:cNvPr id="159" name="ellipse 159"/>
-          <p:cNvSpPr/>
-          <p:nvPr/>
-        </p:nvSpPr>
-        <p:spPr>
-          <a:xfrm>
-            <a:off x="1684782" y="4812030"/>
-            <a:ext cx="96012" cy="96012"/>
-          </a:xfrm>
-          <a:prstGeom prst="ellipse">
-            <a:avLst/>
-          </a:prstGeom>
-          <a:solidFill>
-            <a:srgbClr val="FF6B3D"/>
-          </a:solidFill>
-          <a:ln>
-            <a:noFill/>
-          </a:ln>
-          <a:effectLst/>
-        </p:spPr>
-        <p:txBody>
-          <a:bodyPr rtlCol="0" anchor="ctr"/>
-          <a:lstStyle/>
-          <a:p>
-            <a:pPr algn="ctr"/>
-          </a:p>
-        </p:txBody>
-      </p:sp>
-      <p:sp>
-        <p:nvSpPr>
-          <p:cNvPr id="160" name="ellipse 160"/>
-          <p:cNvSpPr/>
-          <p:nvPr/>
-        </p:nvSpPr>
-        <p:spPr>
-          <a:xfrm>
-            <a:off x="1826514" y="4812030"/>
-            <a:ext cx="96012" cy="96012"/>
-          </a:xfrm>
-          <a:prstGeom prst="ellipse">
-            <a:avLst/>
-          </a:prstGeom>
-          <a:solidFill>
-            <a:srgbClr val="FF6B3D"/>
-          </a:solidFill>
-          <a:ln>
-            <a:noFill/>
-          </a:ln>
-          <a:effectLst/>
-        </p:spPr>
-        <p:txBody>
-          <a:bodyPr rtlCol="0" anchor="ctr"/>
-          <a:lstStyle/>
-          <a:p>
-            <a:pPr algn="ctr"/>
-          </a:p>
-        </p:txBody>
-      </p:sp>
-      <p:sp>
-        <p:nvSpPr>
-          <p:cNvPr id="161" name="ellipse 161"/>
-          <p:cNvSpPr/>
-          <p:nvPr/>
-        </p:nvSpPr>
-        <p:spPr>
-          <a:xfrm>
-            <a:off x="1968246" y="4812030"/>
-            <a:ext cx="96012" cy="96012"/>
-          </a:xfrm>
-          <a:prstGeom prst="ellipse">
-            <a:avLst/>
-          </a:prstGeom>
-          <a:solidFill>
-            <a:srgbClr val="FF6B3D"/>
-          </a:solidFill>
-          <a:ln>
-            <a:noFill/>
-          </a:ln>
-          <a:effectLst/>
-        </p:spPr>
-        <p:txBody>
-          <a:bodyPr rtlCol="0" anchor="ctr"/>
-          <a:lstStyle/>
-          <a:p>
-            <a:pPr algn="ctr"/>
-          </a:p>
-        </p:txBody>
-      </p:sp>
-      <p:sp>
-        <p:nvSpPr>
-          <p:cNvPr id="162" name="ellipse 162"/>
-          <p:cNvSpPr/>
-          <p:nvPr/>
-        </p:nvSpPr>
-        <p:spPr>
-          <a:xfrm>
-            <a:off x="2109978" y="4812030"/>
-            <a:ext cx="96012" cy="96012"/>
-          </a:xfrm>
-          <a:prstGeom prst="ellipse">
-            <a:avLst/>
-          </a:prstGeom>
-          <a:solidFill>
-            <a:srgbClr val="FF6B3D"/>
-          </a:solidFill>
-          <a:ln>
-            <a:noFill/>
-          </a:ln>
-          <a:effectLst/>
-        </p:spPr>
-        <p:txBody>
-          <a:bodyPr rtlCol="0" anchor="ctr"/>
-          <a:lstStyle/>
-          <a:p>
-            <a:pPr algn="ctr"/>
-          </a:p>
-        </p:txBody>
-      </p:sp>
-      <p:sp>
-        <p:nvSpPr>
-          <p:cNvPr id="163" name="ellipse 163"/>
-          <p:cNvSpPr/>
-          <p:nvPr/>
-        </p:nvSpPr>
-        <p:spPr>
-          <a:xfrm>
-            <a:off x="2251710" y="4812030"/>
-            <a:ext cx="96012" cy="96012"/>
-          </a:xfrm>
-          <a:prstGeom prst="ellipse">
-            <a:avLst/>
-          </a:prstGeom>
-          <a:solidFill>
-            <a:srgbClr val="FF6B3D"/>
-          </a:solidFill>
-          <a:ln>
-            <a:noFill/>
-          </a:ln>
-          <a:effectLst/>
-        </p:spPr>
-        <p:txBody>
-          <a:bodyPr rtlCol="0" anchor="ctr"/>
-          <a:lstStyle/>
-          <a:p>
-            <a:pPr algn="ctr"/>
-          </a:p>
-        </p:txBody>
-      </p:sp>
-      <p:sp>
-        <p:nvSpPr>
-          <p:cNvPr id="164" name="ellipse 164"/>
-          <p:cNvSpPr/>
-          <p:nvPr/>
-        </p:nvSpPr>
-        <p:spPr>
-          <a:xfrm>
-            <a:off x="2393442" y="4812030"/>
-            <a:ext cx="96012" cy="96012"/>
-          </a:xfrm>
-          <a:prstGeom prst="ellipse">
-            <a:avLst/>
-          </a:prstGeom>
-          <a:solidFill>
-            <a:srgbClr val="FF6B3D"/>
-          </a:solidFill>
-          <a:ln>
-            <a:noFill/>
-          </a:ln>
-          <a:effectLst/>
-        </p:spPr>
-        <p:txBody>
-          <a:bodyPr rtlCol="0" anchor="ctr"/>
-          <a:lstStyle/>
-          <a:p>
-            <a:pPr algn="ctr"/>
-          </a:p>
-        </p:txBody>
-      </p:sp>
-      <p:sp>
-        <p:nvSpPr>
-          <p:cNvPr id="165" name="ellipse 165"/>
-          <p:cNvSpPr/>
-          <p:nvPr/>
-        </p:nvSpPr>
-        <p:spPr>
-          <a:xfrm>
-            <a:off x="2535174" y="4812030"/>
-            <a:ext cx="96012" cy="96012"/>
-          </a:xfrm>
-          <a:prstGeom prst="ellipse">
-            <a:avLst/>
-          </a:prstGeom>
-          <a:solidFill>
-            <a:srgbClr val="FF6B3D"/>
-          </a:solidFill>
-          <a:ln>
-            <a:noFill/>
-          </a:ln>
-          <a:effectLst/>
-        </p:spPr>
-        <p:txBody>
-          <a:bodyPr rtlCol="0" anchor="ctr"/>
-          <a:lstStyle/>
-          <a:p>
-            <a:pPr algn="ctr"/>
-          </a:p>
-        </p:txBody>
-      </p:sp>
-      <p:sp>
-        <p:nvSpPr>
-          <p:cNvPr id="166" name="ellipse 166"/>
-          <p:cNvSpPr/>
-          <p:nvPr/>
-        </p:nvSpPr>
-        <p:spPr>
-          <a:xfrm>
-            <a:off x="2676906" y="4812030"/>
-            <a:ext cx="96012" cy="96012"/>
-          </a:xfrm>
-          <a:prstGeom prst="ellipse">
-            <a:avLst/>
-          </a:prstGeom>
-          <a:solidFill>
-            <a:srgbClr val="FF6B3D"/>
-          </a:solidFill>
-          <a:ln>
-            <a:noFill/>
-          </a:ln>
-          <a:effectLst/>
-        </p:spPr>
-        <p:txBody>
-          <a:bodyPr rtlCol="0" anchor="ctr"/>
-          <a:lstStyle/>
-          <a:p>
-            <a:pPr algn="ctr"/>
-          </a:p>
-        </p:txBody>
-      </p:sp>
-      <p:sp>
-        <p:nvSpPr>
-          <p:cNvPr id="167" name="ellipse 167"/>
-          <p:cNvSpPr/>
-          <p:nvPr/>
-        </p:nvSpPr>
-        <p:spPr>
-          <a:xfrm>
-            <a:off x="2818638" y="4812030"/>
-            <a:ext cx="96012" cy="96012"/>
-          </a:xfrm>
-          <a:prstGeom prst="ellipse">
-            <a:avLst/>
-          </a:prstGeom>
-          <a:solidFill>
-            <a:srgbClr val="FF6B3D"/>
-          </a:solidFill>
-          <a:ln>
-            <a:noFill/>
-          </a:ln>
-          <a:effectLst/>
-        </p:spPr>
-        <p:txBody>
-          <a:bodyPr rtlCol="0" anchor="ctr"/>
-          <a:lstStyle/>
-          <a:p>
-            <a:pPr algn="ctr"/>
-          </a:p>
-        </p:txBody>
-      </p:sp>
-      <p:sp>
-        <p:nvSpPr>
-          <p:cNvPr id="168" name="ellipse 168"/>
-          <p:cNvSpPr/>
-          <p:nvPr/>
-        </p:nvSpPr>
-        <p:spPr>
-          <a:xfrm>
-            <a:off x="2960370" y="4812030"/>
-            <a:ext cx="96012" cy="96012"/>
-          </a:xfrm>
-          <a:prstGeom prst="ellipse">
-            <a:avLst/>
-          </a:prstGeom>
-          <a:solidFill>
-            <a:srgbClr val="FF6B3D"/>
-          </a:solidFill>
-          <a:ln>
-            <a:noFill/>
-          </a:ln>
-          <a:effectLst/>
-        </p:spPr>
-        <p:txBody>
-          <a:bodyPr rtlCol="0" anchor="ctr"/>
-          <a:lstStyle/>
-          <a:p>
-            <a:pPr algn="ctr"/>
-          </a:p>
-        </p:txBody>
-      </p:sp>
-      <p:sp>
-        <p:nvSpPr>
-          <p:cNvPr id="169" name="ellipse 169"/>
-          <p:cNvSpPr/>
-          <p:nvPr/>
-        </p:nvSpPr>
-        <p:spPr>
-          <a:xfrm>
-            <a:off x="3102102" y="4812030"/>
-            <a:ext cx="96012" cy="96012"/>
-          </a:xfrm>
-          <a:prstGeom prst="ellipse">
-            <a:avLst/>
-          </a:prstGeom>
-          <a:solidFill>
-            <a:srgbClr val="FF6B3D"/>
-          </a:solidFill>
-          <a:ln>
-            <a:noFill/>
-          </a:ln>
-          <a:effectLst/>
-        </p:spPr>
-        <p:txBody>
-          <a:bodyPr rtlCol="0" anchor="ctr"/>
-          <a:lstStyle/>
-          <a:p>
-            <a:pPr algn="ctr"/>
-          </a:p>
-        </p:txBody>
-      </p:sp>
-      <p:sp>
-        <p:nvSpPr>
-          <p:cNvPr id="170" name="ellipse 170"/>
-          <p:cNvSpPr/>
-          <p:nvPr/>
-        </p:nvSpPr>
-        <p:spPr>
-          <a:xfrm>
-            <a:off x="3243834" y="4812030"/>
-            <a:ext cx="96012" cy="96012"/>
-          </a:xfrm>
-          <a:prstGeom prst="ellipse">
-            <a:avLst/>
-          </a:prstGeom>
-          <a:solidFill>
-            <a:srgbClr val="FF6B3D"/>
-          </a:solidFill>
-          <a:ln>
-            <a:noFill/>
-          </a:ln>
-          <a:effectLst/>
-        </p:spPr>
-        <p:txBody>
-          <a:bodyPr rtlCol="0" anchor="ctr"/>
-          <a:lstStyle/>
-          <a:p>
-            <a:pPr algn="ctr"/>
-          </a:p>
-        </p:txBody>
-      </p:sp>
-      <p:sp>
-        <p:nvSpPr>
-          <p:cNvPr id="171" name="ellipse 171"/>
-          <p:cNvSpPr/>
-          <p:nvPr/>
-        </p:nvSpPr>
-        <p:spPr>
-          <a:xfrm>
-            <a:off x="3385566" y="4812030"/>
-            <a:ext cx="96012" cy="96012"/>
-          </a:xfrm>
-          <a:prstGeom prst="ellipse">
-            <a:avLst/>
-          </a:prstGeom>
-          <a:solidFill>
-            <a:srgbClr val="FF6B3D"/>
-          </a:solidFill>
-          <a:ln>
-            <a:noFill/>
-          </a:ln>
-          <a:effectLst/>
-        </p:spPr>
-        <p:txBody>
-          <a:bodyPr rtlCol="0" anchor="ctr"/>
-          <a:lstStyle/>
-          <a:p>
-            <a:pPr algn="ctr"/>
-          </a:p>
-        </p:txBody>
-      </p:sp>
-      <p:sp>
-        <p:nvSpPr>
-          <p:cNvPr id="172" name="ellipse 172"/>
-          <p:cNvSpPr/>
-          <p:nvPr/>
-        </p:nvSpPr>
-        <p:spPr>
-          <a:xfrm>
-            <a:off x="692658" y="4953762"/>
-            <a:ext cx="96012" cy="96012"/>
-          </a:xfrm>
-          <a:prstGeom prst="ellipse">
-            <a:avLst/>
-          </a:prstGeom>
-          <a:solidFill>
-            <a:srgbClr val="FF6B3D"/>
-          </a:solidFill>
-          <a:ln>
-            <a:noFill/>
-          </a:ln>
-          <a:effectLst/>
-        </p:spPr>
-        <p:txBody>
-          <a:bodyPr rtlCol="0" anchor="ctr"/>
-          <a:lstStyle/>
-          <a:p>
-            <a:pPr algn="ctr"/>
-          </a:p>
-        </p:txBody>
-      </p:sp>
-      <p:sp>
-        <p:nvSpPr>
-          <p:cNvPr id="173" name="ellipse 173"/>
-          <p:cNvSpPr/>
-          <p:nvPr/>
-        </p:nvSpPr>
-        <p:spPr>
-          <a:xfrm>
-            <a:off x="834390" y="4953762"/>
-            <a:ext cx="96012" cy="96012"/>
-          </a:xfrm>
-          <a:prstGeom prst="ellipse">
-            <a:avLst/>
-          </a:prstGeom>
-          <a:solidFill>
-            <a:srgbClr val="FF6B3D"/>
-          </a:solidFill>
-          <a:ln>
-            <a:noFill/>
-          </a:ln>
-          <a:effectLst/>
-        </p:spPr>
-        <p:txBody>
-          <a:bodyPr rtlCol="0" anchor="ctr"/>
-          <a:lstStyle/>
-          <a:p>
-            <a:pPr algn="ctr"/>
-          </a:p>
-        </p:txBody>
-      </p:sp>
-      <p:sp>
-        <p:nvSpPr>
-          <p:cNvPr id="174" name="ellipse 174"/>
-          <p:cNvSpPr/>
-          <p:nvPr/>
-        </p:nvSpPr>
-        <p:spPr>
-          <a:xfrm>
-            <a:off x="976122" y="4953762"/>
-            <a:ext cx="96012" cy="96012"/>
-          </a:xfrm>
-          <a:prstGeom prst="ellipse">
-            <a:avLst/>
-          </a:prstGeom>
-          <a:solidFill>
-            <a:srgbClr val="FF6B3D"/>
-          </a:solidFill>
-          <a:ln>
-            <a:noFill/>
-          </a:ln>
-          <a:effectLst/>
-        </p:spPr>
-        <p:txBody>
-          <a:bodyPr rtlCol="0" anchor="ctr"/>
-          <a:lstStyle/>
-          <a:p>
-            <a:pPr algn="ctr"/>
-          </a:p>
-        </p:txBody>
-      </p:sp>
-      <p:sp>
-        <p:nvSpPr>
-          <p:cNvPr id="175" name="ellipse 175"/>
-          <p:cNvSpPr/>
-          <p:nvPr/>
-        </p:nvSpPr>
-        <p:spPr>
-          <a:xfrm>
-            <a:off x="1117854" y="4953762"/>
-            <a:ext cx="96012" cy="96012"/>
-          </a:xfrm>
-          <a:prstGeom prst="ellipse">
-            <a:avLst/>
-          </a:prstGeom>
-          <a:solidFill>
-            <a:srgbClr val="FF6B3D"/>
-          </a:solidFill>
-          <a:ln>
-            <a:noFill/>
-          </a:ln>
-          <a:effectLst/>
-        </p:spPr>
-        <p:txBody>
-          <a:bodyPr rtlCol="0" anchor="ctr"/>
-          <a:lstStyle/>
-          <a:p>
-            <a:pPr algn="ctr"/>
-          </a:p>
-        </p:txBody>
-      </p:sp>
-      <p:sp>
-        <p:nvSpPr>
-          <p:cNvPr id="176" name="ellipse 176"/>
-          <p:cNvSpPr/>
-          <p:nvPr/>
-        </p:nvSpPr>
-        <p:spPr>
-          <a:xfrm>
-            <a:off x="1259586" y="4953762"/>
-            <a:ext cx="96012" cy="96012"/>
-          </a:xfrm>
-          <a:prstGeom prst="ellipse">
-            <a:avLst/>
-          </a:prstGeom>
-          <a:solidFill>
-            <a:srgbClr val="FF6B3D"/>
-          </a:solidFill>
-          <a:ln>
-            <a:noFill/>
-          </a:ln>
-          <a:effectLst/>
-        </p:spPr>
-        <p:txBody>
-          <a:bodyPr rtlCol="0" anchor="ctr"/>
-          <a:lstStyle/>
-          <a:p>
-            <a:pPr algn="ctr"/>
-          </a:p>
-        </p:txBody>
-      </p:sp>
-      <p:sp>
-        <p:nvSpPr>
-          <p:cNvPr id="177" name="ellipse 177"/>
-          <p:cNvSpPr/>
-          <p:nvPr/>
-        </p:nvSpPr>
-        <p:spPr>
-          <a:xfrm>
-            <a:off x="1401318" y="4953762"/>
-            <a:ext cx="96012" cy="96012"/>
-          </a:xfrm>
-          <a:prstGeom prst="ellipse">
-            <a:avLst/>
-          </a:prstGeom>
-          <a:solidFill>
-            <a:srgbClr val="FF6B3D"/>
-          </a:solidFill>
-          <a:ln>
-            <a:noFill/>
-          </a:ln>
-          <a:effectLst/>
-        </p:spPr>
-        <p:txBody>
-          <a:bodyPr rtlCol="0" anchor="ctr"/>
-          <a:lstStyle/>
-          <a:p>
-            <a:pPr algn="ctr"/>
-          </a:p>
-        </p:txBody>
-      </p:sp>
-      <p:sp>
-        <p:nvSpPr>
-          <p:cNvPr id="178" name="ellipse 178"/>
-          <p:cNvSpPr/>
-          <p:nvPr/>
-        </p:nvSpPr>
-        <p:spPr>
-          <a:xfrm>
-            <a:off x="1543050" y="4953762"/>
-            <a:ext cx="96012" cy="96012"/>
-          </a:xfrm>
-          <a:prstGeom prst="ellipse">
-            <a:avLst/>
-          </a:prstGeom>
-          <a:solidFill>
-            <a:srgbClr val="FF6B3D"/>
-          </a:solidFill>
-          <a:ln>
-            <a:noFill/>
-          </a:ln>
-          <a:effectLst/>
-        </p:spPr>
-        <p:txBody>
-          <a:bodyPr rtlCol="0" anchor="ctr"/>
-          <a:lstStyle/>
-          <a:p>
-            <a:pPr algn="ctr"/>
-          </a:p>
-        </p:txBody>
-      </p:sp>
-      <p:sp>
-        <p:nvSpPr>
-          <p:cNvPr id="179" name="ellipse 179"/>
-          <p:cNvSpPr/>
-          <p:nvPr/>
-        </p:nvSpPr>
-        <p:spPr>
-          <a:xfrm>
-            <a:off x="1684782" y="4953762"/>
-            <a:ext cx="96012" cy="96012"/>
-          </a:xfrm>
-          <a:prstGeom prst="ellipse">
-            <a:avLst/>
-          </a:prstGeom>
-          <a:solidFill>
-            <a:srgbClr val="FF6B3D"/>
-          </a:solidFill>
-          <a:ln>
-            <a:noFill/>
-          </a:ln>
-          <a:effectLst/>
-        </p:spPr>
-        <p:txBody>
-          <a:bodyPr rtlCol="0" anchor="ctr"/>
-          <a:lstStyle/>
-          <a:p>
-            <a:pPr algn="ctr"/>
-          </a:p>
-        </p:txBody>
-      </p:sp>
-      <p:sp>
-        <p:nvSpPr>
-          <p:cNvPr id="180" name="ellipse 180"/>
-          <p:cNvSpPr/>
-          <p:nvPr/>
-        </p:nvSpPr>
-        <p:spPr>
-          <a:xfrm>
-            <a:off x="1826514" y="4953762"/>
-            <a:ext cx="96012" cy="96012"/>
-          </a:xfrm>
-          <a:prstGeom prst="ellipse">
-            <a:avLst/>
-          </a:prstGeom>
-          <a:solidFill>
-            <a:srgbClr val="FF6B3D"/>
-          </a:solidFill>
-          <a:ln>
-            <a:noFill/>
-          </a:ln>
-          <a:effectLst/>
-        </p:spPr>
-        <p:txBody>
-          <a:bodyPr rtlCol="0" anchor="ctr"/>
-          <a:lstStyle/>
-          <a:p>
-            <a:pPr algn="ctr"/>
-          </a:p>
-        </p:txBody>
-      </p:sp>
-      <p:sp>
-        <p:nvSpPr>
-          <p:cNvPr id="181" name="ellipse 181"/>
-          <p:cNvSpPr/>
-          <p:nvPr/>
-        </p:nvSpPr>
-        <p:spPr>
-          <a:xfrm>
-            <a:off x="1968246" y="4953762"/>
-            <a:ext cx="96012" cy="96012"/>
-          </a:xfrm>
-          <a:prstGeom prst="ellipse">
-            <a:avLst/>
-          </a:prstGeom>
-          <a:solidFill>
-            <a:srgbClr val="FF6B3D"/>
-          </a:solidFill>
-          <a:ln>
-            <a:noFill/>
-          </a:ln>
-          <a:effectLst/>
-        </p:spPr>
-        <p:txBody>
-          <a:bodyPr rtlCol="0" anchor="ctr"/>
-          <a:lstStyle/>
-          <a:p>
-            <a:pPr algn="ctr"/>
-          </a:p>
-        </p:txBody>
-      </p:sp>
-      <p:sp>
-        <p:nvSpPr>
-          <p:cNvPr id="182" name="ellipse 182"/>
-          <p:cNvSpPr/>
-          <p:nvPr/>
-        </p:nvSpPr>
-        <p:spPr>
-          <a:xfrm>
-            <a:off x="2109978" y="4953762"/>
-            <a:ext cx="96012" cy="96012"/>
-          </a:xfrm>
-          <a:prstGeom prst="ellipse">
-            <a:avLst/>
-          </a:prstGeom>
-          <a:solidFill>
-            <a:srgbClr val="FF6B3D"/>
-          </a:solidFill>
-          <a:ln>
-            <a:noFill/>
-          </a:ln>
-          <a:effectLst/>
-        </p:spPr>
-        <p:txBody>
-          <a:bodyPr rtlCol="0" anchor="ctr"/>
-          <a:lstStyle/>
-          <a:p>
-            <a:pPr algn="ctr"/>
-          </a:p>
-        </p:txBody>
-      </p:sp>
-      <p:sp>
-        <p:nvSpPr>
-          <p:cNvPr id="183" name="ellipse 183"/>
-          <p:cNvSpPr/>
-          <p:nvPr/>
-        </p:nvSpPr>
-        <p:spPr>
-          <a:xfrm>
-            <a:off x="2251710" y="4953762"/>
-            <a:ext cx="96012" cy="96012"/>
-          </a:xfrm>
-          <a:prstGeom prst="ellipse">
-            <a:avLst/>
-          </a:prstGeom>
-          <a:solidFill>
-            <a:srgbClr val="FF6B3D"/>
-          </a:solidFill>
-          <a:ln>
-            <a:noFill/>
-          </a:ln>
-          <a:effectLst/>
-        </p:spPr>
-        <p:txBody>
-          <a:bodyPr rtlCol="0" anchor="ctr"/>
-          <a:lstStyle/>
-          <a:p>
-            <a:pPr algn="ctr"/>
-          </a:p>
-        </p:txBody>
-      </p:sp>
-      <p:sp>
-        <p:nvSpPr>
-          <p:cNvPr id="184" name="ellipse 184"/>
-          <p:cNvSpPr/>
-          <p:nvPr/>
-        </p:nvSpPr>
-        <p:spPr>
-          <a:xfrm>
-            <a:off x="2393442" y="4953762"/>
-            <a:ext cx="96012" cy="96012"/>
-          </a:xfrm>
-          <a:prstGeom prst="ellipse">
-            <a:avLst/>
-          </a:prstGeom>
-          <a:solidFill>
-            <a:srgbClr val="FF6B3D"/>
-          </a:solidFill>
-          <a:ln>
-            <a:noFill/>
-          </a:ln>
-          <a:effectLst/>
-        </p:spPr>
-        <p:txBody>
-          <a:bodyPr rtlCol="0" anchor="ctr"/>
-          <a:lstStyle/>
-          <a:p>
-            <a:pPr algn="ctr"/>
-          </a:p>
-        </p:txBody>
-      </p:sp>
-      <p:sp>
-        <p:nvSpPr>
-          <p:cNvPr id="185" name="ellipse 185"/>
-          <p:cNvSpPr/>
-          <p:nvPr/>
-        </p:nvSpPr>
-        <p:spPr>
-          <a:xfrm>
-            <a:off x="2535174" y="4953762"/>
-            <a:ext cx="96012" cy="96012"/>
-          </a:xfrm>
-          <a:prstGeom prst="ellipse">
-            <a:avLst/>
-          </a:prstGeom>
-          <a:solidFill>
-            <a:srgbClr val="FF6B3D"/>
-          </a:solidFill>
-          <a:ln>
-            <a:noFill/>
-          </a:ln>
-          <a:effectLst/>
-        </p:spPr>
-        <p:txBody>
-          <a:bodyPr rtlCol="0" anchor="ctr"/>
-          <a:lstStyle/>
-          <a:p>
-            <a:pPr algn="ctr"/>
-          </a:p>
-        </p:txBody>
-      </p:sp>
-      <p:sp>
-        <p:nvSpPr>
-          <p:cNvPr id="186" name="ellipse 186"/>
-          <p:cNvSpPr/>
-          <p:nvPr/>
-        </p:nvSpPr>
-        <p:spPr>
-          <a:xfrm>
-            <a:off x="2676906" y="4953762"/>
-            <a:ext cx="96012" cy="96012"/>
-          </a:xfrm>
-          <a:prstGeom prst="ellipse">
-            <a:avLst/>
-          </a:prstGeom>
-          <a:solidFill>
-            <a:srgbClr val="FF6B3D"/>
-          </a:solidFill>
-          <a:ln>
-            <a:noFill/>
-          </a:ln>
-          <a:effectLst/>
-        </p:spPr>
-        <p:txBody>
-          <a:bodyPr rtlCol="0" anchor="ctr"/>
-          <a:lstStyle/>
-          <a:p>
-            <a:pPr algn="ctr"/>
-          </a:p>
-        </p:txBody>
-      </p:sp>
-      <p:sp>
-        <p:nvSpPr>
-          <p:cNvPr id="187" name="ellipse 187"/>
-          <p:cNvSpPr/>
-          <p:nvPr/>
-        </p:nvSpPr>
-        <p:spPr>
-          <a:xfrm>
-            <a:off x="2818638" y="4953762"/>
-            <a:ext cx="96012" cy="96012"/>
-          </a:xfrm>
-          <a:prstGeom prst="ellipse">
-            <a:avLst/>
-          </a:prstGeom>
-          <a:solidFill>
-            <a:srgbClr val="FF6B3D"/>
-          </a:solidFill>
-          <a:ln>
-            <a:noFill/>
-          </a:ln>
-          <a:effectLst/>
-        </p:spPr>
-        <p:txBody>
-          <a:bodyPr rtlCol="0" anchor="ctr"/>
-          <a:lstStyle/>
-          <a:p>
-            <a:pPr algn="ctr"/>
-          </a:p>
-        </p:txBody>
-      </p:sp>
-      <p:sp>
-        <p:nvSpPr>
-          <p:cNvPr id="188" name="ellipse 188"/>
-          <p:cNvSpPr/>
-          <p:nvPr/>
-        </p:nvSpPr>
-        <p:spPr>
-          <a:xfrm>
-            <a:off x="2960370" y="4953762"/>
-            <a:ext cx="96012" cy="96012"/>
-          </a:xfrm>
-          <a:prstGeom prst="ellipse">
-            <a:avLst/>
-          </a:prstGeom>
-          <a:solidFill>
-            <a:srgbClr val="FF6B3D"/>
-          </a:solidFill>
-          <a:ln>
-            <a:noFill/>
-          </a:ln>
-          <a:effectLst/>
-        </p:spPr>
-        <p:txBody>
-          <a:bodyPr rtlCol="0" anchor="ctr"/>
-          <a:lstStyle/>
-          <a:p>
-            <a:pPr algn="ctr"/>
-          </a:p>
-        </p:txBody>
-      </p:sp>
-      <p:sp>
-        <p:nvSpPr>
-          <p:cNvPr id="189" name="ellipse 189"/>
-          <p:cNvSpPr/>
-          <p:nvPr/>
-        </p:nvSpPr>
-        <p:spPr>
-          <a:xfrm>
-            <a:off x="3102102" y="4953762"/>
-            <a:ext cx="96012" cy="96012"/>
-          </a:xfrm>
-          <a:prstGeom prst="ellipse">
-            <a:avLst/>
-          </a:prstGeom>
-          <a:solidFill>
-            <a:srgbClr val="FF6B3D"/>
-          </a:solidFill>
-          <a:ln>
-            <a:noFill/>
-          </a:ln>
-          <a:effectLst/>
-        </p:spPr>
-        <p:txBody>
-          <a:bodyPr rtlCol="0" anchor="ctr"/>
-          <a:lstStyle/>
-          <a:p>
-            <a:pPr algn="ctr"/>
-          </a:p>
-        </p:txBody>
-      </p:sp>
-      <p:sp>
-        <p:nvSpPr>
-          <p:cNvPr id="190" name="ellipse 190"/>
-          <p:cNvSpPr/>
-          <p:nvPr/>
-        </p:nvSpPr>
-        <p:spPr>
-          <a:xfrm>
-            <a:off x="3243834" y="4953762"/>
-            <a:ext cx="96012" cy="96012"/>
-          </a:xfrm>
-          <a:prstGeom prst="ellipse">
-            <a:avLst/>
-          </a:prstGeom>
-          <a:solidFill>
-            <a:srgbClr val="FF6B3D"/>
-          </a:solidFill>
-          <a:ln>
-            <a:noFill/>
-          </a:ln>
-          <a:effectLst/>
-        </p:spPr>
-        <p:txBody>
-          <a:bodyPr rtlCol="0" anchor="ctr"/>
-          <a:lstStyle/>
-          <a:p>
-            <a:pPr algn="ctr"/>
-          </a:p>
-        </p:txBody>
-      </p:sp>
-      <p:sp>
-        <p:nvSpPr>
-          <p:cNvPr id="191" name="ellipse 191"/>
-          <p:cNvSpPr/>
-          <p:nvPr/>
-        </p:nvSpPr>
-        <p:spPr>
-          <a:xfrm>
-            <a:off x="3385566" y="4953762"/>
-            <a:ext cx="96012" cy="96012"/>
-          </a:xfrm>
-          <a:prstGeom prst="ellipse">
-            <a:avLst/>
-          </a:prstGeom>
-          <a:solidFill>
-            <a:srgbClr val="FF6B3D"/>
-          </a:solidFill>
-          <a:ln>
-            <a:noFill/>
-          </a:ln>
-          <a:effectLst/>
-        </p:spPr>
-        <p:txBody>
-          <a:bodyPr rtlCol="0" anchor="ctr"/>
-          <a:lstStyle/>
-          <a:p>
-            <a:pPr algn="ctr"/>
-          </a:p>
-        </p:txBody>
-      </p:sp>
-      <p:sp>
-        <p:nvSpPr>
-          <p:cNvPr id="192" name="ellipse 192"/>
-          <p:cNvSpPr/>
-          <p:nvPr/>
-        </p:nvSpPr>
-        <p:spPr>
-          <a:xfrm>
-            <a:off x="692658" y="5095494"/>
-            <a:ext cx="96012" cy="96012"/>
-          </a:xfrm>
-          <a:prstGeom prst="ellipse">
-            <a:avLst/>
-          </a:prstGeom>
-          <a:solidFill>
-            <a:srgbClr val="FF6B3D"/>
-          </a:solidFill>
-          <a:ln>
-            <a:noFill/>
-          </a:ln>
-          <a:effectLst/>
-        </p:spPr>
-        <p:txBody>
-          <a:bodyPr rtlCol="0" anchor="ctr"/>
-          <a:lstStyle/>
-          <a:p>
-            <a:pPr algn="ctr"/>
-          </a:p>
-        </p:txBody>
-      </p:sp>
-      <p:sp>
-        <p:nvSpPr>
-          <p:cNvPr id="193" name="ellipse 193"/>
-          <p:cNvSpPr/>
-          <p:nvPr/>
-        </p:nvSpPr>
-        <p:spPr>
-          <a:xfrm>
-            <a:off x="834390" y="5095494"/>
-            <a:ext cx="96012" cy="96012"/>
-          </a:xfrm>
-          <a:prstGeom prst="ellipse">
-            <a:avLst/>
-          </a:prstGeom>
-          <a:solidFill>
-            <a:srgbClr val="2B2B2D"/>
-          </a:solidFill>
-          <a:ln>
-            <a:noFill/>
-          </a:ln>
-          <a:effectLst/>
-        </p:spPr>
-        <p:txBody>
-          <a:bodyPr rtlCol="0" anchor="ctr"/>
-          <a:lstStyle/>
-          <a:p>
-            <a:pPr algn="ctr"/>
-          </a:p>
-        </p:txBody>
-      </p:sp>
-      <p:sp>
-        <p:nvSpPr>
-          <p:cNvPr id="194" name="ellipse 194"/>
-          <p:cNvSpPr/>
-          <p:nvPr/>
-        </p:nvSpPr>
-        <p:spPr>
-          <a:xfrm>
-            <a:off x="976122" y="5095494"/>
-            <a:ext cx="96012" cy="96012"/>
-          </a:xfrm>
-          <a:prstGeom prst="ellipse">
-            <a:avLst/>
-          </a:prstGeom>
-          <a:solidFill>
-            <a:srgbClr val="2B2B2D"/>
-          </a:solidFill>
-          <a:ln>
-            <a:noFill/>
-          </a:ln>
-          <a:effectLst/>
-        </p:spPr>
-        <p:txBody>
-          <a:bodyPr rtlCol="0" anchor="ctr"/>
-          <a:lstStyle/>
-          <a:p>
-            <a:pPr algn="ctr"/>
-          </a:p>
-        </p:txBody>
-      </p:sp>
-      <p:sp>
-        <p:nvSpPr>
-          <p:cNvPr id="195" name="ellipse 195"/>
-          <p:cNvSpPr/>
-          <p:nvPr/>
-        </p:nvSpPr>
-        <p:spPr>
-          <a:xfrm>
-            <a:off x="1117854" y="5095494"/>
-            <a:ext cx="96012" cy="96012"/>
-          </a:xfrm>
-          <a:prstGeom prst="ellipse">
-            <a:avLst/>
-          </a:prstGeom>
-          <a:solidFill>
-            <a:srgbClr val="2B2B2D"/>
-          </a:solidFill>
-          <a:ln>
-            <a:noFill/>
-          </a:ln>
-          <a:effectLst/>
-        </p:spPr>
-        <p:txBody>
-          <a:bodyPr rtlCol="0" anchor="ctr"/>
-          <a:lstStyle/>
-          <a:p>
-            <a:pPr algn="ctr"/>
-          </a:p>
-        </p:txBody>
-      </p:sp>
-      <p:sp>
-        <p:nvSpPr>
-          <p:cNvPr id="196" name="ellipse 196"/>
-          <p:cNvSpPr/>
-          <p:nvPr/>
-        </p:nvSpPr>
-        <p:spPr>
-          <a:xfrm>
-            <a:off x="1259586" y="5095494"/>
-            <a:ext cx="96012" cy="96012"/>
-          </a:xfrm>
-          <a:prstGeom prst="ellipse">
-            <a:avLst/>
-          </a:prstGeom>
-          <a:solidFill>
-            <a:srgbClr val="2B2B2D"/>
-          </a:solidFill>
-          <a:ln>
-            <a:noFill/>
-          </a:ln>
-          <a:effectLst/>
-        </p:spPr>
-        <p:txBody>
-          <a:bodyPr rtlCol="0" anchor="ctr"/>
-          <a:lstStyle/>
-          <a:p>
-            <a:pPr algn="ctr"/>
-          </a:p>
-        </p:txBody>
-      </p:sp>
-      <p:sp>
-        <p:nvSpPr>
-          <p:cNvPr id="197" name="ellipse 197"/>
-          <p:cNvSpPr/>
-          <p:nvPr/>
-        </p:nvSpPr>
-        <p:spPr>
-          <a:xfrm>
-            <a:off x="1401318" y="5095494"/>
-            <a:ext cx="96012" cy="96012"/>
-          </a:xfrm>
-          <a:prstGeom prst="ellipse">
-            <a:avLst/>
-          </a:prstGeom>
-          <a:solidFill>
-            <a:srgbClr val="2B2B2D"/>
-          </a:solidFill>
-          <a:ln>
-            <a:noFill/>
-          </a:ln>
-          <a:effectLst/>
-        </p:spPr>
-        <p:txBody>
-          <a:bodyPr rtlCol="0" anchor="ctr"/>
-          <a:lstStyle/>
-          <a:p>
-            <a:pPr algn="ctr"/>
-          </a:p>
-        </p:txBody>
-      </p:sp>
-      <p:sp>
-        <p:nvSpPr>
-          <p:cNvPr id="198" name="ellipse 198"/>
-          <p:cNvSpPr/>
-          <p:nvPr/>
-        </p:nvSpPr>
-        <p:spPr>
-          <a:xfrm>
-            <a:off x="1543050" y="5095494"/>
-            <a:ext cx="96012" cy="96012"/>
-          </a:xfrm>
-          <a:prstGeom prst="ellipse">
-            <a:avLst/>
-          </a:prstGeom>
-          <a:solidFill>
-            <a:srgbClr val="2B2B2D"/>
-          </a:solidFill>
-          <a:ln>
-            <a:noFill/>
-          </a:ln>
-          <a:effectLst/>
-        </p:spPr>
-        <p:txBody>
-          <a:bodyPr rtlCol="0" anchor="ctr"/>
-          <a:lstStyle/>
-          <a:p>
-            <a:pPr algn="ctr"/>
-          </a:p>
-        </p:txBody>
-      </p:sp>
-      <p:sp>
-        <p:nvSpPr>
-          <p:cNvPr id="199" name="ellipse 199"/>
-          <p:cNvSpPr/>
-          <p:nvPr/>
-        </p:nvSpPr>
-        <p:spPr>
-          <a:xfrm>
-            <a:off x="1684782" y="5095494"/>
-            <a:ext cx="96012" cy="96012"/>
-          </a:xfrm>
-          <a:prstGeom prst="ellipse">
-            <a:avLst/>
-          </a:prstGeom>
-          <a:solidFill>
-            <a:srgbClr val="2B2B2D"/>
-          </a:solidFill>
-          <a:ln>
-            <a:noFill/>
-          </a:ln>
-          <a:effectLst/>
-        </p:spPr>
-        <p:txBody>
-          <a:bodyPr rtlCol="0" anchor="ctr"/>
-          <a:lstStyle/>
-          <a:p>
-            <a:pPr algn="ctr"/>
-          </a:p>
-        </p:txBody>
-      </p:sp>
-      <p:sp>
-        <p:nvSpPr>
-          <p:cNvPr id="200" name="ellipse 200"/>
-          <p:cNvSpPr/>
-          <p:nvPr/>
-        </p:nvSpPr>
-        <p:spPr>
-          <a:xfrm>
-            <a:off x="1826514" y="5095494"/>
-            <a:ext cx="96012" cy="96012"/>
-          </a:xfrm>
-          <a:prstGeom prst="ellipse">
-            <a:avLst/>
-          </a:prstGeom>
-          <a:solidFill>
-            <a:srgbClr val="2B2B2D"/>
-          </a:solidFill>
-          <a:ln>
-            <a:noFill/>
-          </a:ln>
-          <a:effectLst/>
-        </p:spPr>
-        <p:txBody>
-          <a:bodyPr rtlCol="0" anchor="ctr"/>
-          <a:lstStyle/>
-          <a:p>
-            <a:pPr algn="ctr"/>
-          </a:p>
-        </p:txBody>
-      </p:sp>
-      <p:sp>
-        <p:nvSpPr>
-          <p:cNvPr id="201" name="ellipse 201"/>
-          <p:cNvSpPr/>
-          <p:nvPr/>
-        </p:nvSpPr>
-        <p:spPr>
-          <a:xfrm>
-            <a:off x="1968246" y="5095494"/>
-            <a:ext cx="96012" cy="96012"/>
-          </a:xfrm>
-          <a:prstGeom prst="ellipse">
-            <a:avLst/>
-          </a:prstGeom>
-          <a:solidFill>
-            <a:srgbClr val="2B2B2D"/>
-          </a:solidFill>
-          <a:ln>
-            <a:noFill/>
-          </a:ln>
-          <a:effectLst/>
-        </p:spPr>
-        <p:txBody>
-          <a:bodyPr rtlCol="0" anchor="ctr"/>
-          <a:lstStyle/>
-          <a:p>
-            <a:pPr algn="ctr"/>
-          </a:p>
-        </p:txBody>
-      </p:sp>
-      <p:sp>
-        <p:nvSpPr>
-          <p:cNvPr id="202" name="ellipse 202"/>
-          <p:cNvSpPr/>
-          <p:nvPr/>
-        </p:nvSpPr>
-        <p:spPr>
-          <a:xfrm>
-            <a:off x="2109978" y="5095494"/>
-            <a:ext cx="96012" cy="96012"/>
-          </a:xfrm>
-          <a:prstGeom prst="ellipse">
-            <a:avLst/>
-          </a:prstGeom>
-          <a:solidFill>
-            <a:srgbClr val="2B2B2D"/>
-          </a:solidFill>
-          <a:ln>
-            <a:noFill/>
-          </a:ln>
-          <a:effectLst/>
-        </p:spPr>
-        <p:txBody>
-          <a:bodyPr rtlCol="0" anchor="ctr"/>
-          <a:lstStyle/>
-          <a:p>
-            <a:pPr algn="ctr"/>
-          </a:p>
-        </p:txBody>
-      </p:sp>
-      <p:sp>
-        <p:nvSpPr>
-          <p:cNvPr id="203" name="ellipse 203"/>
-          <p:cNvSpPr/>
-          <p:nvPr/>
-        </p:nvSpPr>
-        <p:spPr>
-          <a:xfrm>
-            <a:off x="2251710" y="5095494"/>
-            <a:ext cx="96012" cy="96012"/>
-          </a:xfrm>
-          <a:prstGeom prst="ellipse">
-            <a:avLst/>
-          </a:prstGeom>
-          <a:solidFill>
-            <a:srgbClr val="2B2B2D"/>
-          </a:solidFill>
-          <a:ln>
-            <a:noFill/>
-          </a:ln>
-          <a:effectLst/>
-        </p:spPr>
-        <p:txBody>
-          <a:bodyPr rtlCol="0" anchor="ctr"/>
-          <a:lstStyle/>
-          <a:p>
-            <a:pPr algn="ctr"/>
-          </a:p>
-        </p:txBody>
-      </p:sp>
-      <p:sp>
-        <p:nvSpPr>
-          <p:cNvPr id="204" name="ellipse 204"/>
-          <p:cNvSpPr/>
-          <p:nvPr/>
-        </p:nvSpPr>
-        <p:spPr>
-          <a:xfrm>
-            <a:off x="2393442" y="5095494"/>
-            <a:ext cx="96012" cy="96012"/>
-          </a:xfrm>
-          <a:prstGeom prst="ellipse">
-            <a:avLst/>
-          </a:prstGeom>
-          <a:solidFill>
-            <a:srgbClr val="2B2B2D"/>
-          </a:solidFill>
-          <a:ln>
-            <a:noFill/>
-          </a:ln>
-          <a:effectLst/>
-        </p:spPr>
-        <p:txBody>
-          <a:bodyPr rtlCol="0" anchor="ctr"/>
-          <a:lstStyle/>
-          <a:p>
-            <a:pPr algn="ctr"/>
-          </a:p>
-        </p:txBody>
-      </p:sp>
-      <p:sp>
-        <p:nvSpPr>
-          <p:cNvPr id="205" name="ellipse 205"/>
-          <p:cNvSpPr/>
-          <p:nvPr/>
-        </p:nvSpPr>
-        <p:spPr>
-          <a:xfrm>
-            <a:off x="2535174" y="5095494"/>
-            <a:ext cx="96012" cy="96012"/>
-          </a:xfrm>
-          <a:prstGeom prst="ellipse">
-            <a:avLst/>
-          </a:prstGeom>
-          <a:solidFill>
-            <a:srgbClr val="2B2B2D"/>
-          </a:solidFill>
-          <a:ln>
-            <a:noFill/>
-          </a:ln>
-          <a:effectLst/>
-        </p:spPr>
-        <p:txBody>
-          <a:bodyPr rtlCol="0" anchor="ctr"/>
-          <a:lstStyle/>
-          <a:p>
-            <a:pPr algn="ctr"/>
-          </a:p>
-        </p:txBody>
-      </p:sp>
-      <p:sp>
-        <p:nvSpPr>
-          <p:cNvPr id="206" name="ellipse 206"/>
-          <p:cNvSpPr/>
-          <p:nvPr/>
-        </p:nvSpPr>
-        <p:spPr>
-          <a:xfrm>
-            <a:off x="2676906" y="5095494"/>
-            <a:ext cx="96012" cy="96012"/>
-          </a:xfrm>
-          <a:prstGeom prst="ellipse">
-            <a:avLst/>
-          </a:prstGeom>
-          <a:solidFill>
-            <a:srgbClr val="2B2B2D"/>
-          </a:solidFill>
-          <a:ln>
-            <a:noFill/>
-          </a:ln>
-          <a:effectLst/>
-        </p:spPr>
-        <p:txBody>
-          <a:bodyPr rtlCol="0" anchor="ctr"/>
-          <a:lstStyle/>
-          <a:p>
-            <a:pPr algn="ctr"/>
-          </a:p>
-        </p:txBody>
-      </p:sp>
-      <p:sp>
-        <p:nvSpPr>
-          <p:cNvPr id="207" name="ellipse 207"/>
-          <p:cNvSpPr/>
-          <p:nvPr/>
-        </p:nvSpPr>
-        <p:spPr>
-          <a:xfrm>
-            <a:off x="2818638" y="5095494"/>
-            <a:ext cx="96012" cy="96012"/>
-          </a:xfrm>
-          <a:prstGeom prst="ellipse">
-            <a:avLst/>
-          </a:prstGeom>
-          <a:solidFill>
-            <a:srgbClr val="2B2B2D"/>
-          </a:solidFill>
-          <a:ln>
-            <a:noFill/>
-          </a:ln>
-          <a:effectLst/>
-        </p:spPr>
-        <p:txBody>
-          <a:bodyPr rtlCol="0" anchor="ctr"/>
-          <a:lstStyle/>
-          <a:p>
-            <a:pPr algn="ctr"/>
-          </a:p>
-        </p:txBody>
-      </p:sp>
-      <p:sp>
-        <p:nvSpPr>
-          <p:cNvPr id="208" name="ellipse 208"/>
-          <p:cNvSpPr/>
-          <p:nvPr/>
-        </p:nvSpPr>
-        <p:spPr>
-          <a:xfrm>
-            <a:off x="2960370" y="5095494"/>
-            <a:ext cx="96012" cy="96012"/>
-          </a:xfrm>
-          <a:prstGeom prst="ellipse">
-            <a:avLst/>
-          </a:prstGeom>
-          <a:solidFill>
-            <a:srgbClr val="2B2B2D"/>
-          </a:solidFill>
-          <a:ln>
-            <a:noFill/>
-          </a:ln>
-          <a:effectLst/>
-        </p:spPr>
-        <p:txBody>
-          <a:bodyPr rtlCol="0" anchor="ctr"/>
-          <a:lstStyle/>
-          <a:p>
-            <a:pPr algn="ctr"/>
-          </a:p>
-        </p:txBody>
-      </p:sp>
-      <p:sp>
-        <p:nvSpPr>
-          <p:cNvPr id="209" name="ellipse 209"/>
-          <p:cNvSpPr/>
-          <p:nvPr/>
-        </p:nvSpPr>
-        <p:spPr>
-          <a:xfrm>
-            <a:off x="3102102" y="5095494"/>
-            <a:ext cx="96012" cy="96012"/>
-          </a:xfrm>
-          <a:prstGeom prst="ellipse">
-            <a:avLst/>
-          </a:prstGeom>
-          <a:solidFill>
-            <a:srgbClr val="2B2B2D"/>
-          </a:solidFill>
-          <a:ln>
-            <a:noFill/>
-          </a:ln>
-          <a:effectLst/>
-        </p:spPr>
-        <p:txBody>
-          <a:bodyPr rtlCol="0" anchor="ctr"/>
-          <a:lstStyle/>
-          <a:p>
-            <a:pPr algn="ctr"/>
-          </a:p>
-        </p:txBody>
-      </p:sp>
-      <p:sp>
-        <p:nvSpPr>
-          <p:cNvPr id="210" name="ellipse 210"/>
-          <p:cNvSpPr/>
-          <p:nvPr/>
-        </p:nvSpPr>
-        <p:spPr>
-          <a:xfrm>
-            <a:off x="3243834" y="5095494"/>
-            <a:ext cx="96012" cy="96012"/>
-          </a:xfrm>
-          <a:prstGeom prst="ellipse">
-            <a:avLst/>
-          </a:prstGeom>
-          <a:solidFill>
-            <a:srgbClr val="2B2B2D"/>
-          </a:solidFill>
-          <a:ln>
-            <a:noFill/>
-          </a:ln>
-          <a:effectLst/>
-        </p:spPr>
-        <p:txBody>
-          <a:bodyPr rtlCol="0" anchor="ctr"/>
-          <a:lstStyle/>
-          <a:p>
-            <a:pPr algn="ctr"/>
-          </a:p>
-        </p:txBody>
-      </p:sp>
-      <p:sp>
-        <p:nvSpPr>
-          <p:cNvPr id="211" name="ellipse 211"/>
-          <p:cNvSpPr/>
-          <p:nvPr/>
-        </p:nvSpPr>
-        <p:spPr>
-          <a:xfrm>
-            <a:off x="3385566" y="5095494"/>
-            <a:ext cx="96012" cy="96012"/>
-          </a:xfrm>
-          <a:prstGeom prst="ellipse">
-            <a:avLst/>
-          </a:prstGeom>
-          <a:solidFill>
-            <a:srgbClr val="2B2B2D"/>
-          </a:solidFill>
-          <a:ln>
-            <a:noFill/>
-          </a:ln>
-          <a:effectLst/>
-        </p:spPr>
-        <p:txBody>
-          <a:bodyPr rtlCol="0" anchor="ctr"/>
-          <a:lstStyle/>
-          <a:p>
-            <a:pPr algn="ctr"/>
-          </a:p>
-        </p:txBody>
-      </p:sp>
-      <p:sp>
-        <p:nvSpPr>
-          <p:cNvPr id="212" name="ellipse 212"/>
-          <p:cNvSpPr/>
-          <p:nvPr/>
-        </p:nvSpPr>
-        <p:spPr>
-          <a:xfrm>
-            <a:off x="692658" y="5237226"/>
-            <a:ext cx="96012" cy="96012"/>
-          </a:xfrm>
-          <a:prstGeom prst="ellipse">
-            <a:avLst/>
-          </a:prstGeom>
-          <a:solidFill>
-            <a:srgbClr val="2B2B2D"/>
-          </a:solidFill>
-          <a:ln>
-            <a:noFill/>
-          </a:ln>
-          <a:effectLst/>
-        </p:spPr>
-        <p:txBody>
-          <a:bodyPr rtlCol="0" anchor="ctr"/>
-          <a:lstStyle/>
-          <a:p>
-            <a:pPr algn="ctr"/>
-          </a:p>
-        </p:txBody>
-      </p:sp>
-      <p:sp>
-        <p:nvSpPr>
-          <p:cNvPr id="213" name="ellipse 213"/>
-          <p:cNvSpPr/>
-          <p:nvPr/>
-        </p:nvSpPr>
-        <p:spPr>
-          <a:xfrm>
-            <a:off x="834390" y="5237226"/>
-            <a:ext cx="96012" cy="96012"/>
-          </a:xfrm>
-          <a:prstGeom prst="ellipse">
-            <a:avLst/>
-          </a:prstGeom>
-          <a:solidFill>
-            <a:srgbClr val="2B2B2D"/>
-          </a:solidFill>
-          <a:ln>
-            <a:noFill/>
-          </a:ln>
-          <a:effectLst/>
-        </p:spPr>
-        <p:txBody>
-          <a:bodyPr rtlCol="0" anchor="ctr"/>
-          <a:lstStyle/>
-          <a:p>
-            <a:pPr algn="ctr"/>
-          </a:p>
-        </p:txBody>
-      </p:sp>
-      <p:sp>
-        <p:nvSpPr>
-          <p:cNvPr id="214" name="ellipse 214"/>
-          <p:cNvSpPr/>
-          <p:nvPr/>
-        </p:nvSpPr>
-        <p:spPr>
-          <a:xfrm>
-            <a:off x="976122" y="5237226"/>
-            <a:ext cx="96012" cy="96012"/>
-          </a:xfrm>
-          <a:prstGeom prst="ellipse">
-            <a:avLst/>
-          </a:prstGeom>
-          <a:solidFill>
-            <a:srgbClr val="2B2B2D"/>
-          </a:solidFill>
-          <a:ln>
-            <a:noFill/>
-          </a:ln>
-          <a:effectLst/>
-        </p:spPr>
-        <p:txBody>
-          <a:bodyPr rtlCol="0" anchor="ctr"/>
-          <a:lstStyle/>
-          <a:p>
-            <a:pPr algn="ctr"/>
-          </a:p>
-        </p:txBody>
-      </p:sp>
-      <p:sp>
-        <p:nvSpPr>
-          <p:cNvPr id="215" name="ellipse 215"/>
-          <p:cNvSpPr/>
-          <p:nvPr/>
-        </p:nvSpPr>
-        <p:spPr>
-          <a:xfrm>
-            <a:off x="1117854" y="5237226"/>
-            <a:ext cx="96012" cy="96012"/>
-          </a:xfrm>
-          <a:prstGeom prst="ellipse">
-            <a:avLst/>
-          </a:prstGeom>
-          <a:solidFill>
-            <a:srgbClr val="2B2B2D"/>
-          </a:solidFill>
-          <a:ln>
-            <a:noFill/>
-          </a:ln>
-          <a:effectLst/>
-        </p:spPr>
-        <p:txBody>
-          <a:bodyPr rtlCol="0" anchor="ctr"/>
-          <a:lstStyle/>
-          <a:p>
-            <a:pPr algn="ctr"/>
-          </a:p>
-        </p:txBody>
-      </p:sp>
-      <p:sp>
-        <p:nvSpPr>
-          <p:cNvPr id="216" name="ellipse 216"/>
-          <p:cNvSpPr/>
-          <p:nvPr/>
-        </p:nvSpPr>
-        <p:spPr>
-          <a:xfrm>
-            <a:off x="1259586" y="5237226"/>
-            <a:ext cx="96012" cy="96012"/>
-          </a:xfrm>
-          <a:prstGeom prst="ellipse">
-            <a:avLst/>
-          </a:prstGeom>
-          <a:solidFill>
-            <a:srgbClr val="2B2B2D"/>
-          </a:solidFill>
-          <a:ln>
-            <a:noFill/>
-          </a:ln>
-          <a:effectLst/>
-        </p:spPr>
-        <p:txBody>
-          <a:bodyPr rtlCol="0" anchor="ctr"/>
-          <a:lstStyle/>
-          <a:p>
-            <a:pPr algn="ctr"/>
-          </a:p>
-        </p:txBody>
-      </p:sp>
-      <p:sp>
-        <p:nvSpPr>
-          <p:cNvPr id="217" name="ellipse 217"/>
-          <p:cNvSpPr/>
-          <p:nvPr/>
-        </p:nvSpPr>
-        <p:spPr>
-          <a:xfrm>
-            <a:off x="1401318" y="5237226"/>
-            <a:ext cx="96012" cy="96012"/>
-          </a:xfrm>
-          <a:prstGeom prst="ellipse">
-            <a:avLst/>
-          </a:prstGeom>
-          <a:solidFill>
-            <a:srgbClr val="2B2B2D"/>
-          </a:solidFill>
-          <a:ln>
-            <a:noFill/>
-          </a:ln>
-          <a:effectLst/>
-        </p:spPr>
-        <p:txBody>
-          <a:bodyPr rtlCol="0" anchor="ctr"/>
-          <a:lstStyle/>
-          <a:p>
-            <a:pPr algn="ctr"/>
-          </a:p>
-        </p:txBody>
-      </p:sp>
-      <p:sp>
-        <p:nvSpPr>
-          <p:cNvPr id="218" name="ellipse 218"/>
-          <p:cNvSpPr/>
-          <p:nvPr/>
-        </p:nvSpPr>
-        <p:spPr>
-          <a:xfrm>
-            <a:off x="1543050" y="5237226"/>
-            <a:ext cx="96012" cy="96012"/>
-          </a:xfrm>
-          <a:prstGeom prst="ellipse">
-            <a:avLst/>
-          </a:prstGeom>
-          <a:solidFill>
-            <a:srgbClr val="2B2B2D"/>
-          </a:solidFill>
-          <a:ln>
-            <a:noFill/>
-          </a:ln>
-          <a:effectLst/>
-        </p:spPr>
-        <p:txBody>
-          <a:bodyPr rtlCol="0" anchor="ctr"/>
-          <a:lstStyle/>
-          <a:p>
-            <a:pPr algn="ctr"/>
-          </a:p>
-        </p:txBody>
-      </p:sp>
-      <p:sp>
-        <p:nvSpPr>
-          <p:cNvPr id="219" name="ellipse 219"/>
-          <p:cNvSpPr/>
-          <p:nvPr/>
-        </p:nvSpPr>
-        <p:spPr>
-          <a:xfrm>
-            <a:off x="1684782" y="5237226"/>
-            <a:ext cx="96012" cy="96012"/>
-          </a:xfrm>
-          <a:prstGeom prst="ellipse">
-            <a:avLst/>
-          </a:prstGeom>
-          <a:solidFill>
-            <a:srgbClr val="2B2B2D"/>
-          </a:solidFill>
-          <a:ln>
-            <a:noFill/>
-          </a:ln>
-          <a:effectLst/>
-        </p:spPr>
-        <p:txBody>
-          <a:bodyPr rtlCol="0" anchor="ctr"/>
-          <a:lstStyle/>
-          <a:p>
-            <a:pPr algn="ctr"/>
-          </a:p>
-        </p:txBody>
-      </p:sp>
-      <p:sp>
-        <p:nvSpPr>
-          <p:cNvPr id="220" name="ellipse 220"/>
-          <p:cNvSpPr/>
-          <p:nvPr/>
-        </p:nvSpPr>
-        <p:spPr>
-          <a:xfrm>
-            <a:off x="1826514" y="5237226"/>
-            <a:ext cx="96012" cy="96012"/>
-          </a:xfrm>
-          <a:prstGeom prst="ellipse">
-            <a:avLst/>
-          </a:prstGeom>
-          <a:solidFill>
-            <a:srgbClr val="2B2B2D"/>
-          </a:solidFill>
-          <a:ln>
-            <a:noFill/>
-          </a:ln>
-          <a:effectLst/>
-        </p:spPr>
-        <p:txBody>
-          <a:bodyPr rtlCol="0" anchor="ctr"/>
-          <a:lstStyle/>
-          <a:p>
-            <a:pPr algn="ctr"/>
-          </a:p>
-        </p:txBody>
-      </p:sp>
-      <p:sp>
-        <p:nvSpPr>
-          <p:cNvPr id="221" name="ellipse 221"/>
-          <p:cNvSpPr/>
-          <p:nvPr/>
-        </p:nvSpPr>
-        <p:spPr>
-          <a:xfrm>
-            <a:off x="1968246" y="5237226"/>
-            <a:ext cx="96012" cy="96012"/>
-          </a:xfrm>
-          <a:prstGeom prst="ellipse">
-            <a:avLst/>
-          </a:prstGeom>
-          <a:solidFill>
-            <a:srgbClr val="2B2B2D"/>
-          </a:solidFill>
-          <a:ln>
-            <a:noFill/>
-          </a:ln>
-          <a:effectLst/>
-        </p:spPr>
-        <p:txBody>
-          <a:bodyPr rtlCol="0" anchor="ctr"/>
-          <a:lstStyle/>
-          <a:p>
-            <a:pPr algn="ctr"/>
-          </a:p>
-        </p:txBody>
-      </p:sp>
-      <p:sp>
-        <p:nvSpPr>
-          <p:cNvPr id="222" name="ellipse 222"/>
-          <p:cNvSpPr/>
-          <p:nvPr/>
-        </p:nvSpPr>
-        <p:spPr>
-          <a:xfrm>
-            <a:off x="2109978" y="5237226"/>
-            <a:ext cx="96012" cy="96012"/>
-          </a:xfrm>
-          <a:prstGeom prst="ellipse">
-            <a:avLst/>
-          </a:prstGeom>
-          <a:solidFill>
-            <a:srgbClr val="2B2B2D"/>
-          </a:solidFill>
-          <a:ln>
-            <a:noFill/>
-          </a:ln>
-          <a:effectLst/>
-        </p:spPr>
-        <p:txBody>
-          <a:bodyPr rtlCol="0" anchor="ctr"/>
-          <a:lstStyle/>
-          <a:p>
-            <a:pPr algn="ctr"/>
-          </a:p>
-        </p:txBody>
-      </p:sp>
-      <p:sp>
-        <p:nvSpPr>
-          <p:cNvPr id="223" name="ellipse 223"/>
-          <p:cNvSpPr/>
-          <p:nvPr/>
-        </p:nvSpPr>
-        <p:spPr>
-          <a:xfrm>
-            <a:off x="2251710" y="5237226"/>
-            <a:ext cx="96012" cy="96012"/>
-          </a:xfrm>
-          <a:prstGeom prst="ellipse">
-            <a:avLst/>
-          </a:prstGeom>
-          <a:solidFill>
-            <a:srgbClr val="2B2B2D"/>
-          </a:solidFill>
-          <a:ln>
-            <a:noFill/>
-          </a:ln>
-          <a:effectLst/>
-        </p:spPr>
-        <p:txBody>
-          <a:bodyPr rtlCol="0" anchor="ctr"/>
-          <a:lstStyle/>
-          <a:p>
-            <a:pPr algn="ctr"/>
-          </a:p>
-        </p:txBody>
-      </p:sp>
-      <p:sp>
-        <p:nvSpPr>
-          <p:cNvPr id="224" name="ellipse 224"/>
-          <p:cNvSpPr/>
-          <p:nvPr/>
-        </p:nvSpPr>
-        <p:spPr>
-          <a:xfrm>
-            <a:off x="2393442" y="5237226"/>
-            <a:ext cx="96012" cy="96012"/>
-          </a:xfrm>
-          <a:prstGeom prst="ellipse">
-            <a:avLst/>
-          </a:prstGeom>
-          <a:solidFill>
-            <a:srgbClr val="2B2B2D"/>
-          </a:solidFill>
-          <a:ln>
-            <a:noFill/>
-          </a:ln>
-          <a:effectLst/>
-        </p:spPr>
-        <p:txBody>
-          <a:bodyPr rtlCol="0" anchor="ctr"/>
-          <a:lstStyle/>
-          <a:p>
-            <a:pPr algn="ctr"/>
-          </a:p>
-        </p:txBody>
-      </p:sp>
-      <p:sp>
-        <p:nvSpPr>
-          <p:cNvPr id="225" name="ellipse 225"/>
-          <p:cNvSpPr/>
-          <p:nvPr/>
-        </p:nvSpPr>
-        <p:spPr>
-          <a:xfrm>
-            <a:off x="2535174" y="5237226"/>
-            <a:ext cx="96012" cy="96012"/>
-          </a:xfrm>
-          <a:prstGeom prst="ellipse">
-            <a:avLst/>
-          </a:prstGeom>
-          <a:solidFill>
-            <a:srgbClr val="2B2B2D"/>
-          </a:solidFill>
-          <a:ln>
-            <a:noFill/>
-          </a:ln>
-          <a:effectLst/>
-        </p:spPr>
-        <p:txBody>
-          <a:bodyPr rtlCol="0" anchor="ctr"/>
-          <a:lstStyle/>
-          <a:p>
-            <a:pPr algn="ctr"/>
-          </a:p>
-        </p:txBody>
-      </p:sp>
-      <p:sp>
-        <p:nvSpPr>
-          <p:cNvPr id="226" name="ellipse 226"/>
-          <p:cNvSpPr/>
-          <p:nvPr/>
-        </p:nvSpPr>
-        <p:spPr>
-          <a:xfrm>
-            <a:off x="2676906" y="5237226"/>
-            <a:ext cx="96012" cy="96012"/>
-          </a:xfrm>
-          <a:prstGeom prst="ellipse">
-            <a:avLst/>
-          </a:prstGeom>
-          <a:solidFill>
-            <a:srgbClr val="2B2B2D"/>
-          </a:solidFill>
-          <a:ln>
-            <a:noFill/>
-          </a:ln>
-          <a:effectLst/>
-        </p:spPr>
-        <p:txBody>
-          <a:bodyPr rtlCol="0" anchor="ctr"/>
-          <a:lstStyle/>
-          <a:p>
-            <a:pPr algn="ctr"/>
-          </a:p>
-        </p:txBody>
-      </p:sp>
-      <p:sp>
-        <p:nvSpPr>
-          <p:cNvPr id="227" name="ellipse 227"/>
-          <p:cNvSpPr/>
-          <p:nvPr/>
-        </p:nvSpPr>
-        <p:spPr>
-          <a:xfrm>
-            <a:off x="2818638" y="5237226"/>
-            <a:ext cx="96012" cy="96012"/>
-          </a:xfrm>
-          <a:prstGeom prst="ellipse">
-            <a:avLst/>
-          </a:prstGeom>
-          <a:solidFill>
-            <a:srgbClr val="2B2B2D"/>
-          </a:solidFill>
-          <a:ln>
-            <a:noFill/>
-          </a:ln>
-          <a:effectLst/>
-        </p:spPr>
-        <p:txBody>
-          <a:bodyPr rtlCol="0" anchor="ctr"/>
-          <a:lstStyle/>
-          <a:p>
-            <a:pPr algn="ctr"/>
-          </a:p>
-        </p:txBody>
-      </p:sp>
-      <p:sp>
-        <p:nvSpPr>
-          <p:cNvPr id="228" name="ellipse 228"/>
-          <p:cNvSpPr/>
-          <p:nvPr/>
-        </p:nvSpPr>
-        <p:spPr>
-          <a:xfrm>
-            <a:off x="2960370" y="5237226"/>
-            <a:ext cx="96012" cy="96012"/>
-          </a:xfrm>
-          <a:prstGeom prst="ellipse">
-            <a:avLst/>
-          </a:prstGeom>
-          <a:solidFill>
-            <a:srgbClr val="2B2B2D"/>
-          </a:solidFill>
-          <a:ln>
-            <a:noFill/>
-          </a:ln>
-          <a:effectLst/>
-        </p:spPr>
-        <p:txBody>
-          <a:bodyPr rtlCol="0" anchor="ctr"/>
-          <a:lstStyle/>
-          <a:p>
-            <a:pPr algn="ctr"/>
-          </a:p>
-        </p:txBody>
-      </p:sp>
-      <p:sp>
-        <p:nvSpPr>
-          <p:cNvPr id="229" name="ellipse 229"/>
-          <p:cNvSpPr/>
-          <p:nvPr/>
-        </p:nvSpPr>
-        <p:spPr>
-          <a:xfrm>
-            <a:off x="3102102" y="5237226"/>
-            <a:ext cx="96012" cy="96012"/>
-          </a:xfrm>
-          <a:prstGeom prst="ellipse">
-            <a:avLst/>
-          </a:prstGeom>
-          <a:solidFill>
-            <a:srgbClr val="2B2B2D"/>
-          </a:solidFill>
-          <a:ln>
-            <a:noFill/>
-          </a:ln>
-          <a:effectLst/>
-        </p:spPr>
-        <p:txBody>
-          <a:bodyPr rtlCol="0" anchor="ctr"/>
-          <a:lstStyle/>
-          <a:p>
-            <a:pPr algn="ctr"/>
-          </a:p>
-        </p:txBody>
-      </p:sp>
-      <p:sp>
-        <p:nvSpPr>
-          <p:cNvPr id="230" name="ellipse 230"/>
-          <p:cNvSpPr/>
-          <p:nvPr/>
-        </p:nvSpPr>
-        <p:spPr>
-          <a:xfrm>
-            <a:off x="3243834" y="5237226"/>
-            <a:ext cx="96012" cy="96012"/>
-          </a:xfrm>
-          <a:prstGeom prst="ellipse">
-            <a:avLst/>
-          </a:prstGeom>
-          <a:solidFill>
-            <a:srgbClr val="2B2B2D"/>
-          </a:solidFill>
-          <a:ln>
-            <a:noFill/>
-          </a:ln>
-          <a:effectLst/>
-        </p:spPr>
-        <p:txBody>
-          <a:bodyPr rtlCol="0" anchor="ctr"/>
-          <a:lstStyle/>
-          <a:p>
-            <a:pPr algn="ctr"/>
-          </a:p>
-        </p:txBody>
-      </p:sp>
-      <p:sp>
-        <p:nvSpPr>
-          <p:cNvPr id="231" name="ellipse 231"/>
-          <p:cNvSpPr/>
-          <p:nvPr/>
-        </p:nvSpPr>
-        <p:spPr>
-          <a:xfrm>
-            <a:off x="3385566" y="5237226"/>
-            <a:ext cx="96012" cy="96012"/>
-          </a:xfrm>
-          <a:prstGeom prst="ellipse">
-            <a:avLst/>
-          </a:prstGeom>
-          <a:solidFill>
-            <a:srgbClr val="2B2B2D"/>
-          </a:solidFill>
-          <a:ln>
-            <a:noFill/>
-          </a:ln>
-          <a:effectLst/>
-        </p:spPr>
-        <p:txBody>
-          <a:bodyPr rtlCol="0" anchor="ctr"/>
-          <a:lstStyle/>
-          <a:p>
-            <a:pPr algn="ctr"/>
-          </a:p>
-        </p:txBody>
-      </p:sp>
-      <p:sp>
-        <p:nvSpPr>
-          <p:cNvPr id="232" name="TextBox 232"/>
-          <p:cNvSpPr txBox="1"/>
-          <p:nvPr/>
-        </p:nvSpPr>
-        <p:spPr>
-          <a:xfrm>
-            <a:off x="694944" y="5413248"/>
-            <a:ext cx="5486400" cy="137160"/>
-          </a:xfrm>
-          <a:prstGeom prst="rect">
-            <a:avLst/>
-          </a:prstGeom>
-          <a:noFill/>
-        </p:spPr>
-        <p:txBody>
-          <a:bodyPr wrap="square" lIns="0" rIns="0" tIns="0" bIns="0" anchor="ctr">
-            <a:spAutoFit/>
-          </a:bodyPr>
-          <a:lstStyle/>
-          <a:p>
-            <a:pPr algn="l"/>
-            <a:r>
               <a:rPr sz="900" b="0" spc="100">
                 <a:solidFill>
                   <a:srgbClr val="FF6B3D"/>
@@ -11911,7 +11837,7 @@
       </p:sp>
       <p:sp>
         <p:nvSpPr>
-          <p:cNvPr id="233" name="rect 233"/>
+          <p:cNvPr id="232" name="rect 232"/>
           <p:cNvSpPr/>
           <p:nvPr/>
         </p:nvSpPr>
@@ -11943,7 +11869,7 @@
       </p:sp>
       <p:sp>
         <p:nvSpPr>
-          <p:cNvPr id="234" name="TextBox 234"/>
+          <p:cNvPr id="233" name="TextBox 233"/>
           <p:cNvSpPr txBox="1"/>
           <p:nvPr/>
         </p:nvSpPr>
@@ -11978,7 +11904,7 @@
       </p:sp>
       <p:sp>
         <p:nvSpPr>
-          <p:cNvPr id="235" name="TextBox 235"/>
+          <p:cNvPr id="234" name="TextBox 234"/>
           <p:cNvSpPr txBox="1"/>
           <p:nvPr/>
         </p:nvSpPr>
@@ -12013,7 +11939,7 @@
       </p:sp>
       <p:sp>
         <p:nvSpPr>
-          <p:cNvPr id="236" name="TextBox 236"/>
+          <p:cNvPr id="235" name="TextBox 235"/>
           <p:cNvSpPr txBox="1"/>
           <p:nvPr/>
         </p:nvSpPr>
@@ -12048,7 +11974,7 @@
       </p:sp>
       <p:sp>
         <p:nvSpPr>
-          <p:cNvPr id="237" name="rect 237"/>
+          <p:cNvPr id="236" name="rect 236"/>
           <p:cNvSpPr/>
           <p:nvPr/>
         </p:nvSpPr>
@@ -12080,7 +12006,7 @@
       </p:sp>
       <p:pic>
         <p:nvPicPr>
-          <p:cNvPr id="238" name="Picture 238"/>
+          <p:cNvPr id="237" name="Picture 237"/>
           <p:cNvPicPr/>
           <p:nvPr/>
         </p:nvPicPr>
@@ -12102,7 +12028,7 @@
       </p:pic>
       <p:sp>
         <p:nvSpPr>
-          <p:cNvPr id="239" name="TextBox 239"/>
+          <p:cNvPr id="238" name="TextBox 238"/>
           <p:cNvSpPr txBox="1"/>
           <p:nvPr/>
         </p:nvSpPr>
@@ -12137,7 +12063,7 @@
       </p:sp>
       <p:sp>
         <p:nvSpPr>
-          <p:cNvPr id="240" name="rect 240"/>
+          <p:cNvPr id="239" name="rect 239"/>
           <p:cNvSpPr/>
           <p:nvPr/>
         </p:nvSpPr>
@@ -12169,7 +12095,7 @@
       </p:sp>
       <p:pic>
         <p:nvPicPr>
-          <p:cNvPr id="241" name="Picture 241"/>
+          <p:cNvPr id="240" name="Picture 240"/>
           <p:cNvPicPr/>
           <p:nvPr/>
         </p:nvPicPr>
@@ -12191,7 +12117,7 @@
       </p:pic>
       <p:sp>
         <p:nvSpPr>
-          <p:cNvPr id="242" name="TextBox 242"/>
+          <p:cNvPr id="241" name="TextBox 241"/>
           <p:cNvSpPr txBox="1"/>
           <p:nvPr/>
         </p:nvSpPr>
@@ -12226,7 +12152,7 @@
       </p:sp>
       <p:sp>
         <p:nvSpPr>
-          <p:cNvPr id="243" name="rect 243"/>
+          <p:cNvPr id="242" name="rect 242"/>
           <p:cNvSpPr/>
           <p:nvPr/>
         </p:nvSpPr>
@@ -12258,7 +12184,7 @@
       </p:sp>
       <p:pic>
         <p:nvPicPr>
-          <p:cNvPr id="244" name="Picture 244"/>
+          <p:cNvPr id="243" name="Picture 243"/>
           <p:cNvPicPr/>
           <p:nvPr/>
         </p:nvPicPr>
@@ -12280,7 +12206,7 @@
       </p:pic>
       <p:sp>
         <p:nvSpPr>
-          <p:cNvPr id="245" name="TextBox 245"/>
+          <p:cNvPr id="244" name="TextBox 244"/>
           <p:cNvSpPr txBox="1"/>
           <p:nvPr/>
         </p:nvSpPr>
@@ -12315,7 +12241,7 @@
       </p:sp>
       <p:sp>
         <p:nvSpPr>
-          <p:cNvPr id="246" name="rect 246"/>
+          <p:cNvPr id="245" name="rect 245"/>
           <p:cNvSpPr/>
           <p:nvPr/>
         </p:nvSpPr>
@@ -12345,7 +12271,7 @@
       </p:sp>
       <p:sp>
         <p:nvSpPr>
-          <p:cNvPr id="247" name="TextBox 247"/>
+          <p:cNvPr id="246" name="TextBox 246"/>
           <p:cNvSpPr txBox="1"/>
           <p:nvPr/>
         </p:nvSpPr>
@@ -12373,14 +12299,14 @@
                 </a:solidFill>
                 <a:latin typeface="Courier New"/>
               </a:rPr>
-              <a:t>Source: McKinsey, The State of AI in 2025 — 39% attribute any EBIT impact to AI</a:t>
+              <a:t>Source: McKinsey, The State of AI in 2025. 39% attribute any EBIT impact to AI</a:t>
             </a:r>
           </a:p>
         </p:txBody>
       </p:sp>
       <p:pic>
         <p:nvPicPr>
-          <p:cNvPr id="248" name="Logo"/>
+          <p:cNvPr id="247" name="Logo"/>
           <p:cNvPicPr/>
           <p:nvPr/>
         </p:nvPicPr>
@@ -12596,7 +12522,7 @@
                 </a:solidFill>
                 <a:latin typeface="Poppins"/>
               </a:rPr>
-              <a:t> — from first conversation to a build-ready package.</a:t>
+              <a:t>. From first conversation to a build-ready package.</a:t>
             </a:r>
           </a:p>
         </p:txBody>
@@ -13586,6 +13512,315 @@
             <a:avLst/>
           </a:prstGeom>
           <a:solidFill>
+            <a:srgbClr val="1F1F22"/>
+          </a:solidFill>
+          <a:ln w="9525">
+            <a:solidFill>
+              <a:srgbClr val="5A5A60"/>
+            </a:solidFill>
+          </a:ln>
+          <a:effectLst/>
+        </p:spPr>
+        <p:txBody>
+          <a:bodyPr rtlCol="0" anchor="ctr"/>
+          <a:lstStyle/>
+          <a:p>
+            <a:pPr algn="ctr"/>
+          </a:p>
+        </p:txBody>
+      </p:sp>
+      <p:sp>
+        <p:nvSpPr>
+          <p:cNvPr id="136" name="TextBox 136"/>
+          <p:cNvSpPr txBox="1"/>
+          <p:nvPr/>
+        </p:nvSpPr>
+        <p:spPr>
+          <a:xfrm>
+            <a:off x="1527048" y="3968496"/>
+            <a:ext cx="9116568" cy="155448"/>
+          </a:xfrm>
+          <a:prstGeom prst="rect">
+            <a:avLst/>
+          </a:prstGeom>
+          <a:noFill/>
+        </p:spPr>
+        <p:txBody>
+          <a:bodyPr wrap="square" lIns="0" rIns="0" tIns="0" bIns="0" anchor="ctr">
+            <a:spAutoFit/>
+          </a:bodyPr>
+          <a:lstStyle/>
+          <a:p>
+            <a:pPr algn="ctr"/>
+            <a:r>
+              <a:rPr sz="900" b="0" spc="200">
+                <a:solidFill>
+                  <a:srgbClr val="9A9AA2"/>
+                </a:solidFill>
+                <a:latin typeface="Courier New"/>
+              </a:rPr>
+              <a:t>AI AGENTS SUPPORT EVERY STAGE</a:t>
+            </a:r>
+          </a:p>
+        </p:txBody>
+      </p:sp>
+      <p:sp>
+        <p:nvSpPr>
+          <p:cNvPr id="137" name="rect 137"/>
+          <p:cNvSpPr/>
+          <p:nvPr/>
+        </p:nvSpPr>
+        <p:spPr>
+          <a:xfrm rot="484747">
+            <a:off x="1747731" y="4549140"/>
+            <a:ext cx="4359234" cy="18288"/>
+          </a:xfrm>
+          <a:prstGeom prst="rect">
+            <a:avLst/>
+          </a:prstGeom>
+          <a:solidFill>
+            <a:srgbClr val="5A5A60"/>
+          </a:solidFill>
+          <a:ln>
+            <a:noFill/>
+          </a:ln>
+          <a:effectLst/>
+        </p:spPr>
+        <p:txBody>
+          <a:bodyPr rtlCol="0" anchor="ctr"/>
+          <a:lstStyle/>
+          <a:p>
+            <a:pPr algn="ctr"/>
+          </a:p>
+        </p:txBody>
+      </p:sp>
+      <p:sp>
+        <p:nvSpPr>
+          <p:cNvPr id="138" name="rect 138"/>
+          <p:cNvSpPr/>
+          <p:nvPr/>
+        </p:nvSpPr>
+        <p:spPr>
+          <a:xfrm rot="950949">
+            <a:off x="3884708" y="4549140"/>
+            <a:ext cx="2243264" cy="18288"/>
+          </a:xfrm>
+          <a:prstGeom prst="rect">
+            <a:avLst/>
+          </a:prstGeom>
+          <a:solidFill>
+            <a:srgbClr val="5A5A60"/>
+          </a:solidFill>
+          <a:ln>
+            <a:noFill/>
+          </a:ln>
+          <a:effectLst/>
+        </p:spPr>
+        <p:txBody>
+          <a:bodyPr rtlCol="0" anchor="ctr"/>
+          <a:lstStyle/>
+          <a:p>
+            <a:pPr algn="ctr"/>
+          </a:p>
+        </p:txBody>
+      </p:sp>
+      <p:sp>
+        <p:nvSpPr>
+          <p:cNvPr id="139" name="rect 139"/>
+          <p:cNvSpPr/>
+          <p:nvPr/>
+        </p:nvSpPr>
+        <p:spPr>
+          <a:xfrm rot="5400000">
+            <a:off x="5779008" y="4549140"/>
+            <a:ext cx="612648" cy="18288"/>
+          </a:xfrm>
+          <a:prstGeom prst="rect">
+            <a:avLst/>
+          </a:prstGeom>
+          <a:solidFill>
+            <a:srgbClr val="5A5A60"/>
+          </a:solidFill>
+          <a:ln>
+            <a:noFill/>
+          </a:ln>
+          <a:effectLst/>
+        </p:spPr>
+        <p:txBody>
+          <a:bodyPr rtlCol="0" anchor="ctr"/>
+          <a:lstStyle/>
+          <a:p>
+            <a:pPr algn="ctr"/>
+          </a:p>
+        </p:txBody>
+      </p:sp>
+      <p:sp>
+        <p:nvSpPr>
+          <p:cNvPr id="140" name="rect 140"/>
+          <p:cNvSpPr/>
+          <p:nvPr/>
+        </p:nvSpPr>
+        <p:spPr>
+          <a:xfrm rot="9849051">
+            <a:off x="6042692" y="4549140"/>
+            <a:ext cx="2243264" cy="18288"/>
+          </a:xfrm>
+          <a:prstGeom prst="rect">
+            <a:avLst/>
+          </a:prstGeom>
+          <a:solidFill>
+            <a:srgbClr val="5A5A60"/>
+          </a:solidFill>
+          <a:ln>
+            <a:noFill/>
+          </a:ln>
+          <a:effectLst/>
+        </p:spPr>
+        <p:txBody>
+          <a:bodyPr rtlCol="0" anchor="ctr"/>
+          <a:lstStyle/>
+          <a:p>
+            <a:pPr algn="ctr"/>
+          </a:p>
+        </p:txBody>
+      </p:sp>
+      <p:sp>
+        <p:nvSpPr>
+          <p:cNvPr id="141" name="rect 141"/>
+          <p:cNvSpPr/>
+          <p:nvPr/>
+        </p:nvSpPr>
+        <p:spPr>
+          <a:xfrm rot="10315253">
+            <a:off x="6063699" y="4549140"/>
+            <a:ext cx="4359234" cy="18288"/>
+          </a:xfrm>
+          <a:prstGeom prst="rect">
+            <a:avLst/>
+          </a:prstGeom>
+          <a:solidFill>
+            <a:srgbClr val="5A5A60"/>
+          </a:solidFill>
+          <a:ln>
+            <a:noFill/>
+          </a:ln>
+          <a:effectLst/>
+        </p:spPr>
+        <p:txBody>
+          <a:bodyPr rtlCol="0" anchor="ctr"/>
+          <a:lstStyle/>
+          <a:p>
+            <a:pPr algn="ctr"/>
+          </a:p>
+        </p:txBody>
+      </p:sp>
+      <p:sp>
+        <p:nvSpPr>
+          <p:cNvPr id="142" name="ellipse 142"/>
+          <p:cNvSpPr/>
+          <p:nvPr/>
+        </p:nvSpPr>
+        <p:spPr>
+          <a:xfrm>
+            <a:off x="5975604" y="4754880"/>
+            <a:ext cx="219456" cy="219456"/>
+          </a:xfrm>
+          <a:prstGeom prst="ellipse">
+            <a:avLst/>
+          </a:prstGeom>
+          <a:solidFill>
+            <a:srgbClr val="0E0E11"/>
+          </a:solidFill>
+          <a:ln w="12700">
+            <a:solidFill>
+              <a:srgbClr val="9A9AA2"/>
+            </a:solidFill>
+          </a:ln>
+          <a:effectLst/>
+        </p:spPr>
+        <p:txBody>
+          <a:bodyPr rtlCol="0" anchor="ctr"/>
+          <a:lstStyle/>
+          <a:p>
+            <a:pPr algn="ctr"/>
+          </a:p>
+        </p:txBody>
+      </p:sp>
+      <p:sp>
+        <p:nvSpPr>
+          <p:cNvPr id="143" name="rect 143"/>
+          <p:cNvSpPr/>
+          <p:nvPr/>
+        </p:nvSpPr>
+        <p:spPr>
+          <a:xfrm>
+            <a:off x="6076188" y="4974336"/>
+            <a:ext cx="18288" cy="292608"/>
+          </a:xfrm>
+          <a:prstGeom prst="rect">
+            <a:avLst/>
+          </a:prstGeom>
+          <a:solidFill>
+            <a:srgbClr val="5A5A60"/>
+          </a:solidFill>
+          <a:ln>
+            <a:noFill/>
+          </a:ln>
+          <a:effectLst/>
+        </p:spPr>
+        <p:txBody>
+          <a:bodyPr rtlCol="0" anchor="ctr"/>
+          <a:lstStyle/>
+          <a:p>
+            <a:pPr algn="ctr"/>
+          </a:p>
+        </p:txBody>
+      </p:sp>
+      <p:sp>
+        <p:nvSpPr>
+          <p:cNvPr id="144" name="triangle 144"/>
+          <p:cNvSpPr/>
+          <p:nvPr/>
+        </p:nvSpPr>
+        <p:spPr>
+          <a:xfrm rot="10800000">
+            <a:off x="5993892" y="5093208"/>
+            <a:ext cx="182880" cy="128016"/>
+          </a:xfrm>
+          <a:prstGeom prst="triangle">
+            <a:avLst/>
+          </a:prstGeom>
+          <a:solidFill>
+            <a:srgbClr val="9A9AA2"/>
+          </a:solidFill>
+          <a:ln>
+            <a:noFill/>
+          </a:ln>
+          <a:effectLst/>
+        </p:spPr>
+        <p:txBody>
+          <a:bodyPr rtlCol="0" anchor="ctr"/>
+          <a:lstStyle/>
+          <a:p>
+            <a:pPr algn="ctr"/>
+          </a:p>
+        </p:txBody>
+      </p:sp>
+      <p:sp>
+        <p:nvSpPr>
+          <p:cNvPr id="145" name="rect 145"/>
+          <p:cNvSpPr/>
+          <p:nvPr/>
+        </p:nvSpPr>
+        <p:spPr>
+          <a:xfrm>
+            <a:off x="694944" y="5230368"/>
+            <a:ext cx="10789920" cy="786384"/>
+          </a:xfrm>
+          <a:prstGeom prst="rect">
+            <a:avLst/>
+          </a:prstGeom>
+          <a:solidFill>
             <a:srgbClr val="161619"/>
           </a:solidFill>
           <a:ln w="9525">
@@ -13605,14 +13840,14 @@
       </p:sp>
       <p:sp>
         <p:nvSpPr>
-          <p:cNvPr id="136" name="TextBox 136"/>
-          <p:cNvSpPr txBox="1"/>
-          <p:nvPr/>
-        </p:nvSpPr>
-        <p:spPr>
-          <a:xfrm>
-            <a:off x="1527048" y="3968496"/>
-            <a:ext cx="9116568" cy="155448"/>
+          <p:cNvPr id="146" name="TextBox 146"/>
+          <p:cNvSpPr txBox="1"/>
+          <p:nvPr/>
+        </p:nvSpPr>
+        <p:spPr>
+          <a:xfrm>
+            <a:off x="987552" y="5413248"/>
+            <a:ext cx="5486400" cy="137160"/>
           </a:xfrm>
           <a:prstGeom prst="rect">
             <a:avLst/>
@@ -13625,7 +13860,7 @@
           </a:bodyPr>
           <a:lstStyle/>
           <a:p>
-            <a:pPr algn="ctr"/>
+            <a:pPr algn="l"/>
             <a:r>
               <a:rPr sz="900" b="0" spc="200">
                 <a:solidFill>
@@ -13633,233 +13868,21 @@
                 </a:solidFill>
                 <a:latin typeface="Courier New"/>
               </a:rPr>
-              <a:t>AI AGENTS SUPPORT EVERY STAGE</a:t>
-            </a:r>
-          </a:p>
-        </p:txBody>
-      </p:sp>
-      <p:sp>
-        <p:nvSpPr>
-          <p:cNvPr id="137" name="rect 137"/>
-          <p:cNvSpPr/>
-          <p:nvPr/>
-        </p:nvSpPr>
-        <p:spPr>
-          <a:xfrm rot="654752">
-            <a:off x="1729623" y="4662526"/>
-            <a:ext cx="4395450" cy="10973"/>
-          </a:xfrm>
-          <a:prstGeom prst="rect">
-            <a:avLst/>
-          </a:prstGeom>
-          <a:solidFill>
-            <a:srgbClr val="2B2B2D"/>
-          </a:solidFill>
-          <a:ln>
-            <a:noFill/>
-          </a:ln>
-          <a:effectLst/>
-        </p:spPr>
-        <p:txBody>
-          <a:bodyPr rtlCol="0" anchor="ctr"/>
-          <a:lstStyle/>
-          <a:p>
-            <a:pPr algn="ctr"/>
-          </a:p>
-        </p:txBody>
-      </p:sp>
-      <p:sp>
-        <p:nvSpPr>
-          <p:cNvPr id="138" name="rect 138"/>
-          <p:cNvSpPr/>
-          <p:nvPr/>
-        </p:nvSpPr>
-        <p:spPr>
-          <a:xfrm rot="1265178">
-            <a:off x="3849913" y="4662526"/>
-            <a:ext cx="2312854" cy="10973"/>
-          </a:xfrm>
-          <a:prstGeom prst="rect">
-            <a:avLst/>
-          </a:prstGeom>
-          <a:solidFill>
-            <a:srgbClr val="2B2B2D"/>
-          </a:solidFill>
-          <a:ln>
-            <a:noFill/>
-          </a:ln>
-          <a:effectLst/>
-        </p:spPr>
-        <p:txBody>
-          <a:bodyPr rtlCol="0" anchor="ctr"/>
-          <a:lstStyle/>
-          <a:p>
-            <a:pPr algn="ctr"/>
-          </a:p>
-        </p:txBody>
-      </p:sp>
-      <p:sp>
-        <p:nvSpPr>
-          <p:cNvPr id="139" name="rect 139"/>
-          <p:cNvSpPr/>
-          <p:nvPr/>
-        </p:nvSpPr>
-        <p:spPr>
-          <a:xfrm rot="5400000">
-            <a:off x="5669280" y="4662526"/>
-            <a:ext cx="832104" cy="10973"/>
-          </a:xfrm>
-          <a:prstGeom prst="rect">
-            <a:avLst/>
-          </a:prstGeom>
-          <a:solidFill>
-            <a:srgbClr val="2B2B2D"/>
-          </a:solidFill>
-          <a:ln>
-            <a:noFill/>
-          </a:ln>
-          <a:effectLst/>
-        </p:spPr>
-        <p:txBody>
-          <a:bodyPr rtlCol="0" anchor="ctr"/>
-          <a:lstStyle/>
-          <a:p>
-            <a:pPr algn="ctr"/>
-          </a:p>
-        </p:txBody>
-      </p:sp>
-      <p:sp>
-        <p:nvSpPr>
-          <p:cNvPr id="140" name="rect 140"/>
-          <p:cNvSpPr/>
-          <p:nvPr/>
-        </p:nvSpPr>
-        <p:spPr>
-          <a:xfrm rot="9534822">
-            <a:off x="6007897" y="4662526"/>
-            <a:ext cx="2312854" cy="10973"/>
-          </a:xfrm>
-          <a:prstGeom prst="rect">
-            <a:avLst/>
-          </a:prstGeom>
-          <a:solidFill>
-            <a:srgbClr val="2B2B2D"/>
-          </a:solidFill>
-          <a:ln>
-            <a:noFill/>
-          </a:ln>
-          <a:effectLst/>
-        </p:spPr>
-        <p:txBody>
-          <a:bodyPr rtlCol="0" anchor="ctr"/>
-          <a:lstStyle/>
-          <a:p>
-            <a:pPr algn="ctr"/>
-          </a:p>
-        </p:txBody>
-      </p:sp>
-      <p:sp>
-        <p:nvSpPr>
-          <p:cNvPr id="141" name="rect 141"/>
-          <p:cNvSpPr/>
-          <p:nvPr/>
-        </p:nvSpPr>
-        <p:spPr>
-          <a:xfrm rot="10145248">
-            <a:off x="6045591" y="4662526"/>
-            <a:ext cx="4395450" cy="10973"/>
-          </a:xfrm>
-          <a:prstGeom prst="rect">
-            <a:avLst/>
-          </a:prstGeom>
-          <a:solidFill>
-            <a:srgbClr val="2B2B2D"/>
-          </a:solidFill>
-          <a:ln>
-            <a:noFill/>
-          </a:ln>
-          <a:effectLst/>
-        </p:spPr>
-        <p:txBody>
-          <a:bodyPr rtlCol="0" anchor="ctr"/>
-          <a:lstStyle/>
-          <a:p>
-            <a:pPr algn="ctr"/>
-          </a:p>
-        </p:txBody>
-      </p:sp>
-      <p:sp>
-        <p:nvSpPr>
-          <p:cNvPr id="142" name="triangle 142"/>
-          <p:cNvSpPr/>
-          <p:nvPr/>
-        </p:nvSpPr>
-        <p:spPr>
-          <a:xfrm rot="10800000">
-            <a:off x="6021324" y="5084064"/>
-            <a:ext cx="128016" cy="109728"/>
-          </a:xfrm>
-          <a:prstGeom prst="triangle">
-            <a:avLst/>
-          </a:prstGeom>
-          <a:solidFill>
-            <a:srgbClr val="9A9AA2"/>
-          </a:solidFill>
-          <a:ln>
-            <a:noFill/>
-          </a:ln>
-          <a:effectLst/>
-        </p:spPr>
-        <p:txBody>
-          <a:bodyPr rtlCol="0" anchor="ctr"/>
-          <a:lstStyle/>
-          <a:p>
-            <a:pPr algn="ctr"/>
-          </a:p>
-        </p:txBody>
-      </p:sp>
-      <p:sp>
-        <p:nvSpPr>
-          <p:cNvPr id="143" name="rect 143"/>
-          <p:cNvSpPr/>
-          <p:nvPr/>
-        </p:nvSpPr>
-        <p:spPr>
-          <a:xfrm>
-            <a:off x="694944" y="5230368"/>
-            <a:ext cx="10789920" cy="786384"/>
-          </a:xfrm>
-          <a:prstGeom prst="rect">
-            <a:avLst/>
-          </a:prstGeom>
-          <a:solidFill>
-            <a:srgbClr val="161619"/>
-          </a:solidFill>
-          <a:ln w="9525">
-            <a:solidFill>
-              <a:srgbClr val="2B2B2D"/>
-            </a:solidFill>
-          </a:ln>
-          <a:effectLst/>
-        </p:spPr>
-        <p:txBody>
-          <a:bodyPr rtlCol="0" anchor="ctr"/>
-          <a:lstStyle/>
-          <a:p>
-            <a:pPr algn="ctr"/>
-          </a:p>
-        </p:txBody>
-      </p:sp>
-      <p:sp>
-        <p:nvSpPr>
-          <p:cNvPr id="144" name="TextBox 144"/>
-          <p:cNvSpPr txBox="1"/>
-          <p:nvPr/>
-        </p:nvSpPr>
-        <p:spPr>
-          <a:xfrm>
-            <a:off x="987552" y="5413248"/>
-            <a:ext cx="5486400" cy="137160"/>
+              <a:t>OUTPUT  ·  ONE APPROVED ARTIFACT</a:t>
+            </a:r>
+          </a:p>
+        </p:txBody>
+      </p:sp>
+      <p:sp>
+        <p:nvSpPr>
+          <p:cNvPr id="147" name="TextBox 147"/>
+          <p:cNvSpPr txBox="1"/>
+          <p:nvPr/>
+        </p:nvSpPr>
+        <p:spPr>
+          <a:xfrm>
+            <a:off x="987552" y="5669280"/>
+            <a:ext cx="10204704" cy="219456"/>
           </a:xfrm>
           <a:prstGeom prst="rect">
             <a:avLst/>
@@ -13874,55 +13897,20 @@
           <a:p>
             <a:pPr algn="l"/>
             <a:r>
-              <a:rPr sz="900" b="0" spc="200">
-                <a:solidFill>
-                  <a:srgbClr val="9A9AA2"/>
-                </a:solidFill>
-                <a:latin typeface="Courier New"/>
-              </a:rPr>
-              <a:t>OUTPUT  ·  ONE APPROVED ARTIFACT</a:t>
-            </a:r>
-          </a:p>
-        </p:txBody>
-      </p:sp>
-      <p:sp>
-        <p:nvSpPr>
-          <p:cNvPr id="145" name="TextBox 145"/>
-          <p:cNvSpPr txBox="1"/>
-          <p:nvPr/>
-        </p:nvSpPr>
-        <p:spPr>
-          <a:xfrm>
-            <a:off x="987552" y="5669280"/>
-            <a:ext cx="10204704" cy="219456"/>
-          </a:xfrm>
-          <a:prstGeom prst="rect">
-            <a:avLst/>
-          </a:prstGeom>
-          <a:noFill/>
-        </p:spPr>
-        <p:txBody>
-          <a:bodyPr wrap="square" lIns="0" rIns="0" tIns="0" bIns="0" anchor="ctr">
-            <a:spAutoFit/>
-          </a:bodyPr>
-          <a:lstStyle/>
-          <a:p>
-            <a:pPr algn="l"/>
-            <a:r>
               <a:rPr sz="1400" b="1">
                 <a:solidFill>
                   <a:srgbClr val="ECECEE"/>
                 </a:solidFill>
                 <a:latin typeface="Poppins"/>
               </a:rPr>
-              <a:t>Requirements, scope, cited research, compliance and prior patterns — approved before code.</a:t>
+              <a:t>Requirements, scope, cited research, compliance and prior patterns. Approved before code.</a:t>
             </a:r>
           </a:p>
         </p:txBody>
       </p:sp>
       <p:pic>
         <p:nvPicPr>
-          <p:cNvPr id="146" name="Logo"/>
+          <p:cNvPr id="148" name="Logo"/>
           <p:cNvPicPr/>
           <p:nvPr/>
         </p:nvPicPr>
@@ -14138,7 +14126,7 @@
                 </a:solidFill>
                 <a:latin typeface="Poppins"/>
               </a:rPr>
-              <a:t> — from approved package to software running in production. Every decision that matters stays with a person.</a:t>
+              <a:t> takes it from approved package to software running in production. Every decision that matters stays with a person.</a:t>
             </a:r>
           </a:p>
         </p:txBody>
@@ -15049,6 +15037,267 @@
             <a:avLst/>
           </a:prstGeom>
           <a:solidFill>
+            <a:srgbClr val="1F1F22"/>
+          </a:solidFill>
+          <a:ln w="9525">
+            <a:solidFill>
+              <a:srgbClr val="5A5A60"/>
+            </a:solidFill>
+          </a:ln>
+          <a:effectLst/>
+        </p:spPr>
+        <p:txBody>
+          <a:bodyPr rtlCol="0" anchor="ctr"/>
+          <a:lstStyle/>
+          <a:p>
+            <a:pPr algn="ctr"/>
+          </a:p>
+        </p:txBody>
+      </p:sp>
+      <p:sp>
+        <p:nvSpPr>
+          <p:cNvPr id="134" name="TextBox 134"/>
+          <p:cNvSpPr txBox="1"/>
+          <p:nvPr/>
+        </p:nvSpPr>
+        <p:spPr>
+          <a:xfrm>
+            <a:off x="4416552" y="3968496"/>
+            <a:ext cx="5952744" cy="155448"/>
+          </a:xfrm>
+          <a:prstGeom prst="rect">
+            <a:avLst/>
+          </a:prstGeom>
+          <a:noFill/>
+        </p:spPr>
+        <p:txBody>
+          <a:bodyPr wrap="square" lIns="0" rIns="0" tIns="0" bIns="0" anchor="ctr">
+            <a:spAutoFit/>
+          </a:bodyPr>
+          <a:lstStyle/>
+          <a:p>
+            <a:pPr algn="ctr"/>
+            <a:r>
+              <a:rPr sz="900" b="0" spc="200">
+                <a:solidFill>
+                  <a:srgbClr val="9A9AA2"/>
+                </a:solidFill>
+                <a:latin typeface="Courier New"/>
+              </a:rPr>
+              <a:t>AI AGENTS SUPPORT EVERY STAGE</a:t>
+            </a:r>
+          </a:p>
+        </p:txBody>
+      </p:sp>
+      <p:sp>
+        <p:nvSpPr>
+          <p:cNvPr id="135" name="rect 135"/>
+          <p:cNvSpPr/>
+          <p:nvPr/>
+        </p:nvSpPr>
+        <p:spPr>
+          <a:xfrm>
+            <a:off x="10369296" y="4197096"/>
+            <a:ext cx="10973" cy="557784"/>
+          </a:xfrm>
+          <a:prstGeom prst="rect">
+            <a:avLst/>
+          </a:prstGeom>
+          <a:solidFill>
+            <a:srgbClr val="FF6B3D"/>
+          </a:solidFill>
+          <a:ln>
+            <a:noFill/>
+          </a:ln>
+          <a:effectLst/>
+        </p:spPr>
+        <p:txBody>
+          <a:bodyPr rtlCol="0" anchor="ctr"/>
+          <a:lstStyle/>
+          <a:p>
+            <a:pPr algn="ctr"/>
+          </a:p>
+        </p:txBody>
+      </p:sp>
+      <p:sp>
+        <p:nvSpPr>
+          <p:cNvPr id="136" name="rect 136"/>
+          <p:cNvSpPr/>
+          <p:nvPr/>
+        </p:nvSpPr>
+        <p:spPr>
+          <a:xfrm>
+            <a:off x="1901952" y="4754880"/>
+            <a:ext cx="8467344" cy="10973"/>
+          </a:xfrm>
+          <a:prstGeom prst="rect">
+            <a:avLst/>
+          </a:prstGeom>
+          <a:solidFill>
+            <a:srgbClr val="FF6B3D"/>
+          </a:solidFill>
+          <a:ln>
+            <a:noFill/>
+          </a:ln>
+          <a:effectLst/>
+        </p:spPr>
+        <p:txBody>
+          <a:bodyPr rtlCol="0" anchor="ctr"/>
+          <a:lstStyle/>
+          <a:p>
+            <a:pPr algn="ctr"/>
+          </a:p>
+        </p:txBody>
+      </p:sp>
+      <p:sp>
+        <p:nvSpPr>
+          <p:cNvPr id="137" name="rect 137"/>
+          <p:cNvSpPr/>
+          <p:nvPr/>
+        </p:nvSpPr>
+        <p:spPr>
+          <a:xfrm>
+            <a:off x="1901952" y="3182112"/>
+            <a:ext cx="10973" cy="1572768"/>
+          </a:xfrm>
+          <a:prstGeom prst="rect">
+            <a:avLst/>
+          </a:prstGeom>
+          <a:solidFill>
+            <a:srgbClr val="FF6B3D"/>
+          </a:solidFill>
+          <a:ln>
+            <a:noFill/>
+          </a:ln>
+          <a:effectLst/>
+        </p:spPr>
+        <p:txBody>
+          <a:bodyPr rtlCol="0" anchor="ctr"/>
+          <a:lstStyle/>
+          <a:p>
+            <a:pPr algn="ctr"/>
+          </a:p>
+        </p:txBody>
+      </p:sp>
+      <p:sp>
+        <p:nvSpPr>
+          <p:cNvPr id="138" name="triangle 138"/>
+          <p:cNvSpPr/>
+          <p:nvPr/>
+        </p:nvSpPr>
+        <p:spPr>
+          <a:xfrm>
+            <a:off x="1852574" y="3049524"/>
+            <a:ext cx="109728" cy="137160"/>
+          </a:xfrm>
+          <a:prstGeom prst="triangle">
+            <a:avLst/>
+          </a:prstGeom>
+          <a:solidFill>
+            <a:srgbClr val="FF6B3D"/>
+          </a:solidFill>
+          <a:ln>
+            <a:noFill/>
+          </a:ln>
+          <a:effectLst/>
+        </p:spPr>
+        <p:txBody>
+          <a:bodyPr rtlCol="0" anchor="ctr"/>
+          <a:lstStyle/>
+          <a:p>
+            <a:pPr algn="ctr"/>
+          </a:p>
+        </p:txBody>
+      </p:sp>
+      <p:sp>
+        <p:nvSpPr>
+          <p:cNvPr id="139" name="rect 139"/>
+          <p:cNvSpPr/>
+          <p:nvPr/>
+        </p:nvSpPr>
+        <p:spPr>
+          <a:xfrm>
+            <a:off x="3529584" y="4608576"/>
+            <a:ext cx="5120640" cy="310896"/>
+          </a:xfrm>
+          <a:prstGeom prst="rect">
+            <a:avLst/>
+          </a:prstGeom>
+          <a:solidFill>
+            <a:srgbClr val="0E0E11"/>
+          </a:solidFill>
+          <a:ln>
+            <a:noFill/>
+          </a:ln>
+          <a:effectLst/>
+        </p:spPr>
+        <p:txBody>
+          <a:bodyPr rtlCol="0" anchor="ctr"/>
+          <a:lstStyle/>
+          <a:p>
+            <a:pPr algn="ctr"/>
+          </a:p>
+        </p:txBody>
+      </p:sp>
+      <p:sp>
+        <p:nvSpPr>
+          <p:cNvPr id="140" name="TextBox 140"/>
+          <p:cNvSpPr txBox="1"/>
+          <p:nvPr/>
+        </p:nvSpPr>
+        <p:spPr>
+          <a:xfrm>
+            <a:off x="3529584" y="4690872"/>
+            <a:ext cx="5120640" cy="164592"/>
+          </a:xfrm>
+          <a:prstGeom prst="rect">
+            <a:avLst/>
+          </a:prstGeom>
+          <a:noFill/>
+        </p:spPr>
+        <p:txBody>
+          <a:bodyPr wrap="square" lIns="0" rIns="0" tIns="0" bIns="0" anchor="ctr">
+            <a:spAutoFit/>
+          </a:bodyPr>
+          <a:lstStyle/>
+          <a:p>
+            <a:pPr algn="ctr"/>
+            <a:r>
+              <a:rPr sz="1100" b="0" spc="200">
+                <a:solidFill>
+                  <a:srgbClr val="FF6B3D"/>
+                </a:solidFill>
+                <a:latin typeface="Courier New"/>
+              </a:rPr>
+              <a:t>LEARN</a:t>
+            </a:r>
+            <a:r>
+              <a:rPr sz="1100" b="0" spc="100">
+                <a:solidFill>
+                  <a:srgbClr val="9A9AA2"/>
+                </a:solidFill>
+                <a:latin typeface="Courier New"/>
+              </a:rPr>
+              <a:t>  ·  every build teaches the next</a:t>
+            </a:r>
+          </a:p>
+        </p:txBody>
+      </p:sp>
+      <p:sp>
+        <p:nvSpPr>
+          <p:cNvPr id="141" name="rect 141"/>
+          <p:cNvSpPr/>
+          <p:nvPr/>
+        </p:nvSpPr>
+        <p:spPr>
+          <a:xfrm>
+            <a:off x="694944" y="5230368"/>
+            <a:ext cx="10789920" cy="786384"/>
+          </a:xfrm>
+          <a:prstGeom prst="rect">
+            <a:avLst/>
+          </a:prstGeom>
+          <a:solidFill>
             <a:srgbClr val="161619"/>
           </a:solidFill>
           <a:ln w="9525">
@@ -15068,14 +15317,14 @@
       </p:sp>
       <p:sp>
         <p:nvSpPr>
-          <p:cNvPr id="134" name="TextBox 134"/>
-          <p:cNvSpPr txBox="1"/>
-          <p:nvPr/>
-        </p:nvSpPr>
-        <p:spPr>
-          <a:xfrm>
-            <a:off x="4416552" y="3968496"/>
-            <a:ext cx="5952744" cy="155448"/>
+          <p:cNvPr id="142" name="TextBox 142"/>
+          <p:cNvSpPr txBox="1"/>
+          <p:nvPr/>
+        </p:nvSpPr>
+        <p:spPr>
+          <a:xfrm>
+            <a:off x="987552" y="5413248"/>
+            <a:ext cx="5486400" cy="137160"/>
           </a:xfrm>
           <a:prstGeom prst="rect">
             <a:avLst/>
@@ -15088,7 +15337,7 @@
           </a:bodyPr>
           <a:lstStyle/>
           <a:p>
-            <a:pPr algn="ctr"/>
+            <a:pPr algn="l"/>
             <a:r>
               <a:rPr sz="900" b="0" spc="200">
                 <a:solidFill>
@@ -15096,171 +15345,21 @@
                 </a:solidFill>
                 <a:latin typeface="Courier New"/>
               </a:rPr>
-              <a:t>AI AGENTS SUPPORT EVERY STAGE</a:t>
-            </a:r>
-          </a:p>
-        </p:txBody>
-      </p:sp>
-      <p:sp>
-        <p:nvSpPr>
-          <p:cNvPr id="135" name="rect 135"/>
-          <p:cNvSpPr/>
-          <p:nvPr/>
-        </p:nvSpPr>
-        <p:spPr>
-          <a:xfrm>
-            <a:off x="10369296" y="4197096"/>
-            <a:ext cx="10973" cy="557784"/>
-          </a:xfrm>
-          <a:prstGeom prst="rect">
-            <a:avLst/>
-          </a:prstGeom>
-          <a:solidFill>
-            <a:srgbClr val="FF6B3D"/>
-          </a:solidFill>
-          <a:ln>
-            <a:noFill/>
-          </a:ln>
-          <a:effectLst/>
-        </p:spPr>
-        <p:txBody>
-          <a:bodyPr rtlCol="0" anchor="ctr"/>
-          <a:lstStyle/>
-          <a:p>
-            <a:pPr algn="ctr"/>
-          </a:p>
-        </p:txBody>
-      </p:sp>
-      <p:sp>
-        <p:nvSpPr>
-          <p:cNvPr id="136" name="rect 136"/>
-          <p:cNvSpPr/>
-          <p:nvPr/>
-        </p:nvSpPr>
-        <p:spPr>
-          <a:xfrm>
-            <a:off x="1901952" y="4754880"/>
-            <a:ext cx="8467344" cy="10973"/>
-          </a:xfrm>
-          <a:prstGeom prst="rect">
-            <a:avLst/>
-          </a:prstGeom>
-          <a:solidFill>
-            <a:srgbClr val="FF6B3D"/>
-          </a:solidFill>
-          <a:ln>
-            <a:noFill/>
-          </a:ln>
-          <a:effectLst/>
-        </p:spPr>
-        <p:txBody>
-          <a:bodyPr rtlCol="0" anchor="ctr"/>
-          <a:lstStyle/>
-          <a:p>
-            <a:pPr algn="ctr"/>
-          </a:p>
-        </p:txBody>
-      </p:sp>
-      <p:sp>
-        <p:nvSpPr>
-          <p:cNvPr id="137" name="rect 137"/>
-          <p:cNvSpPr/>
-          <p:nvPr/>
-        </p:nvSpPr>
-        <p:spPr>
-          <a:xfrm>
-            <a:off x="1901952" y="3182112"/>
-            <a:ext cx="10973" cy="1572768"/>
-          </a:xfrm>
-          <a:prstGeom prst="rect">
-            <a:avLst/>
-          </a:prstGeom>
-          <a:solidFill>
-            <a:srgbClr val="FF6B3D"/>
-          </a:solidFill>
-          <a:ln>
-            <a:noFill/>
-          </a:ln>
-          <a:effectLst/>
-        </p:spPr>
-        <p:txBody>
-          <a:bodyPr rtlCol="0" anchor="ctr"/>
-          <a:lstStyle/>
-          <a:p>
-            <a:pPr algn="ctr"/>
-          </a:p>
-        </p:txBody>
-      </p:sp>
-      <p:sp>
-        <p:nvSpPr>
-          <p:cNvPr id="138" name="triangle 138"/>
-          <p:cNvSpPr/>
-          <p:nvPr/>
-        </p:nvSpPr>
-        <p:spPr>
-          <a:xfrm>
-            <a:off x="1852574" y="3049524"/>
-            <a:ext cx="109728" cy="137160"/>
-          </a:xfrm>
-          <a:prstGeom prst="triangle">
-            <a:avLst/>
-          </a:prstGeom>
-          <a:solidFill>
-            <a:srgbClr val="FF6B3D"/>
-          </a:solidFill>
-          <a:ln>
-            <a:noFill/>
-          </a:ln>
-          <a:effectLst/>
-        </p:spPr>
-        <p:txBody>
-          <a:bodyPr rtlCol="0" anchor="ctr"/>
-          <a:lstStyle/>
-          <a:p>
-            <a:pPr algn="ctr"/>
-          </a:p>
-        </p:txBody>
-      </p:sp>
-      <p:sp>
-        <p:nvSpPr>
-          <p:cNvPr id="139" name="rect 139"/>
-          <p:cNvSpPr/>
-          <p:nvPr/>
-        </p:nvSpPr>
-        <p:spPr>
-          <a:xfrm>
-            <a:off x="3529584" y="4608576"/>
-            <a:ext cx="5120640" cy="310896"/>
-          </a:xfrm>
-          <a:prstGeom prst="rect">
-            <a:avLst/>
-          </a:prstGeom>
-          <a:solidFill>
-            <a:srgbClr val="0E0E11"/>
-          </a:solidFill>
-          <a:ln>
-            <a:noFill/>
-          </a:ln>
-          <a:effectLst/>
-        </p:spPr>
-        <p:txBody>
-          <a:bodyPr rtlCol="0" anchor="ctr"/>
-          <a:lstStyle/>
-          <a:p>
-            <a:pPr algn="ctr"/>
-          </a:p>
-        </p:txBody>
-      </p:sp>
-      <p:sp>
-        <p:nvSpPr>
-          <p:cNvPr id="140" name="TextBox 140"/>
-          <p:cNvSpPr txBox="1"/>
-          <p:nvPr/>
-        </p:nvSpPr>
-        <p:spPr>
-          <a:xfrm>
-            <a:off x="3529584" y="4690872"/>
-            <a:ext cx="5120640" cy="164592"/>
+              <a:t>OUTPUT  ·  SOFTWARE RUNNING IN PRODUCTION</a:t>
+            </a:r>
+          </a:p>
+        </p:txBody>
+      </p:sp>
+      <p:sp>
+        <p:nvSpPr>
+          <p:cNvPr id="143" name="TextBox 143"/>
+          <p:cNvSpPr txBox="1"/>
+          <p:nvPr/>
+        </p:nvSpPr>
+        <p:spPr>
+          <a:xfrm>
+            <a:off x="987552" y="5669280"/>
+            <a:ext cx="10204704" cy="219456"/>
           </a:xfrm>
           <a:prstGeom prst="rect">
             <a:avLst/>
@@ -15273,126 +15372,15 @@
           </a:bodyPr>
           <a:lstStyle/>
           <a:p>
-            <a:pPr algn="ctr"/>
-            <a:r>
-              <a:rPr sz="1100" b="0" spc="200">
-                <a:solidFill>
-                  <a:srgbClr val="FF6B3D"/>
-                </a:solidFill>
-                <a:latin typeface="Courier New"/>
-              </a:rPr>
-              <a:t>LEARN</a:t>
-            </a:r>
-            <a:r>
-              <a:rPr sz="1100" b="0" spc="100">
-                <a:solidFill>
-                  <a:srgbClr val="9A9AA2"/>
-                </a:solidFill>
-                <a:latin typeface="Courier New"/>
-              </a:rPr>
-              <a:t>  ·  every build teaches the next</a:t>
-            </a:r>
-          </a:p>
-        </p:txBody>
-      </p:sp>
-      <p:sp>
-        <p:nvSpPr>
-          <p:cNvPr id="141" name="rect 141"/>
-          <p:cNvSpPr/>
-          <p:nvPr/>
-        </p:nvSpPr>
-        <p:spPr>
-          <a:xfrm>
-            <a:off x="694944" y="5230368"/>
-            <a:ext cx="10789920" cy="786384"/>
-          </a:xfrm>
-          <a:prstGeom prst="rect">
-            <a:avLst/>
-          </a:prstGeom>
-          <a:solidFill>
-            <a:srgbClr val="161619"/>
-          </a:solidFill>
-          <a:ln w="9525">
-            <a:solidFill>
-              <a:srgbClr val="2B2B2D"/>
-            </a:solidFill>
-          </a:ln>
-          <a:effectLst/>
-        </p:spPr>
-        <p:txBody>
-          <a:bodyPr rtlCol="0" anchor="ctr"/>
-          <a:lstStyle/>
-          <a:p>
-            <a:pPr algn="ctr"/>
-          </a:p>
-        </p:txBody>
-      </p:sp>
-      <p:sp>
-        <p:nvSpPr>
-          <p:cNvPr id="142" name="TextBox 142"/>
-          <p:cNvSpPr txBox="1"/>
-          <p:nvPr/>
-        </p:nvSpPr>
-        <p:spPr>
-          <a:xfrm>
-            <a:off x="987552" y="5413248"/>
-            <a:ext cx="5486400" cy="137160"/>
-          </a:xfrm>
-          <a:prstGeom prst="rect">
-            <a:avLst/>
-          </a:prstGeom>
-          <a:noFill/>
-        </p:spPr>
-        <p:txBody>
-          <a:bodyPr wrap="square" lIns="0" rIns="0" tIns="0" bIns="0" anchor="ctr">
-            <a:spAutoFit/>
-          </a:bodyPr>
-          <a:lstStyle/>
-          <a:p>
             <a:pPr algn="l"/>
             <a:r>
-              <a:rPr sz="900" b="0" spc="200">
-                <a:solidFill>
-                  <a:srgbClr val="9A9AA2"/>
-                </a:solidFill>
-                <a:latin typeface="Courier New"/>
-              </a:rPr>
-              <a:t>OUTPUT  ·  SOFTWARE RUNNING IN PRODUCTION</a:t>
-            </a:r>
-          </a:p>
-        </p:txBody>
-      </p:sp>
-      <p:sp>
-        <p:nvSpPr>
-          <p:cNvPr id="143" name="TextBox 143"/>
-          <p:cNvSpPr txBox="1"/>
-          <p:nvPr/>
-        </p:nvSpPr>
-        <p:spPr>
-          <a:xfrm>
-            <a:off x="987552" y="5669280"/>
-            <a:ext cx="10204704" cy="219456"/>
-          </a:xfrm>
-          <a:prstGeom prst="rect">
-            <a:avLst/>
-          </a:prstGeom>
-          <a:noFill/>
-        </p:spPr>
-        <p:txBody>
-          <a:bodyPr wrap="square" lIns="0" rIns="0" tIns="0" bIns="0" anchor="ctr">
-            <a:spAutoFit/>
-          </a:bodyPr>
-          <a:lstStyle/>
-          <a:p>
-            <a:pPr algn="l"/>
-            <a:r>
               <a:rPr sz="1400" b="1">
                 <a:solidFill>
                   <a:srgbClr val="ECECEE"/>
                 </a:solidFill>
                 <a:latin typeface="Poppins"/>
               </a:rPr>
-              <a:t>Eight stages, one line, a person on every gate — and a library that grows with every build.</a:t>
+              <a:t>Eight stages, one line, a person on every gate, and a library that grows with every build.</a:t>
             </a:r>
           </a:p>
         </p:txBody>
@@ -16169,44 +16157,14 @@
       </p:sp>
       <p:sp>
         <p:nvSpPr>
-          <p:cNvPr id="123" name="rect 123"/>
-          <p:cNvSpPr/>
-          <p:nvPr/>
-        </p:nvSpPr>
-        <p:spPr>
-          <a:xfrm>
-            <a:off x="694944" y="3840480"/>
-            <a:ext cx="6236208" cy="10973"/>
-          </a:xfrm>
-          <a:prstGeom prst="rect">
-            <a:avLst/>
-          </a:prstGeom>
-          <a:solidFill>
-            <a:srgbClr val="2B2B2D"/>
-          </a:solidFill>
-          <a:ln>
-            <a:noFill/>
-          </a:ln>
-          <a:effectLst/>
-        </p:spPr>
-        <p:txBody>
-          <a:bodyPr rtlCol="0" anchor="ctr"/>
-          <a:lstStyle/>
-          <a:p>
-            <a:pPr algn="ctr"/>
-          </a:p>
-        </p:txBody>
-      </p:sp>
-      <p:sp>
-        <p:nvSpPr>
-          <p:cNvPr id="124" name="TextBox 124"/>
-          <p:cNvSpPr txBox="1"/>
-          <p:nvPr/>
-        </p:nvSpPr>
-        <p:spPr>
-          <a:xfrm>
-            <a:off x="694944" y="4005072"/>
-            <a:ext cx="4572000" cy="164592"/>
+          <p:cNvPr id="123" name="TextBox 123"/>
+          <p:cNvSpPr txBox="1"/>
+          <p:nvPr/>
+        </p:nvSpPr>
+        <p:spPr>
+          <a:xfrm>
+            <a:off x="694944" y="3785616"/>
+            <a:ext cx="6236208" cy="384048"/>
           </a:xfrm>
           <a:prstGeom prst="rect">
             <a:avLst/>
@@ -16221,14 +16179,44 @@
           <a:p>
             <a:pPr algn="l"/>
             <a:r>
-              <a:rPr sz="1100" b="0" spc="300">
+              <a:rPr sz="1200" b="0">
                 <a:solidFill>
                   <a:srgbClr val="9A9AA2"/>
                 </a:solidFill>
-                <a:latin typeface="Courier New"/>
-              </a:rPr>
-              <a:t>THE PATTERN LIBRARY</a:t>
-            </a:r>
+                <a:latin typeface="Poppins"/>
+              </a:rPr>
+              <a:t>Every project writes validated patterns and documented failures back into the library, and every next build queries it before a line of code is written.</a:t>
+            </a:r>
+          </a:p>
+        </p:txBody>
+      </p:sp>
+      <p:sp>
+        <p:nvSpPr>
+          <p:cNvPr id="124" name="rect 124"/>
+          <p:cNvSpPr/>
+          <p:nvPr/>
+        </p:nvSpPr>
+        <p:spPr>
+          <a:xfrm>
+            <a:off x="694944" y="4315968"/>
+            <a:ext cx="6236208" cy="10973"/>
+          </a:xfrm>
+          <a:prstGeom prst="rect">
+            <a:avLst/>
+          </a:prstGeom>
+          <a:solidFill>
+            <a:srgbClr val="2B2B2D"/>
+          </a:solidFill>
+          <a:ln>
+            <a:noFill/>
+          </a:ln>
+          <a:effectLst/>
+        </p:spPr>
+        <p:txBody>
+          <a:bodyPr rtlCol="0" anchor="ctr"/>
+          <a:lstStyle/>
+          <a:p>
+            <a:pPr algn="ctr"/>
           </a:p>
         </p:txBody>
       </p:sp>
@@ -16240,8 +16228,8 @@
         </p:nvSpPr>
         <p:spPr>
           <a:xfrm>
-            <a:off x="694944" y="4261104"/>
-            <a:ext cx="3017520" cy="530352"/>
+            <a:off x="694944" y="4480560"/>
+            <a:ext cx="4572000" cy="164592"/>
           </a:xfrm>
           <a:prstGeom prst="rect">
             <a:avLst/>
@@ -16256,13 +16244,13 @@
           <a:p>
             <a:pPr algn="l"/>
             <a:r>
-              <a:rPr sz="3800" b="0">
-                <a:solidFill>
-                  <a:srgbClr val="ECECEE"/>
-                </a:solidFill>
-                <a:latin typeface="Poppins"/>
-              </a:rPr>
-              <a:t>Hundreds</a:t>
+              <a:rPr sz="1100" b="0" spc="300">
+                <a:solidFill>
+                  <a:srgbClr val="9A9AA2"/>
+                </a:solidFill>
+                <a:latin typeface="Courier New"/>
+              </a:rPr>
+              <a:t>THE PATTERN LIBRARY</a:t>
             </a:r>
           </a:p>
         </p:txBody>
@@ -16275,8 +16263,8 @@
         </p:nvSpPr>
         <p:spPr>
           <a:xfrm>
-            <a:off x="694944" y="4864608"/>
-            <a:ext cx="3017520" cy="192024"/>
+            <a:off x="694944" y="4736592"/>
+            <a:ext cx="3017520" cy="530352"/>
           </a:xfrm>
           <a:prstGeom prst="rect">
             <a:avLst/>
@@ -16291,13 +16279,13 @@
           <a:p>
             <a:pPr algn="l"/>
             <a:r>
-              <a:rPr sz="1400" b="0">
+              <a:rPr sz="3800" b="0">
                 <a:solidFill>
                   <a:srgbClr val="ECECEE"/>
                 </a:solidFill>
                 <a:latin typeface="Poppins"/>
               </a:rPr>
-              <a:t>validated patterns</a:t>
+              <a:t>Hundreds</a:t>
             </a:r>
           </a:p>
         </p:txBody>
@@ -16310,8 +16298,8 @@
         </p:nvSpPr>
         <p:spPr>
           <a:xfrm>
-            <a:off x="3840480" y="4261104"/>
-            <a:ext cx="3090672" cy="530352"/>
+            <a:off x="694944" y="5340096"/>
+            <a:ext cx="3017520" cy="192024"/>
           </a:xfrm>
           <a:prstGeom prst="rect">
             <a:avLst/>
@@ -16326,13 +16314,13 @@
           <a:p>
             <a:pPr algn="l"/>
             <a:r>
-              <a:rPr sz="3800" b="0">
-                <a:solidFill>
-                  <a:srgbClr val="FF6B3D"/>
+              <a:rPr sz="1400" b="0">
+                <a:solidFill>
+                  <a:srgbClr val="ECECEE"/>
                 </a:solidFill>
                 <a:latin typeface="Poppins"/>
               </a:rPr>
-              <a:t>Thousands</a:t>
+              <a:t>validated patterns</a:t>
             </a:r>
           </a:p>
         </p:txBody>
@@ -16345,8 +16333,8 @@
         </p:nvSpPr>
         <p:spPr>
           <a:xfrm>
-            <a:off x="3840480" y="4864608"/>
-            <a:ext cx="3090672" cy="192024"/>
+            <a:off x="3840480" y="4736592"/>
+            <a:ext cx="3090672" cy="530352"/>
           </a:xfrm>
           <a:prstGeom prst="rect">
             <a:avLst/>
@@ -16361,13 +16349,13 @@
           <a:p>
             <a:pPr algn="l"/>
             <a:r>
-              <a:rPr sz="1400" b="0">
-                <a:solidFill>
-                  <a:srgbClr val="ECECEE"/>
+              <a:rPr sz="3800" b="0">
+                <a:solidFill>
+                  <a:srgbClr val="FF6B3D"/>
                 </a:solidFill>
                 <a:latin typeface="Poppins"/>
               </a:rPr>
-              <a:t>documented anti-patterns</a:t>
+              <a:t>Thousands</a:t>
             </a:r>
           </a:p>
         </p:txBody>
@@ -16380,8 +16368,8 @@
         </p:nvSpPr>
         <p:spPr>
           <a:xfrm>
-            <a:off x="694944" y="5376672"/>
-            <a:ext cx="6236208" cy="173736"/>
+            <a:off x="3840480" y="5340096"/>
+            <a:ext cx="3090672" cy="192024"/>
           </a:xfrm>
           <a:prstGeom prst="rect">
             <a:avLst/>
@@ -16396,13 +16384,13 @@
           <a:p>
             <a:pPr algn="l"/>
             <a:r>
-              <a:rPr sz="1200" b="0">
-                <a:solidFill>
-                  <a:srgbClr val="9A9AA2"/>
+              <a:rPr sz="1400" b="0">
+                <a:solidFill>
+                  <a:srgbClr val="ECECEE"/>
                 </a:solidFill>
                 <a:latin typeface="Poppins"/>
               </a:rPr>
-              <a:t>The LEARN loop from the chain is what fills this library.</a:t>
+              <a:t>documented anti-patterns</a:t>
             </a:r>
           </a:p>
         </p:txBody>
@@ -18266,7 +18254,7 @@
                 </a:solidFill>
                 <a:latin typeface="Poppins"/>
               </a:rPr>
-              <a:t>Turns a stack of board documents into a cited briefing — a watermarked PDF with a signed audit trail, EU-only.</a:t>
+              <a:t>Turns a stack of board documents into a cited briefing: a watermarked PDF with a signed audit trail, EU-only.</a:t>
             </a:r>
           </a:p>
         </p:txBody>
@@ -18466,7 +18454,7 @@
                 </a:solidFill>
                 <a:latin typeface="Poppins"/>
               </a:rPr>
-              <a:t>Three sectors, one chain — the same pipeline produced all three.</a:t>
+              <a:t>Three sectors, one chain. The same pipeline produced all three.</a:t>
             </a:r>
           </a:p>
         </p:txBody>
@@ -18722,7 +18710,7 @@
                 </a:solidFill>
                 <a:latin typeface="Poppins"/>
               </a:rPr>
-              <a:t> — and shouldn’t have for the past year?</a:t>
+              <a:t>, and shouldn’t have for the past year?</a:t>
             </a:r>
           </a:p>
         </p:txBody>
@@ -18801,7 +18789,7 @@
         <p:spPr>
           <a:xfrm>
             <a:off x="694944" y="4261104"/>
-            <a:ext cx="5166360" cy="1371600"/>
+            <a:ext cx="5166360" cy="1225296"/>
           </a:xfrm>
           <a:prstGeom prst="rect">
             <a:avLst/>
@@ -18832,8 +18820,8 @@
         </p:nvSpPr>
         <p:spPr>
           <a:xfrm>
-            <a:off x="1005840" y="4480560"/>
-            <a:ext cx="4544568" cy="137160"/>
+            <a:off x="1005840" y="4553712"/>
+            <a:ext cx="4544568" cy="283464"/>
           </a:xfrm>
           <a:prstGeom prst="rect">
             <a:avLst/>
@@ -18848,13 +18836,13 @@
           <a:p>
             <a:pPr algn="l"/>
             <a:r>
-              <a:rPr sz="900" b="0" spc="200">
-                <a:solidFill>
-                  <a:srgbClr val="5A5A60"/>
-                </a:solidFill>
-                <a:latin typeface="Courier New"/>
-              </a:rPr>
-              <a:t>IF ONE THING CAME TO MIND</a:t>
+              <a:rPr sz="2000" b="1">
+                <a:solidFill>
+                  <a:srgbClr val="ECECEE"/>
+                </a:solidFill>
+                <a:latin typeface="Poppins"/>
+              </a:rPr>
+              <a:t>We build the application.</a:t>
             </a:r>
           </a:p>
         </p:txBody>
@@ -18867,8 +18855,8 @@
         </p:nvSpPr>
         <p:spPr>
           <a:xfrm>
-            <a:off x="1005840" y="4754880"/>
-            <a:ext cx="4544568" cy="283464"/>
+            <a:off x="1005840" y="4974336"/>
+            <a:ext cx="4544568" cy="201168"/>
           </a:xfrm>
           <a:prstGeom prst="rect">
             <a:avLst/>
@@ -18883,47 +18871,12 @@
           <a:p>
             <a:pPr algn="l"/>
             <a:r>
-              <a:rPr sz="2000" b="1">
-                <a:solidFill>
-                  <a:srgbClr val="ECECEE"/>
+              <a:rPr sz="1100" b="0">
+                <a:solidFill>
+                  <a:srgbClr val="9A9AA2"/>
                 </a:solidFill>
                 <a:latin typeface="Poppins"/>
               </a:rPr>
-              <a:t>We build the application.</a:t>
-            </a:r>
-          </a:p>
-        </p:txBody>
-      </p:sp>
-      <p:sp>
-        <p:nvSpPr>
-          <p:cNvPr id="112" name="TextBox 112"/>
-          <p:cNvSpPr txBox="1"/>
-          <p:nvPr/>
-        </p:nvSpPr>
-        <p:spPr>
-          <a:xfrm>
-            <a:off x="1005840" y="5175504"/>
-            <a:ext cx="4544568" cy="201168"/>
-          </a:xfrm>
-          <a:prstGeom prst="rect">
-            <a:avLst/>
-          </a:prstGeom>
-          <a:noFill/>
-        </p:spPr>
-        <p:txBody>
-          <a:bodyPr wrap="square" lIns="0" rIns="0" tIns="0" bIns="0" anchor="ctr">
-            <a:spAutoFit/>
-          </a:bodyPr>
-          <a:lstStyle/>
-          <a:p>
-            <a:pPr algn="l"/>
-            <a:r>
-              <a:rPr sz="1100" b="0">
-                <a:solidFill>
-                  <a:srgbClr val="9A9AA2"/>
-                </a:solidFill>
-                <a:latin typeface="Poppins"/>
-              </a:rPr>
               <a:t>One process, taken end to end through the chain.</a:t>
             </a:r>
           </a:p>
@@ -18931,14 +18884,14 @@
       </p:sp>
       <p:sp>
         <p:nvSpPr>
-          <p:cNvPr id="113" name="rect 113"/>
+          <p:cNvPr id="112" name="rect 112"/>
           <p:cNvSpPr/>
           <p:nvPr/>
         </p:nvSpPr>
         <p:spPr>
           <a:xfrm>
             <a:off x="6318504" y="4261104"/>
-            <a:ext cx="5166360" cy="1371600"/>
+            <a:ext cx="5166360" cy="1225296"/>
           </a:xfrm>
           <a:prstGeom prst="rect">
             <a:avLst/>
@@ -18963,14 +18916,14 @@
       </p:sp>
       <p:sp>
         <p:nvSpPr>
-          <p:cNvPr id="114" name="TextBox 114"/>
-          <p:cNvSpPr txBox="1"/>
-          <p:nvPr/>
-        </p:nvSpPr>
-        <p:spPr>
-          <a:xfrm>
-            <a:off x="6629400" y="4480560"/>
-            <a:ext cx="4544568" cy="137160"/>
+          <p:cNvPr id="113" name="TextBox 113"/>
+          <p:cNvSpPr txBox="1"/>
+          <p:nvPr/>
+        </p:nvSpPr>
+        <p:spPr>
+          <a:xfrm>
+            <a:off x="6629400" y="4553712"/>
+            <a:ext cx="4544568" cy="283464"/>
           </a:xfrm>
           <a:prstGeom prst="rect">
             <a:avLst/>
@@ -18985,27 +18938,27 @@
           <a:p>
             <a:pPr algn="l"/>
             <a:r>
-              <a:rPr sz="900" b="0" spc="200">
-                <a:solidFill>
-                  <a:srgbClr val="5A5A60"/>
-                </a:solidFill>
-                <a:latin typeface="Courier New"/>
-              </a:rPr>
-              <a:t>IF TWENTY THINGS CAME TO MIND</a:t>
-            </a:r>
-          </a:p>
-        </p:txBody>
-      </p:sp>
-      <p:sp>
-        <p:nvSpPr>
-          <p:cNvPr id="115" name="TextBox 115"/>
-          <p:cNvSpPr txBox="1"/>
-          <p:nvPr/>
-        </p:nvSpPr>
-        <p:spPr>
-          <a:xfrm>
-            <a:off x="6629400" y="4754880"/>
-            <a:ext cx="4544568" cy="283464"/>
+              <a:rPr sz="2000" b="1">
+                <a:solidFill>
+                  <a:srgbClr val="FF6B3D"/>
+                </a:solidFill>
+                <a:latin typeface="Poppins"/>
+              </a:rPr>
+              <a:t>We deliver the platform.</a:t>
+            </a:r>
+          </a:p>
+        </p:txBody>
+      </p:sp>
+      <p:sp>
+        <p:nvSpPr>
+          <p:cNvPr id="114" name="TextBox 114"/>
+          <p:cNvSpPr txBox="1"/>
+          <p:nvPr/>
+        </p:nvSpPr>
+        <p:spPr>
+          <a:xfrm>
+            <a:off x="6629400" y="4974336"/>
+            <a:ext cx="4544568" cy="201168"/>
           </a:xfrm>
           <a:prstGeom prst="rect">
             <a:avLst/>
@@ -19020,155 +18973,20 @@
           <a:p>
             <a:pPr algn="l"/>
             <a:r>
-              <a:rPr sz="2000" b="1">
-                <a:solidFill>
-                  <a:srgbClr val="FF6B3D"/>
+              <a:rPr sz="1100" b="0">
+                <a:solidFill>
+                  <a:srgbClr val="9A9AA2"/>
                 </a:solidFill>
                 <a:latin typeface="Poppins"/>
               </a:rPr>
-              <a:t>We build the platform.</a:t>
-            </a:r>
-          </a:p>
-        </p:txBody>
-      </p:sp>
-      <p:sp>
-        <p:nvSpPr>
-          <p:cNvPr id="116" name="TextBox 116"/>
-          <p:cNvSpPr txBox="1"/>
-          <p:nvPr/>
-        </p:nvSpPr>
-        <p:spPr>
-          <a:xfrm>
-            <a:off x="6629400" y="5175504"/>
-            <a:ext cx="4544568" cy="201168"/>
-          </a:xfrm>
-          <a:prstGeom prst="rect">
-            <a:avLst/>
-          </a:prstGeom>
-          <a:noFill/>
-        </p:spPr>
-        <p:txBody>
-          <a:bodyPr wrap="square" lIns="0" rIns="0" tIns="0" bIns="0" anchor="ctr">
-            <a:spAutoFit/>
-          </a:bodyPr>
-          <a:lstStyle/>
-          <a:p>
-            <a:pPr algn="l"/>
-            <a:r>
-              <a:rPr sz="1100" b="0">
-                <a:solidFill>
-                  <a:srgbClr val="9A9AA2"/>
-                </a:solidFill>
-                <a:latin typeface="Poppins"/>
-              </a:rPr>
-              <a:t>Twenty processes — that’s the platform conversation.</a:t>
-            </a:r>
-          </a:p>
-        </p:txBody>
-      </p:sp>
-      <p:sp>
-        <p:nvSpPr>
-          <p:cNvPr id="117" name="rect 117"/>
-          <p:cNvSpPr/>
-          <p:nvPr/>
-        </p:nvSpPr>
-        <p:spPr>
-          <a:xfrm>
-            <a:off x="694944" y="5888736"/>
-            <a:ext cx="10789920" cy="10973"/>
-          </a:xfrm>
-          <a:prstGeom prst="rect">
-            <a:avLst/>
-          </a:prstGeom>
-          <a:solidFill>
-            <a:srgbClr val="2B2B2D"/>
-          </a:solidFill>
-          <a:ln>
-            <a:noFill/>
-          </a:ln>
-          <a:effectLst/>
-        </p:spPr>
-        <p:txBody>
-          <a:bodyPr rtlCol="0" anchor="ctr"/>
-          <a:lstStyle/>
-          <a:p>
-            <a:pPr algn="ctr"/>
-          </a:p>
-        </p:txBody>
-      </p:sp>
-      <p:sp>
-        <p:nvSpPr>
-          <p:cNvPr id="118" name="TextBox 118"/>
-          <p:cNvSpPr txBox="1"/>
-          <p:nvPr/>
-        </p:nvSpPr>
-        <p:spPr>
-          <a:xfrm>
-            <a:off x="694944" y="6053328"/>
-            <a:ext cx="5486400" cy="164592"/>
-          </a:xfrm>
-          <a:prstGeom prst="rect">
-            <a:avLst/>
-          </a:prstGeom>
-          <a:noFill/>
-        </p:spPr>
-        <p:txBody>
-          <a:bodyPr wrap="square" lIns="0" rIns="0" tIns="0" bIns="0" anchor="ctr">
-            <a:spAutoFit/>
-          </a:bodyPr>
-          <a:lstStyle/>
-          <a:p>
-            <a:pPr algn="l"/>
-            <a:r>
-              <a:rPr sz="1000" b="0" spc="200">
-                <a:solidFill>
-                  <a:srgbClr val="5A5A60"/>
-                </a:solidFill>
-                <a:latin typeface="Courier New"/>
-              </a:rPr>
-              <a:t>ATHENARUN  ·  WE BUILD THE CHAIN, NOT THE GENERATOR</a:t>
-            </a:r>
-          </a:p>
-        </p:txBody>
-      </p:sp>
-      <p:sp>
-        <p:nvSpPr>
-          <p:cNvPr id="119" name="TextBox 119"/>
-          <p:cNvSpPr txBox="1"/>
-          <p:nvPr/>
-        </p:nvSpPr>
-        <p:spPr>
-          <a:xfrm>
-            <a:off x="7040880" y="6053328"/>
-            <a:ext cx="4443984" cy="164592"/>
-          </a:xfrm>
-          <a:prstGeom prst="rect">
-            <a:avLst/>
-          </a:prstGeom>
-          <a:noFill/>
-        </p:spPr>
-        <p:txBody>
-          <a:bodyPr wrap="square" lIns="0" rIns="0" tIns="0" bIns="0" anchor="ctr">
-            <a:spAutoFit/>
-          </a:bodyPr>
-          <a:lstStyle/>
-          <a:p>
-            <a:pPr algn="r"/>
-            <a:r>
-              <a:rPr sz="1000" b="0">
-                <a:solidFill>
-                  <a:srgbClr val="FF6B3D"/>
-                </a:solidFill>
-                <a:latin typeface="Courier New"/>
-              </a:rPr>
-              <a:t>[Name · Email · Phone]</a:t>
+              <a:t>Multiple processes, that’s the platform conversation.</a:t>
             </a:r>
           </a:p>
         </p:txBody>
       </p:sp>
       <p:pic>
         <p:nvPicPr>
-          <p:cNvPr id="120" name="Logo"/>
+          <p:cNvPr id="115" name="Logo"/>
           <p:cNvPicPr/>
           <p:nvPr/>
         </p:nvPicPr>
@@ -20425,7 +20243,7 @@
                 </a:solidFill>
                 <a:latin typeface="Poppins"/>
               </a:rPr>
-              <a:t>1% of SAM — </a:t>
+              <a:t>1% of SAM. </a:t>
             </a:r>
             <a:r>
               <a:rPr sz="1400" b="0">
@@ -20434,7 +20252,7 @@
                 </a:solidFill>
                 <a:latin typeface="Poppins"/>
               </a:rPr>
-              <a:t>open source as the adoption lever.</a:t>
+              <a:t>Open source as the adoption lever.</a:t>
             </a:r>
           </a:p>
         </p:txBody>

--- a/decks/Pitch_Deck_AthenaRun_v4.pptx
+++ b/decks/Pitch_Deck_AthenaRun_v4.pptx
@@ -2778,8 +2778,8 @@
         </p:nvSpPr>
         <p:spPr>
           <a:xfrm>
-            <a:off x="704088" y="4178808"/>
-            <a:ext cx="8686800" cy="219456"/>
+            <a:off x="704088" y="2351837"/>
+            <a:ext cx="10972800" cy="731520"/>
           </a:xfrm>
           <a:prstGeom prst="rect">
             <a:avLst/>
@@ -2794,13 +2794,13 @@
           <a:p>
             <a:pPr algn="l"/>
             <a:r>
-              <a:rPr sz="1700" b="0">
-                <a:solidFill>
-                  <a:srgbClr val="C9C9CE"/>
+              <a:rPr sz="4800" b="1">
+                <a:solidFill>
+                  <a:srgbClr val="ECECEE"/>
                 </a:solidFill>
                 <a:latin typeface="Poppins"/>
               </a:rPr>
-              <a:t>The bottleneck has moved from writing code to everything around it.</a:t>
+              <a:t>AI writes code.</a:t>
             </a:r>
           </a:p>
         </p:txBody>
@@ -2813,8 +2813,8 @@
         </p:nvSpPr>
         <p:spPr>
           <a:xfrm>
-            <a:off x="694944" y="4590288"/>
-            <a:ext cx="8229600" cy="256032"/>
+            <a:off x="704088" y="3094787"/>
+            <a:ext cx="10972800" cy="731520"/>
           </a:xfrm>
           <a:prstGeom prst="rect">
             <a:avLst/>
@@ -2829,13 +2829,83 @@
           <a:p>
             <a:pPr algn="l"/>
             <a:r>
+              <a:rPr sz="4800" b="0">
+                <a:solidFill>
+                  <a:srgbClr val="9A9AA2"/>
+                </a:solidFill>
+                <a:latin typeface="Poppins"/>
+              </a:rPr>
+              <a:t>It doesn’t finish applications.</a:t>
+            </a:r>
+          </a:p>
+        </p:txBody>
+      </p:sp>
+      <p:sp>
+        <p:nvSpPr>
+          <p:cNvPr id="104" name="TextBox 104"/>
+          <p:cNvSpPr txBox="1"/>
+          <p:nvPr/>
+        </p:nvSpPr>
+        <p:spPr>
+          <a:xfrm>
+            <a:off x="704088" y="4178808"/>
+            <a:ext cx="10058400" cy="219456"/>
+          </a:xfrm>
+          <a:prstGeom prst="rect">
+            <a:avLst/>
+          </a:prstGeom>
+          <a:noFill/>
+        </p:spPr>
+        <p:txBody>
+          <a:bodyPr wrap="square" lIns="0" rIns="0" tIns="0" bIns="0" anchor="ctr">
+            <a:spAutoFit/>
+          </a:bodyPr>
+          <a:lstStyle/>
+          <a:p>
+            <a:pPr algn="l"/>
+            <a:r>
+              <a:rPr sz="1700" b="0">
+                <a:solidFill>
+                  <a:srgbClr val="C9C9CE"/>
+                </a:solidFill>
+                <a:latin typeface="Poppins"/>
+              </a:rPr>
+              <a:t>Enterprise-grade means integrated, tested, audit-proof and signed off by a person.</a:t>
+            </a:r>
+          </a:p>
+        </p:txBody>
+      </p:sp>
+      <p:sp>
+        <p:nvSpPr>
+          <p:cNvPr id="105" name="TextBox 105"/>
+          <p:cNvSpPr txBox="1"/>
+          <p:nvPr/>
+        </p:nvSpPr>
+        <p:spPr>
+          <a:xfrm>
+            <a:off x="694944" y="4590288"/>
+            <a:ext cx="8229600" cy="256032"/>
+          </a:xfrm>
+          <a:prstGeom prst="rect">
+            <a:avLst/>
+          </a:prstGeom>
+          <a:noFill/>
+        </p:spPr>
+        <p:txBody>
+          <a:bodyPr wrap="square" lIns="0" rIns="0" tIns="0" bIns="0" anchor="ctr">
+            <a:spAutoFit/>
+          </a:bodyPr>
+          <a:lstStyle/>
+          <a:p>
+            <a:pPr algn="l"/>
+            <a:r>
               <a:rPr sz="1700" b="1">
                 <a:solidFill>
                   <a:srgbClr val="FF6B3D"/>
                 </a:solidFill>
                 <a:latin typeface="Poppins"/>
               </a:rPr>
-              <a:t>We build the chain, not the generator.</a:t>
+              <a:t>We deliver the finished application.</a:t>
             </a:r>
           </a:p>
         </p:txBody>

--- a/decks/Pitch_Deck_AthenaRun_v4.pptx
+++ b/decks/Pitch_Deck_AthenaRun_v4.pptx
@@ -11,7 +11,6 @@
     <p:sldId id="256" r:id="rId8"/>
     <p:sldId id="257" r:id="rId9"/>
     <p:sldId id="258" r:id="rId10"/>
-    <p:sldId id="265" r:id="rId17"/>
     <p:sldId id="259" r:id="rId11"/>
     <p:sldId id="266" r:id="rId18"/>
     <p:sldId id="267" r:id="rId19"/>
@@ -7888,7 +7887,7 @@
                 </a:solidFill>
                 <a:latin typeface="Poppins"/>
               </a:rPr>
-              <a:t>Still manual.</a:t>
+              <a:t>Everyone builds tools.</a:t>
             </a:r>
             <a:r>
               <a:rPr sz="2700" b="0">
@@ -7897,7 +7896,7 @@
                 </a:solidFill>
                 <a:latin typeface="Poppins"/>
               </a:rPr>
-              <a:t> And that is where the money goes.</a:t>
+              <a:t> Systems are the hard part.</a:t>
             </a:r>
           </a:p>
         </p:txBody>
@@ -7975,8 +7974,8 @@
         </p:nvSpPr>
         <p:spPr>
           <a:xfrm>
-            <a:off x="694944" y="1325880"/>
-            <a:ext cx="8229600" cy="164592"/>
+            <a:off x="694944" y="1298448"/>
+            <a:ext cx="9528048" cy="457200"/>
           </a:xfrm>
           <a:prstGeom prst="rect">
             <a:avLst/>
@@ -7991,61 +7990,26 @@
           <a:p>
             <a:pPr algn="l"/>
             <a:r>
-              <a:rPr sz="1100" b="0" spc="200">
+              <a:rPr sz="1400" b="0">
                 <a:solidFill>
                   <a:srgbClr val="9A9AA2"/>
                 </a:solidFill>
-                <a:latin typeface="Courier New"/>
-              </a:rPr>
-              <a:t>FIVE STEPS AROUND THE CODE. NOT ONE OF THEM IS CODE</a:t>
-            </a:r>
-          </a:p>
-        </p:txBody>
-      </p:sp>
-      <p:sp>
-        <p:nvSpPr>
-          <p:cNvPr id="106" name="TextBox 106"/>
-          <p:cNvSpPr txBox="1"/>
-          <p:nvPr/>
-        </p:nvSpPr>
-        <p:spPr>
-          <a:xfrm>
-            <a:off x="694944" y="1591056"/>
-            <a:ext cx="9528048" cy="192024"/>
-          </a:xfrm>
-          <a:prstGeom prst="rect">
-            <a:avLst/>
-          </a:prstGeom>
-          <a:noFill/>
-        </p:spPr>
-        <p:txBody>
-          <a:bodyPr wrap="square" lIns="0" rIns="0" tIns="0" bIns="0" anchor="ctr">
-            <a:spAutoFit/>
-          </a:bodyPr>
-          <a:lstStyle/>
-          <a:p>
-            <a:pPr algn="l"/>
-            <a:r>
-              <a:rPr sz="1400" b="0">
-                <a:solidFill>
-                  <a:srgbClr val="9A9AA2"/>
-                </a:solidFill>
                 <a:latin typeface="Poppins"/>
               </a:rPr>
-              <a:t>Every one of them a handoff, a document, a wait.</a:t>
-            </a:r>
-          </a:p>
-        </p:txBody>
-      </p:sp>
-      <p:sp>
-        <p:nvSpPr>
-          <p:cNvPr id="107" name="rect 107"/>
+              <a:t>Code is the cheap part now. What still fails is everything that has to be true before someone signs off on the result.</a:t>
+            </a:r>
+          </a:p>
+        </p:txBody>
+      </p:sp>
+      <p:sp>
+        <p:nvSpPr>
+          <p:cNvPr id="106" name="rect 106"/>
           <p:cNvSpPr/>
           <p:nvPr/>
         </p:nvSpPr>
         <p:spPr>
           <a:xfrm>
-            <a:off x="694944" y="2207362"/>
+            <a:off x="694944" y="1920240"/>
             <a:ext cx="10789920" cy="10973"/>
           </a:xfrm>
           <a:prstGeom prst="rect">
@@ -8069,3852 +8033,49 @@
       </p:sp>
       <p:sp>
         <p:nvSpPr>
-          <p:cNvPr id="108" name="ellipse 108"/>
+          <p:cNvPr id="107" name="TextBox 107"/>
+          <p:cNvSpPr txBox="1"/>
+          <p:nvPr/>
+        </p:nvSpPr>
+        <p:spPr>
+          <a:xfrm>
+            <a:off x="694944" y="2084832"/>
+            <a:ext cx="5486400" cy="164592"/>
+          </a:xfrm>
+          <a:prstGeom prst="rect">
+            <a:avLst/>
+          </a:prstGeom>
+          <a:noFill/>
+        </p:spPr>
+        <p:txBody>
+          <a:bodyPr wrap="square" lIns="0" rIns="0" tIns="0" bIns="0" anchor="ctr">
+            <a:spAutoFit/>
+          </a:bodyPr>
+          <a:lstStyle/>
+          <a:p>
+            <a:pPr algn="l"/>
+            <a:r>
+              <a:rPr sz="1100" b="0" spc="200">
+                <a:solidFill>
+                  <a:srgbClr val="9A9AA2"/>
+                </a:solidFill>
+                <a:latin typeface="Courier New"/>
+              </a:rPr>
+              <a:t>WHAT SEPARATES A TOOL FROM A SYSTEM</a:t>
+            </a:r>
+          </a:p>
+        </p:txBody>
+      </p:sp>
+      <p:sp>
+        <p:nvSpPr>
+          <p:cNvPr id="108" name="rect 108"/>
           <p:cNvSpPr/>
           <p:nvPr/>
         </p:nvSpPr>
         <p:spPr>
           <a:xfrm>
-            <a:off x="1527048" y="1970532"/>
-            <a:ext cx="484632" cy="484632"/>
-          </a:xfrm>
-          <a:prstGeom prst="ellipse">
-            <a:avLst/>
-          </a:prstGeom>
-          <a:solidFill>
-            <a:srgbClr val="0E0E11"/>
-          </a:solidFill>
-          <a:ln w="15875">
-            <a:solidFill>
-              <a:srgbClr val="9A9AA2"/>
-            </a:solidFill>
-          </a:ln>
-          <a:effectLst/>
-        </p:spPr>
-        <p:txBody>
-          <a:bodyPr rtlCol="0" anchor="ctr"/>
-          <a:lstStyle/>
-          <a:p>
-            <a:pPr algn="ctr"/>
-          </a:p>
-        </p:txBody>
-      </p:sp>
-      <p:sp>
-        <p:nvSpPr>
-          <p:cNvPr id="109" name="TextBox 109"/>
-          <p:cNvSpPr txBox="1"/>
-          <p:nvPr/>
-        </p:nvSpPr>
-        <p:spPr>
-          <a:xfrm>
-            <a:off x="1513332" y="2116836"/>
-            <a:ext cx="512064" cy="192024"/>
-          </a:xfrm>
-          <a:prstGeom prst="rect">
-            <a:avLst/>
-          </a:prstGeom>
-          <a:noFill/>
-        </p:spPr>
-        <p:txBody>
-          <a:bodyPr wrap="square" lIns="0" rIns="0" tIns="0" bIns="0" anchor="ctr">
-            <a:spAutoFit/>
-          </a:bodyPr>
-          <a:lstStyle/>
-          <a:p>
-            <a:pPr algn="ctr"/>
-            <a:r>
-              <a:rPr sz="1300" b="0">
-                <a:solidFill>
-                  <a:srgbClr val="9A9AA2"/>
-                </a:solidFill>
-                <a:latin typeface="Courier New"/>
-              </a:rPr>
-              <a:t>01</a:t>
-            </a:r>
-          </a:p>
-        </p:txBody>
-      </p:sp>
-      <p:sp>
-        <p:nvSpPr>
-          <p:cNvPr id="110" name="TextBox 110"/>
-          <p:cNvSpPr txBox="1"/>
-          <p:nvPr/>
-        </p:nvSpPr>
-        <p:spPr>
-          <a:xfrm>
-            <a:off x="754380" y="2560320"/>
-            <a:ext cx="2029968" cy="219456"/>
-          </a:xfrm>
-          <a:prstGeom prst="rect">
-            <a:avLst/>
-          </a:prstGeom>
-          <a:noFill/>
-        </p:spPr>
-        <p:txBody>
-          <a:bodyPr wrap="square" lIns="0" rIns="0" tIns="0" bIns="0" anchor="ctr">
-            <a:spAutoFit/>
-          </a:bodyPr>
-          <a:lstStyle/>
-          <a:p>
-            <a:pPr algn="ctr"/>
-            <a:r>
-              <a:rPr sz="1700" b="0">
-                <a:solidFill>
-                  <a:srgbClr val="ECECEE"/>
-                </a:solidFill>
-                <a:latin typeface="Poppins"/>
-              </a:rPr>
-              <a:t>Requirements</a:t>
-            </a:r>
-          </a:p>
-        </p:txBody>
-      </p:sp>
-      <p:sp>
-        <p:nvSpPr>
-          <p:cNvPr id="111" name="TextBox 111"/>
-          <p:cNvSpPr txBox="1"/>
-          <p:nvPr/>
-        </p:nvSpPr>
-        <p:spPr>
-          <a:xfrm>
-            <a:off x="754380" y="2816352"/>
-            <a:ext cx="2029968" cy="137160"/>
-          </a:xfrm>
-          <a:prstGeom prst="rect">
-            <a:avLst/>
-          </a:prstGeom>
-          <a:noFill/>
-        </p:spPr>
-        <p:txBody>
-          <a:bodyPr wrap="square" lIns="0" rIns="0" tIns="0" bIns="0" anchor="ctr">
-            <a:spAutoFit/>
-          </a:bodyPr>
-          <a:lstStyle/>
-          <a:p>
-            <a:pPr algn="ctr"/>
-            <a:r>
-              <a:rPr sz="900" b="0">
-                <a:solidFill>
-                  <a:srgbClr val="5A5A60"/>
-                </a:solidFill>
-                <a:latin typeface="Courier New"/>
-              </a:rPr>
-              <a:t>handoff · document · wait</a:t>
-            </a:r>
-          </a:p>
-        </p:txBody>
-      </p:sp>
-      <p:sp>
-        <p:nvSpPr>
-          <p:cNvPr id="112" name="ellipse 112"/>
-          <p:cNvSpPr/>
-          <p:nvPr/>
-        </p:nvSpPr>
-        <p:spPr>
-          <a:xfrm>
-            <a:off x="3685032" y="1970532"/>
-            <a:ext cx="484632" cy="484632"/>
-          </a:xfrm>
-          <a:prstGeom prst="ellipse">
-            <a:avLst/>
-          </a:prstGeom>
-          <a:solidFill>
-            <a:srgbClr val="0E0E11"/>
-          </a:solidFill>
-          <a:ln w="15875">
-            <a:solidFill>
-              <a:srgbClr val="9A9AA2"/>
-            </a:solidFill>
-          </a:ln>
-          <a:effectLst/>
-        </p:spPr>
-        <p:txBody>
-          <a:bodyPr rtlCol="0" anchor="ctr"/>
-          <a:lstStyle/>
-          <a:p>
-            <a:pPr algn="ctr"/>
-          </a:p>
-        </p:txBody>
-      </p:sp>
-      <p:sp>
-        <p:nvSpPr>
-          <p:cNvPr id="113" name="TextBox 113"/>
-          <p:cNvSpPr txBox="1"/>
-          <p:nvPr/>
-        </p:nvSpPr>
-        <p:spPr>
-          <a:xfrm>
-            <a:off x="3671316" y="2116836"/>
-            <a:ext cx="512064" cy="192024"/>
-          </a:xfrm>
-          <a:prstGeom prst="rect">
-            <a:avLst/>
-          </a:prstGeom>
-          <a:noFill/>
-        </p:spPr>
-        <p:txBody>
-          <a:bodyPr wrap="square" lIns="0" rIns="0" tIns="0" bIns="0" anchor="ctr">
-            <a:spAutoFit/>
-          </a:bodyPr>
-          <a:lstStyle/>
-          <a:p>
-            <a:pPr algn="ctr"/>
-            <a:r>
-              <a:rPr sz="1300" b="0">
-                <a:solidFill>
-                  <a:srgbClr val="9A9AA2"/>
-                </a:solidFill>
-                <a:latin typeface="Courier New"/>
-              </a:rPr>
-              <a:t>02</a:t>
-            </a:r>
-          </a:p>
-        </p:txBody>
-      </p:sp>
-      <p:sp>
-        <p:nvSpPr>
-          <p:cNvPr id="114" name="TextBox 114"/>
-          <p:cNvSpPr txBox="1"/>
-          <p:nvPr/>
-        </p:nvSpPr>
-        <p:spPr>
-          <a:xfrm>
-            <a:off x="2912364" y="2560320"/>
-            <a:ext cx="2029968" cy="219456"/>
-          </a:xfrm>
-          <a:prstGeom prst="rect">
-            <a:avLst/>
-          </a:prstGeom>
-          <a:noFill/>
-        </p:spPr>
-        <p:txBody>
-          <a:bodyPr wrap="square" lIns="0" rIns="0" tIns="0" bIns="0" anchor="ctr">
-            <a:spAutoFit/>
-          </a:bodyPr>
-          <a:lstStyle/>
-          <a:p>
-            <a:pPr algn="ctr"/>
-            <a:r>
-              <a:rPr sz="1700" b="0">
-                <a:solidFill>
-                  <a:srgbClr val="ECECEE"/>
-                </a:solidFill>
-                <a:latin typeface="Poppins"/>
-              </a:rPr>
-              <a:t>Feasibility</a:t>
-            </a:r>
-          </a:p>
-        </p:txBody>
-      </p:sp>
-      <p:sp>
-        <p:nvSpPr>
-          <p:cNvPr id="115" name="TextBox 115"/>
-          <p:cNvSpPr txBox="1"/>
-          <p:nvPr/>
-        </p:nvSpPr>
-        <p:spPr>
-          <a:xfrm>
-            <a:off x="2912364" y="2816352"/>
-            <a:ext cx="2029968" cy="137160"/>
-          </a:xfrm>
-          <a:prstGeom prst="rect">
-            <a:avLst/>
-          </a:prstGeom>
-          <a:noFill/>
-        </p:spPr>
-        <p:txBody>
-          <a:bodyPr wrap="square" lIns="0" rIns="0" tIns="0" bIns="0" anchor="ctr">
-            <a:spAutoFit/>
-          </a:bodyPr>
-          <a:lstStyle/>
-          <a:p>
-            <a:pPr algn="ctr"/>
-            <a:r>
-              <a:rPr sz="900" b="0">
-                <a:solidFill>
-                  <a:srgbClr val="5A5A60"/>
-                </a:solidFill>
-                <a:latin typeface="Courier New"/>
-              </a:rPr>
-              <a:t>handoff · document · wait</a:t>
-            </a:r>
-          </a:p>
-        </p:txBody>
-      </p:sp>
-      <p:sp>
-        <p:nvSpPr>
-          <p:cNvPr id="116" name="ellipse 116"/>
-          <p:cNvSpPr/>
-          <p:nvPr/>
-        </p:nvSpPr>
-        <p:spPr>
-          <a:xfrm>
-            <a:off x="5843016" y="1970532"/>
-            <a:ext cx="484632" cy="484632"/>
-          </a:xfrm>
-          <a:prstGeom prst="ellipse">
-            <a:avLst/>
-          </a:prstGeom>
-          <a:solidFill>
-            <a:srgbClr val="0E0E11"/>
-          </a:solidFill>
-          <a:ln w="15875">
-            <a:solidFill>
-              <a:srgbClr val="9A9AA2"/>
-            </a:solidFill>
-          </a:ln>
-          <a:effectLst/>
-        </p:spPr>
-        <p:txBody>
-          <a:bodyPr rtlCol="0" anchor="ctr"/>
-          <a:lstStyle/>
-          <a:p>
-            <a:pPr algn="ctr"/>
-          </a:p>
-        </p:txBody>
-      </p:sp>
-      <p:sp>
-        <p:nvSpPr>
-          <p:cNvPr id="117" name="TextBox 117"/>
-          <p:cNvSpPr txBox="1"/>
-          <p:nvPr/>
-        </p:nvSpPr>
-        <p:spPr>
-          <a:xfrm>
-            <a:off x="5829300" y="2116836"/>
-            <a:ext cx="512064" cy="192024"/>
-          </a:xfrm>
-          <a:prstGeom prst="rect">
-            <a:avLst/>
-          </a:prstGeom>
-          <a:noFill/>
-        </p:spPr>
-        <p:txBody>
-          <a:bodyPr wrap="square" lIns="0" rIns="0" tIns="0" bIns="0" anchor="ctr">
-            <a:spAutoFit/>
-          </a:bodyPr>
-          <a:lstStyle/>
-          <a:p>
-            <a:pPr algn="ctr"/>
-            <a:r>
-              <a:rPr sz="1300" b="0">
-                <a:solidFill>
-                  <a:srgbClr val="9A9AA2"/>
-                </a:solidFill>
-                <a:latin typeface="Courier New"/>
-              </a:rPr>
-              <a:t>03</a:t>
-            </a:r>
-          </a:p>
-        </p:txBody>
-      </p:sp>
-      <p:sp>
-        <p:nvSpPr>
-          <p:cNvPr id="118" name="TextBox 118"/>
-          <p:cNvSpPr txBox="1"/>
-          <p:nvPr/>
-        </p:nvSpPr>
-        <p:spPr>
-          <a:xfrm>
-            <a:off x="5070348" y="2560320"/>
-            <a:ext cx="2029968" cy="219456"/>
-          </a:xfrm>
-          <a:prstGeom prst="rect">
-            <a:avLst/>
-          </a:prstGeom>
-          <a:noFill/>
-        </p:spPr>
-        <p:txBody>
-          <a:bodyPr wrap="square" lIns="0" rIns="0" tIns="0" bIns="0" anchor="ctr">
-            <a:spAutoFit/>
-          </a:bodyPr>
-          <a:lstStyle/>
-          <a:p>
-            <a:pPr algn="ctr"/>
-            <a:r>
-              <a:rPr sz="1700" b="0">
-                <a:solidFill>
-                  <a:srgbClr val="ECECEE"/>
-                </a:solidFill>
-                <a:latin typeface="Poppins"/>
-              </a:rPr>
-              <a:t>Compliance</a:t>
-            </a:r>
-          </a:p>
-        </p:txBody>
-      </p:sp>
-      <p:sp>
-        <p:nvSpPr>
-          <p:cNvPr id="119" name="TextBox 119"/>
-          <p:cNvSpPr txBox="1"/>
-          <p:nvPr/>
-        </p:nvSpPr>
-        <p:spPr>
-          <a:xfrm>
-            <a:off x="5070348" y="2816352"/>
-            <a:ext cx="2029968" cy="137160"/>
-          </a:xfrm>
-          <a:prstGeom prst="rect">
-            <a:avLst/>
-          </a:prstGeom>
-          <a:noFill/>
-        </p:spPr>
-        <p:txBody>
-          <a:bodyPr wrap="square" lIns="0" rIns="0" tIns="0" bIns="0" anchor="ctr">
-            <a:spAutoFit/>
-          </a:bodyPr>
-          <a:lstStyle/>
-          <a:p>
-            <a:pPr algn="ctr"/>
-            <a:r>
-              <a:rPr sz="900" b="0">
-                <a:solidFill>
-                  <a:srgbClr val="5A5A60"/>
-                </a:solidFill>
-                <a:latin typeface="Courier New"/>
-              </a:rPr>
-              <a:t>handoff · document · wait</a:t>
-            </a:r>
-          </a:p>
-        </p:txBody>
-      </p:sp>
-      <p:sp>
-        <p:nvSpPr>
-          <p:cNvPr id="120" name="ellipse 120"/>
-          <p:cNvSpPr/>
-          <p:nvPr/>
-        </p:nvSpPr>
-        <p:spPr>
-          <a:xfrm>
-            <a:off x="8001000" y="1970532"/>
-            <a:ext cx="484632" cy="484632"/>
-          </a:xfrm>
-          <a:prstGeom prst="ellipse">
-            <a:avLst/>
-          </a:prstGeom>
-          <a:solidFill>
-            <a:srgbClr val="0E0E11"/>
-          </a:solidFill>
-          <a:ln w="15875">
-            <a:solidFill>
-              <a:srgbClr val="9A9AA2"/>
-            </a:solidFill>
-          </a:ln>
-          <a:effectLst/>
-        </p:spPr>
-        <p:txBody>
-          <a:bodyPr rtlCol="0" anchor="ctr"/>
-          <a:lstStyle/>
-          <a:p>
-            <a:pPr algn="ctr"/>
-          </a:p>
-        </p:txBody>
-      </p:sp>
-      <p:sp>
-        <p:nvSpPr>
-          <p:cNvPr id="121" name="TextBox 121"/>
-          <p:cNvSpPr txBox="1"/>
-          <p:nvPr/>
-        </p:nvSpPr>
-        <p:spPr>
-          <a:xfrm>
-            <a:off x="7987284" y="2116836"/>
-            <a:ext cx="512064" cy="192024"/>
-          </a:xfrm>
-          <a:prstGeom prst="rect">
-            <a:avLst/>
-          </a:prstGeom>
-          <a:noFill/>
-        </p:spPr>
-        <p:txBody>
-          <a:bodyPr wrap="square" lIns="0" rIns="0" tIns="0" bIns="0" anchor="ctr">
-            <a:spAutoFit/>
-          </a:bodyPr>
-          <a:lstStyle/>
-          <a:p>
-            <a:pPr algn="ctr"/>
-            <a:r>
-              <a:rPr sz="1300" b="0">
-                <a:solidFill>
-                  <a:srgbClr val="9A9AA2"/>
-                </a:solidFill>
-                <a:latin typeface="Courier New"/>
-              </a:rPr>
-              <a:t>04</a:t>
-            </a:r>
-          </a:p>
-        </p:txBody>
-      </p:sp>
-      <p:sp>
-        <p:nvSpPr>
-          <p:cNvPr id="122" name="TextBox 122"/>
-          <p:cNvSpPr txBox="1"/>
-          <p:nvPr/>
-        </p:nvSpPr>
-        <p:spPr>
-          <a:xfrm>
-            <a:off x="7228332" y="2560320"/>
-            <a:ext cx="2029968" cy="219456"/>
-          </a:xfrm>
-          <a:prstGeom prst="rect">
-            <a:avLst/>
-          </a:prstGeom>
-          <a:noFill/>
-        </p:spPr>
-        <p:txBody>
-          <a:bodyPr wrap="square" lIns="0" rIns="0" tIns="0" bIns="0" anchor="ctr">
-            <a:spAutoFit/>
-          </a:bodyPr>
-          <a:lstStyle/>
-          <a:p>
-            <a:pPr algn="ctr"/>
-            <a:r>
-              <a:rPr sz="1700" b="0">
-                <a:solidFill>
-                  <a:srgbClr val="ECECEE"/>
-                </a:solidFill>
-                <a:latin typeface="Poppins"/>
-              </a:rPr>
-              <a:t>Approval</a:t>
-            </a:r>
-          </a:p>
-        </p:txBody>
-      </p:sp>
-      <p:sp>
-        <p:nvSpPr>
-          <p:cNvPr id="123" name="TextBox 123"/>
-          <p:cNvSpPr txBox="1"/>
-          <p:nvPr/>
-        </p:nvSpPr>
-        <p:spPr>
-          <a:xfrm>
-            <a:off x="7228332" y="2816352"/>
-            <a:ext cx="2029968" cy="137160"/>
-          </a:xfrm>
-          <a:prstGeom prst="rect">
-            <a:avLst/>
-          </a:prstGeom>
-          <a:noFill/>
-        </p:spPr>
-        <p:txBody>
-          <a:bodyPr wrap="square" lIns="0" rIns="0" tIns="0" bIns="0" anchor="ctr">
-            <a:spAutoFit/>
-          </a:bodyPr>
-          <a:lstStyle/>
-          <a:p>
-            <a:pPr algn="ctr"/>
-            <a:r>
-              <a:rPr sz="900" b="0">
-                <a:solidFill>
-                  <a:srgbClr val="5A5A60"/>
-                </a:solidFill>
-                <a:latin typeface="Courier New"/>
-              </a:rPr>
-              <a:t>handoff · document · wait</a:t>
-            </a:r>
-          </a:p>
-        </p:txBody>
-      </p:sp>
-      <p:sp>
-        <p:nvSpPr>
-          <p:cNvPr id="124" name="ellipse 124"/>
-          <p:cNvSpPr/>
-          <p:nvPr/>
-        </p:nvSpPr>
-        <p:spPr>
-          <a:xfrm>
-            <a:off x="10158984" y="1970532"/>
-            <a:ext cx="484632" cy="484632"/>
-          </a:xfrm>
-          <a:prstGeom prst="ellipse">
-            <a:avLst/>
-          </a:prstGeom>
-          <a:solidFill>
-            <a:srgbClr val="0E0E11"/>
-          </a:solidFill>
-          <a:ln w="15875">
-            <a:solidFill>
-              <a:srgbClr val="9A9AA2"/>
-            </a:solidFill>
-          </a:ln>
-          <a:effectLst/>
-        </p:spPr>
-        <p:txBody>
-          <a:bodyPr rtlCol="0" anchor="ctr"/>
-          <a:lstStyle/>
-          <a:p>
-            <a:pPr algn="ctr"/>
-          </a:p>
-        </p:txBody>
-      </p:sp>
-      <p:sp>
-        <p:nvSpPr>
-          <p:cNvPr id="125" name="TextBox 125"/>
-          <p:cNvSpPr txBox="1"/>
-          <p:nvPr/>
-        </p:nvSpPr>
-        <p:spPr>
-          <a:xfrm>
-            <a:off x="10145268" y="2116836"/>
-            <a:ext cx="512064" cy="192024"/>
-          </a:xfrm>
-          <a:prstGeom prst="rect">
-            <a:avLst/>
-          </a:prstGeom>
-          <a:noFill/>
-        </p:spPr>
-        <p:txBody>
-          <a:bodyPr wrap="square" lIns="0" rIns="0" tIns="0" bIns="0" anchor="ctr">
-            <a:spAutoFit/>
-          </a:bodyPr>
-          <a:lstStyle/>
-          <a:p>
-            <a:pPr algn="ctr"/>
-            <a:r>
-              <a:rPr sz="1300" b="0">
-                <a:solidFill>
-                  <a:srgbClr val="9A9AA2"/>
-                </a:solidFill>
-                <a:latin typeface="Courier New"/>
-              </a:rPr>
-              <a:t>05</a:t>
-            </a:r>
-          </a:p>
-        </p:txBody>
-      </p:sp>
-      <p:sp>
-        <p:nvSpPr>
-          <p:cNvPr id="126" name="TextBox 126"/>
-          <p:cNvSpPr txBox="1"/>
-          <p:nvPr/>
-        </p:nvSpPr>
-        <p:spPr>
-          <a:xfrm>
-            <a:off x="9386316" y="2560320"/>
-            <a:ext cx="2029968" cy="219456"/>
-          </a:xfrm>
-          <a:prstGeom prst="rect">
-            <a:avLst/>
-          </a:prstGeom>
-          <a:noFill/>
-        </p:spPr>
-        <p:txBody>
-          <a:bodyPr wrap="square" lIns="0" rIns="0" tIns="0" bIns="0" anchor="ctr">
-            <a:spAutoFit/>
-          </a:bodyPr>
-          <a:lstStyle/>
-          <a:p>
-            <a:pPr algn="ctr"/>
-            <a:r>
-              <a:rPr sz="1700" b="0">
-                <a:solidFill>
-                  <a:srgbClr val="ECECEE"/>
-                </a:solidFill>
-                <a:latin typeface="Poppins"/>
-              </a:rPr>
-              <a:t>Operations</a:t>
-            </a:r>
-          </a:p>
-        </p:txBody>
-      </p:sp>
-      <p:sp>
-        <p:nvSpPr>
-          <p:cNvPr id="127" name="TextBox 127"/>
-          <p:cNvSpPr txBox="1"/>
-          <p:nvPr/>
-        </p:nvSpPr>
-        <p:spPr>
-          <a:xfrm>
-            <a:off x="9386316" y="2816352"/>
-            <a:ext cx="2029968" cy="137160"/>
-          </a:xfrm>
-          <a:prstGeom prst="rect">
-            <a:avLst/>
-          </a:prstGeom>
-          <a:noFill/>
-        </p:spPr>
-        <p:txBody>
-          <a:bodyPr wrap="square" lIns="0" rIns="0" tIns="0" bIns="0" anchor="ctr">
-            <a:spAutoFit/>
-          </a:bodyPr>
-          <a:lstStyle/>
-          <a:p>
-            <a:pPr algn="ctr"/>
-            <a:r>
-              <a:rPr sz="900" b="0">
-                <a:solidFill>
-                  <a:srgbClr val="5A5A60"/>
-                </a:solidFill>
-                <a:latin typeface="Courier New"/>
-              </a:rPr>
-              <a:t>handoff · document · wait</a:t>
-            </a:r>
-          </a:p>
-        </p:txBody>
-      </p:sp>
-      <p:sp>
-        <p:nvSpPr>
-          <p:cNvPr id="128" name="rect 128"/>
-          <p:cNvSpPr/>
-          <p:nvPr/>
-        </p:nvSpPr>
-        <p:spPr>
-          <a:xfrm>
-            <a:off x="694944" y="3163824"/>
-            <a:ext cx="10789920" cy="10973"/>
-          </a:xfrm>
-          <a:prstGeom prst="rect">
-            <a:avLst/>
-          </a:prstGeom>
-          <a:solidFill>
-            <a:srgbClr val="2B2B2D"/>
-          </a:solidFill>
-          <a:ln>
-            <a:noFill/>
-          </a:ln>
-          <a:effectLst/>
-        </p:spPr>
-        <p:txBody>
-          <a:bodyPr rtlCol="0" anchor="ctr"/>
-          <a:lstStyle/>
-          <a:p>
-            <a:pPr algn="ctr"/>
-          </a:p>
-        </p:txBody>
-      </p:sp>
-      <p:sp>
-        <p:nvSpPr>
-          <p:cNvPr id="129" name="TextBox 129"/>
-          <p:cNvSpPr txBox="1"/>
-          <p:nvPr/>
-        </p:nvSpPr>
-        <p:spPr>
-          <a:xfrm>
-            <a:off x="694944" y="3675888"/>
-            <a:ext cx="2743200" cy="822960"/>
-          </a:xfrm>
-          <a:prstGeom prst="rect">
-            <a:avLst/>
-          </a:prstGeom>
-          <a:noFill/>
-        </p:spPr>
-        <p:txBody>
-          <a:bodyPr wrap="square" lIns="0" rIns="0" tIns="0" bIns="0" anchor="ctr">
-            <a:spAutoFit/>
-          </a:bodyPr>
-          <a:lstStyle/>
-          <a:p>
-            <a:pPr algn="l"/>
-            <a:r>
-              <a:rPr sz="5400" b="0">
-                <a:solidFill>
-                  <a:srgbClr val="FF6B3D"/>
-                </a:solidFill>
-                <a:latin typeface="Poppins"/>
-              </a:rPr>
-              <a:t>61</a:t>
-            </a:r>
-            <a:r>
-              <a:rPr sz="2400" b="0">
-                <a:solidFill>
-                  <a:srgbClr val="9A9AA2"/>
-                </a:solidFill>
-                <a:latin typeface="Poppins"/>
-              </a:rPr>
-              <a:t>%</a:t>
-            </a:r>
-          </a:p>
-        </p:txBody>
-      </p:sp>
-      <p:sp>
-        <p:nvSpPr>
-          <p:cNvPr id="130" name="TextBox 130"/>
-          <p:cNvSpPr txBox="1"/>
-          <p:nvPr/>
-        </p:nvSpPr>
-        <p:spPr>
-          <a:xfrm>
-            <a:off x="2212848" y="3840480"/>
-            <a:ext cx="4114800" cy="502920"/>
-          </a:xfrm>
-          <a:prstGeom prst="rect">
-            <a:avLst/>
-          </a:prstGeom>
-          <a:noFill/>
-        </p:spPr>
-        <p:txBody>
-          <a:bodyPr wrap="square" lIns="0" rIns="0" tIns="0" bIns="0" anchor="ctr">
-            <a:spAutoFit/>
-          </a:bodyPr>
-          <a:lstStyle/>
-          <a:p>
-            <a:pPr algn="l"/>
-            <a:r>
-              <a:rPr sz="1400" b="0">
-                <a:solidFill>
-                  <a:srgbClr val="9A9AA2"/>
-                </a:solidFill>
-                <a:latin typeface="Poppins"/>
-              </a:rPr>
-              <a:t>of organizations see no EBIT impact from AI</a:t>
-            </a:r>
-          </a:p>
-        </p:txBody>
-      </p:sp>
-      <p:sp>
-        <p:nvSpPr>
-          <p:cNvPr id="131" name="ellipse 131"/>
-          <p:cNvSpPr/>
-          <p:nvPr/>
-        </p:nvSpPr>
-        <p:spPr>
-          <a:xfrm>
-            <a:off x="692658" y="4670298"/>
-            <a:ext cx="96012" cy="96012"/>
-          </a:xfrm>
-          <a:prstGeom prst="ellipse">
-            <a:avLst/>
-          </a:prstGeom>
-          <a:solidFill>
-            <a:srgbClr val="FF6B3D"/>
-          </a:solidFill>
-          <a:ln>
-            <a:noFill/>
-          </a:ln>
-          <a:effectLst/>
-        </p:spPr>
-        <p:txBody>
-          <a:bodyPr rtlCol="0" anchor="ctr"/>
-          <a:lstStyle/>
-          <a:p>
-            <a:pPr algn="ctr"/>
-          </a:p>
-        </p:txBody>
-      </p:sp>
-      <p:sp>
-        <p:nvSpPr>
-          <p:cNvPr id="132" name="ellipse 132"/>
-          <p:cNvSpPr/>
-          <p:nvPr/>
-        </p:nvSpPr>
-        <p:spPr>
-          <a:xfrm>
-            <a:off x="834390" y="4670298"/>
-            <a:ext cx="96012" cy="96012"/>
-          </a:xfrm>
-          <a:prstGeom prst="ellipse">
-            <a:avLst/>
-          </a:prstGeom>
-          <a:solidFill>
-            <a:srgbClr val="FF6B3D"/>
-          </a:solidFill>
-          <a:ln>
-            <a:noFill/>
-          </a:ln>
-          <a:effectLst/>
-        </p:spPr>
-        <p:txBody>
-          <a:bodyPr rtlCol="0" anchor="ctr"/>
-          <a:lstStyle/>
-          <a:p>
-            <a:pPr algn="ctr"/>
-          </a:p>
-        </p:txBody>
-      </p:sp>
-      <p:sp>
-        <p:nvSpPr>
-          <p:cNvPr id="133" name="ellipse 133"/>
-          <p:cNvSpPr/>
-          <p:nvPr/>
-        </p:nvSpPr>
-        <p:spPr>
-          <a:xfrm>
-            <a:off x="976122" y="4670298"/>
-            <a:ext cx="96012" cy="96012"/>
-          </a:xfrm>
-          <a:prstGeom prst="ellipse">
-            <a:avLst/>
-          </a:prstGeom>
-          <a:solidFill>
-            <a:srgbClr val="FF6B3D"/>
-          </a:solidFill>
-          <a:ln>
-            <a:noFill/>
-          </a:ln>
-          <a:effectLst/>
-        </p:spPr>
-        <p:txBody>
-          <a:bodyPr rtlCol="0" anchor="ctr"/>
-          <a:lstStyle/>
-          <a:p>
-            <a:pPr algn="ctr"/>
-          </a:p>
-        </p:txBody>
-      </p:sp>
-      <p:sp>
-        <p:nvSpPr>
-          <p:cNvPr id="134" name="ellipse 134"/>
-          <p:cNvSpPr/>
-          <p:nvPr/>
-        </p:nvSpPr>
-        <p:spPr>
-          <a:xfrm>
-            <a:off x="1117854" y="4670298"/>
-            <a:ext cx="96012" cy="96012"/>
-          </a:xfrm>
-          <a:prstGeom prst="ellipse">
-            <a:avLst/>
-          </a:prstGeom>
-          <a:solidFill>
-            <a:srgbClr val="FF6B3D"/>
-          </a:solidFill>
-          <a:ln>
-            <a:noFill/>
-          </a:ln>
-          <a:effectLst/>
-        </p:spPr>
-        <p:txBody>
-          <a:bodyPr rtlCol="0" anchor="ctr"/>
-          <a:lstStyle/>
-          <a:p>
-            <a:pPr algn="ctr"/>
-          </a:p>
-        </p:txBody>
-      </p:sp>
-      <p:sp>
-        <p:nvSpPr>
-          <p:cNvPr id="135" name="ellipse 135"/>
-          <p:cNvSpPr/>
-          <p:nvPr/>
-        </p:nvSpPr>
-        <p:spPr>
-          <a:xfrm>
-            <a:off x="1259586" y="4670298"/>
-            <a:ext cx="96012" cy="96012"/>
-          </a:xfrm>
-          <a:prstGeom prst="ellipse">
-            <a:avLst/>
-          </a:prstGeom>
-          <a:solidFill>
-            <a:srgbClr val="FF6B3D"/>
-          </a:solidFill>
-          <a:ln>
-            <a:noFill/>
-          </a:ln>
-          <a:effectLst/>
-        </p:spPr>
-        <p:txBody>
-          <a:bodyPr rtlCol="0" anchor="ctr"/>
-          <a:lstStyle/>
-          <a:p>
-            <a:pPr algn="ctr"/>
-          </a:p>
-        </p:txBody>
-      </p:sp>
-      <p:sp>
-        <p:nvSpPr>
-          <p:cNvPr id="136" name="ellipse 136"/>
-          <p:cNvSpPr/>
-          <p:nvPr/>
-        </p:nvSpPr>
-        <p:spPr>
-          <a:xfrm>
-            <a:off x="1401318" y="4670298"/>
-            <a:ext cx="96012" cy="96012"/>
-          </a:xfrm>
-          <a:prstGeom prst="ellipse">
-            <a:avLst/>
-          </a:prstGeom>
-          <a:solidFill>
-            <a:srgbClr val="FF6B3D"/>
-          </a:solidFill>
-          <a:ln>
-            <a:noFill/>
-          </a:ln>
-          <a:effectLst/>
-        </p:spPr>
-        <p:txBody>
-          <a:bodyPr rtlCol="0" anchor="ctr"/>
-          <a:lstStyle/>
-          <a:p>
-            <a:pPr algn="ctr"/>
-          </a:p>
-        </p:txBody>
-      </p:sp>
-      <p:sp>
-        <p:nvSpPr>
-          <p:cNvPr id="137" name="ellipse 137"/>
-          <p:cNvSpPr/>
-          <p:nvPr/>
-        </p:nvSpPr>
-        <p:spPr>
-          <a:xfrm>
-            <a:off x="1543050" y="4670298"/>
-            <a:ext cx="96012" cy="96012"/>
-          </a:xfrm>
-          <a:prstGeom prst="ellipse">
-            <a:avLst/>
-          </a:prstGeom>
-          <a:solidFill>
-            <a:srgbClr val="FF6B3D"/>
-          </a:solidFill>
-          <a:ln>
-            <a:noFill/>
-          </a:ln>
-          <a:effectLst/>
-        </p:spPr>
-        <p:txBody>
-          <a:bodyPr rtlCol="0" anchor="ctr"/>
-          <a:lstStyle/>
-          <a:p>
-            <a:pPr algn="ctr"/>
-          </a:p>
-        </p:txBody>
-      </p:sp>
-      <p:sp>
-        <p:nvSpPr>
-          <p:cNvPr id="138" name="ellipse 138"/>
-          <p:cNvSpPr/>
-          <p:nvPr/>
-        </p:nvSpPr>
-        <p:spPr>
-          <a:xfrm>
-            <a:off x="1684782" y="4670298"/>
-            <a:ext cx="96012" cy="96012"/>
-          </a:xfrm>
-          <a:prstGeom prst="ellipse">
-            <a:avLst/>
-          </a:prstGeom>
-          <a:solidFill>
-            <a:srgbClr val="FF6B3D"/>
-          </a:solidFill>
-          <a:ln>
-            <a:noFill/>
-          </a:ln>
-          <a:effectLst/>
-        </p:spPr>
-        <p:txBody>
-          <a:bodyPr rtlCol="0" anchor="ctr"/>
-          <a:lstStyle/>
-          <a:p>
-            <a:pPr algn="ctr"/>
-          </a:p>
-        </p:txBody>
-      </p:sp>
-      <p:sp>
-        <p:nvSpPr>
-          <p:cNvPr id="139" name="ellipse 139"/>
-          <p:cNvSpPr/>
-          <p:nvPr/>
-        </p:nvSpPr>
-        <p:spPr>
-          <a:xfrm>
-            <a:off x="1826514" y="4670298"/>
-            <a:ext cx="96012" cy="96012"/>
-          </a:xfrm>
-          <a:prstGeom prst="ellipse">
-            <a:avLst/>
-          </a:prstGeom>
-          <a:solidFill>
-            <a:srgbClr val="FF6B3D"/>
-          </a:solidFill>
-          <a:ln>
-            <a:noFill/>
-          </a:ln>
-          <a:effectLst/>
-        </p:spPr>
-        <p:txBody>
-          <a:bodyPr rtlCol="0" anchor="ctr"/>
-          <a:lstStyle/>
-          <a:p>
-            <a:pPr algn="ctr"/>
-          </a:p>
-        </p:txBody>
-      </p:sp>
-      <p:sp>
-        <p:nvSpPr>
-          <p:cNvPr id="140" name="ellipse 140"/>
-          <p:cNvSpPr/>
-          <p:nvPr/>
-        </p:nvSpPr>
-        <p:spPr>
-          <a:xfrm>
-            <a:off x="1968246" y="4670298"/>
-            <a:ext cx="96012" cy="96012"/>
-          </a:xfrm>
-          <a:prstGeom prst="ellipse">
-            <a:avLst/>
-          </a:prstGeom>
-          <a:solidFill>
-            <a:srgbClr val="FF6B3D"/>
-          </a:solidFill>
-          <a:ln>
-            <a:noFill/>
-          </a:ln>
-          <a:effectLst/>
-        </p:spPr>
-        <p:txBody>
-          <a:bodyPr rtlCol="0" anchor="ctr"/>
-          <a:lstStyle/>
-          <a:p>
-            <a:pPr algn="ctr"/>
-          </a:p>
-        </p:txBody>
-      </p:sp>
-      <p:sp>
-        <p:nvSpPr>
-          <p:cNvPr id="141" name="ellipse 141"/>
-          <p:cNvSpPr/>
-          <p:nvPr/>
-        </p:nvSpPr>
-        <p:spPr>
-          <a:xfrm>
-            <a:off x="2109978" y="4670298"/>
-            <a:ext cx="96012" cy="96012"/>
-          </a:xfrm>
-          <a:prstGeom prst="ellipse">
-            <a:avLst/>
-          </a:prstGeom>
-          <a:solidFill>
-            <a:srgbClr val="FF6B3D"/>
-          </a:solidFill>
-          <a:ln>
-            <a:noFill/>
-          </a:ln>
-          <a:effectLst/>
-        </p:spPr>
-        <p:txBody>
-          <a:bodyPr rtlCol="0" anchor="ctr"/>
-          <a:lstStyle/>
-          <a:p>
-            <a:pPr algn="ctr"/>
-          </a:p>
-        </p:txBody>
-      </p:sp>
-      <p:sp>
-        <p:nvSpPr>
-          <p:cNvPr id="142" name="ellipse 142"/>
-          <p:cNvSpPr/>
-          <p:nvPr/>
-        </p:nvSpPr>
-        <p:spPr>
-          <a:xfrm>
-            <a:off x="2251710" y="4670298"/>
-            <a:ext cx="96012" cy="96012"/>
-          </a:xfrm>
-          <a:prstGeom prst="ellipse">
-            <a:avLst/>
-          </a:prstGeom>
-          <a:solidFill>
-            <a:srgbClr val="FF6B3D"/>
-          </a:solidFill>
-          <a:ln>
-            <a:noFill/>
-          </a:ln>
-          <a:effectLst/>
-        </p:spPr>
-        <p:txBody>
-          <a:bodyPr rtlCol="0" anchor="ctr"/>
-          <a:lstStyle/>
-          <a:p>
-            <a:pPr algn="ctr"/>
-          </a:p>
-        </p:txBody>
-      </p:sp>
-      <p:sp>
-        <p:nvSpPr>
-          <p:cNvPr id="143" name="ellipse 143"/>
-          <p:cNvSpPr/>
-          <p:nvPr/>
-        </p:nvSpPr>
-        <p:spPr>
-          <a:xfrm>
-            <a:off x="2393442" y="4670298"/>
-            <a:ext cx="96012" cy="96012"/>
-          </a:xfrm>
-          <a:prstGeom prst="ellipse">
-            <a:avLst/>
-          </a:prstGeom>
-          <a:solidFill>
-            <a:srgbClr val="FF6B3D"/>
-          </a:solidFill>
-          <a:ln>
-            <a:noFill/>
-          </a:ln>
-          <a:effectLst/>
-        </p:spPr>
-        <p:txBody>
-          <a:bodyPr rtlCol="0" anchor="ctr"/>
-          <a:lstStyle/>
-          <a:p>
-            <a:pPr algn="ctr"/>
-          </a:p>
-        </p:txBody>
-      </p:sp>
-      <p:sp>
-        <p:nvSpPr>
-          <p:cNvPr id="144" name="ellipse 144"/>
-          <p:cNvSpPr/>
-          <p:nvPr/>
-        </p:nvSpPr>
-        <p:spPr>
-          <a:xfrm>
-            <a:off x="2535174" y="4670298"/>
-            <a:ext cx="96012" cy="96012"/>
-          </a:xfrm>
-          <a:prstGeom prst="ellipse">
-            <a:avLst/>
-          </a:prstGeom>
-          <a:solidFill>
-            <a:srgbClr val="FF6B3D"/>
-          </a:solidFill>
-          <a:ln>
-            <a:noFill/>
-          </a:ln>
-          <a:effectLst/>
-        </p:spPr>
-        <p:txBody>
-          <a:bodyPr rtlCol="0" anchor="ctr"/>
-          <a:lstStyle/>
-          <a:p>
-            <a:pPr algn="ctr"/>
-          </a:p>
-        </p:txBody>
-      </p:sp>
-      <p:sp>
-        <p:nvSpPr>
-          <p:cNvPr id="145" name="ellipse 145"/>
-          <p:cNvSpPr/>
-          <p:nvPr/>
-        </p:nvSpPr>
-        <p:spPr>
-          <a:xfrm>
-            <a:off x="2676906" y="4670298"/>
-            <a:ext cx="96012" cy="96012"/>
-          </a:xfrm>
-          <a:prstGeom prst="ellipse">
-            <a:avLst/>
-          </a:prstGeom>
-          <a:solidFill>
-            <a:srgbClr val="FF6B3D"/>
-          </a:solidFill>
-          <a:ln>
-            <a:noFill/>
-          </a:ln>
-          <a:effectLst/>
-        </p:spPr>
-        <p:txBody>
-          <a:bodyPr rtlCol="0" anchor="ctr"/>
-          <a:lstStyle/>
-          <a:p>
-            <a:pPr algn="ctr"/>
-          </a:p>
-        </p:txBody>
-      </p:sp>
-      <p:sp>
-        <p:nvSpPr>
-          <p:cNvPr id="146" name="ellipse 146"/>
-          <p:cNvSpPr/>
-          <p:nvPr/>
-        </p:nvSpPr>
-        <p:spPr>
-          <a:xfrm>
-            <a:off x="2818638" y="4670298"/>
-            <a:ext cx="96012" cy="96012"/>
-          </a:xfrm>
-          <a:prstGeom prst="ellipse">
-            <a:avLst/>
-          </a:prstGeom>
-          <a:solidFill>
-            <a:srgbClr val="FF6B3D"/>
-          </a:solidFill>
-          <a:ln>
-            <a:noFill/>
-          </a:ln>
-          <a:effectLst/>
-        </p:spPr>
-        <p:txBody>
-          <a:bodyPr rtlCol="0" anchor="ctr"/>
-          <a:lstStyle/>
-          <a:p>
-            <a:pPr algn="ctr"/>
-          </a:p>
-        </p:txBody>
-      </p:sp>
-      <p:sp>
-        <p:nvSpPr>
-          <p:cNvPr id="147" name="ellipse 147"/>
-          <p:cNvSpPr/>
-          <p:nvPr/>
-        </p:nvSpPr>
-        <p:spPr>
-          <a:xfrm>
-            <a:off x="2960370" y="4670298"/>
-            <a:ext cx="96012" cy="96012"/>
-          </a:xfrm>
-          <a:prstGeom prst="ellipse">
-            <a:avLst/>
-          </a:prstGeom>
-          <a:solidFill>
-            <a:srgbClr val="FF6B3D"/>
-          </a:solidFill>
-          <a:ln>
-            <a:noFill/>
-          </a:ln>
-          <a:effectLst/>
-        </p:spPr>
-        <p:txBody>
-          <a:bodyPr rtlCol="0" anchor="ctr"/>
-          <a:lstStyle/>
-          <a:p>
-            <a:pPr algn="ctr"/>
-          </a:p>
-        </p:txBody>
-      </p:sp>
-      <p:sp>
-        <p:nvSpPr>
-          <p:cNvPr id="148" name="ellipse 148"/>
-          <p:cNvSpPr/>
-          <p:nvPr/>
-        </p:nvSpPr>
-        <p:spPr>
-          <a:xfrm>
-            <a:off x="3102102" y="4670298"/>
-            <a:ext cx="96012" cy="96012"/>
-          </a:xfrm>
-          <a:prstGeom prst="ellipse">
-            <a:avLst/>
-          </a:prstGeom>
-          <a:solidFill>
-            <a:srgbClr val="FF6B3D"/>
-          </a:solidFill>
-          <a:ln>
-            <a:noFill/>
-          </a:ln>
-          <a:effectLst/>
-        </p:spPr>
-        <p:txBody>
-          <a:bodyPr rtlCol="0" anchor="ctr"/>
-          <a:lstStyle/>
-          <a:p>
-            <a:pPr algn="ctr"/>
-          </a:p>
-        </p:txBody>
-      </p:sp>
-      <p:sp>
-        <p:nvSpPr>
-          <p:cNvPr id="149" name="ellipse 149"/>
-          <p:cNvSpPr/>
-          <p:nvPr/>
-        </p:nvSpPr>
-        <p:spPr>
-          <a:xfrm>
-            <a:off x="3243834" y="4670298"/>
-            <a:ext cx="96012" cy="96012"/>
-          </a:xfrm>
-          <a:prstGeom prst="ellipse">
-            <a:avLst/>
-          </a:prstGeom>
-          <a:solidFill>
-            <a:srgbClr val="FF6B3D"/>
-          </a:solidFill>
-          <a:ln>
-            <a:noFill/>
-          </a:ln>
-          <a:effectLst/>
-        </p:spPr>
-        <p:txBody>
-          <a:bodyPr rtlCol="0" anchor="ctr"/>
-          <a:lstStyle/>
-          <a:p>
-            <a:pPr algn="ctr"/>
-          </a:p>
-        </p:txBody>
-      </p:sp>
-      <p:sp>
-        <p:nvSpPr>
-          <p:cNvPr id="150" name="ellipse 150"/>
-          <p:cNvSpPr/>
-          <p:nvPr/>
-        </p:nvSpPr>
-        <p:spPr>
-          <a:xfrm>
-            <a:off x="3385566" y="4670298"/>
-            <a:ext cx="96012" cy="96012"/>
-          </a:xfrm>
-          <a:prstGeom prst="ellipse">
-            <a:avLst/>
-          </a:prstGeom>
-          <a:solidFill>
-            <a:srgbClr val="FF6B3D"/>
-          </a:solidFill>
-          <a:ln>
-            <a:noFill/>
-          </a:ln>
-          <a:effectLst/>
-        </p:spPr>
-        <p:txBody>
-          <a:bodyPr rtlCol="0" anchor="ctr"/>
-          <a:lstStyle/>
-          <a:p>
-            <a:pPr algn="ctr"/>
-          </a:p>
-        </p:txBody>
-      </p:sp>
-      <p:sp>
-        <p:nvSpPr>
-          <p:cNvPr id="151" name="ellipse 151"/>
-          <p:cNvSpPr/>
-          <p:nvPr/>
-        </p:nvSpPr>
-        <p:spPr>
-          <a:xfrm>
-            <a:off x="692658" y="4812030"/>
-            <a:ext cx="96012" cy="96012"/>
-          </a:xfrm>
-          <a:prstGeom prst="ellipse">
-            <a:avLst/>
-          </a:prstGeom>
-          <a:solidFill>
-            <a:srgbClr val="FF6B3D"/>
-          </a:solidFill>
-          <a:ln>
-            <a:noFill/>
-          </a:ln>
-          <a:effectLst/>
-        </p:spPr>
-        <p:txBody>
-          <a:bodyPr rtlCol="0" anchor="ctr"/>
-          <a:lstStyle/>
-          <a:p>
-            <a:pPr algn="ctr"/>
-          </a:p>
-        </p:txBody>
-      </p:sp>
-      <p:sp>
-        <p:nvSpPr>
-          <p:cNvPr id="152" name="ellipse 152"/>
-          <p:cNvSpPr/>
-          <p:nvPr/>
-        </p:nvSpPr>
-        <p:spPr>
-          <a:xfrm>
-            <a:off x="834390" y="4812030"/>
-            <a:ext cx="96012" cy="96012"/>
-          </a:xfrm>
-          <a:prstGeom prst="ellipse">
-            <a:avLst/>
-          </a:prstGeom>
-          <a:solidFill>
-            <a:srgbClr val="FF6B3D"/>
-          </a:solidFill>
-          <a:ln>
-            <a:noFill/>
-          </a:ln>
-          <a:effectLst/>
-        </p:spPr>
-        <p:txBody>
-          <a:bodyPr rtlCol="0" anchor="ctr"/>
-          <a:lstStyle/>
-          <a:p>
-            <a:pPr algn="ctr"/>
-          </a:p>
-        </p:txBody>
-      </p:sp>
-      <p:sp>
-        <p:nvSpPr>
-          <p:cNvPr id="153" name="ellipse 153"/>
-          <p:cNvSpPr/>
-          <p:nvPr/>
-        </p:nvSpPr>
-        <p:spPr>
-          <a:xfrm>
-            <a:off x="976122" y="4812030"/>
-            <a:ext cx="96012" cy="96012"/>
-          </a:xfrm>
-          <a:prstGeom prst="ellipse">
-            <a:avLst/>
-          </a:prstGeom>
-          <a:solidFill>
-            <a:srgbClr val="FF6B3D"/>
-          </a:solidFill>
-          <a:ln>
-            <a:noFill/>
-          </a:ln>
-          <a:effectLst/>
-        </p:spPr>
-        <p:txBody>
-          <a:bodyPr rtlCol="0" anchor="ctr"/>
-          <a:lstStyle/>
-          <a:p>
-            <a:pPr algn="ctr"/>
-          </a:p>
-        </p:txBody>
-      </p:sp>
-      <p:sp>
-        <p:nvSpPr>
-          <p:cNvPr id="154" name="ellipse 154"/>
-          <p:cNvSpPr/>
-          <p:nvPr/>
-        </p:nvSpPr>
-        <p:spPr>
-          <a:xfrm>
-            <a:off x="1117854" y="4812030"/>
-            <a:ext cx="96012" cy="96012"/>
-          </a:xfrm>
-          <a:prstGeom prst="ellipse">
-            <a:avLst/>
-          </a:prstGeom>
-          <a:solidFill>
-            <a:srgbClr val="FF6B3D"/>
-          </a:solidFill>
-          <a:ln>
-            <a:noFill/>
-          </a:ln>
-          <a:effectLst/>
-        </p:spPr>
-        <p:txBody>
-          <a:bodyPr rtlCol="0" anchor="ctr"/>
-          <a:lstStyle/>
-          <a:p>
-            <a:pPr algn="ctr"/>
-          </a:p>
-        </p:txBody>
-      </p:sp>
-      <p:sp>
-        <p:nvSpPr>
-          <p:cNvPr id="155" name="ellipse 155"/>
-          <p:cNvSpPr/>
-          <p:nvPr/>
-        </p:nvSpPr>
-        <p:spPr>
-          <a:xfrm>
-            <a:off x="1259586" y="4812030"/>
-            <a:ext cx="96012" cy="96012"/>
-          </a:xfrm>
-          <a:prstGeom prst="ellipse">
-            <a:avLst/>
-          </a:prstGeom>
-          <a:solidFill>
-            <a:srgbClr val="FF6B3D"/>
-          </a:solidFill>
-          <a:ln>
-            <a:noFill/>
-          </a:ln>
-          <a:effectLst/>
-        </p:spPr>
-        <p:txBody>
-          <a:bodyPr rtlCol="0" anchor="ctr"/>
-          <a:lstStyle/>
-          <a:p>
-            <a:pPr algn="ctr"/>
-          </a:p>
-        </p:txBody>
-      </p:sp>
-      <p:sp>
-        <p:nvSpPr>
-          <p:cNvPr id="156" name="ellipse 156"/>
-          <p:cNvSpPr/>
-          <p:nvPr/>
-        </p:nvSpPr>
-        <p:spPr>
-          <a:xfrm>
-            <a:off x="1401318" y="4812030"/>
-            <a:ext cx="96012" cy="96012"/>
-          </a:xfrm>
-          <a:prstGeom prst="ellipse">
-            <a:avLst/>
-          </a:prstGeom>
-          <a:solidFill>
-            <a:srgbClr val="FF6B3D"/>
-          </a:solidFill>
-          <a:ln>
-            <a:noFill/>
-          </a:ln>
-          <a:effectLst/>
-        </p:spPr>
-        <p:txBody>
-          <a:bodyPr rtlCol="0" anchor="ctr"/>
-          <a:lstStyle/>
-          <a:p>
-            <a:pPr algn="ctr"/>
-          </a:p>
-        </p:txBody>
-      </p:sp>
-      <p:sp>
-        <p:nvSpPr>
-          <p:cNvPr id="157" name="ellipse 157"/>
-          <p:cNvSpPr/>
-          <p:nvPr/>
-        </p:nvSpPr>
-        <p:spPr>
-          <a:xfrm>
-            <a:off x="1543050" y="4812030"/>
-            <a:ext cx="96012" cy="96012"/>
-          </a:xfrm>
-          <a:prstGeom prst="ellipse">
-            <a:avLst/>
-          </a:prstGeom>
-          <a:solidFill>
-            <a:srgbClr val="FF6B3D"/>
-          </a:solidFill>
-          <a:ln>
-            <a:noFill/>
-          </a:ln>
-          <a:effectLst/>
-        </p:spPr>
-        <p:txBody>
-          <a:bodyPr rtlCol="0" anchor="ctr"/>
-          <a:lstStyle/>
-          <a:p>
-            <a:pPr algn="ctr"/>
-          </a:p>
-        </p:txBody>
-      </p:sp>
-      <p:sp>
-        <p:nvSpPr>
-          <p:cNvPr id="158" name="ellipse 158"/>
-          <p:cNvSpPr/>
-          <p:nvPr/>
-        </p:nvSpPr>
-        <p:spPr>
-          <a:xfrm>
-            <a:off x="1684782" y="4812030"/>
-            <a:ext cx="96012" cy="96012"/>
-          </a:xfrm>
-          <a:prstGeom prst="ellipse">
-            <a:avLst/>
-          </a:prstGeom>
-          <a:solidFill>
-            <a:srgbClr val="FF6B3D"/>
-          </a:solidFill>
-          <a:ln>
-            <a:noFill/>
-          </a:ln>
-          <a:effectLst/>
-        </p:spPr>
-        <p:txBody>
-          <a:bodyPr rtlCol="0" anchor="ctr"/>
-          <a:lstStyle/>
-          <a:p>
-            <a:pPr algn="ctr"/>
-          </a:p>
-        </p:txBody>
-      </p:sp>
-      <p:sp>
-        <p:nvSpPr>
-          <p:cNvPr id="159" name="ellipse 159"/>
-          <p:cNvSpPr/>
-          <p:nvPr/>
-        </p:nvSpPr>
-        <p:spPr>
-          <a:xfrm>
-            <a:off x="1826514" y="4812030"/>
-            <a:ext cx="96012" cy="96012"/>
-          </a:xfrm>
-          <a:prstGeom prst="ellipse">
-            <a:avLst/>
-          </a:prstGeom>
-          <a:solidFill>
-            <a:srgbClr val="FF6B3D"/>
-          </a:solidFill>
-          <a:ln>
-            <a:noFill/>
-          </a:ln>
-          <a:effectLst/>
-        </p:spPr>
-        <p:txBody>
-          <a:bodyPr rtlCol="0" anchor="ctr"/>
-          <a:lstStyle/>
-          <a:p>
-            <a:pPr algn="ctr"/>
-          </a:p>
-        </p:txBody>
-      </p:sp>
-      <p:sp>
-        <p:nvSpPr>
-          <p:cNvPr id="160" name="ellipse 160"/>
-          <p:cNvSpPr/>
-          <p:nvPr/>
-        </p:nvSpPr>
-        <p:spPr>
-          <a:xfrm>
-            <a:off x="1968246" y="4812030"/>
-            <a:ext cx="96012" cy="96012"/>
-          </a:xfrm>
-          <a:prstGeom prst="ellipse">
-            <a:avLst/>
-          </a:prstGeom>
-          <a:solidFill>
-            <a:srgbClr val="FF6B3D"/>
-          </a:solidFill>
-          <a:ln>
-            <a:noFill/>
-          </a:ln>
-          <a:effectLst/>
-        </p:spPr>
-        <p:txBody>
-          <a:bodyPr rtlCol="0" anchor="ctr"/>
-          <a:lstStyle/>
-          <a:p>
-            <a:pPr algn="ctr"/>
-          </a:p>
-        </p:txBody>
-      </p:sp>
-      <p:sp>
-        <p:nvSpPr>
-          <p:cNvPr id="161" name="ellipse 161"/>
-          <p:cNvSpPr/>
-          <p:nvPr/>
-        </p:nvSpPr>
-        <p:spPr>
-          <a:xfrm>
-            <a:off x="2109978" y="4812030"/>
-            <a:ext cx="96012" cy="96012"/>
-          </a:xfrm>
-          <a:prstGeom prst="ellipse">
-            <a:avLst/>
-          </a:prstGeom>
-          <a:solidFill>
-            <a:srgbClr val="FF6B3D"/>
-          </a:solidFill>
-          <a:ln>
-            <a:noFill/>
-          </a:ln>
-          <a:effectLst/>
-        </p:spPr>
-        <p:txBody>
-          <a:bodyPr rtlCol="0" anchor="ctr"/>
-          <a:lstStyle/>
-          <a:p>
-            <a:pPr algn="ctr"/>
-          </a:p>
-        </p:txBody>
-      </p:sp>
-      <p:sp>
-        <p:nvSpPr>
-          <p:cNvPr id="162" name="ellipse 162"/>
-          <p:cNvSpPr/>
-          <p:nvPr/>
-        </p:nvSpPr>
-        <p:spPr>
-          <a:xfrm>
-            <a:off x="2251710" y="4812030"/>
-            <a:ext cx="96012" cy="96012"/>
-          </a:xfrm>
-          <a:prstGeom prst="ellipse">
-            <a:avLst/>
-          </a:prstGeom>
-          <a:solidFill>
-            <a:srgbClr val="FF6B3D"/>
-          </a:solidFill>
-          <a:ln>
-            <a:noFill/>
-          </a:ln>
-          <a:effectLst/>
-        </p:spPr>
-        <p:txBody>
-          <a:bodyPr rtlCol="0" anchor="ctr"/>
-          <a:lstStyle/>
-          <a:p>
-            <a:pPr algn="ctr"/>
-          </a:p>
-        </p:txBody>
-      </p:sp>
-      <p:sp>
-        <p:nvSpPr>
-          <p:cNvPr id="163" name="ellipse 163"/>
-          <p:cNvSpPr/>
-          <p:nvPr/>
-        </p:nvSpPr>
-        <p:spPr>
-          <a:xfrm>
-            <a:off x="2393442" y="4812030"/>
-            <a:ext cx="96012" cy="96012"/>
-          </a:xfrm>
-          <a:prstGeom prst="ellipse">
-            <a:avLst/>
-          </a:prstGeom>
-          <a:solidFill>
-            <a:srgbClr val="FF6B3D"/>
-          </a:solidFill>
-          <a:ln>
-            <a:noFill/>
-          </a:ln>
-          <a:effectLst/>
-        </p:spPr>
-        <p:txBody>
-          <a:bodyPr rtlCol="0" anchor="ctr"/>
-          <a:lstStyle/>
-          <a:p>
-            <a:pPr algn="ctr"/>
-          </a:p>
-        </p:txBody>
-      </p:sp>
-      <p:sp>
-        <p:nvSpPr>
-          <p:cNvPr id="164" name="ellipse 164"/>
-          <p:cNvSpPr/>
-          <p:nvPr/>
-        </p:nvSpPr>
-        <p:spPr>
-          <a:xfrm>
-            <a:off x="2535174" y="4812030"/>
-            <a:ext cx="96012" cy="96012"/>
-          </a:xfrm>
-          <a:prstGeom prst="ellipse">
-            <a:avLst/>
-          </a:prstGeom>
-          <a:solidFill>
-            <a:srgbClr val="FF6B3D"/>
-          </a:solidFill>
-          <a:ln>
-            <a:noFill/>
-          </a:ln>
-          <a:effectLst/>
-        </p:spPr>
-        <p:txBody>
-          <a:bodyPr rtlCol="0" anchor="ctr"/>
-          <a:lstStyle/>
-          <a:p>
-            <a:pPr algn="ctr"/>
-          </a:p>
-        </p:txBody>
-      </p:sp>
-      <p:sp>
-        <p:nvSpPr>
-          <p:cNvPr id="165" name="ellipse 165"/>
-          <p:cNvSpPr/>
-          <p:nvPr/>
-        </p:nvSpPr>
-        <p:spPr>
-          <a:xfrm>
-            <a:off x="2676906" y="4812030"/>
-            <a:ext cx="96012" cy="96012"/>
-          </a:xfrm>
-          <a:prstGeom prst="ellipse">
-            <a:avLst/>
-          </a:prstGeom>
-          <a:solidFill>
-            <a:srgbClr val="FF6B3D"/>
-          </a:solidFill>
-          <a:ln>
-            <a:noFill/>
-          </a:ln>
-          <a:effectLst/>
-        </p:spPr>
-        <p:txBody>
-          <a:bodyPr rtlCol="0" anchor="ctr"/>
-          <a:lstStyle/>
-          <a:p>
-            <a:pPr algn="ctr"/>
-          </a:p>
-        </p:txBody>
-      </p:sp>
-      <p:sp>
-        <p:nvSpPr>
-          <p:cNvPr id="166" name="ellipse 166"/>
-          <p:cNvSpPr/>
-          <p:nvPr/>
-        </p:nvSpPr>
-        <p:spPr>
-          <a:xfrm>
-            <a:off x="2818638" y="4812030"/>
-            <a:ext cx="96012" cy="96012"/>
-          </a:xfrm>
-          <a:prstGeom prst="ellipse">
-            <a:avLst/>
-          </a:prstGeom>
-          <a:solidFill>
-            <a:srgbClr val="FF6B3D"/>
-          </a:solidFill>
-          <a:ln>
-            <a:noFill/>
-          </a:ln>
-          <a:effectLst/>
-        </p:spPr>
-        <p:txBody>
-          <a:bodyPr rtlCol="0" anchor="ctr"/>
-          <a:lstStyle/>
-          <a:p>
-            <a:pPr algn="ctr"/>
-          </a:p>
-        </p:txBody>
-      </p:sp>
-      <p:sp>
-        <p:nvSpPr>
-          <p:cNvPr id="167" name="ellipse 167"/>
-          <p:cNvSpPr/>
-          <p:nvPr/>
-        </p:nvSpPr>
-        <p:spPr>
-          <a:xfrm>
-            <a:off x="2960370" y="4812030"/>
-            <a:ext cx="96012" cy="96012"/>
-          </a:xfrm>
-          <a:prstGeom prst="ellipse">
-            <a:avLst/>
-          </a:prstGeom>
-          <a:solidFill>
-            <a:srgbClr val="FF6B3D"/>
-          </a:solidFill>
-          <a:ln>
-            <a:noFill/>
-          </a:ln>
-          <a:effectLst/>
-        </p:spPr>
-        <p:txBody>
-          <a:bodyPr rtlCol="0" anchor="ctr"/>
-          <a:lstStyle/>
-          <a:p>
-            <a:pPr algn="ctr"/>
-          </a:p>
-        </p:txBody>
-      </p:sp>
-      <p:sp>
-        <p:nvSpPr>
-          <p:cNvPr id="168" name="ellipse 168"/>
-          <p:cNvSpPr/>
-          <p:nvPr/>
-        </p:nvSpPr>
-        <p:spPr>
-          <a:xfrm>
-            <a:off x="3102102" y="4812030"/>
-            <a:ext cx="96012" cy="96012"/>
-          </a:xfrm>
-          <a:prstGeom prst="ellipse">
-            <a:avLst/>
-          </a:prstGeom>
-          <a:solidFill>
-            <a:srgbClr val="FF6B3D"/>
-          </a:solidFill>
-          <a:ln>
-            <a:noFill/>
-          </a:ln>
-          <a:effectLst/>
-        </p:spPr>
-        <p:txBody>
-          <a:bodyPr rtlCol="0" anchor="ctr"/>
-          <a:lstStyle/>
-          <a:p>
-            <a:pPr algn="ctr"/>
-          </a:p>
-        </p:txBody>
-      </p:sp>
-      <p:sp>
-        <p:nvSpPr>
-          <p:cNvPr id="169" name="ellipse 169"/>
-          <p:cNvSpPr/>
-          <p:nvPr/>
-        </p:nvSpPr>
-        <p:spPr>
-          <a:xfrm>
-            <a:off x="3243834" y="4812030"/>
-            <a:ext cx="96012" cy="96012"/>
-          </a:xfrm>
-          <a:prstGeom prst="ellipse">
-            <a:avLst/>
-          </a:prstGeom>
-          <a:solidFill>
-            <a:srgbClr val="FF6B3D"/>
-          </a:solidFill>
-          <a:ln>
-            <a:noFill/>
-          </a:ln>
-          <a:effectLst/>
-        </p:spPr>
-        <p:txBody>
-          <a:bodyPr rtlCol="0" anchor="ctr"/>
-          <a:lstStyle/>
-          <a:p>
-            <a:pPr algn="ctr"/>
-          </a:p>
-        </p:txBody>
-      </p:sp>
-      <p:sp>
-        <p:nvSpPr>
-          <p:cNvPr id="170" name="ellipse 170"/>
-          <p:cNvSpPr/>
-          <p:nvPr/>
-        </p:nvSpPr>
-        <p:spPr>
-          <a:xfrm>
-            <a:off x="3385566" y="4812030"/>
-            <a:ext cx="96012" cy="96012"/>
-          </a:xfrm>
-          <a:prstGeom prst="ellipse">
-            <a:avLst/>
-          </a:prstGeom>
-          <a:solidFill>
-            <a:srgbClr val="FF6B3D"/>
-          </a:solidFill>
-          <a:ln>
-            <a:noFill/>
-          </a:ln>
-          <a:effectLst/>
-        </p:spPr>
-        <p:txBody>
-          <a:bodyPr rtlCol="0" anchor="ctr"/>
-          <a:lstStyle/>
-          <a:p>
-            <a:pPr algn="ctr"/>
-          </a:p>
-        </p:txBody>
-      </p:sp>
-      <p:sp>
-        <p:nvSpPr>
-          <p:cNvPr id="171" name="ellipse 171"/>
-          <p:cNvSpPr/>
-          <p:nvPr/>
-        </p:nvSpPr>
-        <p:spPr>
-          <a:xfrm>
-            <a:off x="692658" y="4953762"/>
-            <a:ext cx="96012" cy="96012"/>
-          </a:xfrm>
-          <a:prstGeom prst="ellipse">
-            <a:avLst/>
-          </a:prstGeom>
-          <a:solidFill>
-            <a:srgbClr val="FF6B3D"/>
-          </a:solidFill>
-          <a:ln>
-            <a:noFill/>
-          </a:ln>
-          <a:effectLst/>
-        </p:spPr>
-        <p:txBody>
-          <a:bodyPr rtlCol="0" anchor="ctr"/>
-          <a:lstStyle/>
-          <a:p>
-            <a:pPr algn="ctr"/>
-          </a:p>
-        </p:txBody>
-      </p:sp>
-      <p:sp>
-        <p:nvSpPr>
-          <p:cNvPr id="172" name="ellipse 172"/>
-          <p:cNvSpPr/>
-          <p:nvPr/>
-        </p:nvSpPr>
-        <p:spPr>
-          <a:xfrm>
-            <a:off x="834390" y="4953762"/>
-            <a:ext cx="96012" cy="96012"/>
-          </a:xfrm>
-          <a:prstGeom prst="ellipse">
-            <a:avLst/>
-          </a:prstGeom>
-          <a:solidFill>
-            <a:srgbClr val="FF6B3D"/>
-          </a:solidFill>
-          <a:ln>
-            <a:noFill/>
-          </a:ln>
-          <a:effectLst/>
-        </p:spPr>
-        <p:txBody>
-          <a:bodyPr rtlCol="0" anchor="ctr"/>
-          <a:lstStyle/>
-          <a:p>
-            <a:pPr algn="ctr"/>
-          </a:p>
-        </p:txBody>
-      </p:sp>
-      <p:sp>
-        <p:nvSpPr>
-          <p:cNvPr id="173" name="ellipse 173"/>
-          <p:cNvSpPr/>
-          <p:nvPr/>
-        </p:nvSpPr>
-        <p:spPr>
-          <a:xfrm>
-            <a:off x="976122" y="4953762"/>
-            <a:ext cx="96012" cy="96012"/>
-          </a:xfrm>
-          <a:prstGeom prst="ellipse">
-            <a:avLst/>
-          </a:prstGeom>
-          <a:solidFill>
-            <a:srgbClr val="FF6B3D"/>
-          </a:solidFill>
-          <a:ln>
-            <a:noFill/>
-          </a:ln>
-          <a:effectLst/>
-        </p:spPr>
-        <p:txBody>
-          <a:bodyPr rtlCol="0" anchor="ctr"/>
-          <a:lstStyle/>
-          <a:p>
-            <a:pPr algn="ctr"/>
-          </a:p>
-        </p:txBody>
-      </p:sp>
-      <p:sp>
-        <p:nvSpPr>
-          <p:cNvPr id="174" name="ellipse 174"/>
-          <p:cNvSpPr/>
-          <p:nvPr/>
-        </p:nvSpPr>
-        <p:spPr>
-          <a:xfrm>
-            <a:off x="1117854" y="4953762"/>
-            <a:ext cx="96012" cy="96012"/>
-          </a:xfrm>
-          <a:prstGeom prst="ellipse">
-            <a:avLst/>
-          </a:prstGeom>
-          <a:solidFill>
-            <a:srgbClr val="FF6B3D"/>
-          </a:solidFill>
-          <a:ln>
-            <a:noFill/>
-          </a:ln>
-          <a:effectLst/>
-        </p:spPr>
-        <p:txBody>
-          <a:bodyPr rtlCol="0" anchor="ctr"/>
-          <a:lstStyle/>
-          <a:p>
-            <a:pPr algn="ctr"/>
-          </a:p>
-        </p:txBody>
-      </p:sp>
-      <p:sp>
-        <p:nvSpPr>
-          <p:cNvPr id="175" name="ellipse 175"/>
-          <p:cNvSpPr/>
-          <p:nvPr/>
-        </p:nvSpPr>
-        <p:spPr>
-          <a:xfrm>
-            <a:off x="1259586" y="4953762"/>
-            <a:ext cx="96012" cy="96012"/>
-          </a:xfrm>
-          <a:prstGeom prst="ellipse">
-            <a:avLst/>
-          </a:prstGeom>
-          <a:solidFill>
-            <a:srgbClr val="FF6B3D"/>
-          </a:solidFill>
-          <a:ln>
-            <a:noFill/>
-          </a:ln>
-          <a:effectLst/>
-        </p:spPr>
-        <p:txBody>
-          <a:bodyPr rtlCol="0" anchor="ctr"/>
-          <a:lstStyle/>
-          <a:p>
-            <a:pPr algn="ctr"/>
-          </a:p>
-        </p:txBody>
-      </p:sp>
-      <p:sp>
-        <p:nvSpPr>
-          <p:cNvPr id="176" name="ellipse 176"/>
-          <p:cNvSpPr/>
-          <p:nvPr/>
-        </p:nvSpPr>
-        <p:spPr>
-          <a:xfrm>
-            <a:off x="1401318" y="4953762"/>
-            <a:ext cx="96012" cy="96012"/>
-          </a:xfrm>
-          <a:prstGeom prst="ellipse">
-            <a:avLst/>
-          </a:prstGeom>
-          <a:solidFill>
-            <a:srgbClr val="FF6B3D"/>
-          </a:solidFill>
-          <a:ln>
-            <a:noFill/>
-          </a:ln>
-          <a:effectLst/>
-        </p:spPr>
-        <p:txBody>
-          <a:bodyPr rtlCol="0" anchor="ctr"/>
-          <a:lstStyle/>
-          <a:p>
-            <a:pPr algn="ctr"/>
-          </a:p>
-        </p:txBody>
-      </p:sp>
-      <p:sp>
-        <p:nvSpPr>
-          <p:cNvPr id="177" name="ellipse 177"/>
-          <p:cNvSpPr/>
-          <p:nvPr/>
-        </p:nvSpPr>
-        <p:spPr>
-          <a:xfrm>
-            <a:off x="1543050" y="4953762"/>
-            <a:ext cx="96012" cy="96012"/>
-          </a:xfrm>
-          <a:prstGeom prst="ellipse">
-            <a:avLst/>
-          </a:prstGeom>
-          <a:solidFill>
-            <a:srgbClr val="FF6B3D"/>
-          </a:solidFill>
-          <a:ln>
-            <a:noFill/>
-          </a:ln>
-          <a:effectLst/>
-        </p:spPr>
-        <p:txBody>
-          <a:bodyPr rtlCol="0" anchor="ctr"/>
-          <a:lstStyle/>
-          <a:p>
-            <a:pPr algn="ctr"/>
-          </a:p>
-        </p:txBody>
-      </p:sp>
-      <p:sp>
-        <p:nvSpPr>
-          <p:cNvPr id="178" name="ellipse 178"/>
-          <p:cNvSpPr/>
-          <p:nvPr/>
-        </p:nvSpPr>
-        <p:spPr>
-          <a:xfrm>
-            <a:off x="1684782" y="4953762"/>
-            <a:ext cx="96012" cy="96012"/>
-          </a:xfrm>
-          <a:prstGeom prst="ellipse">
-            <a:avLst/>
-          </a:prstGeom>
-          <a:solidFill>
-            <a:srgbClr val="FF6B3D"/>
-          </a:solidFill>
-          <a:ln>
-            <a:noFill/>
-          </a:ln>
-          <a:effectLst/>
-        </p:spPr>
-        <p:txBody>
-          <a:bodyPr rtlCol="0" anchor="ctr"/>
-          <a:lstStyle/>
-          <a:p>
-            <a:pPr algn="ctr"/>
-          </a:p>
-        </p:txBody>
-      </p:sp>
-      <p:sp>
-        <p:nvSpPr>
-          <p:cNvPr id="179" name="ellipse 179"/>
-          <p:cNvSpPr/>
-          <p:nvPr/>
-        </p:nvSpPr>
-        <p:spPr>
-          <a:xfrm>
-            <a:off x="1826514" y="4953762"/>
-            <a:ext cx="96012" cy="96012"/>
-          </a:xfrm>
-          <a:prstGeom prst="ellipse">
-            <a:avLst/>
-          </a:prstGeom>
-          <a:solidFill>
-            <a:srgbClr val="FF6B3D"/>
-          </a:solidFill>
-          <a:ln>
-            <a:noFill/>
-          </a:ln>
-          <a:effectLst/>
-        </p:spPr>
-        <p:txBody>
-          <a:bodyPr rtlCol="0" anchor="ctr"/>
-          <a:lstStyle/>
-          <a:p>
-            <a:pPr algn="ctr"/>
-          </a:p>
-        </p:txBody>
-      </p:sp>
-      <p:sp>
-        <p:nvSpPr>
-          <p:cNvPr id="180" name="ellipse 180"/>
-          <p:cNvSpPr/>
-          <p:nvPr/>
-        </p:nvSpPr>
-        <p:spPr>
-          <a:xfrm>
-            <a:off x="1968246" y="4953762"/>
-            <a:ext cx="96012" cy="96012"/>
-          </a:xfrm>
-          <a:prstGeom prst="ellipse">
-            <a:avLst/>
-          </a:prstGeom>
-          <a:solidFill>
-            <a:srgbClr val="FF6B3D"/>
-          </a:solidFill>
-          <a:ln>
-            <a:noFill/>
-          </a:ln>
-          <a:effectLst/>
-        </p:spPr>
-        <p:txBody>
-          <a:bodyPr rtlCol="0" anchor="ctr"/>
-          <a:lstStyle/>
-          <a:p>
-            <a:pPr algn="ctr"/>
-          </a:p>
-        </p:txBody>
-      </p:sp>
-      <p:sp>
-        <p:nvSpPr>
-          <p:cNvPr id="181" name="ellipse 181"/>
-          <p:cNvSpPr/>
-          <p:nvPr/>
-        </p:nvSpPr>
-        <p:spPr>
-          <a:xfrm>
-            <a:off x="2109978" y="4953762"/>
-            <a:ext cx="96012" cy="96012"/>
-          </a:xfrm>
-          <a:prstGeom prst="ellipse">
-            <a:avLst/>
-          </a:prstGeom>
-          <a:solidFill>
-            <a:srgbClr val="FF6B3D"/>
-          </a:solidFill>
-          <a:ln>
-            <a:noFill/>
-          </a:ln>
-          <a:effectLst/>
-        </p:spPr>
-        <p:txBody>
-          <a:bodyPr rtlCol="0" anchor="ctr"/>
-          <a:lstStyle/>
-          <a:p>
-            <a:pPr algn="ctr"/>
-          </a:p>
-        </p:txBody>
-      </p:sp>
-      <p:sp>
-        <p:nvSpPr>
-          <p:cNvPr id="182" name="ellipse 182"/>
-          <p:cNvSpPr/>
-          <p:nvPr/>
-        </p:nvSpPr>
-        <p:spPr>
-          <a:xfrm>
-            <a:off x="2251710" y="4953762"/>
-            <a:ext cx="96012" cy="96012"/>
-          </a:xfrm>
-          <a:prstGeom prst="ellipse">
-            <a:avLst/>
-          </a:prstGeom>
-          <a:solidFill>
-            <a:srgbClr val="FF6B3D"/>
-          </a:solidFill>
-          <a:ln>
-            <a:noFill/>
-          </a:ln>
-          <a:effectLst/>
-        </p:spPr>
-        <p:txBody>
-          <a:bodyPr rtlCol="0" anchor="ctr"/>
-          <a:lstStyle/>
-          <a:p>
-            <a:pPr algn="ctr"/>
-          </a:p>
-        </p:txBody>
-      </p:sp>
-      <p:sp>
-        <p:nvSpPr>
-          <p:cNvPr id="183" name="ellipse 183"/>
-          <p:cNvSpPr/>
-          <p:nvPr/>
-        </p:nvSpPr>
-        <p:spPr>
-          <a:xfrm>
-            <a:off x="2393442" y="4953762"/>
-            <a:ext cx="96012" cy="96012"/>
-          </a:xfrm>
-          <a:prstGeom prst="ellipse">
-            <a:avLst/>
-          </a:prstGeom>
-          <a:solidFill>
-            <a:srgbClr val="FF6B3D"/>
-          </a:solidFill>
-          <a:ln>
-            <a:noFill/>
-          </a:ln>
-          <a:effectLst/>
-        </p:spPr>
-        <p:txBody>
-          <a:bodyPr rtlCol="0" anchor="ctr"/>
-          <a:lstStyle/>
-          <a:p>
-            <a:pPr algn="ctr"/>
-          </a:p>
-        </p:txBody>
-      </p:sp>
-      <p:sp>
-        <p:nvSpPr>
-          <p:cNvPr id="184" name="ellipse 184"/>
-          <p:cNvSpPr/>
-          <p:nvPr/>
-        </p:nvSpPr>
-        <p:spPr>
-          <a:xfrm>
-            <a:off x="2535174" y="4953762"/>
-            <a:ext cx="96012" cy="96012"/>
-          </a:xfrm>
-          <a:prstGeom prst="ellipse">
-            <a:avLst/>
-          </a:prstGeom>
-          <a:solidFill>
-            <a:srgbClr val="FF6B3D"/>
-          </a:solidFill>
-          <a:ln>
-            <a:noFill/>
-          </a:ln>
-          <a:effectLst/>
-        </p:spPr>
-        <p:txBody>
-          <a:bodyPr rtlCol="0" anchor="ctr"/>
-          <a:lstStyle/>
-          <a:p>
-            <a:pPr algn="ctr"/>
-          </a:p>
-        </p:txBody>
-      </p:sp>
-      <p:sp>
-        <p:nvSpPr>
-          <p:cNvPr id="185" name="ellipse 185"/>
-          <p:cNvSpPr/>
-          <p:nvPr/>
-        </p:nvSpPr>
-        <p:spPr>
-          <a:xfrm>
-            <a:off x="2676906" y="4953762"/>
-            <a:ext cx="96012" cy="96012"/>
-          </a:xfrm>
-          <a:prstGeom prst="ellipse">
-            <a:avLst/>
-          </a:prstGeom>
-          <a:solidFill>
-            <a:srgbClr val="FF6B3D"/>
-          </a:solidFill>
-          <a:ln>
-            <a:noFill/>
-          </a:ln>
-          <a:effectLst/>
-        </p:spPr>
-        <p:txBody>
-          <a:bodyPr rtlCol="0" anchor="ctr"/>
-          <a:lstStyle/>
-          <a:p>
-            <a:pPr algn="ctr"/>
-          </a:p>
-        </p:txBody>
-      </p:sp>
-      <p:sp>
-        <p:nvSpPr>
-          <p:cNvPr id="186" name="ellipse 186"/>
-          <p:cNvSpPr/>
-          <p:nvPr/>
-        </p:nvSpPr>
-        <p:spPr>
-          <a:xfrm>
-            <a:off x="2818638" y="4953762"/>
-            <a:ext cx="96012" cy="96012"/>
-          </a:xfrm>
-          <a:prstGeom prst="ellipse">
-            <a:avLst/>
-          </a:prstGeom>
-          <a:solidFill>
-            <a:srgbClr val="FF6B3D"/>
-          </a:solidFill>
-          <a:ln>
-            <a:noFill/>
-          </a:ln>
-          <a:effectLst/>
-        </p:spPr>
-        <p:txBody>
-          <a:bodyPr rtlCol="0" anchor="ctr"/>
-          <a:lstStyle/>
-          <a:p>
-            <a:pPr algn="ctr"/>
-          </a:p>
-        </p:txBody>
-      </p:sp>
-      <p:sp>
-        <p:nvSpPr>
-          <p:cNvPr id="187" name="ellipse 187"/>
-          <p:cNvSpPr/>
-          <p:nvPr/>
-        </p:nvSpPr>
-        <p:spPr>
-          <a:xfrm>
-            <a:off x="2960370" y="4953762"/>
-            <a:ext cx="96012" cy="96012"/>
-          </a:xfrm>
-          <a:prstGeom prst="ellipse">
-            <a:avLst/>
-          </a:prstGeom>
-          <a:solidFill>
-            <a:srgbClr val="FF6B3D"/>
-          </a:solidFill>
-          <a:ln>
-            <a:noFill/>
-          </a:ln>
-          <a:effectLst/>
-        </p:spPr>
-        <p:txBody>
-          <a:bodyPr rtlCol="0" anchor="ctr"/>
-          <a:lstStyle/>
-          <a:p>
-            <a:pPr algn="ctr"/>
-          </a:p>
-        </p:txBody>
-      </p:sp>
-      <p:sp>
-        <p:nvSpPr>
-          <p:cNvPr id="188" name="ellipse 188"/>
-          <p:cNvSpPr/>
-          <p:nvPr/>
-        </p:nvSpPr>
-        <p:spPr>
-          <a:xfrm>
-            <a:off x="3102102" y="4953762"/>
-            <a:ext cx="96012" cy="96012"/>
-          </a:xfrm>
-          <a:prstGeom prst="ellipse">
-            <a:avLst/>
-          </a:prstGeom>
-          <a:solidFill>
-            <a:srgbClr val="FF6B3D"/>
-          </a:solidFill>
-          <a:ln>
-            <a:noFill/>
-          </a:ln>
-          <a:effectLst/>
-        </p:spPr>
-        <p:txBody>
-          <a:bodyPr rtlCol="0" anchor="ctr"/>
-          <a:lstStyle/>
-          <a:p>
-            <a:pPr algn="ctr"/>
-          </a:p>
-        </p:txBody>
-      </p:sp>
-      <p:sp>
-        <p:nvSpPr>
-          <p:cNvPr id="189" name="ellipse 189"/>
-          <p:cNvSpPr/>
-          <p:nvPr/>
-        </p:nvSpPr>
-        <p:spPr>
-          <a:xfrm>
-            <a:off x="3243834" y="4953762"/>
-            <a:ext cx="96012" cy="96012"/>
-          </a:xfrm>
-          <a:prstGeom prst="ellipse">
-            <a:avLst/>
-          </a:prstGeom>
-          <a:solidFill>
-            <a:srgbClr val="FF6B3D"/>
-          </a:solidFill>
-          <a:ln>
-            <a:noFill/>
-          </a:ln>
-          <a:effectLst/>
-        </p:spPr>
-        <p:txBody>
-          <a:bodyPr rtlCol="0" anchor="ctr"/>
-          <a:lstStyle/>
-          <a:p>
-            <a:pPr algn="ctr"/>
-          </a:p>
-        </p:txBody>
-      </p:sp>
-      <p:sp>
-        <p:nvSpPr>
-          <p:cNvPr id="190" name="ellipse 190"/>
-          <p:cNvSpPr/>
-          <p:nvPr/>
-        </p:nvSpPr>
-        <p:spPr>
-          <a:xfrm>
-            <a:off x="3385566" y="4953762"/>
-            <a:ext cx="96012" cy="96012"/>
-          </a:xfrm>
-          <a:prstGeom prst="ellipse">
-            <a:avLst/>
-          </a:prstGeom>
-          <a:solidFill>
-            <a:srgbClr val="FF6B3D"/>
-          </a:solidFill>
-          <a:ln>
-            <a:noFill/>
-          </a:ln>
-          <a:effectLst/>
-        </p:spPr>
-        <p:txBody>
-          <a:bodyPr rtlCol="0" anchor="ctr"/>
-          <a:lstStyle/>
-          <a:p>
-            <a:pPr algn="ctr"/>
-          </a:p>
-        </p:txBody>
-      </p:sp>
-      <p:sp>
-        <p:nvSpPr>
-          <p:cNvPr id="191" name="ellipse 191"/>
-          <p:cNvSpPr/>
-          <p:nvPr/>
-        </p:nvSpPr>
-        <p:spPr>
-          <a:xfrm>
-            <a:off x="692658" y="5095494"/>
-            <a:ext cx="96012" cy="96012"/>
-          </a:xfrm>
-          <a:prstGeom prst="ellipse">
-            <a:avLst/>
-          </a:prstGeom>
-          <a:solidFill>
-            <a:srgbClr val="FF6B3D"/>
-          </a:solidFill>
-          <a:ln>
-            <a:noFill/>
-          </a:ln>
-          <a:effectLst/>
-        </p:spPr>
-        <p:txBody>
-          <a:bodyPr rtlCol="0" anchor="ctr"/>
-          <a:lstStyle/>
-          <a:p>
-            <a:pPr algn="ctr"/>
-          </a:p>
-        </p:txBody>
-      </p:sp>
-      <p:sp>
-        <p:nvSpPr>
-          <p:cNvPr id="192" name="ellipse 192"/>
-          <p:cNvSpPr/>
-          <p:nvPr/>
-        </p:nvSpPr>
-        <p:spPr>
-          <a:xfrm>
-            <a:off x="834390" y="5095494"/>
-            <a:ext cx="96012" cy="96012"/>
-          </a:xfrm>
-          <a:prstGeom prst="ellipse">
-            <a:avLst/>
-          </a:prstGeom>
-          <a:solidFill>
-            <a:srgbClr val="2B2B2D"/>
-          </a:solidFill>
-          <a:ln>
-            <a:noFill/>
-          </a:ln>
-          <a:effectLst/>
-        </p:spPr>
-        <p:txBody>
-          <a:bodyPr rtlCol="0" anchor="ctr"/>
-          <a:lstStyle/>
-          <a:p>
-            <a:pPr algn="ctr"/>
-          </a:p>
-        </p:txBody>
-      </p:sp>
-      <p:sp>
-        <p:nvSpPr>
-          <p:cNvPr id="193" name="ellipse 193"/>
-          <p:cNvSpPr/>
-          <p:nvPr/>
-        </p:nvSpPr>
-        <p:spPr>
-          <a:xfrm>
-            <a:off x="976122" y="5095494"/>
-            <a:ext cx="96012" cy="96012"/>
-          </a:xfrm>
-          <a:prstGeom prst="ellipse">
-            <a:avLst/>
-          </a:prstGeom>
-          <a:solidFill>
-            <a:srgbClr val="2B2B2D"/>
-          </a:solidFill>
-          <a:ln>
-            <a:noFill/>
-          </a:ln>
-          <a:effectLst/>
-        </p:spPr>
-        <p:txBody>
-          <a:bodyPr rtlCol="0" anchor="ctr"/>
-          <a:lstStyle/>
-          <a:p>
-            <a:pPr algn="ctr"/>
-          </a:p>
-        </p:txBody>
-      </p:sp>
-      <p:sp>
-        <p:nvSpPr>
-          <p:cNvPr id="194" name="ellipse 194"/>
-          <p:cNvSpPr/>
-          <p:nvPr/>
-        </p:nvSpPr>
-        <p:spPr>
-          <a:xfrm>
-            <a:off x="1117854" y="5095494"/>
-            <a:ext cx="96012" cy="96012"/>
-          </a:xfrm>
-          <a:prstGeom prst="ellipse">
-            <a:avLst/>
-          </a:prstGeom>
-          <a:solidFill>
-            <a:srgbClr val="2B2B2D"/>
-          </a:solidFill>
-          <a:ln>
-            <a:noFill/>
-          </a:ln>
-          <a:effectLst/>
-        </p:spPr>
-        <p:txBody>
-          <a:bodyPr rtlCol="0" anchor="ctr"/>
-          <a:lstStyle/>
-          <a:p>
-            <a:pPr algn="ctr"/>
-          </a:p>
-        </p:txBody>
-      </p:sp>
-      <p:sp>
-        <p:nvSpPr>
-          <p:cNvPr id="195" name="ellipse 195"/>
-          <p:cNvSpPr/>
-          <p:nvPr/>
-        </p:nvSpPr>
-        <p:spPr>
-          <a:xfrm>
-            <a:off x="1259586" y="5095494"/>
-            <a:ext cx="96012" cy="96012"/>
-          </a:xfrm>
-          <a:prstGeom prst="ellipse">
-            <a:avLst/>
-          </a:prstGeom>
-          <a:solidFill>
-            <a:srgbClr val="2B2B2D"/>
-          </a:solidFill>
-          <a:ln>
-            <a:noFill/>
-          </a:ln>
-          <a:effectLst/>
-        </p:spPr>
-        <p:txBody>
-          <a:bodyPr rtlCol="0" anchor="ctr"/>
-          <a:lstStyle/>
-          <a:p>
-            <a:pPr algn="ctr"/>
-          </a:p>
-        </p:txBody>
-      </p:sp>
-      <p:sp>
-        <p:nvSpPr>
-          <p:cNvPr id="196" name="ellipse 196"/>
-          <p:cNvSpPr/>
-          <p:nvPr/>
-        </p:nvSpPr>
-        <p:spPr>
-          <a:xfrm>
-            <a:off x="1401318" y="5095494"/>
-            <a:ext cx="96012" cy="96012"/>
-          </a:xfrm>
-          <a:prstGeom prst="ellipse">
-            <a:avLst/>
-          </a:prstGeom>
-          <a:solidFill>
-            <a:srgbClr val="2B2B2D"/>
-          </a:solidFill>
-          <a:ln>
-            <a:noFill/>
-          </a:ln>
-          <a:effectLst/>
-        </p:spPr>
-        <p:txBody>
-          <a:bodyPr rtlCol="0" anchor="ctr"/>
-          <a:lstStyle/>
-          <a:p>
-            <a:pPr algn="ctr"/>
-          </a:p>
-        </p:txBody>
-      </p:sp>
-      <p:sp>
-        <p:nvSpPr>
-          <p:cNvPr id="197" name="ellipse 197"/>
-          <p:cNvSpPr/>
-          <p:nvPr/>
-        </p:nvSpPr>
-        <p:spPr>
-          <a:xfrm>
-            <a:off x="1543050" y="5095494"/>
-            <a:ext cx="96012" cy="96012"/>
-          </a:xfrm>
-          <a:prstGeom prst="ellipse">
-            <a:avLst/>
-          </a:prstGeom>
-          <a:solidFill>
-            <a:srgbClr val="2B2B2D"/>
-          </a:solidFill>
-          <a:ln>
-            <a:noFill/>
-          </a:ln>
-          <a:effectLst/>
-        </p:spPr>
-        <p:txBody>
-          <a:bodyPr rtlCol="0" anchor="ctr"/>
-          <a:lstStyle/>
-          <a:p>
-            <a:pPr algn="ctr"/>
-          </a:p>
-        </p:txBody>
-      </p:sp>
-      <p:sp>
-        <p:nvSpPr>
-          <p:cNvPr id="198" name="ellipse 198"/>
-          <p:cNvSpPr/>
-          <p:nvPr/>
-        </p:nvSpPr>
-        <p:spPr>
-          <a:xfrm>
-            <a:off x="1684782" y="5095494"/>
-            <a:ext cx="96012" cy="96012"/>
-          </a:xfrm>
-          <a:prstGeom prst="ellipse">
-            <a:avLst/>
-          </a:prstGeom>
-          <a:solidFill>
-            <a:srgbClr val="2B2B2D"/>
-          </a:solidFill>
-          <a:ln>
-            <a:noFill/>
-          </a:ln>
-          <a:effectLst/>
-        </p:spPr>
-        <p:txBody>
-          <a:bodyPr rtlCol="0" anchor="ctr"/>
-          <a:lstStyle/>
-          <a:p>
-            <a:pPr algn="ctr"/>
-          </a:p>
-        </p:txBody>
-      </p:sp>
-      <p:sp>
-        <p:nvSpPr>
-          <p:cNvPr id="199" name="ellipse 199"/>
-          <p:cNvSpPr/>
-          <p:nvPr/>
-        </p:nvSpPr>
-        <p:spPr>
-          <a:xfrm>
-            <a:off x="1826514" y="5095494"/>
-            <a:ext cx="96012" cy="96012"/>
-          </a:xfrm>
-          <a:prstGeom prst="ellipse">
-            <a:avLst/>
-          </a:prstGeom>
-          <a:solidFill>
-            <a:srgbClr val="2B2B2D"/>
-          </a:solidFill>
-          <a:ln>
-            <a:noFill/>
-          </a:ln>
-          <a:effectLst/>
-        </p:spPr>
-        <p:txBody>
-          <a:bodyPr rtlCol="0" anchor="ctr"/>
-          <a:lstStyle/>
-          <a:p>
-            <a:pPr algn="ctr"/>
-          </a:p>
-        </p:txBody>
-      </p:sp>
-      <p:sp>
-        <p:nvSpPr>
-          <p:cNvPr id="200" name="ellipse 200"/>
-          <p:cNvSpPr/>
-          <p:nvPr/>
-        </p:nvSpPr>
-        <p:spPr>
-          <a:xfrm>
-            <a:off x="1968246" y="5095494"/>
-            <a:ext cx="96012" cy="96012"/>
-          </a:xfrm>
-          <a:prstGeom prst="ellipse">
-            <a:avLst/>
-          </a:prstGeom>
-          <a:solidFill>
-            <a:srgbClr val="2B2B2D"/>
-          </a:solidFill>
-          <a:ln>
-            <a:noFill/>
-          </a:ln>
-          <a:effectLst/>
-        </p:spPr>
-        <p:txBody>
-          <a:bodyPr rtlCol="0" anchor="ctr"/>
-          <a:lstStyle/>
-          <a:p>
-            <a:pPr algn="ctr"/>
-          </a:p>
-        </p:txBody>
-      </p:sp>
-      <p:sp>
-        <p:nvSpPr>
-          <p:cNvPr id="201" name="ellipse 201"/>
-          <p:cNvSpPr/>
-          <p:nvPr/>
-        </p:nvSpPr>
-        <p:spPr>
-          <a:xfrm>
-            <a:off x="2109978" y="5095494"/>
-            <a:ext cx="96012" cy="96012"/>
-          </a:xfrm>
-          <a:prstGeom prst="ellipse">
-            <a:avLst/>
-          </a:prstGeom>
-          <a:solidFill>
-            <a:srgbClr val="2B2B2D"/>
-          </a:solidFill>
-          <a:ln>
-            <a:noFill/>
-          </a:ln>
-          <a:effectLst/>
-        </p:spPr>
-        <p:txBody>
-          <a:bodyPr rtlCol="0" anchor="ctr"/>
-          <a:lstStyle/>
-          <a:p>
-            <a:pPr algn="ctr"/>
-          </a:p>
-        </p:txBody>
-      </p:sp>
-      <p:sp>
-        <p:nvSpPr>
-          <p:cNvPr id="202" name="ellipse 202"/>
-          <p:cNvSpPr/>
-          <p:nvPr/>
-        </p:nvSpPr>
-        <p:spPr>
-          <a:xfrm>
-            <a:off x="2251710" y="5095494"/>
-            <a:ext cx="96012" cy="96012"/>
-          </a:xfrm>
-          <a:prstGeom prst="ellipse">
-            <a:avLst/>
-          </a:prstGeom>
-          <a:solidFill>
-            <a:srgbClr val="2B2B2D"/>
-          </a:solidFill>
-          <a:ln>
-            <a:noFill/>
-          </a:ln>
-          <a:effectLst/>
-        </p:spPr>
-        <p:txBody>
-          <a:bodyPr rtlCol="0" anchor="ctr"/>
-          <a:lstStyle/>
-          <a:p>
-            <a:pPr algn="ctr"/>
-          </a:p>
-        </p:txBody>
-      </p:sp>
-      <p:sp>
-        <p:nvSpPr>
-          <p:cNvPr id="203" name="ellipse 203"/>
-          <p:cNvSpPr/>
-          <p:nvPr/>
-        </p:nvSpPr>
-        <p:spPr>
-          <a:xfrm>
-            <a:off x="2393442" y="5095494"/>
-            <a:ext cx="96012" cy="96012"/>
-          </a:xfrm>
-          <a:prstGeom prst="ellipse">
-            <a:avLst/>
-          </a:prstGeom>
-          <a:solidFill>
-            <a:srgbClr val="2B2B2D"/>
-          </a:solidFill>
-          <a:ln>
-            <a:noFill/>
-          </a:ln>
-          <a:effectLst/>
-        </p:spPr>
-        <p:txBody>
-          <a:bodyPr rtlCol="0" anchor="ctr"/>
-          <a:lstStyle/>
-          <a:p>
-            <a:pPr algn="ctr"/>
-          </a:p>
-        </p:txBody>
-      </p:sp>
-      <p:sp>
-        <p:nvSpPr>
-          <p:cNvPr id="204" name="ellipse 204"/>
-          <p:cNvSpPr/>
-          <p:nvPr/>
-        </p:nvSpPr>
-        <p:spPr>
-          <a:xfrm>
-            <a:off x="2535174" y="5095494"/>
-            <a:ext cx="96012" cy="96012"/>
-          </a:xfrm>
-          <a:prstGeom prst="ellipse">
-            <a:avLst/>
-          </a:prstGeom>
-          <a:solidFill>
-            <a:srgbClr val="2B2B2D"/>
-          </a:solidFill>
-          <a:ln>
-            <a:noFill/>
-          </a:ln>
-          <a:effectLst/>
-        </p:spPr>
-        <p:txBody>
-          <a:bodyPr rtlCol="0" anchor="ctr"/>
-          <a:lstStyle/>
-          <a:p>
-            <a:pPr algn="ctr"/>
-          </a:p>
-        </p:txBody>
-      </p:sp>
-      <p:sp>
-        <p:nvSpPr>
-          <p:cNvPr id="205" name="ellipse 205"/>
-          <p:cNvSpPr/>
-          <p:nvPr/>
-        </p:nvSpPr>
-        <p:spPr>
-          <a:xfrm>
-            <a:off x="2676906" y="5095494"/>
-            <a:ext cx="96012" cy="96012"/>
-          </a:xfrm>
-          <a:prstGeom prst="ellipse">
-            <a:avLst/>
-          </a:prstGeom>
-          <a:solidFill>
-            <a:srgbClr val="2B2B2D"/>
-          </a:solidFill>
-          <a:ln>
-            <a:noFill/>
-          </a:ln>
-          <a:effectLst/>
-        </p:spPr>
-        <p:txBody>
-          <a:bodyPr rtlCol="0" anchor="ctr"/>
-          <a:lstStyle/>
-          <a:p>
-            <a:pPr algn="ctr"/>
-          </a:p>
-        </p:txBody>
-      </p:sp>
-      <p:sp>
-        <p:nvSpPr>
-          <p:cNvPr id="206" name="ellipse 206"/>
-          <p:cNvSpPr/>
-          <p:nvPr/>
-        </p:nvSpPr>
-        <p:spPr>
-          <a:xfrm>
-            <a:off x="2818638" y="5095494"/>
-            <a:ext cx="96012" cy="96012"/>
-          </a:xfrm>
-          <a:prstGeom prst="ellipse">
-            <a:avLst/>
-          </a:prstGeom>
-          <a:solidFill>
-            <a:srgbClr val="2B2B2D"/>
-          </a:solidFill>
-          <a:ln>
-            <a:noFill/>
-          </a:ln>
-          <a:effectLst/>
-        </p:spPr>
-        <p:txBody>
-          <a:bodyPr rtlCol="0" anchor="ctr"/>
-          <a:lstStyle/>
-          <a:p>
-            <a:pPr algn="ctr"/>
-          </a:p>
-        </p:txBody>
-      </p:sp>
-      <p:sp>
-        <p:nvSpPr>
-          <p:cNvPr id="207" name="ellipse 207"/>
-          <p:cNvSpPr/>
-          <p:nvPr/>
-        </p:nvSpPr>
-        <p:spPr>
-          <a:xfrm>
-            <a:off x="2960370" y="5095494"/>
-            <a:ext cx="96012" cy="96012"/>
-          </a:xfrm>
-          <a:prstGeom prst="ellipse">
-            <a:avLst/>
-          </a:prstGeom>
-          <a:solidFill>
-            <a:srgbClr val="2B2B2D"/>
-          </a:solidFill>
-          <a:ln>
-            <a:noFill/>
-          </a:ln>
-          <a:effectLst/>
-        </p:spPr>
-        <p:txBody>
-          <a:bodyPr rtlCol="0" anchor="ctr"/>
-          <a:lstStyle/>
-          <a:p>
-            <a:pPr algn="ctr"/>
-          </a:p>
-        </p:txBody>
-      </p:sp>
-      <p:sp>
-        <p:nvSpPr>
-          <p:cNvPr id="208" name="ellipse 208"/>
-          <p:cNvSpPr/>
-          <p:nvPr/>
-        </p:nvSpPr>
-        <p:spPr>
-          <a:xfrm>
-            <a:off x="3102102" y="5095494"/>
-            <a:ext cx="96012" cy="96012"/>
-          </a:xfrm>
-          <a:prstGeom prst="ellipse">
-            <a:avLst/>
-          </a:prstGeom>
-          <a:solidFill>
-            <a:srgbClr val="2B2B2D"/>
-          </a:solidFill>
-          <a:ln>
-            <a:noFill/>
-          </a:ln>
-          <a:effectLst/>
-        </p:spPr>
-        <p:txBody>
-          <a:bodyPr rtlCol="0" anchor="ctr"/>
-          <a:lstStyle/>
-          <a:p>
-            <a:pPr algn="ctr"/>
-          </a:p>
-        </p:txBody>
-      </p:sp>
-      <p:sp>
-        <p:nvSpPr>
-          <p:cNvPr id="209" name="ellipse 209"/>
-          <p:cNvSpPr/>
-          <p:nvPr/>
-        </p:nvSpPr>
-        <p:spPr>
-          <a:xfrm>
-            <a:off x="3243834" y="5095494"/>
-            <a:ext cx="96012" cy="96012"/>
-          </a:xfrm>
-          <a:prstGeom prst="ellipse">
-            <a:avLst/>
-          </a:prstGeom>
-          <a:solidFill>
-            <a:srgbClr val="2B2B2D"/>
-          </a:solidFill>
-          <a:ln>
-            <a:noFill/>
-          </a:ln>
-          <a:effectLst/>
-        </p:spPr>
-        <p:txBody>
-          <a:bodyPr rtlCol="0" anchor="ctr"/>
-          <a:lstStyle/>
-          <a:p>
-            <a:pPr algn="ctr"/>
-          </a:p>
-        </p:txBody>
-      </p:sp>
-      <p:sp>
-        <p:nvSpPr>
-          <p:cNvPr id="210" name="ellipse 210"/>
-          <p:cNvSpPr/>
-          <p:nvPr/>
-        </p:nvSpPr>
-        <p:spPr>
-          <a:xfrm>
-            <a:off x="3385566" y="5095494"/>
-            <a:ext cx="96012" cy="96012"/>
-          </a:xfrm>
-          <a:prstGeom prst="ellipse">
-            <a:avLst/>
-          </a:prstGeom>
-          <a:solidFill>
-            <a:srgbClr val="2B2B2D"/>
-          </a:solidFill>
-          <a:ln>
-            <a:noFill/>
-          </a:ln>
-          <a:effectLst/>
-        </p:spPr>
-        <p:txBody>
-          <a:bodyPr rtlCol="0" anchor="ctr"/>
-          <a:lstStyle/>
-          <a:p>
-            <a:pPr algn="ctr"/>
-          </a:p>
-        </p:txBody>
-      </p:sp>
-      <p:sp>
-        <p:nvSpPr>
-          <p:cNvPr id="211" name="ellipse 211"/>
-          <p:cNvSpPr/>
-          <p:nvPr/>
-        </p:nvSpPr>
-        <p:spPr>
-          <a:xfrm>
-            <a:off x="692658" y="5237226"/>
-            <a:ext cx="96012" cy="96012"/>
-          </a:xfrm>
-          <a:prstGeom prst="ellipse">
-            <a:avLst/>
-          </a:prstGeom>
-          <a:solidFill>
-            <a:srgbClr val="2B2B2D"/>
-          </a:solidFill>
-          <a:ln>
-            <a:noFill/>
-          </a:ln>
-          <a:effectLst/>
-        </p:spPr>
-        <p:txBody>
-          <a:bodyPr rtlCol="0" anchor="ctr"/>
-          <a:lstStyle/>
-          <a:p>
-            <a:pPr algn="ctr"/>
-          </a:p>
-        </p:txBody>
-      </p:sp>
-      <p:sp>
-        <p:nvSpPr>
-          <p:cNvPr id="212" name="ellipse 212"/>
-          <p:cNvSpPr/>
-          <p:nvPr/>
-        </p:nvSpPr>
-        <p:spPr>
-          <a:xfrm>
-            <a:off x="834390" y="5237226"/>
-            <a:ext cx="96012" cy="96012"/>
-          </a:xfrm>
-          <a:prstGeom prst="ellipse">
-            <a:avLst/>
-          </a:prstGeom>
-          <a:solidFill>
-            <a:srgbClr val="2B2B2D"/>
-          </a:solidFill>
-          <a:ln>
-            <a:noFill/>
-          </a:ln>
-          <a:effectLst/>
-        </p:spPr>
-        <p:txBody>
-          <a:bodyPr rtlCol="0" anchor="ctr"/>
-          <a:lstStyle/>
-          <a:p>
-            <a:pPr algn="ctr"/>
-          </a:p>
-        </p:txBody>
-      </p:sp>
-      <p:sp>
-        <p:nvSpPr>
-          <p:cNvPr id="213" name="ellipse 213"/>
-          <p:cNvSpPr/>
-          <p:nvPr/>
-        </p:nvSpPr>
-        <p:spPr>
-          <a:xfrm>
-            <a:off x="976122" y="5237226"/>
-            <a:ext cx="96012" cy="96012"/>
-          </a:xfrm>
-          <a:prstGeom prst="ellipse">
-            <a:avLst/>
-          </a:prstGeom>
-          <a:solidFill>
-            <a:srgbClr val="2B2B2D"/>
-          </a:solidFill>
-          <a:ln>
-            <a:noFill/>
-          </a:ln>
-          <a:effectLst/>
-        </p:spPr>
-        <p:txBody>
-          <a:bodyPr rtlCol="0" anchor="ctr"/>
-          <a:lstStyle/>
-          <a:p>
-            <a:pPr algn="ctr"/>
-          </a:p>
-        </p:txBody>
-      </p:sp>
-      <p:sp>
-        <p:nvSpPr>
-          <p:cNvPr id="214" name="ellipse 214"/>
-          <p:cNvSpPr/>
-          <p:nvPr/>
-        </p:nvSpPr>
-        <p:spPr>
-          <a:xfrm>
-            <a:off x="1117854" y="5237226"/>
-            <a:ext cx="96012" cy="96012"/>
-          </a:xfrm>
-          <a:prstGeom prst="ellipse">
-            <a:avLst/>
-          </a:prstGeom>
-          <a:solidFill>
-            <a:srgbClr val="2B2B2D"/>
-          </a:solidFill>
-          <a:ln>
-            <a:noFill/>
-          </a:ln>
-          <a:effectLst/>
-        </p:spPr>
-        <p:txBody>
-          <a:bodyPr rtlCol="0" anchor="ctr"/>
-          <a:lstStyle/>
-          <a:p>
-            <a:pPr algn="ctr"/>
-          </a:p>
-        </p:txBody>
-      </p:sp>
-      <p:sp>
-        <p:nvSpPr>
-          <p:cNvPr id="215" name="ellipse 215"/>
-          <p:cNvSpPr/>
-          <p:nvPr/>
-        </p:nvSpPr>
-        <p:spPr>
-          <a:xfrm>
-            <a:off x="1259586" y="5237226"/>
-            <a:ext cx="96012" cy="96012"/>
-          </a:xfrm>
-          <a:prstGeom prst="ellipse">
-            <a:avLst/>
-          </a:prstGeom>
-          <a:solidFill>
-            <a:srgbClr val="2B2B2D"/>
-          </a:solidFill>
-          <a:ln>
-            <a:noFill/>
-          </a:ln>
-          <a:effectLst/>
-        </p:spPr>
-        <p:txBody>
-          <a:bodyPr rtlCol="0" anchor="ctr"/>
-          <a:lstStyle/>
-          <a:p>
-            <a:pPr algn="ctr"/>
-          </a:p>
-        </p:txBody>
-      </p:sp>
-      <p:sp>
-        <p:nvSpPr>
-          <p:cNvPr id="216" name="ellipse 216"/>
-          <p:cNvSpPr/>
-          <p:nvPr/>
-        </p:nvSpPr>
-        <p:spPr>
-          <a:xfrm>
-            <a:off x="1401318" y="5237226"/>
-            <a:ext cx="96012" cy="96012"/>
-          </a:xfrm>
-          <a:prstGeom prst="ellipse">
-            <a:avLst/>
-          </a:prstGeom>
-          <a:solidFill>
-            <a:srgbClr val="2B2B2D"/>
-          </a:solidFill>
-          <a:ln>
-            <a:noFill/>
-          </a:ln>
-          <a:effectLst/>
-        </p:spPr>
-        <p:txBody>
-          <a:bodyPr rtlCol="0" anchor="ctr"/>
-          <a:lstStyle/>
-          <a:p>
-            <a:pPr algn="ctr"/>
-          </a:p>
-        </p:txBody>
-      </p:sp>
-      <p:sp>
-        <p:nvSpPr>
-          <p:cNvPr id="217" name="ellipse 217"/>
-          <p:cNvSpPr/>
-          <p:nvPr/>
-        </p:nvSpPr>
-        <p:spPr>
-          <a:xfrm>
-            <a:off x="1543050" y="5237226"/>
-            <a:ext cx="96012" cy="96012"/>
-          </a:xfrm>
-          <a:prstGeom prst="ellipse">
-            <a:avLst/>
-          </a:prstGeom>
-          <a:solidFill>
-            <a:srgbClr val="2B2B2D"/>
-          </a:solidFill>
-          <a:ln>
-            <a:noFill/>
-          </a:ln>
-          <a:effectLst/>
-        </p:spPr>
-        <p:txBody>
-          <a:bodyPr rtlCol="0" anchor="ctr"/>
-          <a:lstStyle/>
-          <a:p>
-            <a:pPr algn="ctr"/>
-          </a:p>
-        </p:txBody>
-      </p:sp>
-      <p:sp>
-        <p:nvSpPr>
-          <p:cNvPr id="218" name="ellipse 218"/>
-          <p:cNvSpPr/>
-          <p:nvPr/>
-        </p:nvSpPr>
-        <p:spPr>
-          <a:xfrm>
-            <a:off x="1684782" y="5237226"/>
-            <a:ext cx="96012" cy="96012"/>
-          </a:xfrm>
-          <a:prstGeom prst="ellipse">
-            <a:avLst/>
-          </a:prstGeom>
-          <a:solidFill>
-            <a:srgbClr val="2B2B2D"/>
-          </a:solidFill>
-          <a:ln>
-            <a:noFill/>
-          </a:ln>
-          <a:effectLst/>
-        </p:spPr>
-        <p:txBody>
-          <a:bodyPr rtlCol="0" anchor="ctr"/>
-          <a:lstStyle/>
-          <a:p>
-            <a:pPr algn="ctr"/>
-          </a:p>
-        </p:txBody>
-      </p:sp>
-      <p:sp>
-        <p:nvSpPr>
-          <p:cNvPr id="219" name="ellipse 219"/>
-          <p:cNvSpPr/>
-          <p:nvPr/>
-        </p:nvSpPr>
-        <p:spPr>
-          <a:xfrm>
-            <a:off x="1826514" y="5237226"/>
-            <a:ext cx="96012" cy="96012"/>
-          </a:xfrm>
-          <a:prstGeom prst="ellipse">
-            <a:avLst/>
-          </a:prstGeom>
-          <a:solidFill>
-            <a:srgbClr val="2B2B2D"/>
-          </a:solidFill>
-          <a:ln>
-            <a:noFill/>
-          </a:ln>
-          <a:effectLst/>
-        </p:spPr>
-        <p:txBody>
-          <a:bodyPr rtlCol="0" anchor="ctr"/>
-          <a:lstStyle/>
-          <a:p>
-            <a:pPr algn="ctr"/>
-          </a:p>
-        </p:txBody>
-      </p:sp>
-      <p:sp>
-        <p:nvSpPr>
-          <p:cNvPr id="220" name="ellipse 220"/>
-          <p:cNvSpPr/>
-          <p:nvPr/>
-        </p:nvSpPr>
-        <p:spPr>
-          <a:xfrm>
-            <a:off x="1968246" y="5237226"/>
-            <a:ext cx="96012" cy="96012"/>
-          </a:xfrm>
-          <a:prstGeom prst="ellipse">
-            <a:avLst/>
-          </a:prstGeom>
-          <a:solidFill>
-            <a:srgbClr val="2B2B2D"/>
-          </a:solidFill>
-          <a:ln>
-            <a:noFill/>
-          </a:ln>
-          <a:effectLst/>
-        </p:spPr>
-        <p:txBody>
-          <a:bodyPr rtlCol="0" anchor="ctr"/>
-          <a:lstStyle/>
-          <a:p>
-            <a:pPr algn="ctr"/>
-          </a:p>
-        </p:txBody>
-      </p:sp>
-      <p:sp>
-        <p:nvSpPr>
-          <p:cNvPr id="221" name="ellipse 221"/>
-          <p:cNvSpPr/>
-          <p:nvPr/>
-        </p:nvSpPr>
-        <p:spPr>
-          <a:xfrm>
-            <a:off x="2109978" y="5237226"/>
-            <a:ext cx="96012" cy="96012"/>
-          </a:xfrm>
-          <a:prstGeom prst="ellipse">
-            <a:avLst/>
-          </a:prstGeom>
-          <a:solidFill>
-            <a:srgbClr val="2B2B2D"/>
-          </a:solidFill>
-          <a:ln>
-            <a:noFill/>
-          </a:ln>
-          <a:effectLst/>
-        </p:spPr>
-        <p:txBody>
-          <a:bodyPr rtlCol="0" anchor="ctr"/>
-          <a:lstStyle/>
-          <a:p>
-            <a:pPr algn="ctr"/>
-          </a:p>
-        </p:txBody>
-      </p:sp>
-      <p:sp>
-        <p:nvSpPr>
-          <p:cNvPr id="222" name="ellipse 222"/>
-          <p:cNvSpPr/>
-          <p:nvPr/>
-        </p:nvSpPr>
-        <p:spPr>
-          <a:xfrm>
-            <a:off x="2251710" y="5237226"/>
-            <a:ext cx="96012" cy="96012"/>
-          </a:xfrm>
-          <a:prstGeom prst="ellipse">
-            <a:avLst/>
-          </a:prstGeom>
-          <a:solidFill>
-            <a:srgbClr val="2B2B2D"/>
-          </a:solidFill>
-          <a:ln>
-            <a:noFill/>
-          </a:ln>
-          <a:effectLst/>
-        </p:spPr>
-        <p:txBody>
-          <a:bodyPr rtlCol="0" anchor="ctr"/>
-          <a:lstStyle/>
-          <a:p>
-            <a:pPr algn="ctr"/>
-          </a:p>
-        </p:txBody>
-      </p:sp>
-      <p:sp>
-        <p:nvSpPr>
-          <p:cNvPr id="223" name="ellipse 223"/>
-          <p:cNvSpPr/>
-          <p:nvPr/>
-        </p:nvSpPr>
-        <p:spPr>
-          <a:xfrm>
-            <a:off x="2393442" y="5237226"/>
-            <a:ext cx="96012" cy="96012"/>
-          </a:xfrm>
-          <a:prstGeom prst="ellipse">
-            <a:avLst/>
-          </a:prstGeom>
-          <a:solidFill>
-            <a:srgbClr val="2B2B2D"/>
-          </a:solidFill>
-          <a:ln>
-            <a:noFill/>
-          </a:ln>
-          <a:effectLst/>
-        </p:spPr>
-        <p:txBody>
-          <a:bodyPr rtlCol="0" anchor="ctr"/>
-          <a:lstStyle/>
-          <a:p>
-            <a:pPr algn="ctr"/>
-          </a:p>
-        </p:txBody>
-      </p:sp>
-      <p:sp>
-        <p:nvSpPr>
-          <p:cNvPr id="224" name="ellipse 224"/>
-          <p:cNvSpPr/>
-          <p:nvPr/>
-        </p:nvSpPr>
-        <p:spPr>
-          <a:xfrm>
-            <a:off x="2535174" y="5237226"/>
-            <a:ext cx="96012" cy="96012"/>
-          </a:xfrm>
-          <a:prstGeom prst="ellipse">
-            <a:avLst/>
-          </a:prstGeom>
-          <a:solidFill>
-            <a:srgbClr val="2B2B2D"/>
-          </a:solidFill>
-          <a:ln>
-            <a:noFill/>
-          </a:ln>
-          <a:effectLst/>
-        </p:spPr>
-        <p:txBody>
-          <a:bodyPr rtlCol="0" anchor="ctr"/>
-          <a:lstStyle/>
-          <a:p>
-            <a:pPr algn="ctr"/>
-          </a:p>
-        </p:txBody>
-      </p:sp>
-      <p:sp>
-        <p:nvSpPr>
-          <p:cNvPr id="225" name="ellipse 225"/>
-          <p:cNvSpPr/>
-          <p:nvPr/>
-        </p:nvSpPr>
-        <p:spPr>
-          <a:xfrm>
-            <a:off x="2676906" y="5237226"/>
-            <a:ext cx="96012" cy="96012"/>
-          </a:xfrm>
-          <a:prstGeom prst="ellipse">
-            <a:avLst/>
-          </a:prstGeom>
-          <a:solidFill>
-            <a:srgbClr val="2B2B2D"/>
-          </a:solidFill>
-          <a:ln>
-            <a:noFill/>
-          </a:ln>
-          <a:effectLst/>
-        </p:spPr>
-        <p:txBody>
-          <a:bodyPr rtlCol="0" anchor="ctr"/>
-          <a:lstStyle/>
-          <a:p>
-            <a:pPr algn="ctr"/>
-          </a:p>
-        </p:txBody>
-      </p:sp>
-      <p:sp>
-        <p:nvSpPr>
-          <p:cNvPr id="226" name="ellipse 226"/>
-          <p:cNvSpPr/>
-          <p:nvPr/>
-        </p:nvSpPr>
-        <p:spPr>
-          <a:xfrm>
-            <a:off x="2818638" y="5237226"/>
-            <a:ext cx="96012" cy="96012"/>
-          </a:xfrm>
-          <a:prstGeom prst="ellipse">
-            <a:avLst/>
-          </a:prstGeom>
-          <a:solidFill>
-            <a:srgbClr val="2B2B2D"/>
-          </a:solidFill>
-          <a:ln>
-            <a:noFill/>
-          </a:ln>
-          <a:effectLst/>
-        </p:spPr>
-        <p:txBody>
-          <a:bodyPr rtlCol="0" anchor="ctr"/>
-          <a:lstStyle/>
-          <a:p>
-            <a:pPr algn="ctr"/>
-          </a:p>
-        </p:txBody>
-      </p:sp>
-      <p:sp>
-        <p:nvSpPr>
-          <p:cNvPr id="227" name="ellipse 227"/>
-          <p:cNvSpPr/>
-          <p:nvPr/>
-        </p:nvSpPr>
-        <p:spPr>
-          <a:xfrm>
-            <a:off x="2960370" y="5237226"/>
-            <a:ext cx="96012" cy="96012"/>
-          </a:xfrm>
-          <a:prstGeom prst="ellipse">
-            <a:avLst/>
-          </a:prstGeom>
-          <a:solidFill>
-            <a:srgbClr val="2B2B2D"/>
-          </a:solidFill>
-          <a:ln>
-            <a:noFill/>
-          </a:ln>
-          <a:effectLst/>
-        </p:spPr>
-        <p:txBody>
-          <a:bodyPr rtlCol="0" anchor="ctr"/>
-          <a:lstStyle/>
-          <a:p>
-            <a:pPr algn="ctr"/>
-          </a:p>
-        </p:txBody>
-      </p:sp>
-      <p:sp>
-        <p:nvSpPr>
-          <p:cNvPr id="228" name="ellipse 228"/>
-          <p:cNvSpPr/>
-          <p:nvPr/>
-        </p:nvSpPr>
-        <p:spPr>
-          <a:xfrm>
-            <a:off x="3102102" y="5237226"/>
-            <a:ext cx="96012" cy="96012"/>
-          </a:xfrm>
-          <a:prstGeom prst="ellipse">
-            <a:avLst/>
-          </a:prstGeom>
-          <a:solidFill>
-            <a:srgbClr val="2B2B2D"/>
-          </a:solidFill>
-          <a:ln>
-            <a:noFill/>
-          </a:ln>
-          <a:effectLst/>
-        </p:spPr>
-        <p:txBody>
-          <a:bodyPr rtlCol="0" anchor="ctr"/>
-          <a:lstStyle/>
-          <a:p>
-            <a:pPr algn="ctr"/>
-          </a:p>
-        </p:txBody>
-      </p:sp>
-      <p:sp>
-        <p:nvSpPr>
-          <p:cNvPr id="229" name="ellipse 229"/>
-          <p:cNvSpPr/>
-          <p:nvPr/>
-        </p:nvSpPr>
-        <p:spPr>
-          <a:xfrm>
-            <a:off x="3243834" y="5237226"/>
-            <a:ext cx="96012" cy="96012"/>
-          </a:xfrm>
-          <a:prstGeom prst="ellipse">
-            <a:avLst/>
-          </a:prstGeom>
-          <a:solidFill>
-            <a:srgbClr val="2B2B2D"/>
-          </a:solidFill>
-          <a:ln>
-            <a:noFill/>
-          </a:ln>
-          <a:effectLst/>
-        </p:spPr>
-        <p:txBody>
-          <a:bodyPr rtlCol="0" anchor="ctr"/>
-          <a:lstStyle/>
-          <a:p>
-            <a:pPr algn="ctr"/>
-          </a:p>
-        </p:txBody>
-      </p:sp>
-      <p:sp>
-        <p:nvSpPr>
-          <p:cNvPr id="230" name="ellipse 230"/>
-          <p:cNvSpPr/>
-          <p:nvPr/>
-        </p:nvSpPr>
-        <p:spPr>
-          <a:xfrm>
-            <a:off x="3385566" y="5237226"/>
-            <a:ext cx="96012" cy="96012"/>
-          </a:xfrm>
-          <a:prstGeom prst="ellipse">
-            <a:avLst/>
-          </a:prstGeom>
-          <a:solidFill>
-            <a:srgbClr val="2B2B2D"/>
-          </a:solidFill>
-          <a:ln>
-            <a:noFill/>
-          </a:ln>
-          <a:effectLst/>
-        </p:spPr>
-        <p:txBody>
-          <a:bodyPr rtlCol="0" anchor="ctr"/>
-          <a:lstStyle/>
-          <a:p>
-            <a:pPr algn="ctr"/>
-          </a:p>
-        </p:txBody>
-      </p:sp>
-      <p:sp>
-        <p:nvSpPr>
-          <p:cNvPr id="231" name="TextBox 231"/>
-          <p:cNvSpPr txBox="1"/>
-          <p:nvPr/>
-        </p:nvSpPr>
-        <p:spPr>
-          <a:xfrm>
-            <a:off x="694944" y="5413248"/>
-            <a:ext cx="5486400" cy="137160"/>
-          </a:xfrm>
-          <a:prstGeom prst="rect">
-            <a:avLst/>
-          </a:prstGeom>
-          <a:noFill/>
-        </p:spPr>
-        <p:txBody>
-          <a:bodyPr wrap="square" lIns="0" rIns="0" tIns="0" bIns="0" anchor="ctr">
-            <a:spAutoFit/>
-          </a:bodyPr>
-          <a:lstStyle/>
-          <a:p>
-            <a:pPr algn="l"/>
-            <a:r>
-              <a:rPr sz="900" b="0" spc="100">
-                <a:solidFill>
-                  <a:srgbClr val="FF6B3D"/>
-                </a:solidFill>
-                <a:latin typeface="Courier New"/>
-              </a:rPr>
-              <a:t>61 NO EBIT IMPACT</a:t>
-            </a:r>
-            <a:r>
-              <a:rPr sz="900" b="0" spc="100">
-                <a:solidFill>
-                  <a:srgbClr val="5A5A60"/>
-                </a:solidFill>
-                <a:latin typeface="Courier New"/>
-              </a:rPr>
-              <a:t>     39 ANY EBIT IMPACT</a:t>
-            </a:r>
-          </a:p>
-        </p:txBody>
-      </p:sp>
-      <p:sp>
-        <p:nvSpPr>
-          <p:cNvPr id="232" name="rect 232"/>
-          <p:cNvSpPr/>
-          <p:nvPr/>
-        </p:nvSpPr>
-        <p:spPr>
-          <a:xfrm>
-            <a:off x="6492240" y="3584448"/>
-            <a:ext cx="4992624" cy="2029968"/>
+            <a:off x="694944" y="2340864"/>
+            <a:ext cx="2532888" cy="1783080"/>
           </a:xfrm>
           <a:prstGeom prst="rect">
             <a:avLst/>
@@ -11939,14 +8100,14 @@
       </p:sp>
       <p:sp>
         <p:nvSpPr>
-          <p:cNvPr id="233" name="TextBox 233"/>
-          <p:cNvSpPr txBox="1"/>
-          <p:nvPr/>
-        </p:nvSpPr>
-        <p:spPr>
-          <a:xfrm>
-            <a:off x="6803136" y="3803904"/>
-            <a:ext cx="4370832" cy="137160"/>
+          <p:cNvPr id="109" name="TextBox 109"/>
+          <p:cNvSpPr txBox="1"/>
+          <p:nvPr/>
+        </p:nvSpPr>
+        <p:spPr>
+          <a:xfrm>
+            <a:off x="950976" y="2615184"/>
+            <a:ext cx="2020824" cy="283464"/>
           </a:xfrm>
           <a:prstGeom prst="rect">
             <a:avLst/>
@@ -11961,103 +8122,96 @@
           <a:p>
             <a:pPr algn="l"/>
             <a:r>
-              <a:rPr sz="900" b="0" spc="200">
+              <a:rPr sz="2000" b="0">
+                <a:solidFill>
+                  <a:srgbClr val="ECECEE"/>
+                </a:solidFill>
+                <a:latin typeface="Poppins"/>
+              </a:rPr>
+              <a:t>Context</a:t>
+            </a:r>
+          </a:p>
+        </p:txBody>
+      </p:sp>
+      <p:sp>
+        <p:nvSpPr>
+          <p:cNvPr id="110" name="rect 110"/>
+          <p:cNvSpPr/>
+          <p:nvPr/>
+        </p:nvSpPr>
+        <p:spPr>
+          <a:xfrm>
+            <a:off x="950976" y="3054096"/>
+            <a:ext cx="2020824" cy="10973"/>
+          </a:xfrm>
+          <a:prstGeom prst="rect">
+            <a:avLst/>
+          </a:prstGeom>
+          <a:solidFill>
+            <a:srgbClr val="2B2B2D"/>
+          </a:solidFill>
+          <a:ln>
+            <a:noFill/>
+          </a:ln>
+          <a:effectLst/>
+        </p:spPr>
+        <p:txBody>
+          <a:bodyPr rtlCol="0" anchor="ctr"/>
+          <a:lstStyle/>
+          <a:p>
+            <a:pPr algn="ctr"/>
+          </a:p>
+        </p:txBody>
+      </p:sp>
+      <p:sp>
+        <p:nvSpPr>
+          <p:cNvPr id="111" name="TextBox 111"/>
+          <p:cNvSpPr txBox="1"/>
+          <p:nvPr/>
+        </p:nvSpPr>
+        <p:spPr>
+          <a:xfrm>
+            <a:off x="950976" y="3200400"/>
+            <a:ext cx="2020824" cy="822960"/>
+          </a:xfrm>
+          <a:prstGeom prst="rect">
+            <a:avLst/>
+          </a:prstGeom>
+          <a:noFill/>
+        </p:spPr>
+        <p:txBody>
+          <a:bodyPr wrap="square" lIns="0" rIns="0" tIns="0" bIns="0" anchor="t"/>
+          <a:lstStyle/>
+          <a:p>
+            <a:pPr algn="l"/>
+            <a:r>
+              <a:rPr sz="1100" b="0">
                 <a:solidFill>
                   <a:srgbClr val="9A9AA2"/>
                 </a:solidFill>
-                <a:latin typeface="Courier New"/>
-              </a:rPr>
-              <a:t>WHERE THE MONEY GOES</a:t>
-            </a:r>
-          </a:p>
-        </p:txBody>
-      </p:sp>
-      <p:sp>
-        <p:nvSpPr>
-          <p:cNvPr id="234" name="TextBox 234"/>
-          <p:cNvSpPr txBox="1"/>
-          <p:nvPr/>
-        </p:nvSpPr>
-        <p:spPr>
-          <a:xfrm>
-            <a:off x="6803136" y="4078224"/>
-            <a:ext cx="4370832" cy="658368"/>
-          </a:xfrm>
-          <a:prstGeom prst="rect">
-            <a:avLst/>
-          </a:prstGeom>
-          <a:noFill/>
-        </p:spPr>
-        <p:txBody>
-          <a:bodyPr wrap="square" lIns="0" rIns="0" tIns="0" bIns="0" anchor="ctr">
-            <a:spAutoFit/>
-          </a:bodyPr>
-          <a:lstStyle/>
-          <a:p>
-            <a:pPr algn="l"/>
-            <a:r>
-              <a:rPr sz="2000" b="1">
-                <a:solidFill>
-                  <a:srgbClr val="ECECEE"/>
-                </a:solidFill>
                 <a:latin typeface="Poppins"/>
               </a:rPr>
-              <a:t>The expensive failures happen before a line of code.</a:t>
-            </a:r>
-          </a:p>
-        </p:txBody>
-      </p:sp>
-      <p:sp>
-        <p:nvSpPr>
-          <p:cNvPr id="235" name="TextBox 235"/>
-          <p:cNvSpPr txBox="1"/>
-          <p:nvPr/>
-        </p:nvSpPr>
-        <p:spPr>
-          <a:xfrm>
-            <a:off x="6803136" y="4846320"/>
-            <a:ext cx="4370832" cy="219456"/>
-          </a:xfrm>
-          <a:prstGeom prst="rect">
-            <a:avLst/>
-          </a:prstGeom>
-          <a:noFill/>
-        </p:spPr>
-        <p:txBody>
-          <a:bodyPr wrap="square" lIns="0" rIns="0" tIns="0" bIns="0" anchor="ctr">
-            <a:spAutoFit/>
-          </a:bodyPr>
-          <a:lstStyle/>
-          <a:p>
-            <a:pPr algn="l"/>
-            <a:r>
-              <a:rPr sz="1600" b="1">
-                <a:solidFill>
-                  <a:srgbClr val="FF6B3D"/>
-                </a:solidFill>
-                <a:latin typeface="Poppins"/>
-              </a:rPr>
-              <a:t>That’s the part we automate.</a:t>
-            </a:r>
-          </a:p>
-        </p:txBody>
-      </p:sp>
-      <p:sp>
-        <p:nvSpPr>
-          <p:cNvPr id="236" name="rect 236"/>
+              <a:t>It needs the house rules, the data model and the edge cases. A prompt does not carry them.</a:t>
+            </a:r>
+          </a:p>
+        </p:txBody>
+      </p:sp>
+      <p:sp>
+        <p:nvSpPr>
+          <p:cNvPr id="112" name="rect 112"/>
           <p:cNvSpPr/>
           <p:nvPr/>
         </p:nvSpPr>
         <p:spPr>
           <a:xfrm>
-            <a:off x="6803136" y="5212080"/>
-            <a:ext cx="1325880" cy="292608"/>
+            <a:off x="3447288" y="2340864"/>
+            <a:ext cx="2532888" cy="1783080"/>
           </a:xfrm>
           <a:prstGeom prst="rect">
             <a:avLst/>
           </a:prstGeom>
           <a:solidFill>
-            <a:srgbClr val="0E0E11"/>
+            <a:srgbClr val="161619"/>
           </a:solidFill>
           <a:ln w="9525">
             <a:solidFill>
@@ -12074,38 +8228,16 @@
           </a:p>
         </p:txBody>
       </p:sp>
-      <p:pic>
-        <p:nvPicPr>
-          <p:cNvPr id="237" name="Picture 237"/>
-          <p:cNvPicPr/>
-          <p:nvPr/>
-        </p:nvPicPr>
-        <p:blipFill>
-          <a:blip r:embed="rId4"/>
-          <a:stretch>
-            <a:fillRect/>
-          </a:stretch>
-        </p:blipFill>
-        <p:spPr>
-          <a:xfrm>
-            <a:off x="6940296" y="5294376"/>
-            <a:ext cx="137160" cy="137160"/>
-          </a:xfrm>
-          <a:prstGeom prst="rect">
-            <a:avLst/>
-          </a:prstGeom>
-        </p:spPr>
-      </p:pic>
-      <p:sp>
-        <p:nvSpPr>
-          <p:cNvPr id="238" name="TextBox 238"/>
-          <p:cNvSpPr txBox="1"/>
-          <p:nvPr/>
-        </p:nvSpPr>
-        <p:spPr>
-          <a:xfrm>
-            <a:off x="7150608" y="5308092"/>
-            <a:ext cx="868680" cy="137160"/>
+      <p:sp>
+        <p:nvSpPr>
+          <p:cNvPr id="113" name="TextBox 113"/>
+          <p:cNvSpPr txBox="1"/>
+          <p:nvPr/>
+        </p:nvSpPr>
+        <p:spPr>
+          <a:xfrm>
+            <a:off x="3703320" y="2615184"/>
+            <a:ext cx="2020824" cy="283464"/>
           </a:xfrm>
           <a:prstGeom prst="rect">
             <a:avLst/>
@@ -12120,33 +8252,96 @@
           <a:p>
             <a:pPr algn="l"/>
             <a:r>
-              <a:rPr sz="900" b="0" spc="100">
+              <a:rPr sz="2000" b="0">
+                <a:solidFill>
+                  <a:srgbClr val="ECECEE"/>
+                </a:solidFill>
+                <a:latin typeface="Poppins"/>
+              </a:rPr>
+              <a:t>Integration</a:t>
+            </a:r>
+          </a:p>
+        </p:txBody>
+      </p:sp>
+      <p:sp>
+        <p:nvSpPr>
+          <p:cNvPr id="114" name="rect 114"/>
+          <p:cNvSpPr/>
+          <p:nvPr/>
+        </p:nvSpPr>
+        <p:spPr>
+          <a:xfrm>
+            <a:off x="3703320" y="3054096"/>
+            <a:ext cx="2020824" cy="10973"/>
+          </a:xfrm>
+          <a:prstGeom prst="rect">
+            <a:avLst/>
+          </a:prstGeom>
+          <a:solidFill>
+            <a:srgbClr val="2B2B2D"/>
+          </a:solidFill>
+          <a:ln>
+            <a:noFill/>
+          </a:ln>
+          <a:effectLst/>
+        </p:spPr>
+        <p:txBody>
+          <a:bodyPr rtlCol="0" anchor="ctr"/>
+          <a:lstStyle/>
+          <a:p>
+            <a:pPr algn="ctr"/>
+          </a:p>
+        </p:txBody>
+      </p:sp>
+      <p:sp>
+        <p:nvSpPr>
+          <p:cNvPr id="115" name="TextBox 115"/>
+          <p:cNvSpPr txBox="1"/>
+          <p:nvPr/>
+        </p:nvSpPr>
+        <p:spPr>
+          <a:xfrm>
+            <a:off x="3703320" y="3200400"/>
+            <a:ext cx="2020824" cy="822960"/>
+          </a:xfrm>
+          <a:prstGeom prst="rect">
+            <a:avLst/>
+          </a:prstGeom>
+          <a:noFill/>
+        </p:spPr>
+        <p:txBody>
+          <a:bodyPr wrap="square" lIns="0" rIns="0" tIns="0" bIns="0" anchor="t"/>
+          <a:lstStyle/>
+          <a:p>
+            <a:pPr algn="l"/>
+            <a:r>
+              <a:rPr sz="1100" b="0">
                 <a:solidFill>
                   <a:srgbClr val="9A9AA2"/>
                 </a:solidFill>
-                <a:latin typeface="Courier New"/>
-              </a:rPr>
-              <a:t>HANDOFF</a:t>
-            </a:r>
-          </a:p>
-        </p:txBody>
-      </p:sp>
-      <p:sp>
-        <p:nvSpPr>
-          <p:cNvPr id="239" name="rect 239"/>
+                <a:latin typeface="Poppins"/>
+              </a:rPr>
+              <a:t>It has to live inside ERP, Slack and the document store, not in a sandbox.</a:t>
+            </a:r>
+          </a:p>
+        </p:txBody>
+      </p:sp>
+      <p:sp>
+        <p:nvSpPr>
+          <p:cNvPr id="116" name="rect 116"/>
           <p:cNvSpPr/>
           <p:nvPr/>
         </p:nvSpPr>
         <p:spPr>
           <a:xfrm>
-            <a:off x="8275320" y="5212080"/>
-            <a:ext cx="1417320" cy="292608"/>
+            <a:off x="6199632" y="2340864"/>
+            <a:ext cx="2532888" cy="1783080"/>
           </a:xfrm>
           <a:prstGeom prst="rect">
             <a:avLst/>
           </a:prstGeom>
           <a:solidFill>
-            <a:srgbClr val="0E0E11"/>
+            <a:srgbClr val="161619"/>
           </a:solidFill>
           <a:ln w="9525">
             <a:solidFill>
@@ -12163,38 +8358,16 @@
           </a:p>
         </p:txBody>
       </p:sp>
-      <p:pic>
-        <p:nvPicPr>
-          <p:cNvPr id="240" name="Picture 240"/>
-          <p:cNvPicPr/>
-          <p:nvPr/>
-        </p:nvPicPr>
-        <p:blipFill>
-          <a:blip r:embed="rId5"/>
-          <a:stretch>
-            <a:fillRect/>
-          </a:stretch>
-        </p:blipFill>
-        <p:spPr>
-          <a:xfrm>
-            <a:off x="8412480" y="5294376"/>
-            <a:ext cx="137160" cy="137160"/>
-          </a:xfrm>
-          <a:prstGeom prst="rect">
-            <a:avLst/>
-          </a:prstGeom>
-        </p:spPr>
-      </p:pic>
-      <p:sp>
-        <p:nvSpPr>
-          <p:cNvPr id="241" name="TextBox 241"/>
-          <p:cNvSpPr txBox="1"/>
-          <p:nvPr/>
-        </p:nvSpPr>
-        <p:spPr>
-          <a:xfrm>
-            <a:off x="8622792" y="5308092"/>
-            <a:ext cx="960120" cy="137160"/>
+      <p:sp>
+        <p:nvSpPr>
+          <p:cNvPr id="117" name="TextBox 117"/>
+          <p:cNvSpPr txBox="1"/>
+          <p:nvPr/>
+        </p:nvSpPr>
+        <p:spPr>
+          <a:xfrm>
+            <a:off x="6455664" y="2615184"/>
+            <a:ext cx="2020824" cy="283464"/>
           </a:xfrm>
           <a:prstGeom prst="rect">
             <a:avLst/>
@@ -12209,33 +8382,96 @@
           <a:p>
             <a:pPr algn="l"/>
             <a:r>
-              <a:rPr sz="900" b="0" spc="100">
+              <a:rPr sz="2000" b="0">
+                <a:solidFill>
+                  <a:srgbClr val="ECECEE"/>
+                </a:solidFill>
+                <a:latin typeface="Poppins"/>
+              </a:rPr>
+              <a:t>Verification</a:t>
+            </a:r>
+          </a:p>
+        </p:txBody>
+      </p:sp>
+      <p:sp>
+        <p:nvSpPr>
+          <p:cNvPr id="118" name="rect 118"/>
+          <p:cNvSpPr/>
+          <p:nvPr/>
+        </p:nvSpPr>
+        <p:spPr>
+          <a:xfrm>
+            <a:off x="6455664" y="3054096"/>
+            <a:ext cx="2020824" cy="10973"/>
+          </a:xfrm>
+          <a:prstGeom prst="rect">
+            <a:avLst/>
+          </a:prstGeom>
+          <a:solidFill>
+            <a:srgbClr val="2B2B2D"/>
+          </a:solidFill>
+          <a:ln>
+            <a:noFill/>
+          </a:ln>
+          <a:effectLst/>
+        </p:spPr>
+        <p:txBody>
+          <a:bodyPr rtlCol="0" anchor="ctr"/>
+          <a:lstStyle/>
+          <a:p>
+            <a:pPr algn="ctr"/>
+          </a:p>
+        </p:txBody>
+      </p:sp>
+      <p:sp>
+        <p:nvSpPr>
+          <p:cNvPr id="119" name="TextBox 119"/>
+          <p:cNvSpPr txBox="1"/>
+          <p:nvPr/>
+        </p:nvSpPr>
+        <p:spPr>
+          <a:xfrm>
+            <a:off x="6455664" y="3200400"/>
+            <a:ext cx="2020824" cy="822960"/>
+          </a:xfrm>
+          <a:prstGeom prst="rect">
+            <a:avLst/>
+          </a:prstGeom>
+          <a:noFill/>
+        </p:spPr>
+        <p:txBody>
+          <a:bodyPr wrap="square" lIns="0" rIns="0" tIns="0" bIns="0" anchor="t"/>
+          <a:lstStyle/>
+          <a:p>
+            <a:pPr algn="l"/>
+            <a:r>
+              <a:rPr sz="1100" b="0">
                 <a:solidFill>
                   <a:srgbClr val="9A9AA2"/>
                 </a:solidFill>
-                <a:latin typeface="Courier New"/>
-              </a:rPr>
-              <a:t>DOCUMENT</a:t>
-            </a:r>
-          </a:p>
-        </p:txBody>
-      </p:sp>
-      <p:sp>
-        <p:nvSpPr>
-          <p:cNvPr id="242" name="rect 242"/>
+                <a:latin typeface="Poppins"/>
+              </a:rPr>
+              <a:t>Someone signs the output. That takes tests, calibration and an audit trail.</a:t>
+            </a:r>
+          </a:p>
+        </p:txBody>
+      </p:sp>
+      <p:sp>
+        <p:nvSpPr>
+          <p:cNvPr id="120" name="rect 120"/>
           <p:cNvSpPr/>
           <p:nvPr/>
         </p:nvSpPr>
         <p:spPr>
           <a:xfrm>
-            <a:off x="9838944" y="5212080"/>
-            <a:ext cx="1051560" cy="292608"/>
+            <a:off x="8951976" y="2340864"/>
+            <a:ext cx="2532888" cy="1783080"/>
           </a:xfrm>
           <a:prstGeom prst="rect">
             <a:avLst/>
           </a:prstGeom>
           <a:solidFill>
-            <a:srgbClr val="0E0E11"/>
+            <a:srgbClr val="161619"/>
           </a:solidFill>
           <a:ln w="9525">
             <a:solidFill>
@@ -12252,38 +8488,16 @@
           </a:p>
         </p:txBody>
       </p:sp>
-      <p:pic>
-        <p:nvPicPr>
-          <p:cNvPr id="243" name="Picture 243"/>
-          <p:cNvPicPr/>
-          <p:nvPr/>
-        </p:nvPicPr>
-        <p:blipFill>
-          <a:blip r:embed="rId6"/>
-          <a:stretch>
-            <a:fillRect/>
-          </a:stretch>
-        </p:blipFill>
-        <p:spPr>
-          <a:xfrm>
-            <a:off x="9976104" y="5294376"/>
-            <a:ext cx="137160" cy="137160"/>
-          </a:xfrm>
-          <a:prstGeom prst="rect">
-            <a:avLst/>
-          </a:prstGeom>
-        </p:spPr>
-      </p:pic>
-      <p:sp>
-        <p:nvSpPr>
-          <p:cNvPr id="244" name="TextBox 244"/>
-          <p:cNvSpPr txBox="1"/>
-          <p:nvPr/>
-        </p:nvSpPr>
-        <p:spPr>
-          <a:xfrm>
-            <a:off x="10186416" y="5308092"/>
-            <a:ext cx="594360" cy="137160"/>
+      <p:sp>
+        <p:nvSpPr>
+          <p:cNvPr id="121" name="TextBox 121"/>
+          <p:cNvSpPr txBox="1"/>
+          <p:nvPr/>
+        </p:nvSpPr>
+        <p:spPr>
+          <a:xfrm>
+            <a:off x="9208008" y="2615184"/>
+            <a:ext cx="2020824" cy="283464"/>
           </a:xfrm>
           <a:prstGeom prst="rect">
             <a:avLst/>
@@ -12298,27 +8512,27 @@
           <a:p>
             <a:pPr algn="l"/>
             <a:r>
-              <a:rPr sz="900" b="0" spc="100">
-                <a:solidFill>
-                  <a:srgbClr val="9A9AA2"/>
-                </a:solidFill>
-                <a:latin typeface="Courier New"/>
-              </a:rPr>
-              <a:t>WAIT</a:t>
-            </a:r>
-          </a:p>
-        </p:txBody>
-      </p:sp>
-      <p:sp>
-        <p:nvSpPr>
-          <p:cNvPr id="245" name="rect 245"/>
+              <a:rPr sz="2000" b="0">
+                <a:solidFill>
+                  <a:srgbClr val="ECECEE"/>
+                </a:solidFill>
+                <a:latin typeface="Poppins"/>
+              </a:rPr>
+              <a:t>Accountability</a:t>
+            </a:r>
+          </a:p>
+        </p:txBody>
+      </p:sp>
+      <p:sp>
+        <p:nvSpPr>
+          <p:cNvPr id="122" name="rect 122"/>
           <p:cNvSpPr/>
           <p:nvPr/>
         </p:nvSpPr>
         <p:spPr>
           <a:xfrm>
-            <a:off x="694944" y="5760720"/>
-            <a:ext cx="10789920" cy="10973"/>
+            <a:off x="9208008" y="3054096"/>
+            <a:ext cx="2020824" cy="10973"/>
           </a:xfrm>
           <a:prstGeom prst="rect">
             <a:avLst/>
@@ -12341,14 +8555,109 @@
       </p:sp>
       <p:sp>
         <p:nvSpPr>
-          <p:cNvPr id="246" name="TextBox 246"/>
-          <p:cNvSpPr txBox="1"/>
-          <p:nvPr/>
-        </p:nvSpPr>
-        <p:spPr>
-          <a:xfrm>
-            <a:off x="694944" y="5943600"/>
-            <a:ext cx="8229600" cy="155448"/>
+          <p:cNvPr id="123" name="TextBox 123"/>
+          <p:cNvSpPr txBox="1"/>
+          <p:nvPr/>
+        </p:nvSpPr>
+        <p:spPr>
+          <a:xfrm>
+            <a:off x="9208008" y="3200400"/>
+            <a:ext cx="2020824" cy="822960"/>
+          </a:xfrm>
+          <a:prstGeom prst="rect">
+            <a:avLst/>
+          </a:prstGeom>
+          <a:noFill/>
+        </p:spPr>
+        <p:txBody>
+          <a:bodyPr wrap="square" lIns="0" rIns="0" tIns="0" bIns="0" anchor="t"/>
+          <a:lstStyle/>
+          <a:p>
+            <a:pPr algn="l"/>
+            <a:r>
+              <a:rPr sz="1100" b="0">
+                <a:solidFill>
+                  <a:srgbClr val="9A9AA2"/>
+                </a:solidFill>
+                <a:latin typeface="Poppins"/>
+              </a:rPr>
+              <a:t>A person owns the decision. That takes gates, not autonomy.</a:t>
+            </a:r>
+          </a:p>
+        </p:txBody>
+      </p:sp>
+      <p:sp>
+        <p:nvSpPr>
+          <p:cNvPr id="124" name="rect 124"/>
+          <p:cNvSpPr/>
+          <p:nvPr/>
+        </p:nvSpPr>
+        <p:spPr>
+          <a:xfrm>
+            <a:off x="694944" y="4343400"/>
+            <a:ext cx="10789920" cy="10973"/>
+          </a:xfrm>
+          <a:prstGeom prst="rect">
+            <a:avLst/>
+          </a:prstGeom>
+          <a:solidFill>
+            <a:srgbClr val="2B2B2D"/>
+          </a:solidFill>
+          <a:ln>
+            <a:noFill/>
+          </a:ln>
+          <a:effectLst/>
+        </p:spPr>
+        <p:txBody>
+          <a:bodyPr rtlCol="0" anchor="ctr"/>
+          <a:lstStyle/>
+          <a:p>
+            <a:pPr algn="ctr"/>
+          </a:p>
+        </p:txBody>
+      </p:sp>
+      <p:sp>
+        <p:nvSpPr>
+          <p:cNvPr id="125" name="rect 125"/>
+          <p:cNvSpPr/>
+          <p:nvPr/>
+        </p:nvSpPr>
+        <p:spPr>
+          <a:xfrm>
+            <a:off x="694944" y="4498848"/>
+            <a:ext cx="10789920" cy="1188720"/>
+          </a:xfrm>
+          <a:prstGeom prst="rect">
+            <a:avLst/>
+          </a:prstGeom>
+          <a:solidFill>
+            <a:srgbClr val="161619"/>
+          </a:solidFill>
+          <a:ln w="9525">
+            <a:solidFill>
+              <a:srgbClr val="2B2B2D"/>
+            </a:solidFill>
+          </a:ln>
+          <a:effectLst/>
+        </p:spPr>
+        <p:txBody>
+          <a:bodyPr rtlCol="0" anchor="ctr"/>
+          <a:lstStyle/>
+          <a:p>
+            <a:pPr algn="ctr"/>
+          </a:p>
+        </p:txBody>
+      </p:sp>
+      <p:sp>
+        <p:nvSpPr>
+          <p:cNvPr id="126" name="TextBox 126"/>
+          <p:cNvSpPr txBox="1"/>
+          <p:nvPr/>
+        </p:nvSpPr>
+        <p:spPr>
+          <a:xfrm>
+            <a:off x="1005840" y="4663440"/>
+            <a:ext cx="2743200" cy="822960"/>
           </a:xfrm>
           <a:prstGeom prst="rect">
             <a:avLst/>
@@ -12363,20 +8672,173 @@
           <a:p>
             <a:pPr algn="l"/>
             <a:r>
-              <a:rPr sz="1000" b="0">
+              <a:rPr sz="5400" b="0">
+                <a:solidFill>
+                  <a:srgbClr val="FF6B3D"/>
+                </a:solidFill>
+                <a:latin typeface="Poppins"/>
+              </a:rPr>
+              <a:t>61</a:t>
+            </a:r>
+            <a:r>
+              <a:rPr sz="2400" b="0">
+                <a:solidFill>
+                  <a:srgbClr val="9A9AA2"/>
+                </a:solidFill>
+                <a:latin typeface="Poppins"/>
+              </a:rPr>
+              <a:t>%</a:t>
+            </a:r>
+          </a:p>
+        </p:txBody>
+      </p:sp>
+      <p:sp>
+        <p:nvSpPr>
+          <p:cNvPr id="127" name="rect 127"/>
+          <p:cNvSpPr/>
+          <p:nvPr/>
+        </p:nvSpPr>
+        <p:spPr>
+          <a:xfrm>
+            <a:off x="3017520" y="4700016"/>
+            <a:ext cx="10973" cy="841248"/>
+          </a:xfrm>
+          <a:prstGeom prst="rect">
+            <a:avLst/>
+          </a:prstGeom>
+          <a:solidFill>
+            <a:srgbClr val="2B2B2D"/>
+          </a:solidFill>
+          <a:ln>
+            <a:noFill/>
+          </a:ln>
+          <a:effectLst/>
+        </p:spPr>
+        <p:txBody>
+          <a:bodyPr rtlCol="0" anchor="ctr"/>
+          <a:lstStyle/>
+          <a:p>
+            <a:pPr algn="ctr"/>
+          </a:p>
+        </p:txBody>
+      </p:sp>
+      <p:sp>
+        <p:nvSpPr>
+          <p:cNvPr id="128" name="TextBox 128"/>
+          <p:cNvSpPr txBox="1"/>
+          <p:nvPr/>
+        </p:nvSpPr>
+        <p:spPr>
+          <a:xfrm>
+            <a:off x="3310128" y="4754880"/>
+            <a:ext cx="5486400" cy="137160"/>
+          </a:xfrm>
+          <a:prstGeom prst="rect">
+            <a:avLst/>
+          </a:prstGeom>
+          <a:noFill/>
+        </p:spPr>
+        <p:txBody>
+          <a:bodyPr wrap="square" lIns="0" rIns="0" tIns="0" bIns="0" anchor="ctr">
+            <a:spAutoFit/>
+          </a:bodyPr>
+          <a:lstStyle/>
+          <a:p>
+            <a:pPr algn="l"/>
+            <a:r>
+              <a:rPr sz="900" b="0" spc="150">
+                <a:solidFill>
+                  <a:srgbClr val="9A9AA2"/>
+                </a:solidFill>
+                <a:latin typeface="Courier New"/>
+              </a:rPr>
+              <a:t>OF ORGANIZATIONS SEE NO EBIT IMPACT FROM AI</a:t>
+            </a:r>
+          </a:p>
+        </p:txBody>
+      </p:sp>
+      <p:sp>
+        <p:nvSpPr>
+          <p:cNvPr id="129" name="TextBox 129"/>
+          <p:cNvSpPr txBox="1"/>
+          <p:nvPr/>
+        </p:nvSpPr>
+        <p:spPr>
+          <a:xfrm>
+            <a:off x="3310128" y="5010912"/>
+            <a:ext cx="7680960" cy="274320"/>
+          </a:xfrm>
+          <a:prstGeom prst="rect">
+            <a:avLst/>
+          </a:prstGeom>
+          <a:noFill/>
+        </p:spPr>
+        <p:txBody>
+          <a:bodyPr wrap="square" lIns="0" rIns="0" tIns="0" bIns="0" anchor="ctr">
+            <a:spAutoFit/>
+          </a:bodyPr>
+          <a:lstStyle/>
+          <a:p>
+            <a:pPr algn="l"/>
+            <a:r>
+              <a:rPr sz="1700" b="1">
+                <a:solidFill>
+                  <a:srgbClr val="ECECEE"/>
+                </a:solidFill>
+                <a:latin typeface="Poppins"/>
+              </a:rPr>
+              <a:t>Pilots are tools, and tools don’t move EBIT. </a:t>
+            </a:r>
+            <a:r>
+              <a:rPr sz="1700" b="1">
+                <a:solidFill>
+                  <a:srgbClr val="FF6B3D"/>
+                </a:solidFill>
+                <a:latin typeface="Poppins"/>
+              </a:rPr>
+              <a:t>Systems do.</a:t>
+            </a:r>
+          </a:p>
+        </p:txBody>
+      </p:sp>
+      <p:sp>
+        <p:nvSpPr>
+          <p:cNvPr id="130" name="TextBox 130"/>
+          <p:cNvSpPr txBox="1"/>
+          <p:nvPr/>
+        </p:nvSpPr>
+        <p:spPr>
+          <a:xfrm>
+            <a:off x="3310128" y="5358384"/>
+            <a:ext cx="7680960" cy="137160"/>
+          </a:xfrm>
+          <a:prstGeom prst="rect">
+            <a:avLst/>
+          </a:prstGeom>
+          <a:noFill/>
+        </p:spPr>
+        <p:txBody>
+          <a:bodyPr wrap="square" lIns="0" rIns="0" tIns="0" bIns="0" anchor="ctr">
+            <a:spAutoFit/>
+          </a:bodyPr>
+          <a:lstStyle/>
+          <a:p>
+            <a:pPr algn="l"/>
+            <a:r>
+              <a:rPr sz="900" b="0" spc="100">
                 <a:solidFill>
                   <a:srgbClr val="5A5A60"/>
                 </a:solidFill>
                 <a:latin typeface="Courier New"/>
               </a:rPr>
-              <a:t>Source: McKinsey, The State of AI in 2025. 39% attribute any EBIT impact to AI</a:t>
+              <a:t>SOURCE: MCKINSEY, THE STATE OF AI IN 2025. 39% ATTRIBUTE ANY EBIT IMPACT TO AI</a:t>
             </a:r>
           </a:p>
         </p:txBody>
       </p:sp>
       <p:pic>
         <p:nvPicPr>
-          <p:cNvPr id="247" name="Logo"/>
+          <p:cNvPr id="131" name="Logo"/>
           <p:cNvPicPr/>
           <p:nvPr/>
         </p:nvPicPr>
@@ -12474,7 +8936,16 @@
                 </a:solidFill>
                 <a:latin typeface="Poppins"/>
               </a:rPr>
-              <a:t>From idea to build-ready package.</a:t>
+              <a:t>What you get.</a:t>
+            </a:r>
+            <a:r>
+              <a:rPr sz="2700" b="0">
+                <a:solidFill>
+                  <a:srgbClr val="9A9AA2"/>
+                </a:solidFill>
+                <a:latin typeface="Poppins"/>
+              </a:rPr>
+              <a:t> And where you can stop.</a:t>
             </a:r>
           </a:p>
         </p:txBody>
@@ -12552,8 +9023,8 @@
         </p:nvSpPr>
         <p:spPr>
           <a:xfrm>
-            <a:off x="694944" y="1243584"/>
-            <a:ext cx="9400032" cy="484632"/>
+            <a:off x="694944" y="1280160"/>
+            <a:ext cx="9400032" cy="457200"/>
           </a:xfrm>
           <a:prstGeom prst="rect">
             <a:avLst/>
@@ -12574,25 +9045,7 @@
                 </a:solidFill>
                 <a:latin typeface="Poppins"/>
               </a:rPr>
-              <a:t>One line, a human gate at every step. AI agents support every stage, </a:t>
-            </a:r>
-            <a:r>
-              <a:rPr sz="1400" b="1">
-                <a:solidFill>
-                  <a:srgbClr val="9A9AA2"/>
-                </a:solidFill>
-                <a:latin typeface="Poppins"/>
-              </a:rPr>
-              <a:t>Discover through AI Memory</a:t>
-            </a:r>
-            <a:r>
-              <a:rPr sz="1400" b="0">
-                <a:solidFill>
-                  <a:srgbClr val="9A9AA2"/>
-                </a:solidFill>
-                <a:latin typeface="Poppins"/>
-              </a:rPr>
-              <a:t>. From first conversation to a build-ready package.</a:t>
+              <a:t>AI agents run every stage, a person opens every gate. Five deliverables on the way to a finished application, and no build budget moves without a human yes.</a:t>
             </a:r>
           </a:p>
         </p:txBody>
@@ -12662,7 +9115,7 @@
                 </a:solidFill>
                 <a:latin typeface="Courier New"/>
               </a:rPr>
-              <a:t>TO  ·  BUILD-READY PACKAGE</a:t>
+              <a:t>TO  ·  A FINISHED APPLICATION</a:t>
             </a:r>
           </a:p>
         </p:txBody>
@@ -12772,7 +9225,7 @@
         </p:nvSpPr>
         <p:spPr>
           <a:xfrm>
-            <a:off x="754380" y="2962656"/>
+            <a:off x="754380" y="2871216"/>
             <a:ext cx="2029968" cy="219456"/>
           </a:xfrm>
           <a:prstGeom prst="rect">
@@ -12794,7 +9247,7 @@
                 </a:solidFill>
                 <a:latin typeface="Poppins"/>
               </a:rPr>
-              <a:t>Discover</a:t>
+              <a:t>Scoped spec</a:t>
             </a:r>
           </a:p>
         </p:txBody>
@@ -12807,7 +9260,7 @@
         </p:nvSpPr>
         <p:spPr>
           <a:xfrm>
-            <a:off x="754380" y="3191256"/>
+            <a:off x="754380" y="3145536"/>
             <a:ext cx="2029968" cy="164592"/>
           </a:xfrm>
           <a:prstGeom prst="rect">
@@ -12829,14 +9282,49 @@
                 </a:solidFill>
                 <a:latin typeface="Poppins"/>
               </a:rPr>
-              <a:t>from conversation</a:t>
-            </a:r>
-          </a:p>
-        </p:txBody>
-      </p:sp>
-      <p:sp>
-        <p:nvSpPr>
-          <p:cNvPr id="113" name="ellipse 113"/>
+              <a:t>requirements and fit</a:t>
+            </a:r>
+          </a:p>
+        </p:txBody>
+      </p:sp>
+      <p:sp>
+        <p:nvSpPr>
+          <p:cNvPr id="113" name="TextBox 113"/>
+          <p:cNvSpPr txBox="1"/>
+          <p:nvPr/>
+        </p:nvSpPr>
+        <p:spPr>
+          <a:xfrm>
+            <a:off x="754380" y="3364992"/>
+            <a:ext cx="2029968" cy="137160"/>
+          </a:xfrm>
+          <a:prstGeom prst="rect">
+            <a:avLst/>
+          </a:prstGeom>
+          <a:noFill/>
+        </p:spPr>
+        <p:txBody>
+          <a:bodyPr wrap="square" lIns="0" rIns="0" tIns="0" bIns="0" anchor="ctr">
+            <a:spAutoFit/>
+          </a:bodyPr>
+          <a:lstStyle/>
+          <a:p>
+            <a:pPr algn="ctr"/>
+            <a:r>
+              <a:rPr sz="900" b="0" spc="100">
+                <a:solidFill>
+                  <a:srgbClr val="5A5A60"/>
+                </a:solidFill>
+                <a:latin typeface="Courier New"/>
+              </a:rPr>
+              <a:t>DISCOVER · ANALYZE</a:t>
+            </a:r>
+          </a:p>
+        </p:txBody>
+      </p:sp>
+      <p:sp>
+        <p:nvSpPr>
+          <p:cNvPr id="114" name="ellipse 114"/>
           <p:cNvSpPr/>
           <p:nvPr/>
         </p:nvSpPr>
@@ -12868,7 +9356,7 @@
       </p:sp>
       <p:sp>
         <p:nvSpPr>
-          <p:cNvPr id="114" name="TextBox 114"/>
+          <p:cNvPr id="115" name="TextBox 115"/>
           <p:cNvSpPr txBox="1"/>
           <p:nvPr/>
         </p:nvSpPr>
@@ -12903,13 +9391,13 @@
       </p:sp>
       <p:sp>
         <p:nvSpPr>
-          <p:cNvPr id="115" name="TextBox 115"/>
-          <p:cNvSpPr txBox="1"/>
-          <p:nvPr/>
-        </p:nvSpPr>
-        <p:spPr>
-          <a:xfrm>
-            <a:off x="2912364" y="2962656"/>
+          <p:cNvPr id="116" name="TextBox 116"/>
+          <p:cNvSpPr txBox="1"/>
+          <p:nvPr/>
+        </p:nvSpPr>
+        <p:spPr>
+          <a:xfrm>
+            <a:off x="2912364" y="2871216"/>
             <a:ext cx="2029968" cy="219456"/>
           </a:xfrm>
           <a:prstGeom prst="rect">
@@ -12931,20 +9419,20 @@
                 </a:solidFill>
                 <a:latin typeface="Poppins"/>
               </a:rPr>
-              <a:t>Analyze</a:t>
-            </a:r>
-          </a:p>
-        </p:txBody>
-      </p:sp>
-      <p:sp>
-        <p:nvSpPr>
-          <p:cNvPr id="116" name="TextBox 116"/>
-          <p:cNvSpPr txBox="1"/>
-          <p:nvPr/>
-        </p:nvSpPr>
-        <p:spPr>
-          <a:xfrm>
-            <a:off x="2912364" y="3191256"/>
+              <a:t>Cited research</a:t>
+            </a:r>
+          </a:p>
+        </p:txBody>
+      </p:sp>
+      <p:sp>
+        <p:nvSpPr>
+          <p:cNvPr id="117" name="TextBox 117"/>
+          <p:cNvSpPr txBox="1"/>
+          <p:nvPr/>
+        </p:nvSpPr>
+        <p:spPr>
+          <a:xfrm>
+            <a:off x="2912364" y="3145536"/>
             <a:ext cx="2029968" cy="164592"/>
           </a:xfrm>
           <a:prstGeom prst="rect">
@@ -12966,14 +9454,49 @@
                 </a:solidFill>
                 <a:latin typeface="Poppins"/>
               </a:rPr>
-              <a:t>scope + fit</a:t>
-            </a:r>
-          </a:p>
-        </p:txBody>
-      </p:sp>
-      <p:sp>
-        <p:nvSpPr>
-          <p:cNvPr id="117" name="ellipse 117"/>
+              <a:t>sources you can check</a:t>
+            </a:r>
+          </a:p>
+        </p:txBody>
+      </p:sp>
+      <p:sp>
+        <p:nvSpPr>
+          <p:cNvPr id="118" name="TextBox 118"/>
+          <p:cNvSpPr txBox="1"/>
+          <p:nvPr/>
+        </p:nvSpPr>
+        <p:spPr>
+          <a:xfrm>
+            <a:off x="2912364" y="3364992"/>
+            <a:ext cx="2029968" cy="137160"/>
+          </a:xfrm>
+          <a:prstGeom prst="rect">
+            <a:avLst/>
+          </a:prstGeom>
+          <a:noFill/>
+        </p:spPr>
+        <p:txBody>
+          <a:bodyPr wrap="square" lIns="0" rIns="0" tIns="0" bIns="0" anchor="ctr">
+            <a:spAutoFit/>
+          </a:bodyPr>
+          <a:lstStyle/>
+          <a:p>
+            <a:pPr algn="ctr"/>
+            <a:r>
+              <a:rPr sz="900" b="0" spc="100">
+                <a:solidFill>
+                  <a:srgbClr val="5A5A60"/>
+                </a:solidFill>
+                <a:latin typeface="Courier New"/>
+              </a:rPr>
+              <a:t>RESEARCH</a:t>
+            </a:r>
+          </a:p>
+        </p:txBody>
+      </p:sp>
+      <p:sp>
+        <p:nvSpPr>
+          <p:cNvPr id="119" name="ellipse 119"/>
           <p:cNvSpPr/>
           <p:nvPr/>
         </p:nvSpPr>
@@ -13005,7 +9528,7 @@
       </p:sp>
       <p:sp>
         <p:nvSpPr>
-          <p:cNvPr id="118" name="TextBox 118"/>
+          <p:cNvPr id="120" name="TextBox 120"/>
           <p:cNvSpPr txBox="1"/>
           <p:nvPr/>
         </p:nvSpPr>
@@ -13040,13 +9563,13 @@
       </p:sp>
       <p:sp>
         <p:nvSpPr>
-          <p:cNvPr id="119" name="TextBox 119"/>
-          <p:cNvSpPr txBox="1"/>
-          <p:nvPr/>
-        </p:nvSpPr>
-        <p:spPr>
-          <a:xfrm>
-            <a:off x="5070348" y="2962656"/>
+          <p:cNvPr id="121" name="TextBox 121"/>
+          <p:cNvSpPr txBox="1"/>
+          <p:nvPr/>
+        </p:nvSpPr>
+        <p:spPr>
+          <a:xfrm>
+            <a:off x="5070348" y="2871216"/>
             <a:ext cx="2029968" cy="219456"/>
           </a:xfrm>
           <a:prstGeom prst="rect">
@@ -13068,20 +9591,20 @@
                 </a:solidFill>
                 <a:latin typeface="Poppins"/>
               </a:rPr>
-              <a:t>Research</a:t>
-            </a:r>
-          </a:p>
-        </p:txBody>
-      </p:sp>
-      <p:sp>
-        <p:nvSpPr>
-          <p:cNvPr id="120" name="TextBox 120"/>
-          <p:cNvSpPr txBox="1"/>
-          <p:nvPr/>
-        </p:nvSpPr>
-        <p:spPr>
-          <a:xfrm>
-            <a:off x="5070348" y="3191256"/>
+              <a:t>Compliance gate</a:t>
+            </a:r>
+          </a:p>
+        </p:txBody>
+      </p:sp>
+      <p:sp>
+        <p:nvSpPr>
+          <p:cNvPr id="122" name="TextBox 122"/>
+          <p:cNvSpPr txBox="1"/>
+          <p:nvPr/>
+        </p:nvSpPr>
+        <p:spPr>
+          <a:xfrm>
+            <a:off x="5070348" y="3145536"/>
             <a:ext cx="2029968" cy="164592"/>
           </a:xfrm>
           <a:prstGeom prst="rect">
@@ -13103,14 +9626,49 @@
                 </a:solidFill>
                 <a:latin typeface="Poppins"/>
               </a:rPr>
-              <a:t>cited, deep</a:t>
-            </a:r>
-          </a:p>
-        </p:txBody>
-      </p:sp>
-      <p:sp>
-        <p:nvSpPr>
-          <p:cNvPr id="121" name="ellipse 121"/>
+              <a:t>signed before any code</a:t>
+            </a:r>
+          </a:p>
+        </p:txBody>
+      </p:sp>
+      <p:sp>
+        <p:nvSpPr>
+          <p:cNvPr id="123" name="TextBox 123"/>
+          <p:cNvSpPr txBox="1"/>
+          <p:nvPr/>
+        </p:nvSpPr>
+        <p:spPr>
+          <a:xfrm>
+            <a:off x="5070348" y="3364992"/>
+            <a:ext cx="2029968" cy="137160"/>
+          </a:xfrm>
+          <a:prstGeom prst="rect">
+            <a:avLst/>
+          </a:prstGeom>
+          <a:noFill/>
+        </p:spPr>
+        <p:txBody>
+          <a:bodyPr wrap="square" lIns="0" rIns="0" tIns="0" bIns="0" anchor="ctr">
+            <a:spAutoFit/>
+          </a:bodyPr>
+          <a:lstStyle/>
+          <a:p>
+            <a:pPr algn="ctr"/>
+            <a:r>
+              <a:rPr sz="900" b="0" spc="100">
+                <a:solidFill>
+                  <a:srgbClr val="5A5A60"/>
+                </a:solidFill>
+                <a:latin typeface="Courier New"/>
+              </a:rPr>
+              <a:t>COMPLIANCE</a:t>
+            </a:r>
+          </a:p>
+        </p:txBody>
+      </p:sp>
+      <p:sp>
+        <p:nvSpPr>
+          <p:cNvPr id="124" name="ellipse 124"/>
           <p:cNvSpPr/>
           <p:nvPr/>
         </p:nvSpPr>
@@ -13142,7 +9700,7 @@
       </p:sp>
       <p:sp>
         <p:nvSpPr>
-          <p:cNvPr id="122" name="TextBox 122"/>
+          <p:cNvPr id="125" name="TextBox 125"/>
           <p:cNvSpPr txBox="1"/>
           <p:nvPr/>
         </p:nvSpPr>
@@ -13177,13 +9735,13 @@
       </p:sp>
       <p:sp>
         <p:nvSpPr>
-          <p:cNvPr id="123" name="TextBox 123"/>
-          <p:cNvSpPr txBox="1"/>
-          <p:nvPr/>
-        </p:nvSpPr>
-        <p:spPr>
-          <a:xfrm>
-            <a:off x="7228332" y="2962656"/>
+          <p:cNvPr id="126" name="TextBox 126"/>
+          <p:cNvSpPr txBox="1"/>
+          <p:nvPr/>
+        </p:nvSpPr>
+        <p:spPr>
+          <a:xfrm>
+            <a:off x="7228332" y="2871216"/>
             <a:ext cx="2029968" cy="219456"/>
           </a:xfrm>
           <a:prstGeom prst="rect">
@@ -13205,20 +9763,20 @@
                 </a:solidFill>
                 <a:latin typeface="Poppins"/>
               </a:rPr>
-              <a:t>Compliance</a:t>
-            </a:r>
-          </a:p>
-        </p:txBody>
-      </p:sp>
-      <p:sp>
-        <p:nvSpPr>
-          <p:cNvPr id="124" name="TextBox 124"/>
-          <p:cNvSpPr txBox="1"/>
-          <p:nvPr/>
-        </p:nvSpPr>
-        <p:spPr>
-          <a:xfrm>
-            <a:off x="7228332" y="3191256"/>
+              <a:t>Reviewed build</a:t>
+            </a:r>
+          </a:p>
+        </p:txBody>
+      </p:sp>
+      <p:sp>
+        <p:nvSpPr>
+          <p:cNvPr id="127" name="TextBox 127"/>
+          <p:cNvSpPr txBox="1"/>
+          <p:nvPr/>
+        </p:nvSpPr>
+        <p:spPr>
+          <a:xfrm>
+            <a:off x="7228332" y="3145536"/>
             <a:ext cx="2029968" cy="164592"/>
           </a:xfrm>
           <a:prstGeom prst="rect">
@@ -13240,14 +9798,49 @@
                 </a:solidFill>
                 <a:latin typeface="Poppins"/>
               </a:rPr>
-              <a:t>pre-build gate</a:t>
-            </a:r>
-          </a:p>
-        </p:txBody>
-      </p:sp>
-      <p:sp>
-        <p:nvSpPr>
-          <p:cNvPr id="125" name="ellipse 125"/>
+              <a:t>applied and reviewed</a:t>
+            </a:r>
+          </a:p>
+        </p:txBody>
+      </p:sp>
+      <p:sp>
+        <p:nvSpPr>
+          <p:cNvPr id="128" name="TextBox 128"/>
+          <p:cNvSpPr txBox="1"/>
+          <p:nvPr/>
+        </p:nvSpPr>
+        <p:spPr>
+          <a:xfrm>
+            <a:off x="7228332" y="3364992"/>
+            <a:ext cx="2029968" cy="137160"/>
+          </a:xfrm>
+          <a:prstGeom prst="rect">
+            <a:avLst/>
+          </a:prstGeom>
+          <a:noFill/>
+        </p:spPr>
+        <p:txBody>
+          <a:bodyPr wrap="square" lIns="0" rIns="0" tIns="0" bIns="0" anchor="ctr">
+            <a:spAutoFit/>
+          </a:bodyPr>
+          <a:lstStyle/>
+          <a:p>
+            <a:pPr algn="ctr"/>
+            <a:r>
+              <a:rPr sz="900" b="0" spc="100">
+                <a:solidFill>
+                  <a:srgbClr val="5A5A60"/>
+                </a:solidFill>
+                <a:latin typeface="Courier New"/>
+              </a:rPr>
+              <a:t>AI MEMORY · BUILD</a:t>
+            </a:r>
+          </a:p>
+        </p:txBody>
+      </p:sp>
+      <p:sp>
+        <p:nvSpPr>
+          <p:cNvPr id="129" name="ellipse 129"/>
           <p:cNvSpPr/>
           <p:nvPr/>
         </p:nvSpPr>
@@ -13279,7 +9872,7 @@
       </p:sp>
       <p:sp>
         <p:nvSpPr>
-          <p:cNvPr id="126" name="TextBox 126"/>
+          <p:cNvPr id="130" name="TextBox 130"/>
           <p:cNvSpPr txBox="1"/>
           <p:nvPr/>
         </p:nvSpPr>
@@ -13314,13 +9907,13 @@
       </p:sp>
       <p:sp>
         <p:nvSpPr>
-          <p:cNvPr id="127" name="TextBox 127"/>
-          <p:cNvSpPr txBox="1"/>
-          <p:nvPr/>
-        </p:nvSpPr>
-        <p:spPr>
-          <a:xfrm>
-            <a:off x="9386316" y="2962656"/>
+          <p:cNvPr id="131" name="TextBox 131"/>
+          <p:cNvSpPr txBox="1"/>
+          <p:nvPr/>
+        </p:nvSpPr>
+        <p:spPr>
+          <a:xfrm>
+            <a:off x="9386316" y="2871216"/>
             <a:ext cx="2029968" cy="219456"/>
           </a:xfrm>
           <a:prstGeom prst="rect">
@@ -13342,20 +9935,20 @@
                 </a:solidFill>
                 <a:latin typeface="Poppins"/>
               </a:rPr>
-              <a:t>AI Memory</a:t>
-            </a:r>
-          </a:p>
-        </p:txBody>
-      </p:sp>
-      <p:sp>
-        <p:nvSpPr>
-          <p:cNvPr id="128" name="TextBox 128"/>
-          <p:cNvSpPr txBox="1"/>
-          <p:nvPr/>
-        </p:nvSpPr>
-        <p:spPr>
-          <a:xfrm>
-            <a:off x="9386316" y="3191256"/>
+              <a:t>Running system</a:t>
+            </a:r>
+          </a:p>
+        </p:txBody>
+      </p:sp>
+      <p:sp>
+        <p:nvSpPr>
+          <p:cNvPr id="132" name="TextBox 132"/>
+          <p:cNvSpPr txBox="1"/>
+          <p:nvPr/>
+        </p:nvSpPr>
+        <p:spPr>
+          <a:xfrm>
+            <a:off x="9386316" y="3145536"/>
             <a:ext cx="2029968" cy="164592"/>
           </a:xfrm>
           <a:prstGeom prst="rect">
@@ -13377,14 +9970,49 @@
                 </a:solidFill>
                 <a:latin typeface="Poppins"/>
               </a:rPr>
-              <a:t>patterns carried in</a:t>
-            </a:r>
-          </a:p>
-        </p:txBody>
-      </p:sp>
-      <p:sp>
-        <p:nvSpPr>
-          <p:cNvPr id="129" name="diamond 129"/>
+              <a:t>released and monitored</a:t>
+            </a:r>
+          </a:p>
+        </p:txBody>
+      </p:sp>
+      <p:sp>
+        <p:nvSpPr>
+          <p:cNvPr id="133" name="TextBox 133"/>
+          <p:cNvSpPr txBox="1"/>
+          <p:nvPr/>
+        </p:nvSpPr>
+        <p:spPr>
+          <a:xfrm>
+            <a:off x="9386316" y="3364992"/>
+            <a:ext cx="2029968" cy="137160"/>
+          </a:xfrm>
+          <a:prstGeom prst="rect">
+            <a:avLst/>
+          </a:prstGeom>
+          <a:noFill/>
+        </p:spPr>
+        <p:txBody>
+          <a:bodyPr wrap="square" lIns="0" rIns="0" tIns="0" bIns="0" anchor="ctr">
+            <a:spAutoFit/>
+          </a:bodyPr>
+          <a:lstStyle/>
+          <a:p>
+            <a:pPr algn="ctr"/>
+            <a:r>
+              <a:rPr sz="900" b="0" spc="100">
+                <a:solidFill>
+                  <a:srgbClr val="5A5A60"/>
+                </a:solidFill>
+                <a:latin typeface="Courier New"/>
+              </a:rPr>
+              <a:t>RELEASE · OPERATE</a:t>
+            </a:r>
+          </a:p>
+        </p:txBody>
+      </p:sp>
+      <p:sp>
+        <p:nvSpPr>
+          <p:cNvPr id="134" name="diamond 134"/>
           <p:cNvSpPr/>
           <p:nvPr/>
         </p:nvSpPr>
@@ -13414,7 +10042,7 @@
       </p:sp>
       <p:sp>
         <p:nvSpPr>
-          <p:cNvPr id="130" name="diamond 130"/>
+          <p:cNvPr id="135" name="diamond 135"/>
           <p:cNvSpPr/>
           <p:nvPr/>
         </p:nvSpPr>
@@ -13444,7 +10072,7 @@
       </p:sp>
       <p:sp>
         <p:nvSpPr>
-          <p:cNvPr id="131" name="diamond 131"/>
+          <p:cNvPr id="136" name="diamond 136"/>
           <p:cNvSpPr/>
           <p:nvPr/>
         </p:nvSpPr>
@@ -13474,7 +10102,7 @@
       </p:sp>
       <p:sp>
         <p:nvSpPr>
-          <p:cNvPr id="132" name="diamond 132"/>
+          <p:cNvPr id="137" name="diamond 137"/>
           <p:cNvSpPr/>
           <p:nvPr/>
         </p:nvSpPr>
@@ -13504,13 +10132,13 @@
       </p:sp>
       <p:sp>
         <p:nvSpPr>
-          <p:cNvPr id="133" name="diamond 133"/>
+          <p:cNvPr id="138" name="diamond 138"/>
           <p:cNvSpPr/>
           <p:nvPr/>
         </p:nvSpPr>
         <p:spPr>
           <a:xfrm>
-            <a:off x="8321040" y="3621024"/>
+            <a:off x="694944" y="3694176"/>
             <a:ext cx="91440" cy="91440"/>
           </a:xfrm>
           <a:prstGeom prst="diamond">
@@ -13534,14 +10162,14 @@
       </p:sp>
       <p:sp>
         <p:nvSpPr>
-          <p:cNvPr id="134" name="TextBox 134"/>
-          <p:cNvSpPr txBox="1"/>
-          <p:nvPr/>
-        </p:nvSpPr>
-        <p:spPr>
-          <a:xfrm>
-            <a:off x="8522208" y="3602736"/>
-            <a:ext cx="2962656" cy="137160"/>
+          <p:cNvPr id="139" name="TextBox 139"/>
+          <p:cNvSpPr txBox="1"/>
+          <p:nvPr/>
+        </p:nvSpPr>
+        <p:spPr>
+          <a:xfrm>
+            <a:off x="896112" y="3675888"/>
+            <a:ext cx="5852160" cy="164592"/>
           </a:xfrm>
           <a:prstGeom prst="rect">
             <a:avLst/>
@@ -13556,26 +10184,26 @@
           <a:p>
             <a:pPr algn="l"/>
             <a:r>
-              <a:rPr sz="900" b="0" spc="150">
-                <a:solidFill>
-                  <a:srgbClr val="9A9AA2"/>
+              <a:rPr sz="1100" b="0" spc="150">
+                <a:solidFill>
+                  <a:srgbClr val="FF6B3D"/>
                 </a:solidFill>
                 <a:latin typeface="Courier New"/>
               </a:rPr>
-              <a:t>HUMAN GATE AT EVERY TRANSITION</a:t>
-            </a:r>
-          </a:p>
-        </p:txBody>
-      </p:sp>
-      <p:sp>
-        <p:nvSpPr>
-          <p:cNvPr id="135" name="rect 135"/>
+              <a:t>YOU CAN STOP AT ANY GATE, BEFORE BUILD BUDGET MOVES</a:t>
+            </a:r>
+          </a:p>
+        </p:txBody>
+      </p:sp>
+      <p:sp>
+        <p:nvSpPr>
+          <p:cNvPr id="140" name="rect 140"/>
           <p:cNvSpPr/>
           <p:nvPr/>
         </p:nvSpPr>
         <p:spPr>
           <a:xfrm>
-            <a:off x="1527048" y="3886200"/>
+            <a:off x="1527048" y="3986784"/>
             <a:ext cx="9116568" cy="310896"/>
           </a:xfrm>
           <a:prstGeom prst="rect">
@@ -13601,13 +10229,13 @@
       </p:sp>
       <p:sp>
         <p:nvSpPr>
-          <p:cNvPr id="136" name="TextBox 136"/>
-          <p:cNvSpPr txBox="1"/>
-          <p:nvPr/>
-        </p:nvSpPr>
-        <p:spPr>
-          <a:xfrm>
-            <a:off x="1527048" y="3968496"/>
+          <p:cNvPr id="141" name="TextBox 141"/>
+          <p:cNvSpPr txBox="1"/>
+          <p:nvPr/>
+        </p:nvSpPr>
+        <p:spPr>
+          <a:xfrm>
+            <a:off x="1527048" y="4069080"/>
             <a:ext cx="9116568" cy="155448"/>
           </a:xfrm>
           <a:prstGeom prst="rect">
@@ -13629,21 +10257,21 @@
                 </a:solidFill>
                 <a:latin typeface="Courier New"/>
               </a:rPr>
-              <a:t>AI AGENTS SUPPORT EVERY STAGE</a:t>
-            </a:r>
-          </a:p>
-        </p:txBody>
-      </p:sp>
-      <p:sp>
-        <p:nvSpPr>
-          <p:cNvPr id="137" name="rect 137"/>
+              <a:t>AI AGENTS RUN EVERY STAGE</a:t>
+            </a:r>
+          </a:p>
+        </p:txBody>
+      </p:sp>
+      <p:sp>
+        <p:nvSpPr>
+          <p:cNvPr id="142" name="rect 142"/>
           <p:cNvSpPr/>
           <p:nvPr/>
         </p:nvSpPr>
         <p:spPr>
-          <a:xfrm rot="484747">
-            <a:off x="1747731" y="4549140"/>
-            <a:ext cx="4359234" cy="18288"/>
+          <a:xfrm rot="276172">
+            <a:off x="1762382" y="4517136"/>
+            <a:ext cx="4329933" cy="18288"/>
           </a:xfrm>
           <a:prstGeom prst="rect">
             <a:avLst/>
@@ -13666,14 +10294,14 @@
       </p:sp>
       <p:sp>
         <p:nvSpPr>
-          <p:cNvPr id="138" name="rect 138"/>
+          <p:cNvPr id="143" name="rect 143"/>
           <p:cNvSpPr/>
           <p:nvPr/>
         </p:nvSpPr>
         <p:spPr>
-          <a:xfrm rot="950949">
-            <a:off x="3884708" y="4549140"/>
-            <a:ext cx="2243264" cy="18288"/>
+          <a:xfrm rot="548825">
+            <a:off x="3913450" y="4517136"/>
+            <a:ext cx="2185779" cy="18288"/>
           </a:xfrm>
           <a:prstGeom prst="rect">
             <a:avLst/>
@@ -13696,14 +10324,14 @@
       </p:sp>
       <p:sp>
         <p:nvSpPr>
-          <p:cNvPr id="139" name="rect 139"/>
+          <p:cNvPr id="144" name="rect 144"/>
           <p:cNvSpPr/>
           <p:nvPr/>
         </p:nvSpPr>
         <p:spPr>
           <a:xfrm rot="5400000">
-            <a:off x="5779008" y="4549140"/>
-            <a:ext cx="612648" cy="18288"/>
+            <a:off x="5911596" y="4517136"/>
+            <a:ext cx="347472" cy="18288"/>
           </a:xfrm>
           <a:prstGeom prst="rect">
             <a:avLst/>
@@ -13726,14 +10354,14 @@
       </p:sp>
       <p:sp>
         <p:nvSpPr>
-          <p:cNvPr id="140" name="rect 140"/>
+          <p:cNvPr id="145" name="rect 145"/>
           <p:cNvSpPr/>
           <p:nvPr/>
         </p:nvSpPr>
         <p:spPr>
-          <a:xfrm rot="9849051">
-            <a:off x="6042692" y="4549140"/>
-            <a:ext cx="2243264" cy="18288"/>
+          <a:xfrm rot="10251175">
+            <a:off x="6071434" y="4517136"/>
+            <a:ext cx="2185779" cy="18288"/>
           </a:xfrm>
           <a:prstGeom prst="rect">
             <a:avLst/>
@@ -13756,14 +10384,14 @@
       </p:sp>
       <p:sp>
         <p:nvSpPr>
-          <p:cNvPr id="141" name="rect 141"/>
+          <p:cNvPr id="146" name="rect 146"/>
           <p:cNvSpPr/>
           <p:nvPr/>
         </p:nvSpPr>
         <p:spPr>
-          <a:xfrm rot="10315253">
-            <a:off x="6063699" y="4549140"/>
-            <a:ext cx="4359234" cy="18288"/>
+          <a:xfrm rot="10523828">
+            <a:off x="6078350" y="4517136"/>
+            <a:ext cx="4329933" cy="18288"/>
           </a:xfrm>
           <a:prstGeom prst="rect">
             <a:avLst/>
@@ -13786,13 +10414,13 @@
       </p:sp>
       <p:sp>
         <p:nvSpPr>
-          <p:cNvPr id="142" name="ellipse 142"/>
+          <p:cNvPr id="147" name="ellipse 147"/>
           <p:cNvSpPr/>
           <p:nvPr/>
         </p:nvSpPr>
         <p:spPr>
           <a:xfrm>
-            <a:off x="5975604" y="4754880"/>
+            <a:off x="5975604" y="4590288"/>
             <a:ext cx="219456" cy="219456"/>
           </a:xfrm>
           <a:prstGeom prst="ellipse">
@@ -13818,14 +10446,14 @@
       </p:sp>
       <p:sp>
         <p:nvSpPr>
-          <p:cNvPr id="143" name="rect 143"/>
+          <p:cNvPr id="148" name="rect 148"/>
           <p:cNvSpPr/>
           <p:nvPr/>
         </p:nvSpPr>
         <p:spPr>
           <a:xfrm>
-            <a:off x="6076188" y="4974336"/>
-            <a:ext cx="18288" cy="292608"/>
+            <a:off x="6076188" y="4809744"/>
+            <a:ext cx="18288" cy="182880"/>
           </a:xfrm>
           <a:prstGeom prst="rect">
             <a:avLst/>
@@ -13848,13 +10476,13 @@
       </p:sp>
       <p:sp>
         <p:nvSpPr>
-          <p:cNvPr id="144" name="triangle 144"/>
+          <p:cNvPr id="149" name="triangle 149"/>
           <p:cNvSpPr/>
           <p:nvPr/>
         </p:nvSpPr>
         <p:spPr>
           <a:xfrm rot="10800000">
-            <a:off x="5993892" y="5093208"/>
+            <a:off x="5993892" y="4892040"/>
             <a:ext cx="182880" cy="128016"/>
           </a:xfrm>
           <a:prstGeom prst="triangle">
@@ -13878,13 +10506,13 @@
       </p:sp>
       <p:sp>
         <p:nvSpPr>
-          <p:cNvPr id="145" name="rect 145"/>
+          <p:cNvPr id="150" name="rect 150"/>
           <p:cNvSpPr/>
           <p:nvPr/>
         </p:nvSpPr>
         <p:spPr>
           <a:xfrm>
-            <a:off x="694944" y="5230368"/>
+            <a:off x="694944" y="5029200"/>
             <a:ext cx="10789920" cy="786384"/>
           </a:xfrm>
           <a:prstGeom prst="rect">
@@ -13910,13 +10538,13 @@
       </p:sp>
       <p:sp>
         <p:nvSpPr>
-          <p:cNvPr id="146" name="TextBox 146"/>
-          <p:cNvSpPr txBox="1"/>
-          <p:nvPr/>
-        </p:nvSpPr>
-        <p:spPr>
-          <a:xfrm>
-            <a:off x="987552" y="5413248"/>
+          <p:cNvPr id="151" name="TextBox 151"/>
+          <p:cNvSpPr txBox="1"/>
+          <p:nvPr/>
+        </p:nvSpPr>
+        <p:spPr>
+          <a:xfrm>
+            <a:off x="987552" y="5212080"/>
             <a:ext cx="5486400" cy="137160"/>
           </a:xfrm>
           <a:prstGeom prst="rect">
@@ -13938,20 +10566,20 @@
                 </a:solidFill>
                 <a:latin typeface="Courier New"/>
               </a:rPr>
-              <a:t>OUTPUT  ·  ONE APPROVED ARTIFACT</a:t>
-            </a:r>
-          </a:p>
-        </p:txBody>
-      </p:sp>
-      <p:sp>
-        <p:nvSpPr>
-          <p:cNvPr id="147" name="TextBox 147"/>
-          <p:cNvSpPr txBox="1"/>
-          <p:nvPr/>
-        </p:nvSpPr>
-        <p:spPr>
-          <a:xfrm>
-            <a:off x="987552" y="5669280"/>
+              <a:t>OUTPUT  ·  WHAT THIS HAS ALREADY PRODUCED</a:t>
+            </a:r>
+          </a:p>
+        </p:txBody>
+      </p:sp>
+      <p:sp>
+        <p:nvSpPr>
+          <p:cNvPr id="152" name="TextBox 152"/>
+          <p:cNvSpPr txBox="1"/>
+          <p:nvPr/>
+        </p:nvSpPr>
+        <p:spPr>
+          <a:xfrm>
+            <a:off x="987552" y="5468112"/>
             <a:ext cx="10204704" cy="219456"/>
           </a:xfrm>
           <a:prstGeom prst="rect">
@@ -13973,1491 +10601,14 @@
                 </a:solidFill>
                 <a:latin typeface="Poppins"/>
               </a:rPr>
-              <a:t>Requirements, scope, cited research, compliance and prior patterns. Approved before code.</a:t>
+              <a:t>Audit-grade output, built and verified. A second system live in production since June 2026.</a:t>
             </a:r>
           </a:p>
         </p:txBody>
       </p:sp>
       <p:pic>
         <p:nvPicPr>
-          <p:cNvPr id="148" name="Logo"/>
-          <p:cNvPicPr/>
-          <p:nvPr/>
-        </p:nvPicPr>
-        <p:blipFill>
-          <a:blip r:embed="rId3"/>
-          <a:stretch>
-            <a:fillRect/>
-          </a:stretch>
-        </p:blipFill>
-        <p:spPr>
-          <a:xfrm>
-            <a:off x="630936" y="6437376"/>
-            <a:ext cx="1078992" cy="256032"/>
-          </a:xfrm>
-          <a:prstGeom prst="rect">
-            <a:avLst/>
-          </a:prstGeom>
-        </p:spPr>
-      </p:pic>
-    </p:spTree>
-  </p:cSld>
-  <p:clrMapOvr>
-    <a:masterClrMapping/>
-  </p:clrMapOvr>
-  <p:transition xmlns:p14="http://schemas.microsoft.com/office/powerpoint/2010/main" spd="med" advClick="1"/>
-</p:sld>
-</file>
-
-<file path=ppt/slides/slide4.xml><?xml version="1.0" encoding="utf-8"?>
-<p:sld xmlns:a="http://schemas.openxmlformats.org/drawingml/2006/main" xmlns:r="http://schemas.openxmlformats.org/officeDocument/2006/relationships" xmlns:p="http://schemas.openxmlformats.org/presentationml/2006/main" xmlns:m="http://schemas.openxmlformats.org/officeDocument/2006/math" xmlns:a14="http://schemas.microsoft.com/office/drawing/2010/main" showMasterSp="1" showMasterPhAnim="1">
-  <p:cSld>
-    <p:spTree>
-      <p:nvGrpSpPr>
-        <p:cNvPr id="1" name=""/>
-        <p:cNvGrpSpPr/>
-        <p:nvPr/>
-      </p:nvGrpSpPr>
-      <p:grpSpPr>
-        <a:xfrm>
-          <a:off x="0" y="0"/>
-          <a:ext cx="0" cy="0"/>
-          <a:chOff x="0" y="0"/>
-          <a:chExt cx="0" cy="0"/>
-        </a:xfrm>
-      </p:grpSpPr>
-      <p:pic>
-        <p:nvPicPr>
-          <p:cNvPr id="101" name="Picture 1"/>
-          <p:cNvPicPr/>
-          <p:nvPr/>
-        </p:nvPicPr>
-        <p:blipFill>
-          <a:blip r:embed="rId2"/>
-          <a:stretch>
-            <a:fillRect/>
-          </a:stretch>
-        </p:blipFill>
-        <p:spPr>
-          <a:xfrm>
-            <a:off x="0" y="0"/>
-            <a:ext cx="12191695" cy="6858000"/>
-          </a:xfrm>
-          <a:prstGeom prst="rect">
-            <a:avLst/>
-          </a:prstGeom>
-        </p:spPr>
-      </p:pic>
-      <p:sp>
-        <p:nvSpPr>
-          <p:cNvPr id="102" name="TextBox 102"/>
-          <p:cNvSpPr txBox="1"/>
-          <p:nvPr/>
-        </p:nvSpPr>
-        <p:spPr>
-          <a:xfrm>
-            <a:off x="694944" y="566928"/>
-            <a:ext cx="9902952" cy="393192"/>
-          </a:xfrm>
-          <a:prstGeom prst="rect">
-            <a:avLst/>
-          </a:prstGeom>
-          <a:noFill/>
-        </p:spPr>
-        <p:txBody>
-          <a:bodyPr wrap="square" lIns="0" rIns="0" tIns="0" bIns="0" anchor="ctr">
-            <a:spAutoFit/>
-          </a:bodyPr>
-          <a:lstStyle/>
-          <a:p>
-            <a:pPr algn="l"/>
-            <a:r>
-              <a:rPr sz="2700" b="1">
-                <a:solidFill>
-                  <a:srgbClr val="ECECEE"/>
-                </a:solidFill>
-                <a:latin typeface="Poppins"/>
-              </a:rPr>
-              <a:t>From package to running software.</a:t>
-            </a:r>
-          </a:p>
-        </p:txBody>
-      </p:sp>
-      <p:sp>
-        <p:nvSpPr>
-          <p:cNvPr id="103" name="TextBox 103"/>
-          <p:cNvSpPr txBox="1"/>
-          <p:nvPr/>
-        </p:nvSpPr>
-        <p:spPr>
-          <a:xfrm>
-            <a:off x="8311896" y="621792"/>
-            <a:ext cx="3172968" cy="155448"/>
-          </a:xfrm>
-          <a:prstGeom prst="rect">
-            <a:avLst/>
-          </a:prstGeom>
-          <a:noFill/>
-        </p:spPr>
-        <p:txBody>
-          <a:bodyPr wrap="square" lIns="0" rIns="0" tIns="0" bIns="0" anchor="ctr">
-            <a:spAutoFit/>
-          </a:bodyPr>
-          <a:lstStyle/>
-          <a:p>
-            <a:pPr algn="r"/>
-            <a:r>
-              <a:rPr sz="1100" b="0" spc="120">
-                <a:solidFill>
-                  <a:srgbClr val="9A9AA2"/>
-                </a:solidFill>
-                <a:latin typeface="Courier New"/>
-              </a:rPr>
-              <a:t>The chain</a:t>
-            </a:r>
-          </a:p>
-        </p:txBody>
-      </p:sp>
-      <p:sp>
-        <p:nvSpPr>
-          <p:cNvPr id="104" name="rect 104"/>
-          <p:cNvSpPr/>
-          <p:nvPr/>
-        </p:nvSpPr>
-        <p:spPr>
-          <a:xfrm>
-            <a:off x="694944" y="1088136"/>
-            <a:ext cx="10789920" cy="10973"/>
-          </a:xfrm>
-          <a:prstGeom prst="rect">
-            <a:avLst/>
-          </a:prstGeom>
-          <a:solidFill>
-            <a:srgbClr val="2B2B2D"/>
-          </a:solidFill>
-          <a:ln>
-            <a:noFill/>
-          </a:ln>
-          <a:effectLst/>
-        </p:spPr>
-        <p:txBody>
-          <a:bodyPr rtlCol="0" anchor="ctr"/>
-          <a:lstStyle/>
-          <a:p>
-            <a:pPr algn="ctr"/>
-          </a:p>
-        </p:txBody>
-      </p:sp>
-      <p:sp>
-        <p:nvSpPr>
-          <p:cNvPr id="105" name="TextBox 105"/>
-          <p:cNvSpPr txBox="1"/>
-          <p:nvPr/>
-        </p:nvSpPr>
-        <p:spPr>
-          <a:xfrm>
-            <a:off x="694944" y="1243584"/>
-            <a:ext cx="9400032" cy="484632"/>
-          </a:xfrm>
-          <a:prstGeom prst="rect">
-            <a:avLst/>
-          </a:prstGeom>
-          <a:noFill/>
-        </p:spPr>
-        <p:txBody>
-          <a:bodyPr wrap="square" lIns="0" rIns="0" tIns="0" bIns="0" anchor="ctr">
-            <a:spAutoFit/>
-          </a:bodyPr>
-          <a:lstStyle/>
-          <a:p>
-            <a:pPr algn="l"/>
-            <a:r>
-              <a:rPr sz="1400" b="0">
-                <a:solidFill>
-                  <a:srgbClr val="9A9AA2"/>
-                </a:solidFill>
-                <a:latin typeface="Poppins"/>
-              </a:rPr>
-              <a:t>The package is approved. </a:t>
-            </a:r>
-            <a:r>
-              <a:rPr sz="1400" b="1">
-                <a:solidFill>
-                  <a:srgbClr val="9A9AA2"/>
-                </a:solidFill>
-                <a:latin typeface="Poppins"/>
-              </a:rPr>
-              <a:t>Build through Operate</a:t>
-            </a:r>
-            <a:r>
-              <a:rPr sz="1400" b="0">
-                <a:solidFill>
-                  <a:srgbClr val="9A9AA2"/>
-                </a:solidFill>
-                <a:latin typeface="Poppins"/>
-              </a:rPr>
-              <a:t> takes it from approved package to software running in production. Every decision that matters stays with a person.</a:t>
-            </a:r>
-          </a:p>
-        </p:txBody>
-      </p:sp>
-      <p:sp>
-        <p:nvSpPr>
-          <p:cNvPr id="106" name="TextBox 106"/>
-          <p:cNvSpPr txBox="1"/>
-          <p:nvPr/>
-        </p:nvSpPr>
-        <p:spPr>
-          <a:xfrm>
-            <a:off x="694944" y="1993392"/>
-            <a:ext cx="4572000" cy="137160"/>
-          </a:xfrm>
-          <a:prstGeom prst="rect">
-            <a:avLst/>
-          </a:prstGeom>
-          <a:noFill/>
-        </p:spPr>
-        <p:txBody>
-          <a:bodyPr wrap="square" lIns="0" rIns="0" tIns="0" bIns="0" anchor="ctr">
-            <a:spAutoFit/>
-          </a:bodyPr>
-          <a:lstStyle/>
-          <a:p>
-            <a:pPr algn="l"/>
-            <a:r>
-              <a:rPr sz="900" b="0" spc="200">
-                <a:solidFill>
-                  <a:srgbClr val="5A5A60"/>
-                </a:solidFill>
-                <a:latin typeface="Courier New"/>
-              </a:rPr>
-              <a:t>FROM  ·  BUILD-READY PACKAGE</a:t>
-            </a:r>
-          </a:p>
-        </p:txBody>
-      </p:sp>
-      <p:sp>
-        <p:nvSpPr>
-          <p:cNvPr id="107" name="TextBox 107"/>
-          <p:cNvSpPr txBox="1"/>
-          <p:nvPr/>
-        </p:nvSpPr>
-        <p:spPr>
-          <a:xfrm>
-            <a:off x="6912864" y="1993392"/>
-            <a:ext cx="4572000" cy="137160"/>
-          </a:xfrm>
-          <a:prstGeom prst="rect">
-            <a:avLst/>
-          </a:prstGeom>
-          <a:noFill/>
-        </p:spPr>
-        <p:txBody>
-          <a:bodyPr wrap="square" lIns="0" rIns="0" tIns="0" bIns="0" anchor="ctr">
-            <a:spAutoFit/>
-          </a:bodyPr>
-          <a:lstStyle/>
-          <a:p>
-            <a:pPr algn="r"/>
-            <a:r>
-              <a:rPr sz="900" b="0" spc="200">
-                <a:solidFill>
-                  <a:srgbClr val="5A5A60"/>
-                </a:solidFill>
-                <a:latin typeface="Courier New"/>
-              </a:rPr>
-              <a:t>TO  ·  SOFTWARE IN PRODUCTION</a:t>
-            </a:r>
-          </a:p>
-        </p:txBody>
-      </p:sp>
-      <p:sp>
-        <p:nvSpPr>
-          <p:cNvPr id="108" name="rect 108"/>
-          <p:cNvSpPr/>
-          <p:nvPr/>
-        </p:nvSpPr>
-        <p:spPr>
-          <a:xfrm>
-            <a:off x="950976" y="2609698"/>
-            <a:ext cx="1901952" cy="10973"/>
-          </a:xfrm>
-          <a:prstGeom prst="rect">
-            <a:avLst/>
-          </a:prstGeom>
-          <a:solidFill>
-            <a:srgbClr val="2B2B2D"/>
-          </a:solidFill>
-          <a:ln>
-            <a:noFill/>
-          </a:ln>
-          <a:effectLst/>
-        </p:spPr>
-        <p:txBody>
-          <a:bodyPr rtlCol="0" anchor="ctr"/>
-          <a:lstStyle/>
-          <a:p>
-            <a:pPr algn="ctr"/>
-          </a:p>
-        </p:txBody>
-      </p:sp>
-      <p:sp>
-        <p:nvSpPr>
-          <p:cNvPr id="109" name="ellipse 109"/>
-          <p:cNvSpPr/>
-          <p:nvPr/>
-        </p:nvSpPr>
-        <p:spPr>
-          <a:xfrm>
-            <a:off x="905256" y="2569464"/>
-            <a:ext cx="91440" cy="91440"/>
-          </a:xfrm>
-          <a:prstGeom prst="ellipse">
-            <a:avLst/>
-          </a:prstGeom>
-          <a:solidFill>
-            <a:srgbClr val="0E0E11"/>
-          </a:solidFill>
-          <a:ln w="12700">
-            <a:solidFill>
-              <a:srgbClr val="5A5A60"/>
-            </a:solidFill>
-          </a:ln>
-          <a:effectLst/>
-        </p:spPr>
-        <p:txBody>
-          <a:bodyPr rtlCol="0" anchor="ctr"/>
-          <a:lstStyle/>
-          <a:p>
-            <a:pPr algn="ctr"/>
-          </a:p>
-        </p:txBody>
-      </p:sp>
-      <p:sp>
-        <p:nvSpPr>
-          <p:cNvPr id="110" name="ellipse 110"/>
-          <p:cNvSpPr/>
-          <p:nvPr/>
-        </p:nvSpPr>
-        <p:spPr>
-          <a:xfrm>
-            <a:off x="1380744" y="2569464"/>
-            <a:ext cx="91440" cy="91440"/>
-          </a:xfrm>
-          <a:prstGeom prst="ellipse">
-            <a:avLst/>
-          </a:prstGeom>
-          <a:solidFill>
-            <a:srgbClr val="0E0E11"/>
-          </a:solidFill>
-          <a:ln w="12700">
-            <a:solidFill>
-              <a:srgbClr val="5A5A60"/>
-            </a:solidFill>
-          </a:ln>
-          <a:effectLst/>
-        </p:spPr>
-        <p:txBody>
-          <a:bodyPr rtlCol="0" anchor="ctr"/>
-          <a:lstStyle/>
-          <a:p>
-            <a:pPr algn="ctr"/>
-          </a:p>
-        </p:txBody>
-      </p:sp>
-      <p:sp>
-        <p:nvSpPr>
-          <p:cNvPr id="111" name="ellipse 111"/>
-          <p:cNvSpPr/>
-          <p:nvPr/>
-        </p:nvSpPr>
-        <p:spPr>
-          <a:xfrm>
-            <a:off x="1856232" y="2569464"/>
-            <a:ext cx="91440" cy="91440"/>
-          </a:xfrm>
-          <a:prstGeom prst="ellipse">
-            <a:avLst/>
-          </a:prstGeom>
-          <a:solidFill>
-            <a:srgbClr val="0E0E11"/>
-          </a:solidFill>
-          <a:ln w="12700">
-            <a:solidFill>
-              <a:srgbClr val="5A5A60"/>
-            </a:solidFill>
-          </a:ln>
-          <a:effectLst/>
-        </p:spPr>
-        <p:txBody>
-          <a:bodyPr rtlCol="0" anchor="ctr"/>
-          <a:lstStyle/>
-          <a:p>
-            <a:pPr algn="ctr"/>
-          </a:p>
-        </p:txBody>
-      </p:sp>
-      <p:sp>
-        <p:nvSpPr>
-          <p:cNvPr id="112" name="ellipse 112"/>
-          <p:cNvSpPr/>
-          <p:nvPr/>
-        </p:nvSpPr>
-        <p:spPr>
-          <a:xfrm>
-            <a:off x="2340864" y="2569464"/>
-            <a:ext cx="91440" cy="91440"/>
-          </a:xfrm>
-          <a:prstGeom prst="ellipse">
-            <a:avLst/>
-          </a:prstGeom>
-          <a:solidFill>
-            <a:srgbClr val="0E0E11"/>
-          </a:solidFill>
-          <a:ln w="12700">
-            <a:solidFill>
-              <a:srgbClr val="5A5A60"/>
-            </a:solidFill>
-          </a:ln>
-          <a:effectLst/>
-        </p:spPr>
-        <p:txBody>
-          <a:bodyPr rtlCol="0" anchor="ctr"/>
-          <a:lstStyle/>
-          <a:p>
-            <a:pPr algn="ctr"/>
-          </a:p>
-        </p:txBody>
-      </p:sp>
-      <p:sp>
-        <p:nvSpPr>
-          <p:cNvPr id="113" name="ellipse 113"/>
-          <p:cNvSpPr/>
-          <p:nvPr/>
-        </p:nvSpPr>
-        <p:spPr>
-          <a:xfrm>
-            <a:off x="2816352" y="2569464"/>
-            <a:ext cx="91440" cy="91440"/>
-          </a:xfrm>
-          <a:prstGeom prst="ellipse">
-            <a:avLst/>
-          </a:prstGeom>
-          <a:solidFill>
-            <a:srgbClr val="0E0E11"/>
-          </a:solidFill>
-          <a:ln w="12700">
-            <a:solidFill>
-              <a:srgbClr val="5A5A60"/>
-            </a:solidFill>
-          </a:ln>
-          <a:effectLst/>
-        </p:spPr>
-        <p:txBody>
-          <a:bodyPr rtlCol="0" anchor="ctr"/>
-          <a:lstStyle/>
-          <a:p>
-            <a:pPr algn="ctr"/>
-          </a:p>
-        </p:txBody>
-      </p:sp>
-      <p:sp>
-        <p:nvSpPr>
-          <p:cNvPr id="114" name="TextBox 114"/>
-          <p:cNvSpPr txBox="1"/>
-          <p:nvPr/>
-        </p:nvSpPr>
-        <p:spPr>
-          <a:xfrm>
-            <a:off x="694944" y="2816352"/>
-            <a:ext cx="2414016" cy="137160"/>
-          </a:xfrm>
-          <a:prstGeom prst="rect">
-            <a:avLst/>
-          </a:prstGeom>
-          <a:noFill/>
-        </p:spPr>
-        <p:txBody>
-          <a:bodyPr wrap="square" lIns="0" rIns="0" tIns="0" bIns="0" anchor="ctr">
-            <a:spAutoFit/>
-          </a:bodyPr>
-          <a:lstStyle/>
-          <a:p>
-            <a:pPr algn="ctr"/>
-            <a:r>
-              <a:rPr sz="900" b="0" spc="100">
-                <a:solidFill>
-                  <a:srgbClr val="5A5A60"/>
-                </a:solidFill>
-                <a:latin typeface="Courier New"/>
-              </a:rPr>
-              <a:t>05 · BUILD-READY PACKAGE</a:t>
-            </a:r>
-          </a:p>
-        </p:txBody>
-      </p:sp>
-      <p:sp>
-        <p:nvSpPr>
-          <p:cNvPr id="115" name="rect 115"/>
-          <p:cNvSpPr/>
-          <p:nvPr/>
-        </p:nvSpPr>
-        <p:spPr>
-          <a:xfrm>
-            <a:off x="3300984" y="2609698"/>
-            <a:ext cx="8183880" cy="10973"/>
-          </a:xfrm>
-          <a:prstGeom prst="rect">
-            <a:avLst/>
-          </a:prstGeom>
-          <a:solidFill>
-            <a:srgbClr val="2B2B2D"/>
-          </a:solidFill>
-          <a:ln>
-            <a:noFill/>
-          </a:ln>
-          <a:effectLst/>
-        </p:spPr>
-        <p:txBody>
-          <a:bodyPr rtlCol="0" anchor="ctr"/>
-          <a:lstStyle/>
-          <a:p>
-            <a:pPr algn="ctr"/>
-          </a:p>
-        </p:txBody>
-      </p:sp>
-      <p:sp>
-        <p:nvSpPr>
-          <p:cNvPr id="116" name="diamond 116"/>
-          <p:cNvSpPr/>
-          <p:nvPr/>
-        </p:nvSpPr>
-        <p:spPr>
-          <a:xfrm>
-            <a:off x="3300984" y="2569464"/>
-            <a:ext cx="91440" cy="91440"/>
-          </a:xfrm>
-          <a:prstGeom prst="diamond">
-            <a:avLst/>
-          </a:prstGeom>
-          <a:solidFill>
-            <a:srgbClr val="FF6B3D"/>
-          </a:solidFill>
-          <a:ln>
-            <a:noFill/>
-          </a:ln>
-          <a:effectLst/>
-        </p:spPr>
-        <p:txBody>
-          <a:bodyPr rtlCol="0" anchor="ctr"/>
-          <a:lstStyle/>
-          <a:p>
-            <a:pPr algn="ctr"/>
-          </a:p>
-        </p:txBody>
-      </p:sp>
-      <p:sp>
-        <p:nvSpPr>
-          <p:cNvPr id="117" name="ellipse 117"/>
-          <p:cNvSpPr/>
-          <p:nvPr/>
-        </p:nvSpPr>
-        <p:spPr>
-          <a:xfrm>
-            <a:off x="4416552" y="2372868"/>
-            <a:ext cx="484632" cy="484632"/>
-          </a:xfrm>
-          <a:prstGeom prst="ellipse">
-            <a:avLst/>
-          </a:prstGeom>
-          <a:solidFill>
-            <a:srgbClr val="0E0E11"/>
-          </a:solidFill>
-          <a:ln w="15875">
-            <a:solidFill>
-              <a:srgbClr val="9A9AA2"/>
-            </a:solidFill>
-          </a:ln>
-          <a:effectLst/>
-        </p:spPr>
-        <p:txBody>
-          <a:bodyPr rtlCol="0" anchor="ctr"/>
-          <a:lstStyle/>
-          <a:p>
-            <a:pPr algn="ctr"/>
-          </a:p>
-        </p:txBody>
-      </p:sp>
-      <p:sp>
-        <p:nvSpPr>
-          <p:cNvPr id="118" name="TextBox 118"/>
-          <p:cNvSpPr txBox="1"/>
-          <p:nvPr/>
-        </p:nvSpPr>
-        <p:spPr>
-          <a:xfrm>
-            <a:off x="4402836" y="2519172"/>
-            <a:ext cx="512064" cy="192024"/>
-          </a:xfrm>
-          <a:prstGeom prst="rect">
-            <a:avLst/>
-          </a:prstGeom>
-          <a:noFill/>
-        </p:spPr>
-        <p:txBody>
-          <a:bodyPr wrap="square" lIns="0" rIns="0" tIns="0" bIns="0" anchor="ctr">
-            <a:spAutoFit/>
-          </a:bodyPr>
-          <a:lstStyle/>
-          <a:p>
-            <a:pPr algn="ctr"/>
-            <a:r>
-              <a:rPr sz="1300" b="0">
-                <a:solidFill>
-                  <a:srgbClr val="9A9AA2"/>
-                </a:solidFill>
-                <a:latin typeface="Courier New"/>
-              </a:rPr>
-              <a:t>06</a:t>
-            </a:r>
-          </a:p>
-        </p:txBody>
-      </p:sp>
-      <p:sp>
-        <p:nvSpPr>
-          <p:cNvPr id="119" name="TextBox 119"/>
-          <p:cNvSpPr txBox="1"/>
-          <p:nvPr/>
-        </p:nvSpPr>
-        <p:spPr>
-          <a:xfrm>
-            <a:off x="3643884" y="2962656"/>
-            <a:ext cx="2029968" cy="219456"/>
-          </a:xfrm>
-          <a:prstGeom prst="rect">
-            <a:avLst/>
-          </a:prstGeom>
-          <a:noFill/>
-        </p:spPr>
-        <p:txBody>
-          <a:bodyPr wrap="square" lIns="0" rIns="0" tIns="0" bIns="0" anchor="ctr">
-            <a:spAutoFit/>
-          </a:bodyPr>
-          <a:lstStyle/>
-          <a:p>
-            <a:pPr algn="ctr"/>
-            <a:r>
-              <a:rPr sz="1700" b="0">
-                <a:solidFill>
-                  <a:srgbClr val="ECECEE"/>
-                </a:solidFill>
-                <a:latin typeface="Poppins"/>
-              </a:rPr>
-              <a:t>Build</a:t>
-            </a:r>
-          </a:p>
-        </p:txBody>
-      </p:sp>
-      <p:sp>
-        <p:nvSpPr>
-          <p:cNvPr id="120" name="TextBox 120"/>
-          <p:cNvSpPr txBox="1"/>
-          <p:nvPr/>
-        </p:nvSpPr>
-        <p:spPr>
-          <a:xfrm>
-            <a:off x="3643884" y="3191256"/>
-            <a:ext cx="2029968" cy="164592"/>
-          </a:xfrm>
-          <a:prstGeom prst="rect">
-            <a:avLst/>
-          </a:prstGeom>
-          <a:noFill/>
-        </p:spPr>
-        <p:txBody>
-          <a:bodyPr wrap="square" lIns="0" rIns="0" tIns="0" bIns="0" anchor="ctr">
-            <a:spAutoFit/>
-          </a:bodyPr>
-          <a:lstStyle/>
-          <a:p>
-            <a:pPr algn="ctr"/>
-            <a:r>
-              <a:rPr sz="1200" b="0">
-                <a:solidFill>
-                  <a:srgbClr val="9A9AA2"/>
-                </a:solidFill>
-                <a:latin typeface="Poppins"/>
-              </a:rPr>
-              <a:t>code + review</a:t>
-            </a:r>
-          </a:p>
-        </p:txBody>
-      </p:sp>
-      <p:sp>
-        <p:nvSpPr>
-          <p:cNvPr id="121" name="ellipse 121"/>
-          <p:cNvSpPr/>
-          <p:nvPr/>
-        </p:nvSpPr>
-        <p:spPr>
-          <a:xfrm>
-            <a:off x="7150608" y="2372868"/>
-            <a:ext cx="484632" cy="484632"/>
-          </a:xfrm>
-          <a:prstGeom prst="ellipse">
-            <a:avLst/>
-          </a:prstGeom>
-          <a:solidFill>
-            <a:srgbClr val="0E0E11"/>
-          </a:solidFill>
-          <a:ln w="15875">
-            <a:solidFill>
-              <a:srgbClr val="9A9AA2"/>
-            </a:solidFill>
-          </a:ln>
-          <a:effectLst/>
-        </p:spPr>
-        <p:txBody>
-          <a:bodyPr rtlCol="0" anchor="ctr"/>
-          <a:lstStyle/>
-          <a:p>
-            <a:pPr algn="ctr"/>
-          </a:p>
-        </p:txBody>
-      </p:sp>
-      <p:sp>
-        <p:nvSpPr>
-          <p:cNvPr id="122" name="TextBox 122"/>
-          <p:cNvSpPr txBox="1"/>
-          <p:nvPr/>
-        </p:nvSpPr>
-        <p:spPr>
-          <a:xfrm>
-            <a:off x="7136892" y="2519172"/>
-            <a:ext cx="512064" cy="192024"/>
-          </a:xfrm>
-          <a:prstGeom prst="rect">
-            <a:avLst/>
-          </a:prstGeom>
-          <a:noFill/>
-        </p:spPr>
-        <p:txBody>
-          <a:bodyPr wrap="square" lIns="0" rIns="0" tIns="0" bIns="0" anchor="ctr">
-            <a:spAutoFit/>
-          </a:bodyPr>
-          <a:lstStyle/>
-          <a:p>
-            <a:pPr algn="ctr"/>
-            <a:r>
-              <a:rPr sz="1300" b="0">
-                <a:solidFill>
-                  <a:srgbClr val="9A9AA2"/>
-                </a:solidFill>
-                <a:latin typeface="Courier New"/>
-              </a:rPr>
-              <a:t>07</a:t>
-            </a:r>
-          </a:p>
-        </p:txBody>
-      </p:sp>
-      <p:sp>
-        <p:nvSpPr>
-          <p:cNvPr id="123" name="TextBox 123"/>
-          <p:cNvSpPr txBox="1"/>
-          <p:nvPr/>
-        </p:nvSpPr>
-        <p:spPr>
-          <a:xfrm>
-            <a:off x="6377940" y="2962656"/>
-            <a:ext cx="2029968" cy="219456"/>
-          </a:xfrm>
-          <a:prstGeom prst="rect">
-            <a:avLst/>
-          </a:prstGeom>
-          <a:noFill/>
-        </p:spPr>
-        <p:txBody>
-          <a:bodyPr wrap="square" lIns="0" rIns="0" tIns="0" bIns="0" anchor="ctr">
-            <a:spAutoFit/>
-          </a:bodyPr>
-          <a:lstStyle/>
-          <a:p>
-            <a:pPr algn="ctr"/>
-            <a:r>
-              <a:rPr sz="1700" b="0">
-                <a:solidFill>
-                  <a:srgbClr val="ECECEE"/>
-                </a:solidFill>
-                <a:latin typeface="Poppins"/>
-              </a:rPr>
-              <a:t>Release</a:t>
-            </a:r>
-          </a:p>
-        </p:txBody>
-      </p:sp>
-      <p:sp>
-        <p:nvSpPr>
-          <p:cNvPr id="124" name="TextBox 124"/>
-          <p:cNvSpPr txBox="1"/>
-          <p:nvPr/>
-        </p:nvSpPr>
-        <p:spPr>
-          <a:xfrm>
-            <a:off x="6377940" y="3191256"/>
-            <a:ext cx="2029968" cy="164592"/>
-          </a:xfrm>
-          <a:prstGeom prst="rect">
-            <a:avLst/>
-          </a:prstGeom>
-          <a:noFill/>
-        </p:spPr>
-        <p:txBody>
-          <a:bodyPr wrap="square" lIns="0" rIns="0" tIns="0" bIns="0" anchor="ctr">
-            <a:spAutoFit/>
-          </a:bodyPr>
-          <a:lstStyle/>
-          <a:p>
-            <a:pPr algn="ctr"/>
-            <a:r>
-              <a:rPr sz="1200" b="0">
-                <a:solidFill>
-                  <a:srgbClr val="9A9AA2"/>
-                </a:solidFill>
-                <a:latin typeface="Poppins"/>
-              </a:rPr>
-              <a:t>human approval</a:t>
-            </a:r>
-          </a:p>
-        </p:txBody>
-      </p:sp>
-      <p:sp>
-        <p:nvSpPr>
-          <p:cNvPr id="125" name="ellipse 125"/>
-          <p:cNvSpPr/>
-          <p:nvPr/>
-        </p:nvSpPr>
-        <p:spPr>
-          <a:xfrm>
-            <a:off x="9884664" y="2372868"/>
-            <a:ext cx="484632" cy="484632"/>
-          </a:xfrm>
-          <a:prstGeom prst="ellipse">
-            <a:avLst/>
-          </a:prstGeom>
-          <a:solidFill>
-            <a:srgbClr val="0E0E11"/>
-          </a:solidFill>
-          <a:ln w="15875">
-            <a:solidFill>
-              <a:srgbClr val="9A9AA2"/>
-            </a:solidFill>
-          </a:ln>
-          <a:effectLst/>
-        </p:spPr>
-        <p:txBody>
-          <a:bodyPr rtlCol="0" anchor="ctr"/>
-          <a:lstStyle/>
-          <a:p>
-            <a:pPr algn="ctr"/>
-          </a:p>
-        </p:txBody>
-      </p:sp>
-      <p:sp>
-        <p:nvSpPr>
-          <p:cNvPr id="126" name="TextBox 126"/>
-          <p:cNvSpPr txBox="1"/>
-          <p:nvPr/>
-        </p:nvSpPr>
-        <p:spPr>
-          <a:xfrm>
-            <a:off x="9870948" y="2519172"/>
-            <a:ext cx="512064" cy="192024"/>
-          </a:xfrm>
-          <a:prstGeom prst="rect">
-            <a:avLst/>
-          </a:prstGeom>
-          <a:noFill/>
-        </p:spPr>
-        <p:txBody>
-          <a:bodyPr wrap="square" lIns="0" rIns="0" tIns="0" bIns="0" anchor="ctr">
-            <a:spAutoFit/>
-          </a:bodyPr>
-          <a:lstStyle/>
-          <a:p>
-            <a:pPr algn="ctr"/>
-            <a:r>
-              <a:rPr sz="1300" b="0">
-                <a:solidFill>
-                  <a:srgbClr val="9A9AA2"/>
-                </a:solidFill>
-                <a:latin typeface="Courier New"/>
-              </a:rPr>
-              <a:t>08</a:t>
-            </a:r>
-          </a:p>
-        </p:txBody>
-      </p:sp>
-      <p:sp>
-        <p:nvSpPr>
-          <p:cNvPr id="127" name="TextBox 127"/>
-          <p:cNvSpPr txBox="1"/>
-          <p:nvPr/>
-        </p:nvSpPr>
-        <p:spPr>
-          <a:xfrm>
-            <a:off x="9111996" y="2962656"/>
-            <a:ext cx="2029968" cy="219456"/>
-          </a:xfrm>
-          <a:prstGeom prst="rect">
-            <a:avLst/>
-          </a:prstGeom>
-          <a:noFill/>
-        </p:spPr>
-        <p:txBody>
-          <a:bodyPr wrap="square" lIns="0" rIns="0" tIns="0" bIns="0" anchor="ctr">
-            <a:spAutoFit/>
-          </a:bodyPr>
-          <a:lstStyle/>
-          <a:p>
-            <a:pPr algn="ctr"/>
-            <a:r>
-              <a:rPr sz="1700" b="0">
-                <a:solidFill>
-                  <a:srgbClr val="ECECEE"/>
-                </a:solidFill>
-                <a:latin typeface="Poppins"/>
-              </a:rPr>
-              <a:t>Operate</a:t>
-            </a:r>
-          </a:p>
-        </p:txBody>
-      </p:sp>
-      <p:sp>
-        <p:nvSpPr>
-          <p:cNvPr id="128" name="TextBox 128"/>
-          <p:cNvSpPr txBox="1"/>
-          <p:nvPr/>
-        </p:nvSpPr>
-        <p:spPr>
-          <a:xfrm>
-            <a:off x="9111996" y="3191256"/>
-            <a:ext cx="2029968" cy="164592"/>
-          </a:xfrm>
-          <a:prstGeom prst="rect">
-            <a:avLst/>
-          </a:prstGeom>
-          <a:noFill/>
-        </p:spPr>
-        <p:txBody>
-          <a:bodyPr wrap="square" lIns="0" rIns="0" tIns="0" bIns="0" anchor="ctr">
-            <a:spAutoFit/>
-          </a:bodyPr>
-          <a:lstStyle/>
-          <a:p>
-            <a:pPr algn="ctr"/>
-            <a:r>
-              <a:rPr sz="1200" b="0">
-                <a:solidFill>
-                  <a:srgbClr val="9A9AA2"/>
-                </a:solidFill>
-                <a:latin typeface="Poppins"/>
-              </a:rPr>
-              <a:t>monitoring</a:t>
-            </a:r>
-          </a:p>
-        </p:txBody>
-      </p:sp>
-      <p:sp>
-        <p:nvSpPr>
-          <p:cNvPr id="129" name="diamond 129"/>
-          <p:cNvSpPr/>
-          <p:nvPr/>
-        </p:nvSpPr>
-        <p:spPr>
-          <a:xfrm>
-            <a:off x="5980176" y="2569464"/>
-            <a:ext cx="91440" cy="91440"/>
-          </a:xfrm>
-          <a:prstGeom prst="diamond">
-            <a:avLst/>
-          </a:prstGeom>
-          <a:solidFill>
-            <a:srgbClr val="FF6B3D"/>
-          </a:solidFill>
-          <a:ln>
-            <a:noFill/>
-          </a:ln>
-          <a:effectLst/>
-        </p:spPr>
-        <p:txBody>
-          <a:bodyPr rtlCol="0" anchor="ctr"/>
-          <a:lstStyle/>
-          <a:p>
-            <a:pPr algn="ctr"/>
-          </a:p>
-        </p:txBody>
-      </p:sp>
-      <p:sp>
-        <p:nvSpPr>
-          <p:cNvPr id="130" name="diamond 130"/>
-          <p:cNvSpPr/>
-          <p:nvPr/>
-        </p:nvSpPr>
-        <p:spPr>
-          <a:xfrm>
-            <a:off x="8714232" y="2569464"/>
-            <a:ext cx="91440" cy="91440"/>
-          </a:xfrm>
-          <a:prstGeom prst="diamond">
-            <a:avLst/>
-          </a:prstGeom>
-          <a:solidFill>
-            <a:srgbClr val="FF6B3D"/>
-          </a:solidFill>
-          <a:ln>
-            <a:noFill/>
-          </a:ln>
-          <a:effectLst/>
-        </p:spPr>
-        <p:txBody>
-          <a:bodyPr rtlCol="0" anchor="ctr"/>
-          <a:lstStyle/>
-          <a:p>
-            <a:pPr algn="ctr"/>
-          </a:p>
-        </p:txBody>
-      </p:sp>
-      <p:sp>
-        <p:nvSpPr>
-          <p:cNvPr id="131" name="diamond 131"/>
-          <p:cNvSpPr/>
-          <p:nvPr/>
-        </p:nvSpPr>
-        <p:spPr>
-          <a:xfrm>
-            <a:off x="8321040" y="3621024"/>
-            <a:ext cx="91440" cy="91440"/>
-          </a:xfrm>
-          <a:prstGeom prst="diamond">
-            <a:avLst/>
-          </a:prstGeom>
-          <a:solidFill>
-            <a:srgbClr val="FF6B3D"/>
-          </a:solidFill>
-          <a:ln>
-            <a:noFill/>
-          </a:ln>
-          <a:effectLst/>
-        </p:spPr>
-        <p:txBody>
-          <a:bodyPr rtlCol="0" anchor="ctr"/>
-          <a:lstStyle/>
-          <a:p>
-            <a:pPr algn="ctr"/>
-          </a:p>
-        </p:txBody>
-      </p:sp>
-      <p:sp>
-        <p:nvSpPr>
-          <p:cNvPr id="132" name="TextBox 132"/>
-          <p:cNvSpPr txBox="1"/>
-          <p:nvPr/>
-        </p:nvSpPr>
-        <p:spPr>
-          <a:xfrm>
-            <a:off x="8522208" y="3602736"/>
-            <a:ext cx="2962656" cy="137160"/>
-          </a:xfrm>
-          <a:prstGeom prst="rect">
-            <a:avLst/>
-          </a:prstGeom>
-          <a:noFill/>
-        </p:spPr>
-        <p:txBody>
-          <a:bodyPr wrap="square" lIns="0" rIns="0" tIns="0" bIns="0" anchor="ctr">
-            <a:spAutoFit/>
-          </a:bodyPr>
-          <a:lstStyle/>
-          <a:p>
-            <a:pPr algn="l"/>
-            <a:r>
-              <a:rPr sz="900" b="0" spc="150">
-                <a:solidFill>
-                  <a:srgbClr val="9A9AA2"/>
-                </a:solidFill>
-                <a:latin typeface="Courier New"/>
-              </a:rPr>
-              <a:t>HUMAN GATE AT EVERY TRANSITION</a:t>
-            </a:r>
-          </a:p>
-        </p:txBody>
-      </p:sp>
-      <p:sp>
-        <p:nvSpPr>
-          <p:cNvPr id="133" name="rect 133"/>
-          <p:cNvSpPr/>
-          <p:nvPr/>
-        </p:nvSpPr>
-        <p:spPr>
-          <a:xfrm>
-            <a:off x="4416552" y="3886200"/>
-            <a:ext cx="5952744" cy="310896"/>
-          </a:xfrm>
-          <a:prstGeom prst="rect">
-            <a:avLst/>
-          </a:prstGeom>
-          <a:solidFill>
-            <a:srgbClr val="1F1F22"/>
-          </a:solidFill>
-          <a:ln w="9525">
-            <a:solidFill>
-              <a:srgbClr val="5A5A60"/>
-            </a:solidFill>
-          </a:ln>
-          <a:effectLst/>
-        </p:spPr>
-        <p:txBody>
-          <a:bodyPr rtlCol="0" anchor="ctr"/>
-          <a:lstStyle/>
-          <a:p>
-            <a:pPr algn="ctr"/>
-          </a:p>
-        </p:txBody>
-      </p:sp>
-      <p:sp>
-        <p:nvSpPr>
-          <p:cNvPr id="134" name="TextBox 134"/>
-          <p:cNvSpPr txBox="1"/>
-          <p:nvPr/>
-        </p:nvSpPr>
-        <p:spPr>
-          <a:xfrm>
-            <a:off x="4416552" y="3968496"/>
-            <a:ext cx="5952744" cy="155448"/>
-          </a:xfrm>
-          <a:prstGeom prst="rect">
-            <a:avLst/>
-          </a:prstGeom>
-          <a:noFill/>
-        </p:spPr>
-        <p:txBody>
-          <a:bodyPr wrap="square" lIns="0" rIns="0" tIns="0" bIns="0" anchor="ctr">
-            <a:spAutoFit/>
-          </a:bodyPr>
-          <a:lstStyle/>
-          <a:p>
-            <a:pPr algn="ctr"/>
-            <a:r>
-              <a:rPr sz="900" b="0" spc="200">
-                <a:solidFill>
-                  <a:srgbClr val="9A9AA2"/>
-                </a:solidFill>
-                <a:latin typeface="Courier New"/>
-              </a:rPr>
-              <a:t>AI AGENTS SUPPORT EVERY STAGE</a:t>
-            </a:r>
-          </a:p>
-        </p:txBody>
-      </p:sp>
-      <p:sp>
-        <p:nvSpPr>
-          <p:cNvPr id="135" name="rect 135"/>
-          <p:cNvSpPr/>
-          <p:nvPr/>
-        </p:nvSpPr>
-        <p:spPr>
-          <a:xfrm>
-            <a:off x="10369296" y="4197096"/>
-            <a:ext cx="10973" cy="557784"/>
-          </a:xfrm>
-          <a:prstGeom prst="rect">
-            <a:avLst/>
-          </a:prstGeom>
-          <a:solidFill>
-            <a:srgbClr val="FF6B3D"/>
-          </a:solidFill>
-          <a:ln>
-            <a:noFill/>
-          </a:ln>
-          <a:effectLst/>
-        </p:spPr>
-        <p:txBody>
-          <a:bodyPr rtlCol="0" anchor="ctr"/>
-          <a:lstStyle/>
-          <a:p>
-            <a:pPr algn="ctr"/>
-          </a:p>
-        </p:txBody>
-      </p:sp>
-      <p:sp>
-        <p:nvSpPr>
-          <p:cNvPr id="136" name="rect 136"/>
-          <p:cNvSpPr/>
-          <p:nvPr/>
-        </p:nvSpPr>
-        <p:spPr>
-          <a:xfrm>
-            <a:off x="1901952" y="4754880"/>
-            <a:ext cx="8467344" cy="10973"/>
-          </a:xfrm>
-          <a:prstGeom prst="rect">
-            <a:avLst/>
-          </a:prstGeom>
-          <a:solidFill>
-            <a:srgbClr val="FF6B3D"/>
-          </a:solidFill>
-          <a:ln>
-            <a:noFill/>
-          </a:ln>
-          <a:effectLst/>
-        </p:spPr>
-        <p:txBody>
-          <a:bodyPr rtlCol="0" anchor="ctr"/>
-          <a:lstStyle/>
-          <a:p>
-            <a:pPr algn="ctr"/>
-          </a:p>
-        </p:txBody>
-      </p:sp>
-      <p:sp>
-        <p:nvSpPr>
-          <p:cNvPr id="137" name="rect 137"/>
-          <p:cNvSpPr/>
-          <p:nvPr/>
-        </p:nvSpPr>
-        <p:spPr>
-          <a:xfrm>
-            <a:off x="1901952" y="3182112"/>
-            <a:ext cx="10973" cy="1572768"/>
-          </a:xfrm>
-          <a:prstGeom prst="rect">
-            <a:avLst/>
-          </a:prstGeom>
-          <a:solidFill>
-            <a:srgbClr val="FF6B3D"/>
-          </a:solidFill>
-          <a:ln>
-            <a:noFill/>
-          </a:ln>
-          <a:effectLst/>
-        </p:spPr>
-        <p:txBody>
-          <a:bodyPr rtlCol="0" anchor="ctr"/>
-          <a:lstStyle/>
-          <a:p>
-            <a:pPr algn="ctr"/>
-          </a:p>
-        </p:txBody>
-      </p:sp>
-      <p:sp>
-        <p:nvSpPr>
-          <p:cNvPr id="138" name="triangle 138"/>
-          <p:cNvSpPr/>
-          <p:nvPr/>
-        </p:nvSpPr>
-        <p:spPr>
-          <a:xfrm>
-            <a:off x="1852574" y="3049524"/>
-            <a:ext cx="109728" cy="137160"/>
-          </a:xfrm>
-          <a:prstGeom prst="triangle">
-            <a:avLst/>
-          </a:prstGeom>
-          <a:solidFill>
-            <a:srgbClr val="FF6B3D"/>
-          </a:solidFill>
-          <a:ln>
-            <a:noFill/>
-          </a:ln>
-          <a:effectLst/>
-        </p:spPr>
-        <p:txBody>
-          <a:bodyPr rtlCol="0" anchor="ctr"/>
-          <a:lstStyle/>
-          <a:p>
-            <a:pPr algn="ctr"/>
-          </a:p>
-        </p:txBody>
-      </p:sp>
-      <p:sp>
-        <p:nvSpPr>
-          <p:cNvPr id="139" name="rect 139"/>
-          <p:cNvSpPr/>
-          <p:nvPr/>
-        </p:nvSpPr>
-        <p:spPr>
-          <a:xfrm>
-            <a:off x="3529584" y="4608576"/>
-            <a:ext cx="5120640" cy="310896"/>
-          </a:xfrm>
-          <a:prstGeom prst="rect">
-            <a:avLst/>
-          </a:prstGeom>
-          <a:solidFill>
-            <a:srgbClr val="0E0E11"/>
-          </a:solidFill>
-          <a:ln>
-            <a:noFill/>
-          </a:ln>
-          <a:effectLst/>
-        </p:spPr>
-        <p:txBody>
-          <a:bodyPr rtlCol="0" anchor="ctr"/>
-          <a:lstStyle/>
-          <a:p>
-            <a:pPr algn="ctr"/>
-          </a:p>
-        </p:txBody>
-      </p:sp>
-      <p:sp>
-        <p:nvSpPr>
-          <p:cNvPr id="140" name="TextBox 140"/>
-          <p:cNvSpPr txBox="1"/>
-          <p:nvPr/>
-        </p:nvSpPr>
-        <p:spPr>
-          <a:xfrm>
-            <a:off x="3529584" y="4690872"/>
-            <a:ext cx="5120640" cy="164592"/>
-          </a:xfrm>
-          <a:prstGeom prst="rect">
-            <a:avLst/>
-          </a:prstGeom>
-          <a:noFill/>
-        </p:spPr>
-        <p:txBody>
-          <a:bodyPr wrap="square" lIns="0" rIns="0" tIns="0" bIns="0" anchor="ctr">
-            <a:spAutoFit/>
-          </a:bodyPr>
-          <a:lstStyle/>
-          <a:p>
-            <a:pPr algn="ctr"/>
-            <a:r>
-              <a:rPr sz="1100" b="0" spc="200">
-                <a:solidFill>
-                  <a:srgbClr val="FF6B3D"/>
-                </a:solidFill>
-                <a:latin typeface="Courier New"/>
-              </a:rPr>
-              <a:t>LEARN</a:t>
-            </a:r>
-            <a:r>
-              <a:rPr sz="1100" b="0" spc="100">
-                <a:solidFill>
-                  <a:srgbClr val="9A9AA2"/>
-                </a:solidFill>
-                <a:latin typeface="Courier New"/>
-              </a:rPr>
-              <a:t>  ·  every build teaches the next</a:t>
-            </a:r>
-          </a:p>
-        </p:txBody>
-      </p:sp>
-      <p:sp>
-        <p:nvSpPr>
-          <p:cNvPr id="141" name="rect 141"/>
-          <p:cNvSpPr/>
-          <p:nvPr/>
-        </p:nvSpPr>
-        <p:spPr>
-          <a:xfrm>
-            <a:off x="694944" y="5230368"/>
-            <a:ext cx="10789920" cy="786384"/>
-          </a:xfrm>
-          <a:prstGeom prst="rect">
-            <a:avLst/>
-          </a:prstGeom>
-          <a:solidFill>
-            <a:srgbClr val="161619"/>
-          </a:solidFill>
-          <a:ln w="9525">
-            <a:solidFill>
-              <a:srgbClr val="2B2B2D"/>
-            </a:solidFill>
-          </a:ln>
-          <a:effectLst/>
-        </p:spPr>
-        <p:txBody>
-          <a:bodyPr rtlCol="0" anchor="ctr"/>
-          <a:lstStyle/>
-          <a:p>
-            <a:pPr algn="ctr"/>
-          </a:p>
-        </p:txBody>
-      </p:sp>
-      <p:sp>
-        <p:nvSpPr>
-          <p:cNvPr id="142" name="TextBox 142"/>
-          <p:cNvSpPr txBox="1"/>
-          <p:nvPr/>
-        </p:nvSpPr>
-        <p:spPr>
-          <a:xfrm>
-            <a:off x="987552" y="5413248"/>
-            <a:ext cx="5486400" cy="137160"/>
-          </a:xfrm>
-          <a:prstGeom prst="rect">
-            <a:avLst/>
-          </a:prstGeom>
-          <a:noFill/>
-        </p:spPr>
-        <p:txBody>
-          <a:bodyPr wrap="square" lIns="0" rIns="0" tIns="0" bIns="0" anchor="ctr">
-            <a:spAutoFit/>
-          </a:bodyPr>
-          <a:lstStyle/>
-          <a:p>
-            <a:pPr algn="l"/>
-            <a:r>
-              <a:rPr sz="900" b="0" spc="200">
-                <a:solidFill>
-                  <a:srgbClr val="9A9AA2"/>
-                </a:solidFill>
-                <a:latin typeface="Courier New"/>
-              </a:rPr>
-              <a:t>OUTPUT  ·  SOFTWARE RUNNING IN PRODUCTION</a:t>
-            </a:r>
-          </a:p>
-        </p:txBody>
-      </p:sp>
-      <p:sp>
-        <p:nvSpPr>
-          <p:cNvPr id="143" name="TextBox 143"/>
-          <p:cNvSpPr txBox="1"/>
-          <p:nvPr/>
-        </p:nvSpPr>
-        <p:spPr>
-          <a:xfrm>
-            <a:off x="987552" y="5669280"/>
-            <a:ext cx="10204704" cy="219456"/>
-          </a:xfrm>
-          <a:prstGeom prst="rect">
-            <a:avLst/>
-          </a:prstGeom>
-          <a:noFill/>
-        </p:spPr>
-        <p:txBody>
-          <a:bodyPr wrap="square" lIns="0" rIns="0" tIns="0" bIns="0" anchor="ctr">
-            <a:spAutoFit/>
-          </a:bodyPr>
-          <a:lstStyle/>
-          <a:p>
-            <a:pPr algn="l"/>
-            <a:r>
-              <a:rPr sz="1400" b="1">
-                <a:solidFill>
-                  <a:srgbClr val="ECECEE"/>
-                </a:solidFill>
-                <a:latin typeface="Poppins"/>
-              </a:rPr>
-              <a:t>Eight stages, one line, a person on every gate, and a library that grows with every build.</a:t>
-            </a:r>
-          </a:p>
-        </p:txBody>
-      </p:sp>
-      <p:pic>
-        <p:nvPicPr>
-          <p:cNvPr id="144" name="Logo"/>
+          <p:cNvPr id="153" name="Logo"/>
           <p:cNvPicPr/>
           <p:nvPr/>
         </p:nvPicPr>
@@ -18762,7 +13913,7 @@
                 </a:solidFill>
                 <a:latin typeface="Poppins"/>
               </a:rPr>
-              <a:t>Which process at your company still runs in </a:t>
+              <a:t>Which system would you rebuild today if delivery took </a:t>
             </a:r>
             <a:r>
               <a:rPr sz="3300" b="0">
@@ -18771,7 +13922,7 @@
                 </a:solidFill>
                 <a:latin typeface="Poppins"/>
               </a:rPr>
-              <a:t>Excel</a:t>
+              <a:t>twelve weeks</a:t>
             </a:r>
             <a:r>
               <a:rPr sz="3300" b="0">
@@ -18780,7 +13931,7 @@
                 </a:solidFill>
                 <a:latin typeface="Poppins"/>
               </a:rPr>
-              <a:t>, and shouldn’t have for the past year?</a:t>
+              <a:t> instead of two years?</a:t>
             </a:r>
           </a:p>
         </p:txBody>
@@ -18947,7 +14098,7 @@
                 </a:solidFill>
                 <a:latin typeface="Poppins"/>
               </a:rPr>
-              <a:t>One process, taken end to end through the chain.</a:t>
+              <a:t>One system, taken end to end.</a:t>
             </a:r>
           </a:p>
         </p:txBody>
@@ -19049,7 +14200,7 @@
                 </a:solidFill>
                 <a:latin typeface="Poppins"/>
               </a:rPr>
-              <a:t>Multiple processes, that’s the platform conversation.</a:t>
+              <a:t>Multiple systems, that’s the platform conversation.</a:t>
             </a:r>
           </a:p>
         </p:txBody>

--- a/decks/Pitch_Deck_AthenaRun_v4.pptx
+++ b/decks/Pitch_Deck_AthenaRun_v4.pptx
@@ -10601,7 +10601,7 @@
                 </a:solidFill>
                 <a:latin typeface="Poppins"/>
               </a:rPr>
-              <a:t>Audit-grade output, built and verified. A second system live in production since June 2026.</a:t>
+              <a:t>Audit-grade output, built and verified: signed audit trail, EU-only, 158 tests green.</a:t>
             </a:r>
           </a:p>
         </p:txBody>
@@ -10794,7 +10794,7 @@
         <p:spPr>
           <a:xfrm>
             <a:off x="694944" y="1280160"/>
-            <a:ext cx="6309360" cy="457200"/>
+            <a:ext cx="10789920" cy="219456"/>
           </a:xfrm>
           <a:prstGeom prst="rect">
             <a:avLst/>
@@ -10828,7 +10828,7 @@
         </p:nvSpPr>
         <p:spPr>
           <a:xfrm>
-            <a:off x="694944" y="1975104"/>
+            <a:off x="694944" y="1828800"/>
             <a:ext cx="4572000" cy="164592"/>
           </a:xfrm>
           <a:prstGeom prst="rect">
@@ -10863,8 +10863,8 @@
         </p:nvSpPr>
         <p:spPr>
           <a:xfrm>
-            <a:off x="694944" y="2249424"/>
-            <a:ext cx="1883664" cy="841248"/>
+            <a:off x="694944" y="2103120"/>
+            <a:ext cx="3377184" cy="914400"/>
           </a:xfrm>
           <a:prstGeom prst="rect">
             <a:avLst/>
@@ -10895,8 +10895,8 @@
         </p:nvSpPr>
         <p:spPr>
           <a:xfrm>
-            <a:off x="694944" y="2432304"/>
-            <a:ext cx="1883664" cy="256032"/>
+            <a:off x="694944" y="2322576"/>
+            <a:ext cx="3377184" cy="256032"/>
           </a:xfrm>
           <a:prstGeom prst="rect">
             <a:avLst/>
@@ -10930,8 +10930,8 @@
         </p:nvSpPr>
         <p:spPr>
           <a:xfrm>
-            <a:off x="694944" y="2752344"/>
-            <a:ext cx="1883664" cy="155448"/>
+            <a:off x="694944" y="2679192"/>
+            <a:ext cx="3377184" cy="155448"/>
           </a:xfrm>
           <a:prstGeom prst="rect">
             <a:avLst/>
@@ -10965,7 +10965,7 @@
         </p:nvSpPr>
         <p:spPr>
           <a:xfrm rot="5400000">
-            <a:off x="2670048" y="2615184"/>
+            <a:off x="4191000" y="2505456"/>
             <a:ext cx="91440" cy="109728"/>
           </a:xfrm>
           <a:prstGeom prst="triangle">
@@ -10995,8 +10995,8 @@
         </p:nvSpPr>
         <p:spPr>
           <a:xfrm>
-            <a:off x="2852928" y="2249424"/>
-            <a:ext cx="1883664" cy="841248"/>
+            <a:off x="4401312" y="2103120"/>
+            <a:ext cx="3377184" cy="914400"/>
           </a:xfrm>
           <a:prstGeom prst="rect">
             <a:avLst/>
@@ -11027,8 +11027,8 @@
         </p:nvSpPr>
         <p:spPr>
           <a:xfrm>
-            <a:off x="2852928" y="2432304"/>
-            <a:ext cx="1883664" cy="256032"/>
+            <a:off x="4401312" y="2322576"/>
+            <a:ext cx="3377184" cy="256032"/>
           </a:xfrm>
           <a:prstGeom prst="rect">
             <a:avLst/>
@@ -11062,8 +11062,8 @@
         </p:nvSpPr>
         <p:spPr>
           <a:xfrm>
-            <a:off x="2852928" y="2752344"/>
-            <a:ext cx="1883664" cy="155448"/>
+            <a:off x="4401312" y="2679192"/>
+            <a:ext cx="3377184" cy="155448"/>
           </a:xfrm>
           <a:prstGeom prst="rect">
             <a:avLst/>
@@ -11097,7 +11097,7 @@
         </p:nvSpPr>
         <p:spPr>
           <a:xfrm rot="5400000">
-            <a:off x="4828032" y="2615184"/>
+            <a:off x="7897368" y="2505456"/>
             <a:ext cx="91440" cy="109728"/>
           </a:xfrm>
           <a:prstGeom prst="triangle">
@@ -11127,8 +11127,8 @@
         </p:nvSpPr>
         <p:spPr>
           <a:xfrm>
-            <a:off x="5010912" y="2249424"/>
-            <a:ext cx="1883664" cy="841248"/>
+            <a:off x="8107680" y="2103120"/>
+            <a:ext cx="3377184" cy="914400"/>
           </a:xfrm>
           <a:prstGeom prst="rect">
             <a:avLst/>
@@ -11159,8 +11159,8 @@
         </p:nvSpPr>
         <p:spPr>
           <a:xfrm>
-            <a:off x="5010912" y="2432304"/>
-            <a:ext cx="1883664" cy="256032"/>
+            <a:off x="8107680" y="2322576"/>
+            <a:ext cx="3377184" cy="256032"/>
           </a:xfrm>
           <a:prstGeom prst="rect">
             <a:avLst/>
@@ -11194,8 +11194,8 @@
         </p:nvSpPr>
         <p:spPr>
           <a:xfrm>
-            <a:off x="5010912" y="2752344"/>
-            <a:ext cx="1883664" cy="155448"/>
+            <a:off x="8107680" y="2679192"/>
+            <a:ext cx="3377184" cy="155448"/>
           </a:xfrm>
           <a:prstGeom prst="rect">
             <a:avLst/>
@@ -11229,8 +11229,8 @@
         </p:nvSpPr>
         <p:spPr>
           <a:xfrm>
-            <a:off x="5952744" y="3090672"/>
-            <a:ext cx="10973" cy="310896"/>
+            <a:off x="9796272" y="3017520"/>
+            <a:ext cx="10973" cy="329184"/>
           </a:xfrm>
           <a:prstGeom prst="rect">
             <a:avLst/>
@@ -11259,8 +11259,8 @@
         </p:nvSpPr>
         <p:spPr>
           <a:xfrm>
-            <a:off x="1636776" y="3401568"/>
-            <a:ext cx="4315968" cy="10973"/>
+            <a:off x="2383536" y="3346704"/>
+            <a:ext cx="7412736" cy="10973"/>
           </a:xfrm>
           <a:prstGeom prst="rect">
             <a:avLst/>
@@ -11289,8 +11289,8 @@
         </p:nvSpPr>
         <p:spPr>
           <a:xfrm>
-            <a:off x="1636776" y="3218688"/>
-            <a:ext cx="10973" cy="182880"/>
+            <a:off x="2383536" y="3145536"/>
+            <a:ext cx="10973" cy="201168"/>
           </a:xfrm>
           <a:prstGeom prst="rect">
             <a:avLst/>
@@ -11319,7 +11319,7 @@
         </p:nvSpPr>
         <p:spPr>
           <a:xfrm>
-            <a:off x="1587398" y="3095244"/>
+            <a:off x="2334158" y="3022092"/>
             <a:ext cx="109728" cy="137160"/>
           </a:xfrm>
           <a:prstGeom prst="triangle">
@@ -11349,8 +11349,8 @@
         </p:nvSpPr>
         <p:spPr>
           <a:xfrm>
-            <a:off x="1636776" y="3493008"/>
-            <a:ext cx="4315968" cy="155448"/>
+            <a:off x="2383536" y="3456432"/>
+            <a:ext cx="7412736" cy="155448"/>
           </a:xfrm>
           <a:prstGeom prst="rect">
             <a:avLst/>
@@ -11385,7 +11385,7 @@
         <p:spPr>
           <a:xfrm>
             <a:off x="694944" y="3785616"/>
-            <a:ext cx="6236208" cy="384048"/>
+            <a:ext cx="10789920" cy="201168"/>
           </a:xfrm>
           <a:prstGeom prst="rect">
             <a:avLst/>
@@ -11406,7 +11406,7 @@
                 </a:solidFill>
                 <a:latin typeface="Poppins"/>
               </a:rPr>
-              <a:t>Every project writes validated patterns and documented failures back into the library, and every next build queries it before a line of code is written.</a:t>
+              <a:t>Every project writes validated patterns and documented failures back into the library. Every next build queries it first.</a:t>
             </a:r>
           </a:p>
         </p:txBody>
@@ -11419,8 +11419,8 @@
         </p:nvSpPr>
         <p:spPr>
           <a:xfrm>
-            <a:off x="694944" y="4315968"/>
-            <a:ext cx="6236208" cy="10973"/>
+            <a:off x="694944" y="4187952"/>
+            <a:ext cx="10789920" cy="10973"/>
           </a:xfrm>
           <a:prstGeom prst="rect">
             <a:avLst/>
@@ -11449,7 +11449,7 @@
         </p:nvSpPr>
         <p:spPr>
           <a:xfrm>
-            <a:off x="694944" y="4480560"/>
+            <a:off x="694944" y="4352544"/>
             <a:ext cx="4572000" cy="164592"/>
           </a:xfrm>
           <a:prstGeom prst="rect">
@@ -11478,184 +11478,14 @@
       </p:sp>
       <p:sp>
         <p:nvSpPr>
-          <p:cNvPr id="126" name="TextBox 126"/>
-          <p:cNvSpPr txBox="1"/>
-          <p:nvPr/>
-        </p:nvSpPr>
-        <p:spPr>
-          <a:xfrm>
-            <a:off x="694944" y="4736592"/>
-            <a:ext cx="3017520" cy="530352"/>
-          </a:xfrm>
-          <a:prstGeom prst="rect">
-            <a:avLst/>
-          </a:prstGeom>
-          <a:noFill/>
-        </p:spPr>
-        <p:txBody>
-          <a:bodyPr wrap="square" lIns="0" rIns="0" tIns="0" bIns="0" anchor="ctr">
-            <a:spAutoFit/>
-          </a:bodyPr>
-          <a:lstStyle/>
-          <a:p>
-            <a:pPr algn="l"/>
-            <a:r>
-              <a:rPr sz="3800" b="0">
-                <a:solidFill>
-                  <a:srgbClr val="ECECEE"/>
-                </a:solidFill>
-                <a:latin typeface="Poppins"/>
-              </a:rPr>
-              <a:t>Hundreds</a:t>
-            </a:r>
-          </a:p>
-        </p:txBody>
-      </p:sp>
-      <p:sp>
-        <p:nvSpPr>
-          <p:cNvPr id="127" name="TextBox 127"/>
-          <p:cNvSpPr txBox="1"/>
-          <p:nvPr/>
-        </p:nvSpPr>
-        <p:spPr>
-          <a:xfrm>
-            <a:off x="694944" y="5340096"/>
-            <a:ext cx="3017520" cy="192024"/>
-          </a:xfrm>
-          <a:prstGeom prst="rect">
-            <a:avLst/>
-          </a:prstGeom>
-          <a:noFill/>
-        </p:spPr>
-        <p:txBody>
-          <a:bodyPr wrap="square" lIns="0" rIns="0" tIns="0" bIns="0" anchor="ctr">
-            <a:spAutoFit/>
-          </a:bodyPr>
-          <a:lstStyle/>
-          <a:p>
-            <a:pPr algn="l"/>
-            <a:r>
-              <a:rPr sz="1400" b="0">
-                <a:solidFill>
-                  <a:srgbClr val="ECECEE"/>
-                </a:solidFill>
-                <a:latin typeface="Poppins"/>
-              </a:rPr>
-              <a:t>validated patterns</a:t>
-            </a:r>
-          </a:p>
-        </p:txBody>
-      </p:sp>
-      <p:sp>
-        <p:nvSpPr>
-          <p:cNvPr id="128" name="TextBox 128"/>
-          <p:cNvSpPr txBox="1"/>
-          <p:nvPr/>
-        </p:nvSpPr>
-        <p:spPr>
-          <a:xfrm>
-            <a:off x="3840480" y="4736592"/>
-            <a:ext cx="3090672" cy="530352"/>
-          </a:xfrm>
-          <a:prstGeom prst="rect">
-            <a:avLst/>
-          </a:prstGeom>
-          <a:noFill/>
-        </p:spPr>
-        <p:txBody>
-          <a:bodyPr wrap="square" lIns="0" rIns="0" tIns="0" bIns="0" anchor="ctr">
-            <a:spAutoFit/>
-          </a:bodyPr>
-          <a:lstStyle/>
-          <a:p>
-            <a:pPr algn="l"/>
-            <a:r>
-              <a:rPr sz="3800" b="0">
-                <a:solidFill>
-                  <a:srgbClr val="FF6B3D"/>
-                </a:solidFill>
-                <a:latin typeface="Poppins"/>
-              </a:rPr>
-              <a:t>Thousands</a:t>
-            </a:r>
-          </a:p>
-        </p:txBody>
-      </p:sp>
-      <p:sp>
-        <p:nvSpPr>
-          <p:cNvPr id="129" name="TextBox 129"/>
-          <p:cNvSpPr txBox="1"/>
-          <p:nvPr/>
-        </p:nvSpPr>
-        <p:spPr>
-          <a:xfrm>
-            <a:off x="3840480" y="5340096"/>
-            <a:ext cx="3090672" cy="192024"/>
-          </a:xfrm>
-          <a:prstGeom prst="rect">
-            <a:avLst/>
-          </a:prstGeom>
-          <a:noFill/>
-        </p:spPr>
-        <p:txBody>
-          <a:bodyPr wrap="square" lIns="0" rIns="0" tIns="0" bIns="0" anchor="ctr">
-            <a:spAutoFit/>
-          </a:bodyPr>
-          <a:lstStyle/>
-          <a:p>
-            <a:pPr algn="l"/>
-            <a:r>
-              <a:rPr sz="1400" b="0">
-                <a:solidFill>
-                  <a:srgbClr val="ECECEE"/>
-                </a:solidFill>
-                <a:latin typeface="Poppins"/>
-              </a:rPr>
-              <a:t>documented anti-patterns</a:t>
-            </a:r>
-          </a:p>
-        </p:txBody>
-      </p:sp>
-      <p:sp>
-        <p:nvSpPr>
-          <p:cNvPr id="130" name="rect 130"/>
+          <p:cNvPr id="126" name="rect 126"/>
           <p:cNvSpPr/>
           <p:nvPr/>
         </p:nvSpPr>
         <p:spPr>
           <a:xfrm>
-            <a:off x="6931152" y="1975104"/>
-            <a:ext cx="10973" cy="3657600"/>
-          </a:xfrm>
-          <a:prstGeom prst="rect">
-            <a:avLst/>
-          </a:prstGeom>
-          <a:solidFill>
-            <a:srgbClr val="1F1F22"/>
-          </a:solidFill>
-          <a:ln>
-            <a:noFill/>
-          </a:ln>
-          <a:effectLst/>
-        </p:spPr>
-        <p:txBody>
-          <a:bodyPr rtlCol="0" anchor="ctr"/>
-          <a:lstStyle/>
-          <a:p>
-            <a:pPr algn="ctr"/>
-          </a:p>
-        </p:txBody>
-      </p:sp>
-      <p:sp>
-        <p:nvSpPr>
-          <p:cNvPr id="131" name="rect 131"/>
-          <p:cNvSpPr/>
-          <p:nvPr/>
-        </p:nvSpPr>
-        <p:spPr>
-          <a:xfrm>
-            <a:off x="7242048" y="1975104"/>
-            <a:ext cx="4242816" cy="3657600"/>
+            <a:off x="694944" y="4590288"/>
+            <a:ext cx="5230368" cy="1115568"/>
           </a:xfrm>
           <a:prstGeom prst="rect">
             <a:avLst/>
@@ -11680,14 +11510,14 @@
       </p:sp>
       <p:sp>
         <p:nvSpPr>
-          <p:cNvPr id="132" name="TextBox 132"/>
-          <p:cNvSpPr txBox="1"/>
-          <p:nvPr/>
-        </p:nvSpPr>
-        <p:spPr>
-          <a:xfrm>
-            <a:off x="7534656" y="2249424"/>
-            <a:ext cx="3685032" cy="137160"/>
+          <p:cNvPr id="127" name="TextBox 127"/>
+          <p:cNvSpPr txBox="1"/>
+          <p:nvPr/>
+        </p:nvSpPr>
+        <p:spPr>
+          <a:xfrm>
+            <a:off x="969264" y="4809744"/>
+            <a:ext cx="4681728" cy="530352"/>
           </a:xfrm>
           <a:prstGeom prst="rect">
             <a:avLst/>
@@ -11702,27 +11532,27 @@
           <a:p>
             <a:pPr algn="l"/>
             <a:r>
-              <a:rPr sz="900" b="0" spc="200">
-                <a:solidFill>
-                  <a:srgbClr val="9A9AA2"/>
-                </a:solidFill>
-                <a:latin typeface="Courier New"/>
-              </a:rPr>
-              <a:t>WHY IT’S DEFENSIBLE</a:t>
-            </a:r>
-          </a:p>
-        </p:txBody>
-      </p:sp>
-      <p:sp>
-        <p:nvSpPr>
-          <p:cNvPr id="133" name="TextBox 133"/>
-          <p:cNvSpPr txBox="1"/>
-          <p:nvPr/>
-        </p:nvSpPr>
-        <p:spPr>
-          <a:xfrm>
-            <a:off x="7534656" y="2651760"/>
-            <a:ext cx="3657600" cy="182880"/>
+              <a:rPr sz="3800" b="0">
+                <a:solidFill>
+                  <a:srgbClr val="ECECEE"/>
+                </a:solidFill>
+                <a:latin typeface="Poppins"/>
+              </a:rPr>
+              <a:t>Hundreds</a:t>
+            </a:r>
+          </a:p>
+        </p:txBody>
+      </p:sp>
+      <p:sp>
+        <p:nvSpPr>
+          <p:cNvPr id="128" name="TextBox 128"/>
+          <p:cNvSpPr txBox="1"/>
+          <p:nvPr/>
+        </p:nvSpPr>
+        <p:spPr>
+          <a:xfrm>
+            <a:off x="969264" y="5376672"/>
+            <a:ext cx="4681728" cy="192024"/>
           </a:xfrm>
           <a:prstGeom prst="rect">
             <a:avLst/>
@@ -11737,27 +11567,94 @@
           <a:p>
             <a:pPr algn="l"/>
             <a:r>
-              <a:rPr sz="1300" b="1">
+              <a:rPr sz="1400" b="0">
+                <a:solidFill>
+                  <a:srgbClr val="ECECEE"/>
+                </a:solidFill>
+                <a:latin typeface="Poppins"/>
+              </a:rPr>
+              <a:t>validated patterns</a:t>
+            </a:r>
+          </a:p>
+        </p:txBody>
+      </p:sp>
+      <p:sp>
+        <p:nvSpPr>
+          <p:cNvPr id="129" name="rect 129"/>
+          <p:cNvSpPr/>
+          <p:nvPr/>
+        </p:nvSpPr>
+        <p:spPr>
+          <a:xfrm>
+            <a:off x="6254496" y="4590288"/>
+            <a:ext cx="5230368" cy="1115568"/>
+          </a:xfrm>
+          <a:prstGeom prst="rect">
+            <a:avLst/>
+          </a:prstGeom>
+          <a:solidFill>
+            <a:srgbClr val="161619"/>
+          </a:solidFill>
+          <a:ln w="9525">
+            <a:solidFill>
+              <a:srgbClr val="2B2B2D"/>
+            </a:solidFill>
+          </a:ln>
+          <a:effectLst/>
+        </p:spPr>
+        <p:txBody>
+          <a:bodyPr rtlCol="0" anchor="ctr"/>
+          <a:lstStyle/>
+          <a:p>
+            <a:pPr algn="ctr"/>
+          </a:p>
+        </p:txBody>
+      </p:sp>
+      <p:sp>
+        <p:nvSpPr>
+          <p:cNvPr id="130" name="TextBox 130"/>
+          <p:cNvSpPr txBox="1"/>
+          <p:nvPr/>
+        </p:nvSpPr>
+        <p:spPr>
+          <a:xfrm>
+            <a:off x="6528816" y="4809744"/>
+            <a:ext cx="4681728" cy="530352"/>
+          </a:xfrm>
+          <a:prstGeom prst="rect">
+            <a:avLst/>
+          </a:prstGeom>
+          <a:noFill/>
+        </p:spPr>
+        <p:txBody>
+          <a:bodyPr wrap="square" lIns="0" rIns="0" tIns="0" bIns="0" anchor="ctr">
+            <a:spAutoFit/>
+          </a:bodyPr>
+          <a:lstStyle/>
+          <a:p>
+            <a:pPr algn="l"/>
+            <a:r>
+              <a:rPr sz="3800" b="0">
                 <a:solidFill>
                   <a:srgbClr val="FF6B3D"/>
                 </a:solidFill>
                 <a:latin typeface="Poppins"/>
               </a:rPr>
-              <a:t>Earned, not bought.</a:t>
-            </a:r>
-          </a:p>
-        </p:txBody>
-      </p:sp>
-      <p:sp>
-        <p:nvSpPr>
-          <p:cNvPr id="134" name="TextBox 134"/>
-          <p:cNvSpPr txBox="1"/>
-          <p:nvPr/>
-        </p:nvSpPr>
-        <p:spPr>
-          <a:xfrm>
-            <a:off x="7534656" y="2926080"/>
-            <a:ext cx="3657600" cy="402336"/>
+              <a:t>Thousands</a:t>
+            </a:r>
+          </a:p>
+        </p:txBody>
+      </p:sp>
+      <p:sp>
+        <p:nvSpPr>
+          <p:cNvPr id="131" name="TextBox 131"/>
+          <p:cNvSpPr txBox="1"/>
+          <p:nvPr/>
+        </p:nvSpPr>
+        <p:spPr>
+          <a:xfrm>
+            <a:off x="6528816" y="5376672"/>
+            <a:ext cx="4681728" cy="192024"/>
           </a:xfrm>
           <a:prstGeom prst="rect">
             <a:avLst/>
@@ -11772,166 +11669,26 @@
           <a:p>
             <a:pPr algn="l"/>
             <a:r>
-              <a:rPr sz="1100" b="0">
-                <a:solidFill>
-                  <a:srgbClr val="9A9AA2"/>
+              <a:rPr sz="1400" b="0">
+                <a:solidFill>
+                  <a:srgbClr val="ECECEE"/>
                 </a:solidFill>
                 <a:latin typeface="Poppins"/>
               </a:rPr>
-              <a:t>The library only grows by running real production builds.</a:t>
-            </a:r>
-          </a:p>
-        </p:txBody>
-      </p:sp>
-      <p:sp>
-        <p:nvSpPr>
-          <p:cNvPr id="135" name="TextBox 135"/>
-          <p:cNvSpPr txBox="1"/>
-          <p:nvPr/>
-        </p:nvSpPr>
-        <p:spPr>
-          <a:xfrm>
-            <a:off x="7534656" y="3657600"/>
-            <a:ext cx="3657600" cy="182880"/>
-          </a:xfrm>
-          <a:prstGeom prst="rect">
-            <a:avLst/>
-          </a:prstGeom>
-          <a:noFill/>
-        </p:spPr>
-        <p:txBody>
-          <a:bodyPr wrap="square" lIns="0" rIns="0" tIns="0" bIns="0" anchor="ctr">
-            <a:spAutoFit/>
-          </a:bodyPr>
-          <a:lstStyle/>
-          <a:p>
-            <a:pPr algn="l"/>
-            <a:r>
-              <a:rPr sz="1300" b="1">
-                <a:solidFill>
-                  <a:srgbClr val="FF6B3D"/>
-                </a:solidFill>
-                <a:latin typeface="Poppins"/>
-              </a:rPr>
-              <a:t>It compounds.</a:t>
-            </a:r>
-          </a:p>
-        </p:txBody>
-      </p:sp>
-      <p:sp>
-        <p:nvSpPr>
-          <p:cNvPr id="136" name="TextBox 136"/>
-          <p:cNvSpPr txBox="1"/>
-          <p:nvPr/>
-        </p:nvSpPr>
-        <p:spPr>
-          <a:xfrm>
-            <a:off x="7534656" y="3931920"/>
-            <a:ext cx="3657600" cy="402336"/>
-          </a:xfrm>
-          <a:prstGeom prst="rect">
-            <a:avLst/>
-          </a:prstGeom>
-          <a:noFill/>
-        </p:spPr>
-        <p:txBody>
-          <a:bodyPr wrap="square" lIns="0" rIns="0" tIns="0" bIns="0" anchor="ctr">
-            <a:spAutoFit/>
-          </a:bodyPr>
-          <a:lstStyle/>
-          <a:p>
-            <a:pPr algn="l"/>
-            <a:r>
-              <a:rPr sz="1100" b="0">
-                <a:solidFill>
-                  <a:srgbClr val="9A9AA2"/>
-                </a:solidFill>
-                <a:latin typeface="Poppins"/>
-              </a:rPr>
-              <a:t>Every project makes the next estimate, gate and build safer.</a:t>
-            </a:r>
-          </a:p>
-        </p:txBody>
-      </p:sp>
-      <p:sp>
-        <p:nvSpPr>
-          <p:cNvPr id="137" name="TextBox 137"/>
-          <p:cNvSpPr txBox="1"/>
-          <p:nvPr/>
-        </p:nvSpPr>
-        <p:spPr>
-          <a:xfrm>
-            <a:off x="7534656" y="4663440"/>
-            <a:ext cx="3657600" cy="182880"/>
-          </a:xfrm>
-          <a:prstGeom prst="rect">
-            <a:avLst/>
-          </a:prstGeom>
-          <a:noFill/>
-        </p:spPr>
-        <p:txBody>
-          <a:bodyPr wrap="square" lIns="0" rIns="0" tIns="0" bIns="0" anchor="ctr">
-            <a:spAutoFit/>
-          </a:bodyPr>
-          <a:lstStyle/>
-          <a:p>
-            <a:pPr algn="l"/>
-            <a:r>
-              <a:rPr sz="1300" b="1">
-                <a:solidFill>
-                  <a:srgbClr val="FF6B3D"/>
-                </a:solidFill>
-                <a:latin typeface="Poppins"/>
-              </a:rPr>
-              <a:t>Capital can’t copy it.</a:t>
-            </a:r>
-          </a:p>
-        </p:txBody>
-      </p:sp>
-      <p:sp>
-        <p:nvSpPr>
-          <p:cNvPr id="138" name="TextBox 138"/>
-          <p:cNvSpPr txBox="1"/>
-          <p:nvPr/>
-        </p:nvSpPr>
-        <p:spPr>
-          <a:xfrm>
-            <a:off x="7534656" y="4937760"/>
-            <a:ext cx="3657600" cy="402336"/>
-          </a:xfrm>
-          <a:prstGeom prst="rect">
-            <a:avLst/>
-          </a:prstGeom>
-          <a:noFill/>
-        </p:spPr>
-        <p:txBody>
-          <a:bodyPr wrap="square" lIns="0" rIns="0" tIns="0" bIns="0" anchor="ctr">
-            <a:spAutoFit/>
-          </a:bodyPr>
-          <a:lstStyle/>
-          <a:p>
-            <a:pPr algn="l"/>
-            <a:r>
-              <a:rPr sz="1100" b="0">
-                <a:solidFill>
-                  <a:srgbClr val="9A9AA2"/>
-                </a:solidFill>
-                <a:latin typeface="Poppins"/>
-              </a:rPr>
-              <a:t>A bigger round buys code, not failures already survived.</a:t>
-            </a:r>
-          </a:p>
-        </p:txBody>
-      </p:sp>
-      <p:sp>
-        <p:nvSpPr>
-          <p:cNvPr id="139" name="rect 139"/>
+              <a:t>documented anti-patterns</a:t>
+            </a:r>
+          </a:p>
+        </p:txBody>
+      </p:sp>
+      <p:sp>
+        <p:nvSpPr>
+          <p:cNvPr id="132" name="rect 132"/>
           <p:cNvSpPr/>
           <p:nvPr/>
         </p:nvSpPr>
         <p:spPr>
           <a:xfrm>
-            <a:off x="694944" y="5815584"/>
+            <a:off x="694944" y="5852160"/>
             <a:ext cx="10789920" cy="10973"/>
           </a:xfrm>
           <a:prstGeom prst="rect">
@@ -11955,13 +11712,13 @@
       </p:sp>
       <p:sp>
         <p:nvSpPr>
-          <p:cNvPr id="140" name="TextBox 140"/>
-          <p:cNvSpPr txBox="1"/>
-          <p:nvPr/>
-        </p:nvSpPr>
-        <p:spPr>
-          <a:xfrm>
-            <a:off x="694944" y="5980176"/>
+          <p:cNvPr id="133" name="TextBox 133"/>
+          <p:cNvSpPr txBox="1"/>
+          <p:nvPr/>
+        </p:nvSpPr>
+        <p:spPr>
+          <a:xfrm>
+            <a:off x="694944" y="5998464"/>
             <a:ext cx="10789920" cy="219456"/>
           </a:xfrm>
           <a:prstGeom prst="rect">
@@ -11990,7 +11747,7 @@
       </p:sp>
       <p:pic>
         <p:nvPicPr>
-          <p:cNvPr id="141" name="Logo"/>
+          <p:cNvPr id="134" name="Logo"/>
           <p:cNvPicPr/>
           <p:nvPr/>
         </p:nvPicPr>

--- a/decks/Pitch_Deck_AthenaRun_v4.pptx
+++ b/decks/Pitch_Deck_AthenaRun_v4.pptx
@@ -2747,9 +2747,239 @@
           <a:chExt cx="0" cy="0"/>
         </a:xfrm>
       </p:grpSpPr>
+      <p:sp>
+        <p:nvSpPr>
+          <p:cNvPr id="101" name="rect 101"/>
+          <p:cNvSpPr/>
+          <p:nvPr/>
+        </p:nvSpPr>
+        <p:spPr>
+          <a:xfrm>
+            <a:off x="0" y="0"/>
+            <a:ext cx="12191970" cy="6858000"/>
+          </a:xfrm>
+          <a:prstGeom prst="rect">
+            <a:avLst/>
+          </a:prstGeom>
+          <a:solidFill>
+            <a:srgbClr val="0E0E11"/>
+          </a:solidFill>
+          <a:ln>
+            <a:noFill/>
+          </a:ln>
+          <a:effectLst/>
+        </p:spPr>
+        <p:txBody>
+          <a:bodyPr rtlCol="0" anchor="ctr"/>
+          <a:lstStyle/>
+          <a:p>
+            <a:pPr algn="ctr"/>
+          </a:p>
+        </p:txBody>
+      </p:sp>
+      <p:sp>
+        <p:nvSpPr>
+          <p:cNvPr id="102" name="rect 102"/>
+          <p:cNvSpPr/>
+          <p:nvPr/>
+        </p:nvSpPr>
+        <p:spPr>
+          <a:xfrm>
+            <a:off x="694944" y="914400"/>
+            <a:ext cx="10789920" cy="10973"/>
+          </a:xfrm>
+          <a:prstGeom prst="rect">
+            <a:avLst/>
+          </a:prstGeom>
+          <a:solidFill>
+            <a:srgbClr val="1F1F22"/>
+          </a:solidFill>
+          <a:ln>
+            <a:noFill/>
+          </a:ln>
+          <a:effectLst/>
+        </p:spPr>
+        <p:txBody>
+          <a:bodyPr rtlCol="0" anchor="ctr"/>
+          <a:lstStyle/>
+          <a:p>
+            <a:pPr algn="ctr"/>
+          </a:p>
+        </p:txBody>
+      </p:sp>
+      <p:sp>
+        <p:nvSpPr>
+          <p:cNvPr id="103" name="rect 103"/>
+          <p:cNvSpPr/>
+          <p:nvPr/>
+        </p:nvSpPr>
+        <p:spPr>
+          <a:xfrm>
+            <a:off x="694944" y="5880506"/>
+            <a:ext cx="10789920" cy="10973"/>
+          </a:xfrm>
+          <a:prstGeom prst="rect">
+            <a:avLst/>
+          </a:prstGeom>
+          <a:solidFill>
+            <a:srgbClr val="1F1F22"/>
+          </a:solidFill>
+          <a:ln>
+            <a:noFill/>
+          </a:ln>
+          <a:effectLst/>
+        </p:spPr>
+        <p:txBody>
+          <a:bodyPr rtlCol="0" anchor="ctr"/>
+          <a:lstStyle/>
+          <a:p>
+            <a:pPr algn="ctr"/>
+          </a:p>
+        </p:txBody>
+      </p:sp>
+      <p:sp>
+        <p:nvSpPr>
+          <p:cNvPr id="104" name="TextBox 104"/>
+          <p:cNvSpPr txBox="1"/>
+          <p:nvPr/>
+        </p:nvSpPr>
+        <p:spPr>
+          <a:xfrm>
+            <a:off x="704088" y="2351837"/>
+            <a:ext cx="10972800" cy="731520"/>
+          </a:xfrm>
+          <a:prstGeom prst="rect">
+            <a:avLst/>
+          </a:prstGeom>
+          <a:noFill/>
+        </p:spPr>
+        <p:txBody>
+          <a:bodyPr wrap="square" lIns="0" rIns="0" tIns="0" bIns="0" anchor="ctr">
+            <a:spAutoFit/>
+          </a:bodyPr>
+          <a:lstStyle/>
+          <a:p>
+            <a:pPr algn="l"/>
+            <a:r>
+              <a:rPr sz="4800" b="1">
+                <a:solidFill>
+                  <a:srgbClr val="ECECEE"/>
+                </a:solidFill>
+                <a:latin typeface="Poppins"/>
+              </a:rPr>
+              <a:t>AI writes code.</a:t>
+            </a:r>
+          </a:p>
+        </p:txBody>
+      </p:sp>
+      <p:sp>
+        <p:nvSpPr>
+          <p:cNvPr id="105" name="TextBox 105"/>
+          <p:cNvSpPr txBox="1"/>
+          <p:nvPr/>
+        </p:nvSpPr>
+        <p:spPr>
+          <a:xfrm>
+            <a:off x="704088" y="3094787"/>
+            <a:ext cx="10972800" cy="731520"/>
+          </a:xfrm>
+          <a:prstGeom prst="rect">
+            <a:avLst/>
+          </a:prstGeom>
+          <a:noFill/>
+        </p:spPr>
+        <p:txBody>
+          <a:bodyPr wrap="square" lIns="0" rIns="0" tIns="0" bIns="0" anchor="ctr">
+            <a:spAutoFit/>
+          </a:bodyPr>
+          <a:lstStyle/>
+          <a:p>
+            <a:pPr algn="l"/>
+            <a:r>
+              <a:rPr sz="4800" b="0">
+                <a:solidFill>
+                  <a:srgbClr val="9A9AA2"/>
+                </a:solidFill>
+                <a:latin typeface="Poppins"/>
+              </a:rPr>
+              <a:t>It doesn’t finish applications.</a:t>
+            </a:r>
+          </a:p>
+        </p:txBody>
+      </p:sp>
+      <p:sp>
+        <p:nvSpPr>
+          <p:cNvPr id="106" name="TextBox 106"/>
+          <p:cNvSpPr txBox="1"/>
+          <p:nvPr/>
+        </p:nvSpPr>
+        <p:spPr>
+          <a:xfrm>
+            <a:off x="704088" y="4178808"/>
+            <a:ext cx="10058400" cy="219456"/>
+          </a:xfrm>
+          <a:prstGeom prst="rect">
+            <a:avLst/>
+          </a:prstGeom>
+          <a:noFill/>
+        </p:spPr>
+        <p:txBody>
+          <a:bodyPr wrap="square" lIns="0" rIns="0" tIns="0" bIns="0" anchor="ctr">
+            <a:spAutoFit/>
+          </a:bodyPr>
+          <a:lstStyle/>
+          <a:p>
+            <a:pPr algn="l"/>
+            <a:r>
+              <a:rPr sz="1700" b="0">
+                <a:solidFill>
+                  <a:srgbClr val="C9C9CE"/>
+                </a:solidFill>
+                <a:latin typeface="Poppins"/>
+              </a:rPr>
+              <a:t>Enterprise-grade means integrated, tested, audit-proof and signed off by a person.</a:t>
+            </a:r>
+          </a:p>
+        </p:txBody>
+      </p:sp>
+      <p:sp>
+        <p:nvSpPr>
+          <p:cNvPr id="107" name="TextBox 107"/>
+          <p:cNvSpPr txBox="1"/>
+          <p:nvPr/>
+        </p:nvSpPr>
+        <p:spPr>
+          <a:xfrm>
+            <a:off x="694944" y="4590288"/>
+            <a:ext cx="8229600" cy="256032"/>
+          </a:xfrm>
+          <a:prstGeom prst="rect">
+            <a:avLst/>
+          </a:prstGeom>
+          <a:noFill/>
+        </p:spPr>
+        <p:txBody>
+          <a:bodyPr wrap="square" lIns="0" rIns="0" tIns="0" bIns="0" anchor="ctr">
+            <a:spAutoFit/>
+          </a:bodyPr>
+          <a:lstStyle/>
+          <a:p>
+            <a:pPr algn="l"/>
+            <a:r>
+              <a:rPr sz="1700" b="1">
+                <a:solidFill>
+                  <a:srgbClr val="FF6B3D"/>
+                </a:solidFill>
+                <a:latin typeface="Poppins"/>
+              </a:rPr>
+              <a:t>We deliver the finished application.</a:t>
+            </a:r>
+          </a:p>
+        </p:txBody>
+      </p:sp>
       <p:pic>
         <p:nvPicPr>
-          <p:cNvPr id="101" name="Picture 1"/>
+          <p:cNvPr id="108" name="Logo"/>
           <p:cNvPicPr/>
           <p:nvPr/>
         </p:nvPicPr>
@@ -2761,154 +2991,14 @@
         </p:blipFill>
         <p:spPr>
           <a:xfrm>
-            <a:off x="0" y="0"/>
-            <a:ext cx="12191695" cy="6858000"/>
+            <a:off x="603504" y="5962802"/>
+            <a:ext cx="1623060" cy="382219"/>
           </a:xfrm>
           <a:prstGeom prst="rect">
             <a:avLst/>
           </a:prstGeom>
         </p:spPr>
       </p:pic>
-      <p:sp>
-        <p:nvSpPr>
-          <p:cNvPr id="102" name="TextBox 102"/>
-          <p:cNvSpPr txBox="1"/>
-          <p:nvPr/>
-        </p:nvSpPr>
-        <p:spPr>
-          <a:xfrm>
-            <a:off x="704088" y="2351837"/>
-            <a:ext cx="10972800" cy="731520"/>
-          </a:xfrm>
-          <a:prstGeom prst="rect">
-            <a:avLst/>
-          </a:prstGeom>
-          <a:noFill/>
-        </p:spPr>
-        <p:txBody>
-          <a:bodyPr wrap="square" lIns="0" rIns="0" tIns="0" bIns="0" anchor="ctr">
-            <a:spAutoFit/>
-          </a:bodyPr>
-          <a:lstStyle/>
-          <a:p>
-            <a:pPr algn="l"/>
-            <a:r>
-              <a:rPr sz="4800" b="1">
-                <a:solidFill>
-                  <a:srgbClr val="ECECEE"/>
-                </a:solidFill>
-                <a:latin typeface="Poppins"/>
-              </a:rPr>
-              <a:t>AI writes code.</a:t>
-            </a:r>
-          </a:p>
-        </p:txBody>
-      </p:sp>
-      <p:sp>
-        <p:nvSpPr>
-          <p:cNvPr id="103" name="TextBox 103"/>
-          <p:cNvSpPr txBox="1"/>
-          <p:nvPr/>
-        </p:nvSpPr>
-        <p:spPr>
-          <a:xfrm>
-            <a:off x="704088" y="3094787"/>
-            <a:ext cx="10972800" cy="731520"/>
-          </a:xfrm>
-          <a:prstGeom prst="rect">
-            <a:avLst/>
-          </a:prstGeom>
-          <a:noFill/>
-        </p:spPr>
-        <p:txBody>
-          <a:bodyPr wrap="square" lIns="0" rIns="0" tIns="0" bIns="0" anchor="ctr">
-            <a:spAutoFit/>
-          </a:bodyPr>
-          <a:lstStyle/>
-          <a:p>
-            <a:pPr algn="l"/>
-            <a:r>
-              <a:rPr sz="4800" b="0">
-                <a:solidFill>
-                  <a:srgbClr val="9A9AA2"/>
-                </a:solidFill>
-                <a:latin typeface="Poppins"/>
-              </a:rPr>
-              <a:t>It doesn’t finish applications.</a:t>
-            </a:r>
-          </a:p>
-        </p:txBody>
-      </p:sp>
-      <p:sp>
-        <p:nvSpPr>
-          <p:cNvPr id="104" name="TextBox 104"/>
-          <p:cNvSpPr txBox="1"/>
-          <p:nvPr/>
-        </p:nvSpPr>
-        <p:spPr>
-          <a:xfrm>
-            <a:off x="704088" y="4178808"/>
-            <a:ext cx="10058400" cy="219456"/>
-          </a:xfrm>
-          <a:prstGeom prst="rect">
-            <a:avLst/>
-          </a:prstGeom>
-          <a:noFill/>
-        </p:spPr>
-        <p:txBody>
-          <a:bodyPr wrap="square" lIns="0" rIns="0" tIns="0" bIns="0" anchor="ctr">
-            <a:spAutoFit/>
-          </a:bodyPr>
-          <a:lstStyle/>
-          <a:p>
-            <a:pPr algn="l"/>
-            <a:r>
-              <a:rPr sz="1700" b="0">
-                <a:solidFill>
-                  <a:srgbClr val="C9C9CE"/>
-                </a:solidFill>
-                <a:latin typeface="Poppins"/>
-              </a:rPr>
-              <a:t>Enterprise-grade means integrated, tested, audit-proof and signed off by a person.</a:t>
-            </a:r>
-          </a:p>
-        </p:txBody>
-      </p:sp>
-      <p:sp>
-        <p:nvSpPr>
-          <p:cNvPr id="105" name="TextBox 105"/>
-          <p:cNvSpPr txBox="1"/>
-          <p:nvPr/>
-        </p:nvSpPr>
-        <p:spPr>
-          <a:xfrm>
-            <a:off x="694944" y="4590288"/>
-            <a:ext cx="8229600" cy="256032"/>
-          </a:xfrm>
-          <a:prstGeom prst="rect">
-            <a:avLst/>
-          </a:prstGeom>
-          <a:noFill/>
-        </p:spPr>
-        <p:txBody>
-          <a:bodyPr wrap="square" lIns="0" rIns="0" tIns="0" bIns="0" anchor="ctr">
-            <a:spAutoFit/>
-          </a:bodyPr>
-          <a:lstStyle/>
-          <a:p>
-            <a:pPr algn="l"/>
-            <a:r>
-              <a:rPr sz="1700" b="1">
-                <a:solidFill>
-                  <a:srgbClr val="FF6B3D"/>
-                </a:solidFill>
-                <a:latin typeface="Poppins"/>
-              </a:rPr>
-              <a:t>We deliver the finished application.</a:t>
-            </a:r>
-          </a:p>
-        </p:txBody>
-      </p:sp>
     </p:spTree>
   </p:cSld>
   <p:clrMapOvr>
@@ -2935,30 +3025,36 @@
           <a:chExt cx="0" cy="0"/>
         </a:xfrm>
       </p:grpSpPr>
-      <p:pic>
-        <p:nvPicPr>
-          <p:cNvPr id="2" name="Picture 1" descr="image.png"/>
-          <p:cNvPicPr>
-            <a:picLocks noChangeAspect="1"/>
-          </p:cNvPicPr>
-          <p:nvPr/>
-        </p:nvPicPr>
-        <p:blipFill>
-          <a:blip r:embed="rId3"/>
-          <a:stretch>
-            <a:fillRect/>
-          </a:stretch>
-        </p:blipFill>
+      <p:sp>
+        <p:nvSpPr>
+          <p:cNvPr id="1001" name="rect 1001"/>
+          <p:cNvSpPr/>
+          <p:nvPr/>
+        </p:nvSpPr>
         <p:spPr>
           <a:xfrm>
             <a:off x="0" y="0"/>
-            <a:ext cx="12179300" cy="6858000"/>
-          </a:xfrm>
-          <a:prstGeom prst="rect">
-            <a:avLst/>
-          </a:prstGeom>
-        </p:spPr>
-      </p:pic>
+            <a:ext cx="12191970" cy="6858000"/>
+          </a:xfrm>
+          <a:prstGeom prst="rect">
+            <a:avLst/>
+          </a:prstGeom>
+          <a:solidFill>
+            <a:srgbClr val="0E0E11"/>
+          </a:solidFill>
+          <a:ln>
+            <a:noFill/>
+          </a:ln>
+          <a:effectLst/>
+        </p:spPr>
+        <p:txBody>
+          <a:bodyPr rtlCol="0" anchor="ctr"/>
+          <a:lstStyle/>
+          <a:p>
+            <a:pPr algn="ctr"/>
+          </a:p>
+        </p:txBody>
+      </p:sp>
       <p:sp>
         <p:nvSpPr>
           <p:cNvPr id="3" name="TextBox 2"/>
@@ -5032,30 +5128,36 @@
           <a:chExt cx="0" cy="0"/>
         </a:xfrm>
       </p:grpSpPr>
-      <p:pic>
-        <p:nvPicPr>
-          <p:cNvPr id="2" name="Picture 1" descr="image.png"/>
-          <p:cNvPicPr>
-            <a:picLocks noChangeAspect="1"/>
-          </p:cNvPicPr>
-          <p:nvPr/>
-        </p:nvPicPr>
-        <p:blipFill>
-          <a:blip r:embed="rId3"/>
-          <a:stretch>
-            <a:fillRect/>
-          </a:stretch>
-        </p:blipFill>
+      <p:sp>
+        <p:nvSpPr>
+          <p:cNvPr id="1011" name="rect 1011"/>
+          <p:cNvSpPr/>
+          <p:nvPr/>
+        </p:nvSpPr>
         <p:spPr>
           <a:xfrm>
             <a:off x="0" y="0"/>
-            <a:ext cx="12179300" cy="6858000"/>
-          </a:xfrm>
-          <a:prstGeom prst="rect">
-            <a:avLst/>
-          </a:prstGeom>
-        </p:spPr>
-      </p:pic>
+            <a:ext cx="12191970" cy="6858000"/>
+          </a:xfrm>
+          <a:prstGeom prst="rect">
+            <a:avLst/>
+          </a:prstGeom>
+          <a:solidFill>
+            <a:srgbClr val="0E0E11"/>
+          </a:solidFill>
+          <a:ln>
+            <a:noFill/>
+          </a:ln>
+          <a:effectLst/>
+        </p:spPr>
+        <p:txBody>
+          <a:bodyPr rtlCol="0" anchor="ctr"/>
+          <a:lstStyle/>
+          <a:p>
+            <a:pPr algn="ctr"/>
+          </a:p>
+        </p:txBody>
+      </p:sp>
       <p:sp>
         <p:nvSpPr>
           <p:cNvPr id="3" name="TextBox 2"/>
@@ -6590,30 +6692,36 @@
           <a:chExt cx="0" cy="0"/>
         </a:xfrm>
       </p:grpSpPr>
-      <p:pic>
-        <p:nvPicPr>
-          <p:cNvPr id="2" name="Picture 1" descr="image.png"/>
-          <p:cNvPicPr>
-            <a:picLocks noChangeAspect="1"/>
-          </p:cNvPicPr>
-          <p:nvPr/>
-        </p:nvPicPr>
-        <p:blipFill>
-          <a:blip r:embed="rId3"/>
-          <a:stretch>
-            <a:fillRect/>
-          </a:stretch>
-        </p:blipFill>
+      <p:sp>
+        <p:nvSpPr>
+          <p:cNvPr id="1021" name="rect 1021"/>
+          <p:cNvSpPr/>
+          <p:nvPr/>
+        </p:nvSpPr>
         <p:spPr>
           <a:xfrm>
             <a:off x="0" y="0"/>
-            <a:ext cx="12179300" cy="6858000"/>
-          </a:xfrm>
-          <a:prstGeom prst="rect">
-            <a:avLst/>
-          </a:prstGeom>
-        </p:spPr>
-      </p:pic>
+            <a:ext cx="12191970" cy="6858000"/>
+          </a:xfrm>
+          <a:prstGeom prst="rect">
+            <a:avLst/>
+          </a:prstGeom>
+          <a:solidFill>
+            <a:srgbClr val="0E0E11"/>
+          </a:solidFill>
+          <a:ln>
+            <a:noFill/>
+          </a:ln>
+          <a:effectLst/>
+        </p:spPr>
+        <p:txBody>
+          <a:bodyPr rtlCol="0" anchor="ctr"/>
+          <a:lstStyle/>
+          <a:p>
+            <a:pPr algn="ctr"/>
+          </a:p>
+        </p:txBody>
+      </p:sp>
       <p:sp>
         <p:nvSpPr>
           <p:cNvPr id="3" name="TextBox 2"/>
@@ -7835,28 +7943,36 @@
           <a:chExt cx="0" cy="0"/>
         </a:xfrm>
       </p:grpSpPr>
-      <p:pic>
-        <p:nvPicPr>
-          <p:cNvPr id="101" name="Picture 1"/>
-          <p:cNvPicPr/>
-          <p:nvPr/>
-        </p:nvPicPr>
-        <p:blipFill>
-          <a:blip r:embed="rId2"/>
-          <a:stretch>
-            <a:fillRect/>
-          </a:stretch>
-        </p:blipFill>
+      <p:sp>
+        <p:nvSpPr>
+          <p:cNvPr id="101" name="rect 101"/>
+          <p:cNvSpPr/>
+          <p:nvPr/>
+        </p:nvSpPr>
         <p:spPr>
           <a:xfrm>
             <a:off x="0" y="0"/>
-            <a:ext cx="12191695" cy="6858000"/>
-          </a:xfrm>
-          <a:prstGeom prst="rect">
-            <a:avLst/>
-          </a:prstGeom>
-        </p:spPr>
-      </p:pic>
+            <a:ext cx="12191970" cy="6858000"/>
+          </a:xfrm>
+          <a:prstGeom prst="rect">
+            <a:avLst/>
+          </a:prstGeom>
+          <a:solidFill>
+            <a:srgbClr val="0E0E11"/>
+          </a:solidFill>
+          <a:ln>
+            <a:noFill/>
+          </a:ln>
+          <a:effectLst/>
+        </p:spPr>
+        <p:txBody>
+          <a:bodyPr rtlCol="0" anchor="ctr"/>
+          <a:lstStyle/>
+          <a:p>
+            <a:pPr algn="ctr"/>
+          </a:p>
+        </p:txBody>
+      </p:sp>
       <p:sp>
         <p:nvSpPr>
           <p:cNvPr id="102" name="TextBox 102"/>
@@ -8843,7 +8959,7 @@
           <p:nvPr/>
         </p:nvPicPr>
         <p:blipFill>
-          <a:blip r:embed="rId3"/>
+          <a:blip r:embed="rId2"/>
           <a:stretch>
             <a:fillRect/>
           </a:stretch>
@@ -8884,28 +9000,36 @@
           <a:chExt cx="0" cy="0"/>
         </a:xfrm>
       </p:grpSpPr>
-      <p:pic>
-        <p:nvPicPr>
-          <p:cNvPr id="101" name="Picture 1"/>
-          <p:cNvPicPr/>
-          <p:nvPr/>
-        </p:nvPicPr>
-        <p:blipFill>
-          <a:blip r:embed="rId2"/>
-          <a:stretch>
-            <a:fillRect/>
-          </a:stretch>
-        </p:blipFill>
+      <p:sp>
+        <p:nvSpPr>
+          <p:cNvPr id="101" name="rect 101"/>
+          <p:cNvSpPr/>
+          <p:nvPr/>
+        </p:nvSpPr>
         <p:spPr>
           <a:xfrm>
             <a:off x="0" y="0"/>
-            <a:ext cx="12191695" cy="6858000"/>
-          </a:xfrm>
-          <a:prstGeom prst="rect">
-            <a:avLst/>
-          </a:prstGeom>
-        </p:spPr>
-      </p:pic>
+            <a:ext cx="12191970" cy="6858000"/>
+          </a:xfrm>
+          <a:prstGeom prst="rect">
+            <a:avLst/>
+          </a:prstGeom>
+          <a:solidFill>
+            <a:srgbClr val="0E0E11"/>
+          </a:solidFill>
+          <a:ln>
+            <a:noFill/>
+          </a:ln>
+          <a:effectLst/>
+        </p:spPr>
+        <p:txBody>
+          <a:bodyPr rtlCol="0" anchor="ctr"/>
+          <a:lstStyle/>
+          <a:p>
+            <a:pPr algn="ctr"/>
+          </a:p>
+        </p:txBody>
+      </p:sp>
       <p:sp>
         <p:nvSpPr>
           <p:cNvPr id="102" name="TextBox 102"/>
@@ -10613,7 +10737,7 @@
           <p:nvPr/>
         </p:nvPicPr>
         <p:blipFill>
-          <a:blip r:embed="rId3"/>
+          <a:blip r:embed="rId2"/>
           <a:stretch>
             <a:fillRect/>
           </a:stretch>
@@ -10654,28 +10778,36 @@
           <a:chExt cx="0" cy="0"/>
         </a:xfrm>
       </p:grpSpPr>
-      <p:pic>
-        <p:nvPicPr>
-          <p:cNvPr id="101" name="Picture 1"/>
-          <p:cNvPicPr/>
-          <p:nvPr/>
-        </p:nvPicPr>
-        <p:blipFill>
-          <a:blip r:embed="rId2"/>
-          <a:stretch>
-            <a:fillRect/>
-          </a:stretch>
-        </p:blipFill>
+      <p:sp>
+        <p:nvSpPr>
+          <p:cNvPr id="101" name="rect 101"/>
+          <p:cNvSpPr/>
+          <p:nvPr/>
+        </p:nvSpPr>
         <p:spPr>
           <a:xfrm>
             <a:off x="0" y="0"/>
-            <a:ext cx="12191695" cy="6858000"/>
-          </a:xfrm>
-          <a:prstGeom prst="rect">
-            <a:avLst/>
-          </a:prstGeom>
-        </p:spPr>
-      </p:pic>
+            <a:ext cx="12191970" cy="6858000"/>
+          </a:xfrm>
+          <a:prstGeom prst="rect">
+            <a:avLst/>
+          </a:prstGeom>
+          <a:solidFill>
+            <a:srgbClr val="0E0E11"/>
+          </a:solidFill>
+          <a:ln>
+            <a:noFill/>
+          </a:ln>
+          <a:effectLst/>
+        </p:spPr>
+        <p:txBody>
+          <a:bodyPr rtlCol="0" anchor="ctr"/>
+          <a:lstStyle/>
+          <a:p>
+            <a:pPr algn="ctr"/>
+          </a:p>
+        </p:txBody>
+      </p:sp>
       <p:sp>
         <p:nvSpPr>
           <p:cNvPr id="102" name="TextBox 102"/>
@@ -11752,7 +11884,7 @@
           <p:nvPr/>
         </p:nvPicPr>
         <p:blipFill>
-          <a:blip r:embed="rId3"/>
+          <a:blip r:embed="rId2"/>
           <a:stretch>
             <a:fillRect/>
           </a:stretch>
@@ -11793,28 +11925,36 @@
           <a:chExt cx="0" cy="0"/>
         </a:xfrm>
       </p:grpSpPr>
-      <p:pic>
-        <p:nvPicPr>
-          <p:cNvPr id="101" name="Picture 1"/>
-          <p:cNvPicPr/>
-          <p:nvPr/>
-        </p:nvPicPr>
-        <p:blipFill>
-          <a:blip r:embed="rId2"/>
-          <a:stretch>
-            <a:fillRect/>
-          </a:stretch>
-        </p:blipFill>
+      <p:sp>
+        <p:nvSpPr>
+          <p:cNvPr id="101" name="rect 101"/>
+          <p:cNvSpPr/>
+          <p:nvPr/>
+        </p:nvSpPr>
         <p:spPr>
           <a:xfrm>
             <a:off x="0" y="0"/>
-            <a:ext cx="12191695" cy="6858000"/>
-          </a:xfrm>
-          <a:prstGeom prst="rect">
-            <a:avLst/>
-          </a:prstGeom>
-        </p:spPr>
-      </p:pic>
+            <a:ext cx="12191970" cy="6858000"/>
+          </a:xfrm>
+          <a:prstGeom prst="rect">
+            <a:avLst/>
+          </a:prstGeom>
+          <a:solidFill>
+            <a:srgbClr val="0E0E11"/>
+          </a:solidFill>
+          <a:ln>
+            <a:noFill/>
+          </a:ln>
+          <a:effectLst/>
+        </p:spPr>
+        <p:txBody>
+          <a:bodyPr rtlCol="0" anchor="ctr"/>
+          <a:lstStyle/>
+          <a:p>
+            <a:pPr algn="ctr"/>
+          </a:p>
+        </p:txBody>
+      </p:sp>
       <p:sp>
         <p:nvSpPr>
           <p:cNvPr id="102" name="TextBox 102"/>
@@ -12024,6 +12164,467 @@
       <p:pic>
         <p:nvPicPr>
           <p:cNvPr id="108" name="Picture 108"/>
+          <p:cNvPicPr/>
+          <p:nvPr/>
+        </p:nvPicPr>
+        <p:blipFill>
+          <a:blip r:embed="rId3"/>
+          <a:stretch>
+            <a:fillRect/>
+          </a:stretch>
+        </p:blipFill>
+        <p:spPr>
+          <a:xfrm>
+            <a:off x="950976" y="2249424"/>
+            <a:ext cx="219456" cy="219456"/>
+          </a:xfrm>
+          <a:prstGeom prst="rect">
+            <a:avLst/>
+          </a:prstGeom>
+        </p:spPr>
+      </p:pic>
+      <p:sp>
+        <p:nvSpPr>
+          <p:cNvPr id="109" name="rect 109"/>
+          <p:cNvSpPr/>
+          <p:nvPr/>
+        </p:nvSpPr>
+        <p:spPr>
+          <a:xfrm>
+            <a:off x="2898648" y="2212848"/>
+            <a:ext cx="841248" cy="274320"/>
+          </a:xfrm>
+          <a:prstGeom prst="rect">
+            <a:avLst/>
+          </a:prstGeom>
+          <a:solidFill>
+            <a:srgbClr val="0E0E11"/>
+          </a:solidFill>
+          <a:ln w="9525">
+            <a:solidFill>
+              <a:srgbClr val="9A9AA2"/>
+            </a:solidFill>
+          </a:ln>
+          <a:effectLst/>
+        </p:spPr>
+        <p:txBody>
+          <a:bodyPr rtlCol="0" anchor="ctr"/>
+          <a:lstStyle/>
+          <a:p>
+            <a:pPr algn="ctr"/>
+          </a:p>
+        </p:txBody>
+      </p:sp>
+      <p:sp>
+        <p:nvSpPr>
+          <p:cNvPr id="110" name="TextBox 110"/>
+          <p:cNvSpPr txBox="1"/>
+          <p:nvPr/>
+        </p:nvSpPr>
+        <p:spPr>
+          <a:xfrm>
+            <a:off x="2898648" y="2290572"/>
+            <a:ext cx="841248" cy="137160"/>
+          </a:xfrm>
+          <a:prstGeom prst="rect">
+            <a:avLst/>
+          </a:prstGeom>
+          <a:noFill/>
+        </p:spPr>
+        <p:txBody>
+          <a:bodyPr wrap="square" lIns="0" rIns="0" tIns="0" bIns="0" anchor="ctr">
+            <a:spAutoFit/>
+          </a:bodyPr>
+          <a:lstStyle/>
+          <a:p>
+            <a:pPr algn="ctr"/>
+            <a:r>
+              <a:rPr sz="900" b="0" spc="100">
+                <a:solidFill>
+                  <a:srgbClr val="9A9AA2"/>
+                </a:solidFill>
+                <a:latin typeface="Courier New"/>
+              </a:rPr>
+              <a:t>BUILT</a:t>
+            </a:r>
+          </a:p>
+        </p:txBody>
+      </p:sp>
+      <p:sp>
+        <p:nvSpPr>
+          <p:cNvPr id="111" name="TextBox 111"/>
+          <p:cNvSpPr txBox="1"/>
+          <p:nvPr/>
+        </p:nvSpPr>
+        <p:spPr>
+          <a:xfrm>
+            <a:off x="950976" y="2578608"/>
+            <a:ext cx="2788920" cy="301752"/>
+          </a:xfrm>
+          <a:prstGeom prst="rect">
+            <a:avLst/>
+          </a:prstGeom>
+          <a:noFill/>
+        </p:spPr>
+        <p:txBody>
+          <a:bodyPr wrap="square" lIns="0" rIns="0" tIns="0" bIns="0" anchor="ctr">
+            <a:spAutoFit/>
+          </a:bodyPr>
+          <a:lstStyle/>
+          <a:p>
+            <a:pPr algn="l"/>
+            <a:r>
+              <a:rPr sz="2000" b="0">
+                <a:solidFill>
+                  <a:srgbClr val="ECECEE"/>
+                </a:solidFill>
+                <a:latin typeface="Poppins"/>
+              </a:rPr>
+              <a:t>CFO Suite</a:t>
+            </a:r>
+          </a:p>
+        </p:txBody>
+      </p:sp>
+      <p:sp>
+        <p:nvSpPr>
+          <p:cNvPr id="112" name="rect 112"/>
+          <p:cNvSpPr/>
+          <p:nvPr/>
+        </p:nvSpPr>
+        <p:spPr>
+          <a:xfrm>
+            <a:off x="950976" y="3035808"/>
+            <a:ext cx="2788920" cy="10973"/>
+          </a:xfrm>
+          <a:prstGeom prst="rect">
+            <a:avLst/>
+          </a:prstGeom>
+          <a:solidFill>
+            <a:srgbClr val="2B2B2D"/>
+          </a:solidFill>
+          <a:ln>
+            <a:noFill/>
+          </a:ln>
+          <a:effectLst/>
+        </p:spPr>
+        <p:txBody>
+          <a:bodyPr rtlCol="0" anchor="ctr"/>
+          <a:lstStyle/>
+          <a:p>
+            <a:pPr algn="ctr"/>
+          </a:p>
+        </p:txBody>
+      </p:sp>
+      <p:sp>
+        <p:nvSpPr>
+          <p:cNvPr id="113" name="TextBox 113"/>
+          <p:cNvSpPr txBox="1"/>
+          <p:nvPr/>
+        </p:nvSpPr>
+        <p:spPr>
+          <a:xfrm>
+            <a:off x="950976" y="3200400"/>
+            <a:ext cx="2788920" cy="137160"/>
+          </a:xfrm>
+          <a:prstGeom prst="rect">
+            <a:avLst/>
+          </a:prstGeom>
+          <a:noFill/>
+        </p:spPr>
+        <p:txBody>
+          <a:bodyPr wrap="square" lIns="0" rIns="0" tIns="0" bIns="0" anchor="ctr">
+            <a:spAutoFit/>
+          </a:bodyPr>
+          <a:lstStyle/>
+          <a:p>
+            <a:pPr algn="l"/>
+            <a:r>
+              <a:rPr sz="900" b="0" spc="100">
+                <a:solidFill>
+                  <a:srgbClr val="9A9AA2"/>
+                </a:solidFill>
+                <a:latin typeface="Courier New"/>
+              </a:rPr>
+              <a:t>SECTOR</a:t>
+            </a:r>
+          </a:p>
+        </p:txBody>
+      </p:sp>
+      <p:sp>
+        <p:nvSpPr>
+          <p:cNvPr id="114" name="TextBox 114"/>
+          <p:cNvSpPr txBox="1"/>
+          <p:nvPr/>
+        </p:nvSpPr>
+        <p:spPr>
+          <a:xfrm>
+            <a:off x="950976" y="3383280"/>
+            <a:ext cx="2788920" cy="182880"/>
+          </a:xfrm>
+          <a:prstGeom prst="rect">
+            <a:avLst/>
+          </a:prstGeom>
+          <a:noFill/>
+        </p:spPr>
+        <p:txBody>
+          <a:bodyPr wrap="square" lIns="0" rIns="0" tIns="0" bIns="0" anchor="ctr">
+            <a:spAutoFit/>
+          </a:bodyPr>
+          <a:lstStyle/>
+          <a:p>
+            <a:pPr algn="l"/>
+            <a:r>
+              <a:rPr sz="1050" b="0">
+                <a:solidFill>
+                  <a:srgbClr val="ECECEE"/>
+                </a:solidFill>
+                <a:latin typeface="Poppins"/>
+              </a:rPr>
+              <a:t>SME financing · corporate finance</a:t>
+            </a:r>
+          </a:p>
+        </p:txBody>
+      </p:sp>
+      <p:sp>
+        <p:nvSpPr>
+          <p:cNvPr id="115" name="TextBox 115"/>
+          <p:cNvSpPr txBox="1"/>
+          <p:nvPr/>
+        </p:nvSpPr>
+        <p:spPr>
+          <a:xfrm>
+            <a:off x="950976" y="3730752"/>
+            <a:ext cx="2788920" cy="137160"/>
+          </a:xfrm>
+          <a:prstGeom prst="rect">
+            <a:avLst/>
+          </a:prstGeom>
+          <a:noFill/>
+        </p:spPr>
+        <p:txBody>
+          <a:bodyPr wrap="square" lIns="0" rIns="0" tIns="0" bIns="0" anchor="ctr">
+            <a:spAutoFit/>
+          </a:bodyPr>
+          <a:lstStyle/>
+          <a:p>
+            <a:pPr algn="l"/>
+            <a:r>
+              <a:rPr sz="900" b="0" spc="100">
+                <a:solidFill>
+                  <a:srgbClr val="9A9AA2"/>
+                </a:solidFill>
+                <a:latin typeface="Courier New"/>
+              </a:rPr>
+              <a:t>WHAT IT DOES</a:t>
+            </a:r>
+          </a:p>
+        </p:txBody>
+      </p:sp>
+      <p:sp>
+        <p:nvSpPr>
+          <p:cNvPr id="116" name="TextBox 116"/>
+          <p:cNvSpPr txBox="1"/>
+          <p:nvPr/>
+        </p:nvSpPr>
+        <p:spPr>
+          <a:xfrm>
+            <a:off x="950976" y="3913632"/>
+            <a:ext cx="2788920" cy="512064"/>
+          </a:xfrm>
+          <a:prstGeom prst="rect">
+            <a:avLst/>
+          </a:prstGeom>
+          <a:noFill/>
+        </p:spPr>
+        <p:txBody>
+          <a:bodyPr wrap="square" lIns="0" rIns="0" tIns="0" bIns="0" anchor="ctr">
+            <a:spAutoFit/>
+          </a:bodyPr>
+          <a:lstStyle/>
+          <a:p>
+            <a:pPr algn="l"/>
+            <a:r>
+              <a:rPr sz="1050" b="0">
+                <a:solidFill>
+                  <a:srgbClr val="ECECEE"/>
+                </a:solidFill>
+                <a:latin typeface="Poppins"/>
+              </a:rPr>
+              <a:t>Reads a company’s financials and returns a bank-grade credit rating, default probability and pricing as a finished PDF.</a:t>
+            </a:r>
+          </a:p>
+        </p:txBody>
+      </p:sp>
+      <p:sp>
+        <p:nvSpPr>
+          <p:cNvPr id="117" name="rect 117"/>
+          <p:cNvSpPr/>
+          <p:nvPr/>
+        </p:nvSpPr>
+        <p:spPr>
+          <a:xfrm>
+            <a:off x="950976" y="4608576"/>
+            <a:ext cx="2788920" cy="10973"/>
+          </a:xfrm>
+          <a:prstGeom prst="rect">
+            <a:avLst/>
+          </a:prstGeom>
+          <a:solidFill>
+            <a:srgbClr val="2B2B2D"/>
+          </a:solidFill>
+          <a:ln>
+            <a:noFill/>
+          </a:ln>
+          <a:effectLst/>
+        </p:spPr>
+        <p:txBody>
+          <a:bodyPr rtlCol="0" anchor="ctr"/>
+          <a:lstStyle/>
+          <a:p>
+            <a:pPr algn="ctr"/>
+          </a:p>
+        </p:txBody>
+      </p:sp>
+      <p:sp>
+        <p:nvSpPr>
+          <p:cNvPr id="118" name="TextBox 118"/>
+          <p:cNvSpPr txBox="1"/>
+          <p:nvPr/>
+        </p:nvSpPr>
+        <p:spPr>
+          <a:xfrm>
+            <a:off x="950976" y="4773168"/>
+            <a:ext cx="2788920" cy="137160"/>
+          </a:xfrm>
+          <a:prstGeom prst="rect">
+            <a:avLst/>
+          </a:prstGeom>
+          <a:noFill/>
+        </p:spPr>
+        <p:txBody>
+          <a:bodyPr wrap="square" lIns="0" rIns="0" tIns="0" bIns="0" anchor="ctr">
+            <a:spAutoFit/>
+          </a:bodyPr>
+          <a:lstStyle/>
+          <a:p>
+            <a:pPr algn="l"/>
+            <a:r>
+              <a:rPr sz="900" b="0" spc="100">
+                <a:solidFill>
+                  <a:srgbClr val="9A9AA2"/>
+                </a:solidFill>
+                <a:latin typeface="Courier New"/>
+              </a:rPr>
+              <a:t>PROOF</a:t>
+            </a:r>
+          </a:p>
+        </p:txBody>
+      </p:sp>
+      <p:sp>
+        <p:nvSpPr>
+          <p:cNvPr id="119" name="TextBox 119"/>
+          <p:cNvSpPr txBox="1"/>
+          <p:nvPr/>
+        </p:nvSpPr>
+        <p:spPr>
+          <a:xfrm>
+            <a:off x="950976" y="4956048"/>
+            <a:ext cx="2788920" cy="219456"/>
+          </a:xfrm>
+          <a:prstGeom prst="rect">
+            <a:avLst/>
+          </a:prstGeom>
+          <a:noFill/>
+        </p:spPr>
+        <p:txBody>
+          <a:bodyPr wrap="square" lIns="0" rIns="0" tIns="0" bIns="0" anchor="ctr">
+            <a:spAutoFit/>
+          </a:bodyPr>
+          <a:lstStyle/>
+          <a:p>
+            <a:pPr algn="l"/>
+            <a:r>
+              <a:rPr sz="1400" b="1">
+                <a:solidFill>
+                  <a:srgbClr val="ECECEE"/>
+                </a:solidFill>
+                <a:latin typeface="Poppins"/>
+              </a:rPr>
+              <a:t>Bank scorecard</a:t>
+            </a:r>
+          </a:p>
+        </p:txBody>
+      </p:sp>
+      <p:sp>
+        <p:nvSpPr>
+          <p:cNvPr id="120" name="TextBox 120"/>
+          <p:cNvSpPr txBox="1"/>
+          <p:nvPr/>
+        </p:nvSpPr>
+        <p:spPr>
+          <a:xfrm>
+            <a:off x="950976" y="5230368"/>
+            <a:ext cx="2788920" cy="347472"/>
+          </a:xfrm>
+          <a:prstGeom prst="rect">
+            <a:avLst/>
+          </a:prstGeom>
+          <a:noFill/>
+        </p:spPr>
+        <p:txBody>
+          <a:bodyPr wrap="square" lIns="0" rIns="0" tIns="0" bIns="0" anchor="ctr">
+            <a:spAutoFit/>
+          </a:bodyPr>
+          <a:lstStyle/>
+          <a:p>
+            <a:pPr algn="l"/>
+            <a:r>
+              <a:rPr sz="1050" b="0">
+                <a:solidFill>
+                  <a:srgbClr val="9A9AA2"/>
+                </a:solidFill>
+                <a:latin typeface="Poppins"/>
+              </a:rPr>
+              <a:t>Calibrated against a real one. Repositioning to pay-per-use.</a:t>
+            </a:r>
+          </a:p>
+        </p:txBody>
+      </p:sp>
+      <p:sp>
+        <p:nvSpPr>
+          <p:cNvPr id="121" name="rect 121"/>
+          <p:cNvSpPr/>
+          <p:nvPr/>
+        </p:nvSpPr>
+        <p:spPr>
+          <a:xfrm>
+            <a:off x="4315968" y="2011680"/>
+            <a:ext cx="3300984" cy="3602736"/>
+          </a:xfrm>
+          <a:prstGeom prst="rect">
+            <a:avLst/>
+          </a:prstGeom>
+          <a:solidFill>
+            <a:srgbClr val="161619"/>
+          </a:solidFill>
+          <a:ln w="9525">
+            <a:solidFill>
+              <a:srgbClr val="2B2B2D"/>
+            </a:solidFill>
+          </a:ln>
+          <a:effectLst/>
+        </p:spPr>
+        <p:txBody>
+          <a:bodyPr rtlCol="0" anchor="ctr"/>
+          <a:lstStyle/>
+          <a:p>
+            <a:pPr algn="ctr"/>
+          </a:p>
+        </p:txBody>
+      </p:sp>
+      <p:pic>
+        <p:nvPicPr>
+          <p:cNvPr id="122" name="Picture 122"/>
           <p:cNvPicPr/>
           <p:nvPr/>
         </p:nvPicPr>
@@ -12035,7 +12636,7 @@
         </p:blipFill>
         <p:spPr>
           <a:xfrm>
-            <a:off x="950976" y="2249424"/>
+            <a:off x="4572000" y="2249424"/>
             <a:ext cx="219456" cy="219456"/>
           </a:xfrm>
           <a:prstGeom prst="rect">
@@ -12045,13 +12646,13 @@
       </p:pic>
       <p:sp>
         <p:nvSpPr>
-          <p:cNvPr id="109" name="rect 109"/>
+          <p:cNvPr id="123" name="rect 123"/>
           <p:cNvSpPr/>
           <p:nvPr/>
         </p:nvSpPr>
         <p:spPr>
           <a:xfrm>
-            <a:off x="2898648" y="2212848"/>
+            <a:off x="6519672" y="2212848"/>
             <a:ext cx="841248" cy="274320"/>
           </a:xfrm>
           <a:prstGeom prst="rect">
@@ -12062,7 +12663,7 @@
           </a:solidFill>
           <a:ln w="9525">
             <a:solidFill>
-              <a:srgbClr val="9A9AA2"/>
+              <a:srgbClr val="FF6B3D"/>
             </a:solidFill>
           </a:ln>
           <a:effectLst/>
@@ -12077,13 +12678,13 @@
       </p:sp>
       <p:sp>
         <p:nvSpPr>
-          <p:cNvPr id="110" name="TextBox 110"/>
-          <p:cNvSpPr txBox="1"/>
-          <p:nvPr/>
-        </p:nvSpPr>
-        <p:spPr>
-          <a:xfrm>
-            <a:off x="2898648" y="2290572"/>
+          <p:cNvPr id="124" name="TextBox 124"/>
+          <p:cNvSpPr txBox="1"/>
+          <p:nvPr/>
+        </p:nvSpPr>
+        <p:spPr>
+          <a:xfrm>
+            <a:off x="6519672" y="2290572"/>
             <a:ext cx="841248" cy="137160"/>
           </a:xfrm>
           <a:prstGeom prst="rect">
@@ -12101,24 +12702,24 @@
             <a:r>
               <a:rPr sz="900" b="0" spc="100">
                 <a:solidFill>
-                  <a:srgbClr val="9A9AA2"/>
+                  <a:srgbClr val="FF6B3D"/>
                 </a:solidFill>
                 <a:latin typeface="Courier New"/>
               </a:rPr>
-              <a:t>BUILT</a:t>
-            </a:r>
-          </a:p>
-        </p:txBody>
-      </p:sp>
-      <p:sp>
-        <p:nvSpPr>
-          <p:cNvPr id="111" name="TextBox 111"/>
-          <p:cNvSpPr txBox="1"/>
-          <p:nvPr/>
-        </p:nvSpPr>
-        <p:spPr>
-          <a:xfrm>
-            <a:off x="950976" y="2578608"/>
+              <a:t>LIVE</a:t>
+            </a:r>
+          </a:p>
+        </p:txBody>
+      </p:sp>
+      <p:sp>
+        <p:nvSpPr>
+          <p:cNvPr id="125" name="TextBox 125"/>
+          <p:cNvSpPr txBox="1"/>
+          <p:nvPr/>
+        </p:nvSpPr>
+        <p:spPr>
+          <a:xfrm>
+            <a:off x="4572000" y="2578608"/>
             <a:ext cx="2788920" cy="301752"/>
           </a:xfrm>
           <a:prstGeom prst="rect">
@@ -12140,20 +12741,20 @@
                 </a:solidFill>
                 <a:latin typeface="Poppins"/>
               </a:rPr>
-              <a:t>CFO Suite</a:t>
-            </a:r>
-          </a:p>
-        </p:txBody>
-      </p:sp>
-      <p:sp>
-        <p:nvSpPr>
-          <p:cNvPr id="112" name="rect 112"/>
+              <a:t>Baru</a:t>
+            </a:r>
+          </a:p>
+        </p:txBody>
+      </p:sp>
+      <p:sp>
+        <p:nvSpPr>
+          <p:cNvPr id="126" name="rect 126"/>
           <p:cNvSpPr/>
           <p:nvPr/>
         </p:nvSpPr>
         <p:spPr>
           <a:xfrm>
-            <a:off x="950976" y="3035808"/>
+            <a:off x="4572000" y="3035808"/>
             <a:ext cx="2788920" cy="10973"/>
           </a:xfrm>
           <a:prstGeom prst="rect">
@@ -12177,13 +12778,13 @@
       </p:sp>
       <p:sp>
         <p:nvSpPr>
-          <p:cNvPr id="113" name="TextBox 113"/>
-          <p:cNvSpPr txBox="1"/>
-          <p:nvPr/>
-        </p:nvSpPr>
-        <p:spPr>
-          <a:xfrm>
-            <a:off x="950976" y="3200400"/>
+          <p:cNvPr id="127" name="TextBox 127"/>
+          <p:cNvSpPr txBox="1"/>
+          <p:nvPr/>
+        </p:nvSpPr>
+        <p:spPr>
+          <a:xfrm>
+            <a:off x="4572000" y="3200400"/>
             <a:ext cx="2788920" cy="137160"/>
           </a:xfrm>
           <a:prstGeom prst="rect">
@@ -12212,13 +12813,13 @@
       </p:sp>
       <p:sp>
         <p:nvSpPr>
-          <p:cNvPr id="114" name="TextBox 114"/>
-          <p:cNvSpPr txBox="1"/>
-          <p:nvPr/>
-        </p:nvSpPr>
-        <p:spPr>
-          <a:xfrm>
-            <a:off x="950976" y="3383280"/>
+          <p:cNvPr id="128" name="TextBox 128"/>
+          <p:cNvSpPr txBox="1"/>
+          <p:nvPr/>
+        </p:nvSpPr>
+        <p:spPr>
+          <a:xfrm>
+            <a:off x="4572000" y="3383280"/>
             <a:ext cx="2788920" cy="182880"/>
           </a:xfrm>
           <a:prstGeom prst="rect">
@@ -12240,20 +12841,20 @@
                 </a:solidFill>
                 <a:latin typeface="Poppins"/>
               </a:rPr>
-              <a:t>SME financing · corporate finance</a:t>
-            </a:r>
-          </a:p>
-        </p:txBody>
-      </p:sp>
-      <p:sp>
-        <p:nvSpPr>
-          <p:cNvPr id="115" name="TextBox 115"/>
-          <p:cNvSpPr txBox="1"/>
-          <p:nvPr/>
-        </p:nvSpPr>
-        <p:spPr>
-          <a:xfrm>
-            <a:off x="950976" y="3730752"/>
+              <a:t>B2B sales · outbound acquisition</a:t>
+            </a:r>
+          </a:p>
+        </p:txBody>
+      </p:sp>
+      <p:sp>
+        <p:nvSpPr>
+          <p:cNvPr id="129" name="TextBox 129"/>
+          <p:cNvSpPr txBox="1"/>
+          <p:nvPr/>
+        </p:nvSpPr>
+        <p:spPr>
+          <a:xfrm>
+            <a:off x="4572000" y="3730752"/>
             <a:ext cx="2788920" cy="137160"/>
           </a:xfrm>
           <a:prstGeom prst="rect">
@@ -12282,13 +12883,13 @@
       </p:sp>
       <p:sp>
         <p:nvSpPr>
-          <p:cNvPr id="116" name="TextBox 116"/>
-          <p:cNvSpPr txBox="1"/>
-          <p:nvPr/>
-        </p:nvSpPr>
-        <p:spPr>
-          <a:xfrm>
-            <a:off x="950976" y="3913632"/>
+          <p:cNvPr id="130" name="TextBox 130"/>
+          <p:cNvSpPr txBox="1"/>
+          <p:nvPr/>
+        </p:nvSpPr>
+        <p:spPr>
+          <a:xfrm>
+            <a:off x="4572000" y="3913632"/>
             <a:ext cx="2788920" cy="512064"/>
           </a:xfrm>
           <a:prstGeom prst="rect">
@@ -12310,20 +12911,20 @@
                 </a:solidFill>
                 <a:latin typeface="Poppins"/>
               </a:rPr>
-              <a:t>Reads a company’s financials and returns a bank-grade credit rating, default probability and pricing as a finished PDF.</a:t>
-            </a:r>
-          </a:p>
-        </p:txBody>
-      </p:sp>
-      <p:sp>
-        <p:nvSpPr>
-          <p:cNvPr id="117" name="rect 117"/>
+              <a:t>Finds and qualifies B2B leads, drafts the outreach, and routes every send through a Slack approval.</a:t>
+            </a:r>
+          </a:p>
+        </p:txBody>
+      </p:sp>
+      <p:sp>
+        <p:nvSpPr>
+          <p:cNvPr id="131" name="rect 131"/>
           <p:cNvSpPr/>
           <p:nvPr/>
         </p:nvSpPr>
         <p:spPr>
           <a:xfrm>
-            <a:off x="950976" y="4608576"/>
+            <a:off x="4572000" y="4608576"/>
             <a:ext cx="2788920" cy="10973"/>
           </a:xfrm>
           <a:prstGeom prst="rect">
@@ -12347,13 +12948,13 @@
       </p:sp>
       <p:sp>
         <p:nvSpPr>
-          <p:cNvPr id="118" name="TextBox 118"/>
-          <p:cNvSpPr txBox="1"/>
-          <p:nvPr/>
-        </p:nvSpPr>
-        <p:spPr>
-          <a:xfrm>
-            <a:off x="950976" y="4773168"/>
+          <p:cNvPr id="132" name="TextBox 132"/>
+          <p:cNvSpPr txBox="1"/>
+          <p:nvPr/>
+        </p:nvSpPr>
+        <p:spPr>
+          <a:xfrm>
+            <a:off x="4572000" y="4773168"/>
             <a:ext cx="2788920" cy="137160"/>
           </a:xfrm>
           <a:prstGeom prst="rect">
@@ -12382,13 +12983,13 @@
       </p:sp>
       <p:sp>
         <p:nvSpPr>
-          <p:cNvPr id="119" name="TextBox 119"/>
-          <p:cNvSpPr txBox="1"/>
-          <p:nvPr/>
-        </p:nvSpPr>
-        <p:spPr>
-          <a:xfrm>
-            <a:off x="950976" y="4956048"/>
+          <p:cNvPr id="133" name="TextBox 133"/>
+          <p:cNvSpPr txBox="1"/>
+          <p:nvPr/>
+        </p:nvSpPr>
+        <p:spPr>
+          <a:xfrm>
+            <a:off x="4572000" y="4956048"/>
             <a:ext cx="2788920" cy="219456"/>
           </a:xfrm>
           <a:prstGeom prst="rect">
@@ -12406,24 +13007,24 @@
             <a:r>
               <a:rPr sz="1400" b="1">
                 <a:solidFill>
-                  <a:srgbClr val="ECECEE"/>
+                  <a:srgbClr val="FF6B3D"/>
                 </a:solidFill>
                 <a:latin typeface="Poppins"/>
               </a:rPr>
-              <a:t>Bank scorecard</a:t>
-            </a:r>
-          </a:p>
-        </p:txBody>
-      </p:sp>
-      <p:sp>
-        <p:nvSpPr>
-          <p:cNvPr id="120" name="TextBox 120"/>
-          <p:cNvSpPr txBox="1"/>
-          <p:nvPr/>
-        </p:nvSpPr>
-        <p:spPr>
-          <a:xfrm>
-            <a:off x="950976" y="5230368"/>
+              <a:t>€90 / month</a:t>
+            </a:r>
+          </a:p>
+        </p:txBody>
+      </p:sp>
+      <p:sp>
+        <p:nvSpPr>
+          <p:cNvPr id="134" name="TextBox 134"/>
+          <p:cNvSpPr txBox="1"/>
+          <p:nvPr/>
+        </p:nvSpPr>
+        <p:spPr>
+          <a:xfrm>
+            <a:off x="4572000" y="5230368"/>
             <a:ext cx="2788920" cy="347472"/>
           </a:xfrm>
           <a:prstGeom prst="rect">
@@ -12445,20 +13046,20 @@
                 </a:solidFill>
                 <a:latin typeface="Poppins"/>
               </a:rPr>
-              <a:t>Calibrated against a real one. Repositioning to pay-per-use.</a:t>
-            </a:r>
-          </a:p>
-        </p:txBody>
-      </p:sp>
-      <p:sp>
-        <p:nvSpPr>
-          <p:cNvPr id="121" name="rect 121"/>
+              <a:t>Paying customer since June 2026, 150 leads per month.</a:t>
+            </a:r>
+          </a:p>
+        </p:txBody>
+      </p:sp>
+      <p:sp>
+        <p:nvSpPr>
+          <p:cNvPr id="135" name="rect 135"/>
           <p:cNvSpPr/>
           <p:nvPr/>
         </p:nvSpPr>
         <p:spPr>
           <a:xfrm>
-            <a:off x="4315968" y="2011680"/>
+            <a:off x="7936992" y="2011680"/>
             <a:ext cx="3300984" cy="3602736"/>
           </a:xfrm>
           <a:prstGeom prst="rect">
@@ -12484,7 +13085,7 @@
       </p:sp>
       <p:pic>
         <p:nvPicPr>
-          <p:cNvPr id="122" name="Picture 122"/>
+          <p:cNvPr id="136" name="Picture 136"/>
           <p:cNvPicPr/>
           <p:nvPr/>
         </p:nvPicPr>
@@ -12496,467 +13097,6 @@
         </p:blipFill>
         <p:spPr>
           <a:xfrm>
-            <a:off x="4572000" y="2249424"/>
-            <a:ext cx="219456" cy="219456"/>
-          </a:xfrm>
-          <a:prstGeom prst="rect">
-            <a:avLst/>
-          </a:prstGeom>
-        </p:spPr>
-      </p:pic>
-      <p:sp>
-        <p:nvSpPr>
-          <p:cNvPr id="123" name="rect 123"/>
-          <p:cNvSpPr/>
-          <p:nvPr/>
-        </p:nvSpPr>
-        <p:spPr>
-          <a:xfrm>
-            <a:off x="6519672" y="2212848"/>
-            <a:ext cx="841248" cy="274320"/>
-          </a:xfrm>
-          <a:prstGeom prst="rect">
-            <a:avLst/>
-          </a:prstGeom>
-          <a:solidFill>
-            <a:srgbClr val="0E0E11"/>
-          </a:solidFill>
-          <a:ln w="9525">
-            <a:solidFill>
-              <a:srgbClr val="FF6B3D"/>
-            </a:solidFill>
-          </a:ln>
-          <a:effectLst/>
-        </p:spPr>
-        <p:txBody>
-          <a:bodyPr rtlCol="0" anchor="ctr"/>
-          <a:lstStyle/>
-          <a:p>
-            <a:pPr algn="ctr"/>
-          </a:p>
-        </p:txBody>
-      </p:sp>
-      <p:sp>
-        <p:nvSpPr>
-          <p:cNvPr id="124" name="TextBox 124"/>
-          <p:cNvSpPr txBox="1"/>
-          <p:nvPr/>
-        </p:nvSpPr>
-        <p:spPr>
-          <a:xfrm>
-            <a:off x="6519672" y="2290572"/>
-            <a:ext cx="841248" cy="137160"/>
-          </a:xfrm>
-          <a:prstGeom prst="rect">
-            <a:avLst/>
-          </a:prstGeom>
-          <a:noFill/>
-        </p:spPr>
-        <p:txBody>
-          <a:bodyPr wrap="square" lIns="0" rIns="0" tIns="0" bIns="0" anchor="ctr">
-            <a:spAutoFit/>
-          </a:bodyPr>
-          <a:lstStyle/>
-          <a:p>
-            <a:pPr algn="ctr"/>
-            <a:r>
-              <a:rPr sz="900" b="0" spc="100">
-                <a:solidFill>
-                  <a:srgbClr val="FF6B3D"/>
-                </a:solidFill>
-                <a:latin typeface="Courier New"/>
-              </a:rPr>
-              <a:t>LIVE</a:t>
-            </a:r>
-          </a:p>
-        </p:txBody>
-      </p:sp>
-      <p:sp>
-        <p:nvSpPr>
-          <p:cNvPr id="125" name="TextBox 125"/>
-          <p:cNvSpPr txBox="1"/>
-          <p:nvPr/>
-        </p:nvSpPr>
-        <p:spPr>
-          <a:xfrm>
-            <a:off x="4572000" y="2578608"/>
-            <a:ext cx="2788920" cy="301752"/>
-          </a:xfrm>
-          <a:prstGeom prst="rect">
-            <a:avLst/>
-          </a:prstGeom>
-          <a:noFill/>
-        </p:spPr>
-        <p:txBody>
-          <a:bodyPr wrap="square" lIns="0" rIns="0" tIns="0" bIns="0" anchor="ctr">
-            <a:spAutoFit/>
-          </a:bodyPr>
-          <a:lstStyle/>
-          <a:p>
-            <a:pPr algn="l"/>
-            <a:r>
-              <a:rPr sz="2000" b="0">
-                <a:solidFill>
-                  <a:srgbClr val="ECECEE"/>
-                </a:solidFill>
-                <a:latin typeface="Poppins"/>
-              </a:rPr>
-              <a:t>Baru</a:t>
-            </a:r>
-          </a:p>
-        </p:txBody>
-      </p:sp>
-      <p:sp>
-        <p:nvSpPr>
-          <p:cNvPr id="126" name="rect 126"/>
-          <p:cNvSpPr/>
-          <p:nvPr/>
-        </p:nvSpPr>
-        <p:spPr>
-          <a:xfrm>
-            <a:off x="4572000" y="3035808"/>
-            <a:ext cx="2788920" cy="10973"/>
-          </a:xfrm>
-          <a:prstGeom prst="rect">
-            <a:avLst/>
-          </a:prstGeom>
-          <a:solidFill>
-            <a:srgbClr val="2B2B2D"/>
-          </a:solidFill>
-          <a:ln>
-            <a:noFill/>
-          </a:ln>
-          <a:effectLst/>
-        </p:spPr>
-        <p:txBody>
-          <a:bodyPr rtlCol="0" anchor="ctr"/>
-          <a:lstStyle/>
-          <a:p>
-            <a:pPr algn="ctr"/>
-          </a:p>
-        </p:txBody>
-      </p:sp>
-      <p:sp>
-        <p:nvSpPr>
-          <p:cNvPr id="127" name="TextBox 127"/>
-          <p:cNvSpPr txBox="1"/>
-          <p:nvPr/>
-        </p:nvSpPr>
-        <p:spPr>
-          <a:xfrm>
-            <a:off x="4572000" y="3200400"/>
-            <a:ext cx="2788920" cy="137160"/>
-          </a:xfrm>
-          <a:prstGeom prst="rect">
-            <a:avLst/>
-          </a:prstGeom>
-          <a:noFill/>
-        </p:spPr>
-        <p:txBody>
-          <a:bodyPr wrap="square" lIns="0" rIns="0" tIns="0" bIns="0" anchor="ctr">
-            <a:spAutoFit/>
-          </a:bodyPr>
-          <a:lstStyle/>
-          <a:p>
-            <a:pPr algn="l"/>
-            <a:r>
-              <a:rPr sz="900" b="0" spc="100">
-                <a:solidFill>
-                  <a:srgbClr val="9A9AA2"/>
-                </a:solidFill>
-                <a:latin typeface="Courier New"/>
-              </a:rPr>
-              <a:t>SECTOR</a:t>
-            </a:r>
-          </a:p>
-        </p:txBody>
-      </p:sp>
-      <p:sp>
-        <p:nvSpPr>
-          <p:cNvPr id="128" name="TextBox 128"/>
-          <p:cNvSpPr txBox="1"/>
-          <p:nvPr/>
-        </p:nvSpPr>
-        <p:spPr>
-          <a:xfrm>
-            <a:off x="4572000" y="3383280"/>
-            <a:ext cx="2788920" cy="182880"/>
-          </a:xfrm>
-          <a:prstGeom prst="rect">
-            <a:avLst/>
-          </a:prstGeom>
-          <a:noFill/>
-        </p:spPr>
-        <p:txBody>
-          <a:bodyPr wrap="square" lIns="0" rIns="0" tIns="0" bIns="0" anchor="ctr">
-            <a:spAutoFit/>
-          </a:bodyPr>
-          <a:lstStyle/>
-          <a:p>
-            <a:pPr algn="l"/>
-            <a:r>
-              <a:rPr sz="1050" b="0">
-                <a:solidFill>
-                  <a:srgbClr val="ECECEE"/>
-                </a:solidFill>
-                <a:latin typeface="Poppins"/>
-              </a:rPr>
-              <a:t>B2B sales · outbound acquisition</a:t>
-            </a:r>
-          </a:p>
-        </p:txBody>
-      </p:sp>
-      <p:sp>
-        <p:nvSpPr>
-          <p:cNvPr id="129" name="TextBox 129"/>
-          <p:cNvSpPr txBox="1"/>
-          <p:nvPr/>
-        </p:nvSpPr>
-        <p:spPr>
-          <a:xfrm>
-            <a:off x="4572000" y="3730752"/>
-            <a:ext cx="2788920" cy="137160"/>
-          </a:xfrm>
-          <a:prstGeom prst="rect">
-            <a:avLst/>
-          </a:prstGeom>
-          <a:noFill/>
-        </p:spPr>
-        <p:txBody>
-          <a:bodyPr wrap="square" lIns="0" rIns="0" tIns="0" bIns="0" anchor="ctr">
-            <a:spAutoFit/>
-          </a:bodyPr>
-          <a:lstStyle/>
-          <a:p>
-            <a:pPr algn="l"/>
-            <a:r>
-              <a:rPr sz="900" b="0" spc="100">
-                <a:solidFill>
-                  <a:srgbClr val="9A9AA2"/>
-                </a:solidFill>
-                <a:latin typeface="Courier New"/>
-              </a:rPr>
-              <a:t>WHAT IT DOES</a:t>
-            </a:r>
-          </a:p>
-        </p:txBody>
-      </p:sp>
-      <p:sp>
-        <p:nvSpPr>
-          <p:cNvPr id="130" name="TextBox 130"/>
-          <p:cNvSpPr txBox="1"/>
-          <p:nvPr/>
-        </p:nvSpPr>
-        <p:spPr>
-          <a:xfrm>
-            <a:off x="4572000" y="3913632"/>
-            <a:ext cx="2788920" cy="512064"/>
-          </a:xfrm>
-          <a:prstGeom prst="rect">
-            <a:avLst/>
-          </a:prstGeom>
-          <a:noFill/>
-        </p:spPr>
-        <p:txBody>
-          <a:bodyPr wrap="square" lIns="0" rIns="0" tIns="0" bIns="0" anchor="ctr">
-            <a:spAutoFit/>
-          </a:bodyPr>
-          <a:lstStyle/>
-          <a:p>
-            <a:pPr algn="l"/>
-            <a:r>
-              <a:rPr sz="1050" b="0">
-                <a:solidFill>
-                  <a:srgbClr val="ECECEE"/>
-                </a:solidFill>
-                <a:latin typeface="Poppins"/>
-              </a:rPr>
-              <a:t>Finds and qualifies B2B leads, drafts the outreach, and routes every send through a Slack approval.</a:t>
-            </a:r>
-          </a:p>
-        </p:txBody>
-      </p:sp>
-      <p:sp>
-        <p:nvSpPr>
-          <p:cNvPr id="131" name="rect 131"/>
-          <p:cNvSpPr/>
-          <p:nvPr/>
-        </p:nvSpPr>
-        <p:spPr>
-          <a:xfrm>
-            <a:off x="4572000" y="4608576"/>
-            <a:ext cx="2788920" cy="10973"/>
-          </a:xfrm>
-          <a:prstGeom prst="rect">
-            <a:avLst/>
-          </a:prstGeom>
-          <a:solidFill>
-            <a:srgbClr val="2B2B2D"/>
-          </a:solidFill>
-          <a:ln>
-            <a:noFill/>
-          </a:ln>
-          <a:effectLst/>
-        </p:spPr>
-        <p:txBody>
-          <a:bodyPr rtlCol="0" anchor="ctr"/>
-          <a:lstStyle/>
-          <a:p>
-            <a:pPr algn="ctr"/>
-          </a:p>
-        </p:txBody>
-      </p:sp>
-      <p:sp>
-        <p:nvSpPr>
-          <p:cNvPr id="132" name="TextBox 132"/>
-          <p:cNvSpPr txBox="1"/>
-          <p:nvPr/>
-        </p:nvSpPr>
-        <p:spPr>
-          <a:xfrm>
-            <a:off x="4572000" y="4773168"/>
-            <a:ext cx="2788920" cy="137160"/>
-          </a:xfrm>
-          <a:prstGeom prst="rect">
-            <a:avLst/>
-          </a:prstGeom>
-          <a:noFill/>
-        </p:spPr>
-        <p:txBody>
-          <a:bodyPr wrap="square" lIns="0" rIns="0" tIns="0" bIns="0" anchor="ctr">
-            <a:spAutoFit/>
-          </a:bodyPr>
-          <a:lstStyle/>
-          <a:p>
-            <a:pPr algn="l"/>
-            <a:r>
-              <a:rPr sz="900" b="0" spc="100">
-                <a:solidFill>
-                  <a:srgbClr val="9A9AA2"/>
-                </a:solidFill>
-                <a:latin typeface="Courier New"/>
-              </a:rPr>
-              <a:t>PROOF</a:t>
-            </a:r>
-          </a:p>
-        </p:txBody>
-      </p:sp>
-      <p:sp>
-        <p:nvSpPr>
-          <p:cNvPr id="133" name="TextBox 133"/>
-          <p:cNvSpPr txBox="1"/>
-          <p:nvPr/>
-        </p:nvSpPr>
-        <p:spPr>
-          <a:xfrm>
-            <a:off x="4572000" y="4956048"/>
-            <a:ext cx="2788920" cy="219456"/>
-          </a:xfrm>
-          <a:prstGeom prst="rect">
-            <a:avLst/>
-          </a:prstGeom>
-          <a:noFill/>
-        </p:spPr>
-        <p:txBody>
-          <a:bodyPr wrap="square" lIns="0" rIns="0" tIns="0" bIns="0" anchor="ctr">
-            <a:spAutoFit/>
-          </a:bodyPr>
-          <a:lstStyle/>
-          <a:p>
-            <a:pPr algn="l"/>
-            <a:r>
-              <a:rPr sz="1400" b="1">
-                <a:solidFill>
-                  <a:srgbClr val="FF6B3D"/>
-                </a:solidFill>
-                <a:latin typeface="Poppins"/>
-              </a:rPr>
-              <a:t>€90 / month</a:t>
-            </a:r>
-          </a:p>
-        </p:txBody>
-      </p:sp>
-      <p:sp>
-        <p:nvSpPr>
-          <p:cNvPr id="134" name="TextBox 134"/>
-          <p:cNvSpPr txBox="1"/>
-          <p:nvPr/>
-        </p:nvSpPr>
-        <p:spPr>
-          <a:xfrm>
-            <a:off x="4572000" y="5230368"/>
-            <a:ext cx="2788920" cy="347472"/>
-          </a:xfrm>
-          <a:prstGeom prst="rect">
-            <a:avLst/>
-          </a:prstGeom>
-          <a:noFill/>
-        </p:spPr>
-        <p:txBody>
-          <a:bodyPr wrap="square" lIns="0" rIns="0" tIns="0" bIns="0" anchor="ctr">
-            <a:spAutoFit/>
-          </a:bodyPr>
-          <a:lstStyle/>
-          <a:p>
-            <a:pPr algn="l"/>
-            <a:r>
-              <a:rPr sz="1050" b="0">
-                <a:solidFill>
-                  <a:srgbClr val="9A9AA2"/>
-                </a:solidFill>
-                <a:latin typeface="Poppins"/>
-              </a:rPr>
-              <a:t>Paying customer since June 2026, 150 leads per month.</a:t>
-            </a:r>
-          </a:p>
-        </p:txBody>
-      </p:sp>
-      <p:sp>
-        <p:nvSpPr>
-          <p:cNvPr id="135" name="rect 135"/>
-          <p:cNvSpPr/>
-          <p:nvPr/>
-        </p:nvSpPr>
-        <p:spPr>
-          <a:xfrm>
-            <a:off x="7936992" y="2011680"/>
-            <a:ext cx="3300984" cy="3602736"/>
-          </a:xfrm>
-          <a:prstGeom prst="rect">
-            <a:avLst/>
-          </a:prstGeom>
-          <a:solidFill>
-            <a:srgbClr val="161619"/>
-          </a:solidFill>
-          <a:ln w="9525">
-            <a:solidFill>
-              <a:srgbClr val="2B2B2D"/>
-            </a:solidFill>
-          </a:ln>
-          <a:effectLst/>
-        </p:spPr>
-        <p:txBody>
-          <a:bodyPr rtlCol="0" anchor="ctr"/>
-          <a:lstStyle/>
-          <a:p>
-            <a:pPr algn="ctr"/>
-          </a:p>
-        </p:txBody>
-      </p:sp>
-      <p:pic>
-        <p:nvPicPr>
-          <p:cNvPr id="136" name="Picture 136"/>
-          <p:cNvPicPr/>
-          <p:nvPr/>
-        </p:nvPicPr>
-        <p:blipFill>
-          <a:blip r:embed="rId6"/>
-          <a:stretch>
-            <a:fillRect/>
-          </a:stretch>
-        </p:blipFill>
-        <p:spPr>
-          <a:xfrm>
             <a:off x="8193024" y="2249424"/>
             <a:ext cx="219456" cy="219456"/>
           </a:xfrm>
@@ -13444,7 +13584,7 @@
           <p:nvPr/>
         </p:nvPicPr>
         <p:blipFill>
-          <a:blip r:embed="rId3"/>
+          <a:blip r:embed="rId2"/>
           <a:stretch>
             <a:fillRect/>
           </a:stretch>
@@ -13485,28 +13625,36 @@
           <a:chExt cx="0" cy="0"/>
         </a:xfrm>
       </p:grpSpPr>
-      <p:pic>
-        <p:nvPicPr>
-          <p:cNvPr id="101" name="Picture 1"/>
-          <p:cNvPicPr/>
-          <p:nvPr/>
-        </p:nvPicPr>
-        <p:blipFill>
-          <a:blip r:embed="rId2"/>
-          <a:stretch>
-            <a:fillRect/>
-          </a:stretch>
-        </p:blipFill>
+      <p:sp>
+        <p:nvSpPr>
+          <p:cNvPr id="101" name="rect 101"/>
+          <p:cNvSpPr/>
+          <p:nvPr/>
+        </p:nvSpPr>
         <p:spPr>
           <a:xfrm>
             <a:off x="0" y="0"/>
-            <a:ext cx="12191695" cy="6858000"/>
-          </a:xfrm>
-          <a:prstGeom prst="rect">
-            <a:avLst/>
-          </a:prstGeom>
-        </p:spPr>
-      </p:pic>
+            <a:ext cx="12191970" cy="6858000"/>
+          </a:xfrm>
+          <a:prstGeom prst="rect">
+            <a:avLst/>
+          </a:prstGeom>
+          <a:solidFill>
+            <a:srgbClr val="0E0E11"/>
+          </a:solidFill>
+          <a:ln>
+            <a:noFill/>
+          </a:ln>
+          <a:effectLst/>
+        </p:spPr>
+        <p:txBody>
+          <a:bodyPr rtlCol="0" anchor="ctr"/>
+          <a:lstStyle/>
+          <a:p>
+            <a:pPr algn="ctr"/>
+          </a:p>
+        </p:txBody>
+      </p:sp>
       <p:sp>
         <p:nvSpPr>
           <p:cNvPr id="102" name="TextBox 102"/>
@@ -13969,7 +14117,7 @@
           <p:nvPr/>
         </p:nvPicPr>
         <p:blipFill>
-          <a:blip r:embed="rId3"/>
+          <a:blip r:embed="rId2"/>
           <a:stretch>
             <a:fillRect/>
           </a:stretch>
@@ -14003,30 +14151,36 @@
         <p:nvPr/>
       </p:nvGrpSpPr>
       <p:grpSpPr/>
-      <p:pic>
-        <p:nvPicPr>
-          <p:cNvPr id="2" name="Picture 1" descr="image.png"/>
-          <p:cNvPicPr>
-            <a:picLocks noChangeAspect="1"/>
-          </p:cNvPicPr>
-          <p:nvPr/>
-        </p:nvPicPr>
-        <p:blipFill>
-          <a:blip r:embed="rId2"/>
-          <a:stretch>
-            <a:fillRect/>
-          </a:stretch>
-        </p:blipFill>
+      <p:sp>
+        <p:nvSpPr>
+          <p:cNvPr id="981" name="rect 981"/>
+          <p:cNvSpPr/>
+          <p:nvPr/>
+        </p:nvSpPr>
         <p:spPr>
           <a:xfrm>
             <a:off x="0" y="0"/>
-            <a:ext cx="12192000" cy="6858000"/>
-          </a:xfrm>
-          <a:prstGeom prst="rect">
-            <a:avLst/>
-          </a:prstGeom>
-        </p:spPr>
-      </p:pic>
+            <a:ext cx="12191970" cy="6858000"/>
+          </a:xfrm>
+          <a:prstGeom prst="rect">
+            <a:avLst/>
+          </a:prstGeom>
+          <a:solidFill>
+            <a:srgbClr val="0E0E11"/>
+          </a:solidFill>
+          <a:ln>
+            <a:noFill/>
+          </a:ln>
+          <a:effectLst/>
+        </p:spPr>
+        <p:txBody>
+          <a:bodyPr rtlCol="0" anchor="ctr"/>
+          <a:lstStyle/>
+          <a:p>
+            <a:pPr algn="ctr"/>
+          </a:p>
+        </p:txBody>
+      </p:sp>
       <p:sp>
         <p:nvSpPr>
           <p:cNvPr id="3" name="TextBox 2"/>
@@ -14199,30 +14353,36 @@
           <a:chExt cx="0" cy="0"/>
         </a:xfrm>
       </p:grpSpPr>
-      <p:pic>
-        <p:nvPicPr>
-          <p:cNvPr id="2" name="Picture 1" descr="image.png"/>
-          <p:cNvPicPr>
-            <a:picLocks noChangeAspect="1"/>
-          </p:cNvPicPr>
-          <p:nvPr/>
-        </p:nvPicPr>
-        <p:blipFill>
-          <a:blip r:embed="rId3"/>
-          <a:stretch>
-            <a:fillRect/>
-          </a:stretch>
-        </p:blipFill>
+      <p:sp>
+        <p:nvSpPr>
+          <p:cNvPr id="991" name="rect 991"/>
+          <p:cNvSpPr/>
+          <p:nvPr/>
+        </p:nvSpPr>
         <p:spPr>
           <a:xfrm>
             <a:off x="0" y="0"/>
-            <a:ext cx="12179300" cy="6858000"/>
-          </a:xfrm>
-          <a:prstGeom prst="rect">
-            <a:avLst/>
-          </a:prstGeom>
-        </p:spPr>
-      </p:pic>
+            <a:ext cx="12191970" cy="6858000"/>
+          </a:xfrm>
+          <a:prstGeom prst="rect">
+            <a:avLst/>
+          </a:prstGeom>
+          <a:solidFill>
+            <a:srgbClr val="0E0E11"/>
+          </a:solidFill>
+          <a:ln>
+            <a:noFill/>
+          </a:ln>
+          <a:effectLst/>
+        </p:spPr>
+        <p:txBody>
+          <a:bodyPr rtlCol="0" anchor="ctr"/>
+          <a:lstStyle/>
+          <a:p>
+            <a:pPr algn="ctr"/>
+          </a:p>
+        </p:txBody>
+      </p:sp>
       <p:sp>
         <p:nvSpPr>
           <p:cNvPr id="3" name="TextBox 2"/>

--- a/decks/Pitch_Deck_AthenaRun_v4.pptx
+++ b/decks/Pitch_Deck_AthenaRun_v4.pptx
@@ -10926,7 +10926,7 @@
         <p:spPr>
           <a:xfrm>
             <a:off x="694944" y="1280160"/>
-            <a:ext cx="10789920" cy="219456"/>
+            <a:ext cx="10789920" cy="201168"/>
           </a:xfrm>
           <a:prstGeom prst="rect">
             <a:avLst/>
@@ -10960,7 +10960,7 @@
         </p:nvSpPr>
         <p:spPr>
           <a:xfrm>
-            <a:off x="694944" y="1828800"/>
+            <a:off x="694944" y="1773936"/>
             <a:ext cx="4572000" cy="164592"/>
           </a:xfrm>
           <a:prstGeom prst="rect">
@@ -10995,8 +10995,8 @@
         </p:nvSpPr>
         <p:spPr>
           <a:xfrm>
-            <a:off x="694944" y="2103120"/>
-            <a:ext cx="3377184" cy="914400"/>
+            <a:off x="694944" y="2011680"/>
+            <a:ext cx="3377184" cy="896112"/>
           </a:xfrm>
           <a:prstGeom prst="rect">
             <a:avLst/>
@@ -11027,7 +11027,7 @@
         </p:nvSpPr>
         <p:spPr>
           <a:xfrm>
-            <a:off x="694944" y="2322576"/>
+            <a:off x="694944" y="2212848"/>
             <a:ext cx="3377184" cy="256032"/>
           </a:xfrm>
           <a:prstGeom prst="rect">
@@ -11062,7 +11062,7 @@
         </p:nvSpPr>
         <p:spPr>
           <a:xfrm>
-            <a:off x="694944" y="2679192"/>
+            <a:off x="694944" y="2560320"/>
             <a:ext cx="3377184" cy="155448"/>
           </a:xfrm>
           <a:prstGeom prst="rect">
@@ -11097,7 +11097,7 @@
         </p:nvSpPr>
         <p:spPr>
           <a:xfrm rot="5400000">
-            <a:off x="4191000" y="2505456"/>
+            <a:off x="4191000" y="2404872"/>
             <a:ext cx="91440" cy="109728"/>
           </a:xfrm>
           <a:prstGeom prst="triangle">
@@ -11127,8 +11127,8 @@
         </p:nvSpPr>
         <p:spPr>
           <a:xfrm>
-            <a:off x="4401312" y="2103120"/>
-            <a:ext cx="3377184" cy="914400"/>
+            <a:off x="4401312" y="2011680"/>
+            <a:ext cx="3377184" cy="896112"/>
           </a:xfrm>
           <a:prstGeom prst="rect">
             <a:avLst/>
@@ -11159,7 +11159,7 @@
         </p:nvSpPr>
         <p:spPr>
           <a:xfrm>
-            <a:off x="4401312" y="2322576"/>
+            <a:off x="4401312" y="2212848"/>
             <a:ext cx="3377184" cy="256032"/>
           </a:xfrm>
           <a:prstGeom prst="rect">
@@ -11194,7 +11194,7 @@
         </p:nvSpPr>
         <p:spPr>
           <a:xfrm>
-            <a:off x="4401312" y="2679192"/>
+            <a:off x="4401312" y="2560320"/>
             <a:ext cx="3377184" cy="155448"/>
           </a:xfrm>
           <a:prstGeom prst="rect">
@@ -11229,7 +11229,7 @@
         </p:nvSpPr>
         <p:spPr>
           <a:xfrm rot="5400000">
-            <a:off x="7897368" y="2505456"/>
+            <a:off x="7897368" y="2404872"/>
             <a:ext cx="91440" cy="109728"/>
           </a:xfrm>
           <a:prstGeom prst="triangle">
@@ -11259,8 +11259,8 @@
         </p:nvSpPr>
         <p:spPr>
           <a:xfrm>
-            <a:off x="8107680" y="2103120"/>
-            <a:ext cx="3377184" cy="914400"/>
+            <a:off x="8107680" y="2011680"/>
+            <a:ext cx="3377184" cy="896112"/>
           </a:xfrm>
           <a:prstGeom prst="rect">
             <a:avLst/>
@@ -11291,7 +11291,7 @@
         </p:nvSpPr>
         <p:spPr>
           <a:xfrm>
-            <a:off x="8107680" y="2322576"/>
+            <a:off x="8107680" y="2212848"/>
             <a:ext cx="3377184" cy="256032"/>
           </a:xfrm>
           <a:prstGeom prst="rect">
@@ -11326,7 +11326,7 @@
         </p:nvSpPr>
         <p:spPr>
           <a:xfrm>
-            <a:off x="8107680" y="2679192"/>
+            <a:off x="8107680" y="2560320"/>
             <a:ext cx="3377184" cy="155448"/>
           </a:xfrm>
           <a:prstGeom prst="rect">
@@ -11361,8 +11361,8 @@
         </p:nvSpPr>
         <p:spPr>
           <a:xfrm>
-            <a:off x="9796272" y="3017520"/>
-            <a:ext cx="10973" cy="329184"/>
+            <a:off x="9796272" y="2907792"/>
+            <a:ext cx="10973" cy="310896"/>
           </a:xfrm>
           <a:prstGeom prst="rect">
             <a:avLst/>
@@ -11391,7 +11391,7 @@
         </p:nvSpPr>
         <p:spPr>
           <a:xfrm>
-            <a:off x="2383536" y="3346704"/>
+            <a:off x="2383536" y="3218688"/>
             <a:ext cx="7412736" cy="10973"/>
           </a:xfrm>
           <a:prstGeom prst="rect">
@@ -11421,8 +11421,8 @@
         </p:nvSpPr>
         <p:spPr>
           <a:xfrm>
-            <a:off x="2383536" y="3145536"/>
-            <a:ext cx="10973" cy="201168"/>
+            <a:off x="2383536" y="3035808"/>
+            <a:ext cx="10973" cy="182880"/>
           </a:xfrm>
           <a:prstGeom prst="rect">
             <a:avLst/>
@@ -11451,7 +11451,7 @@
         </p:nvSpPr>
         <p:spPr>
           <a:xfrm>
-            <a:off x="2334158" y="3022092"/>
+            <a:off x="2334158" y="2912364"/>
             <a:ext cx="109728" cy="137160"/>
           </a:xfrm>
           <a:prstGeom prst="triangle">
@@ -11481,7 +11481,7 @@
         </p:nvSpPr>
         <p:spPr>
           <a:xfrm>
-            <a:off x="2383536" y="3456432"/>
+            <a:off x="2383536" y="3310128"/>
             <a:ext cx="7412736" cy="155448"/>
           </a:xfrm>
           <a:prstGeom prst="rect">
@@ -11510,48 +11510,13 @@
       </p:sp>
       <p:sp>
         <p:nvSpPr>
-          <p:cNvPr id="123" name="TextBox 123"/>
-          <p:cNvSpPr txBox="1"/>
-          <p:nvPr/>
-        </p:nvSpPr>
-        <p:spPr>
-          <a:xfrm>
-            <a:off x="694944" y="3785616"/>
-            <a:ext cx="10789920" cy="201168"/>
-          </a:xfrm>
-          <a:prstGeom prst="rect">
-            <a:avLst/>
-          </a:prstGeom>
-          <a:noFill/>
-        </p:spPr>
-        <p:txBody>
-          <a:bodyPr wrap="square" lIns="0" rIns="0" tIns="0" bIns="0" anchor="ctr">
-            <a:spAutoFit/>
-          </a:bodyPr>
-          <a:lstStyle/>
-          <a:p>
-            <a:pPr algn="l"/>
-            <a:r>
-              <a:rPr sz="1200" b="0">
-                <a:solidFill>
-                  <a:srgbClr val="9A9AA2"/>
-                </a:solidFill>
-                <a:latin typeface="Poppins"/>
-              </a:rPr>
-              <a:t>Every project writes validated patterns and documented failures back into the library. Every next build queries it first.</a:t>
-            </a:r>
-          </a:p>
-        </p:txBody>
-      </p:sp>
-      <p:sp>
-        <p:nvSpPr>
-          <p:cNvPr id="124" name="rect 124"/>
+          <p:cNvPr id="123" name="rect 123"/>
           <p:cNvSpPr/>
           <p:nvPr/>
         </p:nvSpPr>
         <p:spPr>
           <a:xfrm>
-            <a:off x="694944" y="4187952"/>
+            <a:off x="694944" y="3675888"/>
             <a:ext cx="10789920" cy="10973"/>
           </a:xfrm>
           <a:prstGeom prst="rect">
@@ -11575,13 +11540,13 @@
       </p:sp>
       <p:sp>
         <p:nvSpPr>
-          <p:cNvPr id="125" name="TextBox 125"/>
-          <p:cNvSpPr txBox="1"/>
-          <p:nvPr/>
-        </p:nvSpPr>
-        <p:spPr>
-          <a:xfrm>
-            <a:off x="694944" y="4352544"/>
+          <p:cNvPr id="124" name="TextBox 124"/>
+          <p:cNvSpPr txBox="1"/>
+          <p:nvPr/>
+        </p:nvSpPr>
+        <p:spPr>
+          <a:xfrm>
+            <a:off x="694944" y="3840480"/>
             <a:ext cx="4572000" cy="164592"/>
           </a:xfrm>
           <a:prstGeom prst="rect">
@@ -11610,14 +11575,14 @@
       </p:sp>
       <p:sp>
         <p:nvSpPr>
-          <p:cNvPr id="126" name="rect 126"/>
+          <p:cNvPr id="125" name="rect 125"/>
           <p:cNvSpPr/>
           <p:nvPr/>
         </p:nvSpPr>
         <p:spPr>
           <a:xfrm>
-            <a:off x="694944" y="4590288"/>
-            <a:ext cx="5230368" cy="1115568"/>
+            <a:off x="694944" y="4078224"/>
+            <a:ext cx="5230368" cy="1060704"/>
           </a:xfrm>
           <a:prstGeom prst="rect">
             <a:avLst/>
@@ -11642,14 +11607,49 @@
       </p:sp>
       <p:sp>
         <p:nvSpPr>
+          <p:cNvPr id="126" name="TextBox 126"/>
+          <p:cNvSpPr txBox="1"/>
+          <p:nvPr/>
+        </p:nvSpPr>
+        <p:spPr>
+          <a:xfrm>
+            <a:off x="969264" y="4279392"/>
+            <a:ext cx="4681728" cy="530352"/>
+          </a:xfrm>
+          <a:prstGeom prst="rect">
+            <a:avLst/>
+          </a:prstGeom>
+          <a:noFill/>
+        </p:spPr>
+        <p:txBody>
+          <a:bodyPr wrap="square" lIns="0" rIns="0" tIns="0" bIns="0" anchor="ctr">
+            <a:spAutoFit/>
+          </a:bodyPr>
+          <a:lstStyle/>
+          <a:p>
+            <a:pPr algn="l"/>
+            <a:r>
+              <a:rPr sz="3800" b="0">
+                <a:solidFill>
+                  <a:srgbClr val="ECECEE"/>
+                </a:solidFill>
+                <a:latin typeface="Poppins"/>
+              </a:rPr>
+              <a:t>Hundreds</a:t>
+            </a:r>
+          </a:p>
+        </p:txBody>
+      </p:sp>
+      <p:sp>
+        <p:nvSpPr>
           <p:cNvPr id="127" name="TextBox 127"/>
           <p:cNvSpPr txBox="1"/>
           <p:nvPr/>
         </p:nvSpPr>
         <p:spPr>
           <a:xfrm>
-            <a:off x="969264" y="4809744"/>
-            <a:ext cx="4681728" cy="530352"/>
+            <a:off x="969264" y="4846320"/>
+            <a:ext cx="4681728" cy="192024"/>
           </a:xfrm>
           <a:prstGeom prst="rect">
             <a:avLst/>
@@ -11664,47 +11664,12 @@
           <a:p>
             <a:pPr algn="l"/>
             <a:r>
-              <a:rPr sz="3800" b="0">
+              <a:rPr sz="1400" b="0">
                 <a:solidFill>
                   <a:srgbClr val="ECECEE"/>
                 </a:solidFill>
                 <a:latin typeface="Poppins"/>
               </a:rPr>
-              <a:t>Hundreds</a:t>
-            </a:r>
-          </a:p>
-        </p:txBody>
-      </p:sp>
-      <p:sp>
-        <p:nvSpPr>
-          <p:cNvPr id="128" name="TextBox 128"/>
-          <p:cNvSpPr txBox="1"/>
-          <p:nvPr/>
-        </p:nvSpPr>
-        <p:spPr>
-          <a:xfrm>
-            <a:off x="969264" y="5376672"/>
-            <a:ext cx="4681728" cy="192024"/>
-          </a:xfrm>
-          <a:prstGeom prst="rect">
-            <a:avLst/>
-          </a:prstGeom>
-          <a:noFill/>
-        </p:spPr>
-        <p:txBody>
-          <a:bodyPr wrap="square" lIns="0" rIns="0" tIns="0" bIns="0" anchor="ctr">
-            <a:spAutoFit/>
-          </a:bodyPr>
-          <a:lstStyle/>
-          <a:p>
-            <a:pPr algn="l"/>
-            <a:r>
-              <a:rPr sz="1400" b="0">
-                <a:solidFill>
-                  <a:srgbClr val="ECECEE"/>
-                </a:solidFill>
-                <a:latin typeface="Poppins"/>
-              </a:rPr>
               <a:t>validated patterns</a:t>
             </a:r>
           </a:p>
@@ -11712,14 +11677,14 @@
       </p:sp>
       <p:sp>
         <p:nvSpPr>
-          <p:cNvPr id="129" name="rect 129"/>
+          <p:cNvPr id="128" name="rect 128"/>
           <p:cNvSpPr/>
           <p:nvPr/>
         </p:nvSpPr>
         <p:spPr>
           <a:xfrm>
-            <a:off x="6254496" y="4590288"/>
-            <a:ext cx="5230368" cy="1115568"/>
+            <a:off x="6254496" y="4078224"/>
+            <a:ext cx="5230368" cy="1060704"/>
           </a:xfrm>
           <a:prstGeom prst="rect">
             <a:avLst/>
@@ -11744,14 +11709,49 @@
       </p:sp>
       <p:sp>
         <p:nvSpPr>
+          <p:cNvPr id="129" name="TextBox 129"/>
+          <p:cNvSpPr txBox="1"/>
+          <p:nvPr/>
+        </p:nvSpPr>
+        <p:spPr>
+          <a:xfrm>
+            <a:off x="6528816" y="4279392"/>
+            <a:ext cx="4681728" cy="530352"/>
+          </a:xfrm>
+          <a:prstGeom prst="rect">
+            <a:avLst/>
+          </a:prstGeom>
+          <a:noFill/>
+        </p:spPr>
+        <p:txBody>
+          <a:bodyPr wrap="square" lIns="0" rIns="0" tIns="0" bIns="0" anchor="ctr">
+            <a:spAutoFit/>
+          </a:bodyPr>
+          <a:lstStyle/>
+          <a:p>
+            <a:pPr algn="l"/>
+            <a:r>
+              <a:rPr sz="3800" b="0">
+                <a:solidFill>
+                  <a:srgbClr val="FF6B3D"/>
+                </a:solidFill>
+                <a:latin typeface="Poppins"/>
+              </a:rPr>
+              <a:t>Thousands</a:t>
+            </a:r>
+          </a:p>
+        </p:txBody>
+      </p:sp>
+      <p:sp>
+        <p:nvSpPr>
           <p:cNvPr id="130" name="TextBox 130"/>
           <p:cNvSpPr txBox="1"/>
           <p:nvPr/>
         </p:nvSpPr>
         <p:spPr>
           <a:xfrm>
-            <a:off x="6528816" y="4809744"/>
-            <a:ext cx="4681728" cy="530352"/>
+            <a:off x="6528816" y="4846320"/>
+            <a:ext cx="4681728" cy="192024"/>
           </a:xfrm>
           <a:prstGeom prst="rect">
             <a:avLst/>
@@ -11766,47 +11766,12 @@
           <a:p>
             <a:pPr algn="l"/>
             <a:r>
-              <a:rPr sz="3800" b="0">
-                <a:solidFill>
-                  <a:srgbClr val="FF6B3D"/>
+              <a:rPr sz="1400" b="0">
+                <a:solidFill>
+                  <a:srgbClr val="ECECEE"/>
                 </a:solidFill>
                 <a:latin typeface="Poppins"/>
               </a:rPr>
-              <a:t>Thousands</a:t>
-            </a:r>
-          </a:p>
-        </p:txBody>
-      </p:sp>
-      <p:sp>
-        <p:nvSpPr>
-          <p:cNvPr id="131" name="TextBox 131"/>
-          <p:cNvSpPr txBox="1"/>
-          <p:nvPr/>
-        </p:nvSpPr>
-        <p:spPr>
-          <a:xfrm>
-            <a:off x="6528816" y="5376672"/>
-            <a:ext cx="4681728" cy="192024"/>
-          </a:xfrm>
-          <a:prstGeom prst="rect">
-            <a:avLst/>
-          </a:prstGeom>
-          <a:noFill/>
-        </p:spPr>
-        <p:txBody>
-          <a:bodyPr wrap="square" lIns="0" rIns="0" tIns="0" bIns="0" anchor="ctr">
-            <a:spAutoFit/>
-          </a:bodyPr>
-          <a:lstStyle/>
-          <a:p>
-            <a:pPr algn="l"/>
-            <a:r>
-              <a:rPr sz="1400" b="0">
-                <a:solidFill>
-                  <a:srgbClr val="ECECEE"/>
-                </a:solidFill>
-                <a:latin typeface="Poppins"/>
-              </a:rPr>
               <a:t>documented anti-patterns</a:t>
             </a:r>
           </a:p>
@@ -11814,13 +11779,13 @@
       </p:sp>
       <p:sp>
         <p:nvSpPr>
-          <p:cNvPr id="132" name="rect 132"/>
+          <p:cNvPr id="131" name="rect 131"/>
           <p:cNvSpPr/>
           <p:nvPr/>
         </p:nvSpPr>
         <p:spPr>
           <a:xfrm>
-            <a:off x="694944" y="5852160"/>
+            <a:off x="694944" y="5321808"/>
             <a:ext cx="10789920" cy="10973"/>
           </a:xfrm>
           <a:prstGeom prst="rect">
@@ -11844,14 +11809,82 @@
       </p:sp>
       <p:sp>
         <p:nvSpPr>
+          <p:cNvPr id="132" name="TextBox 132"/>
+          <p:cNvSpPr txBox="1"/>
+          <p:nvPr/>
+        </p:nvSpPr>
+        <p:spPr>
+          <a:xfrm>
+            <a:off x="694944" y="5468112"/>
+            <a:ext cx="3377184" cy="182880"/>
+          </a:xfrm>
+          <a:prstGeom prst="rect">
+            <a:avLst/>
+          </a:prstGeom>
+          <a:noFill/>
+        </p:spPr>
+        <p:txBody>
+          <a:bodyPr wrap="square" lIns="0" rIns="0" tIns="0" bIns="0" anchor="ctr">
+            <a:spAutoFit/>
+          </a:bodyPr>
+          <a:lstStyle/>
+          <a:p>
+            <a:pPr algn="l"/>
+            <a:r>
+              <a:rPr sz="1300" b="1">
+                <a:solidFill>
+                  <a:srgbClr val="FF6B3D"/>
+                </a:solidFill>
+                <a:latin typeface="Poppins"/>
+              </a:rPr>
+              <a:t>Earned, not bought.</a:t>
+            </a:r>
+          </a:p>
+        </p:txBody>
+      </p:sp>
+      <p:sp>
+        <p:nvSpPr>
           <p:cNvPr id="133" name="TextBox 133"/>
           <p:cNvSpPr txBox="1"/>
           <p:nvPr/>
         </p:nvSpPr>
         <p:spPr>
           <a:xfrm>
-            <a:off x="694944" y="5998464"/>
-            <a:ext cx="10789920" cy="219456"/>
+            <a:off x="694944" y="5687568"/>
+            <a:ext cx="3377184" cy="347472"/>
+          </a:xfrm>
+          <a:prstGeom prst="rect">
+            <a:avLst/>
+          </a:prstGeom>
+          <a:noFill/>
+        </p:spPr>
+        <p:txBody>
+          <a:bodyPr wrap="square" lIns="0" rIns="0" tIns="0" bIns="0" anchor="t"/>
+          <a:lstStyle/>
+          <a:p>
+            <a:pPr algn="l"/>
+            <a:r>
+              <a:rPr sz="1100" b="0">
+                <a:solidFill>
+                  <a:srgbClr val="9A9AA2"/>
+                </a:solidFill>
+                <a:latin typeface="Poppins"/>
+              </a:rPr>
+              <a:t>The library only grows by running real production builds.</a:t>
+            </a:r>
+          </a:p>
+        </p:txBody>
+      </p:sp>
+      <p:sp>
+        <p:nvSpPr>
+          <p:cNvPr id="134" name="TextBox 134"/>
+          <p:cNvSpPr txBox="1"/>
+          <p:nvPr/>
+        </p:nvSpPr>
+        <p:spPr>
+          <a:xfrm>
+            <a:off x="4401312" y="5468112"/>
+            <a:ext cx="3377184" cy="182880"/>
           </a:xfrm>
           <a:prstGeom prst="rect">
             <a:avLst/>
@@ -11866,20 +11899,121 @@
           <a:p>
             <a:pPr algn="l"/>
             <a:r>
-              <a:rPr sz="1400" b="1">
-                <a:solidFill>
-                  <a:srgbClr val="ECECEE"/>
+              <a:rPr sz="1300" b="1">
+                <a:solidFill>
+                  <a:srgbClr val="FF6B3D"/>
                 </a:solidFill>
                 <a:latin typeface="Poppins"/>
               </a:rPr>
-              <a:t>The chain fills the library. The library makes the next chain safer. That loop is the moat.</a:t>
+              <a:t>It compounds.</a:t>
+            </a:r>
+          </a:p>
+        </p:txBody>
+      </p:sp>
+      <p:sp>
+        <p:nvSpPr>
+          <p:cNvPr id="135" name="TextBox 135"/>
+          <p:cNvSpPr txBox="1"/>
+          <p:nvPr/>
+        </p:nvSpPr>
+        <p:spPr>
+          <a:xfrm>
+            <a:off x="4401312" y="5687568"/>
+            <a:ext cx="3377184" cy="347472"/>
+          </a:xfrm>
+          <a:prstGeom prst="rect">
+            <a:avLst/>
+          </a:prstGeom>
+          <a:noFill/>
+        </p:spPr>
+        <p:txBody>
+          <a:bodyPr wrap="square" lIns="0" rIns="0" tIns="0" bIns="0" anchor="t"/>
+          <a:lstStyle/>
+          <a:p>
+            <a:pPr algn="l"/>
+            <a:r>
+              <a:rPr sz="1100" b="0">
+                <a:solidFill>
+                  <a:srgbClr val="9A9AA2"/>
+                </a:solidFill>
+                <a:latin typeface="Poppins"/>
+              </a:rPr>
+              <a:t>Every project makes the next estimate, gate and build safer.</a:t>
+            </a:r>
+          </a:p>
+        </p:txBody>
+      </p:sp>
+      <p:sp>
+        <p:nvSpPr>
+          <p:cNvPr id="136" name="TextBox 136"/>
+          <p:cNvSpPr txBox="1"/>
+          <p:nvPr/>
+        </p:nvSpPr>
+        <p:spPr>
+          <a:xfrm>
+            <a:off x="8107680" y="5468112"/>
+            <a:ext cx="3377184" cy="182880"/>
+          </a:xfrm>
+          <a:prstGeom prst="rect">
+            <a:avLst/>
+          </a:prstGeom>
+          <a:noFill/>
+        </p:spPr>
+        <p:txBody>
+          <a:bodyPr wrap="square" lIns="0" rIns="0" tIns="0" bIns="0" anchor="ctr">
+            <a:spAutoFit/>
+          </a:bodyPr>
+          <a:lstStyle/>
+          <a:p>
+            <a:pPr algn="l"/>
+            <a:r>
+              <a:rPr sz="1300" b="1">
+                <a:solidFill>
+                  <a:srgbClr val="FF6B3D"/>
+                </a:solidFill>
+                <a:latin typeface="Poppins"/>
+              </a:rPr>
+              <a:t>Capital can’t copy it.</a:t>
+            </a:r>
+          </a:p>
+        </p:txBody>
+      </p:sp>
+      <p:sp>
+        <p:nvSpPr>
+          <p:cNvPr id="137" name="TextBox 137"/>
+          <p:cNvSpPr txBox="1"/>
+          <p:nvPr/>
+        </p:nvSpPr>
+        <p:spPr>
+          <a:xfrm>
+            <a:off x="8107680" y="5687568"/>
+            <a:ext cx="3377184" cy="347472"/>
+          </a:xfrm>
+          <a:prstGeom prst="rect">
+            <a:avLst/>
+          </a:prstGeom>
+          <a:noFill/>
+        </p:spPr>
+        <p:txBody>
+          <a:bodyPr wrap="square" lIns="0" rIns="0" tIns="0" bIns="0" anchor="t"/>
+          <a:lstStyle/>
+          <a:p>
+            <a:pPr algn="l"/>
+            <a:r>
+              <a:rPr sz="1100" b="0">
+                <a:solidFill>
+                  <a:srgbClr val="9A9AA2"/>
+                </a:solidFill>
+                <a:latin typeface="Poppins"/>
+              </a:rPr>
+              <a:t>A bigger round buys code, not failures already survived.</a:t>
             </a:r>
           </a:p>
         </p:txBody>
       </p:sp>
       <p:pic>
         <p:nvPicPr>
-          <p:cNvPr id="134" name="Logo"/>
+          <p:cNvPr id="138" name="Logo"/>
           <p:cNvPicPr/>
           <p:nvPr/>
         </p:nvPicPr>
